--- a/paper/Paper_Verteidigung.pptx
+++ b/paper/Paper_Verteidigung.pptx
@@ -2974,9 +2974,48 @@
                 <a:ea typeface="Calibri" pitchFamily="34" charset="-122"/>
                 <a:cs typeface="Calibri" pitchFamily="34" charset="-120"/>
               </a:rPr>
-              <a:t>Vertiefungsseminar - Mai 2026</a:t>
+              <a:t>Vertiefungsseminar - Sommersemester 2026</a:t>
             </a:r>
             <a:endParaRPr lang="en-US" sz="1400" dirty="0"/>
+          </a:p>
+        </p:txBody>
+      </p:sp>
+      <p:sp>
+        <p:nvSpPr>
+          <p:cNvPr id="7" name="Text 5"/>
+          <p:cNvSpPr/>
+          <p:nvPr/>
+        </p:nvSpPr>
+        <p:spPr>
+          <a:xfrm>
+            <a:off x="8229600" y="4846320"/>
+            <a:ext cx="822960" cy="228600"/>
+          </a:xfrm>
+          <a:prstGeom prst="rect">
+            <a:avLst/>
+          </a:prstGeom>
+          <a:noFill/>
+          <a:ln/>
+        </p:spPr>
+        <p:txBody>
+          <a:bodyPr wrap="square" rtlCol="0" anchor="ctr"/>
+          <a:lstStyle/>
+          <a:p>
+            <a:pPr algn="r" indent="0" marL="0">
+              <a:buNone/>
+            </a:pPr>
+            <a:r>
+              <a:rPr lang="en-US" sz="900" dirty="0">
+                <a:solidFill>
+                  <a:srgbClr val="9CB4DE"/>
+                </a:solidFill>
+                <a:latin typeface="Calibri" pitchFamily="34" charset="0"/>
+                <a:ea typeface="Calibri" pitchFamily="34" charset="-122"/>
+                <a:cs typeface="Calibri" pitchFamily="34" charset="-120"/>
+              </a:rPr>
+              <a:t>1 / 16</a:t>
+            </a:r>
+            <a:endParaRPr lang="en-US" sz="900" dirty="0"/>
           </a:p>
         </p:txBody>
       </p:sp>
@@ -7390,6 +7429,84 @@
           </a:p>
         </p:txBody>
       </p:sp>
+      <p:sp>
+        <p:nvSpPr>
+          <p:cNvPr id="13" name="Text 11"/>
+          <p:cNvSpPr/>
+          <p:nvPr/>
+        </p:nvSpPr>
+        <p:spPr>
+          <a:xfrm>
+            <a:off x="457200" y="4846320"/>
+            <a:ext cx="6400800" cy="228600"/>
+          </a:xfrm>
+          <a:prstGeom prst="rect">
+            <a:avLst/>
+          </a:prstGeom>
+          <a:noFill/>
+          <a:ln/>
+        </p:spPr>
+        <p:txBody>
+          <a:bodyPr wrap="square" rtlCol="0" anchor="ctr"/>
+          <a:lstStyle/>
+          <a:p>
+            <a:pPr indent="0" marL="0">
+              <a:buNone/>
+            </a:pPr>
+            <a:r>
+              <a:rPr lang="en-US" sz="900" dirty="0">
+                <a:solidFill>
+                  <a:srgbClr val="9CB4DE"/>
+                </a:solidFill>
+                <a:latin typeface="Calibri" pitchFamily="34" charset="0"/>
+                <a:ea typeface="Calibri" pitchFamily="34" charset="-122"/>
+                <a:cs typeface="Calibri" pitchFamily="34" charset="-120"/>
+              </a:rPr>
+              <a:t>K. Schuerger - TinyML fuer Akkulaufzeit-Vorhersage</a:t>
+            </a:r>
+            <a:endParaRPr lang="en-US" sz="900" dirty="0"/>
+          </a:p>
+        </p:txBody>
+      </p:sp>
+      <p:sp>
+        <p:nvSpPr>
+          <p:cNvPr id="14" name="Text 12"/>
+          <p:cNvSpPr/>
+          <p:nvPr/>
+        </p:nvSpPr>
+        <p:spPr>
+          <a:xfrm>
+            <a:off x="8229600" y="4846320"/>
+            <a:ext cx="822960" cy="228600"/>
+          </a:xfrm>
+          <a:prstGeom prst="rect">
+            <a:avLst/>
+          </a:prstGeom>
+          <a:noFill/>
+          <a:ln/>
+        </p:spPr>
+        <p:txBody>
+          <a:bodyPr wrap="square" rtlCol="0" anchor="ctr"/>
+          <a:lstStyle/>
+          <a:p>
+            <a:pPr algn="r" indent="0" marL="0">
+              <a:buNone/>
+            </a:pPr>
+            <a:r>
+              <a:rPr lang="en-US" sz="900" dirty="0">
+                <a:solidFill>
+                  <a:srgbClr val="9CB4DE"/>
+                </a:solidFill>
+                <a:latin typeface="Calibri" pitchFamily="34" charset="0"/>
+                <a:ea typeface="Calibri" pitchFamily="34" charset="-122"/>
+                <a:cs typeface="Calibri" pitchFamily="34" charset="-120"/>
+              </a:rPr>
+              <a:t>15 / 16</a:t>
+            </a:r>
+            <a:endParaRPr lang="en-US" sz="900" dirty="0"/>
+          </a:p>
+        </p:txBody>
+      </p:sp>
     </p:spTree>
   </p:cSld>
   <p:clrMapOvr>
@@ -7404,7 +7521,7 @@
     <p:bg>
       <p:bgPr>
         <a:solidFill>
-          <a:srgbClr val="FFFFFF"/>
+          <a:srgbClr val="0F1B2D"/>
         </a:solidFill>
       </p:bgPr>
     </p:bg>
@@ -7430,8 +7547,8 @@
         </p:nvSpPr>
         <p:spPr>
           <a:xfrm>
-            <a:off x="457200" y="274320"/>
-            <a:ext cx="8229600" cy="594360"/>
+            <a:off x="548640" y="1463040"/>
+            <a:ext cx="8046720" cy="822960"/>
           </a:xfrm>
           <a:prstGeom prst="rect">
             <a:avLst/>
@@ -7440,37 +7557,57 @@
           <a:ln/>
         </p:spPr>
         <p:txBody>
-          <a:bodyPr wrap="square" lIns="0" tIns="0" rIns="0" bIns="0" rtlCol="0" anchor="ctr"/>
+          <a:bodyPr wrap="square" rtlCol="0" anchor="ctr"/>
           <a:lstStyle/>
           <a:p>
-            <a:pPr indent="0" marL="0">
+            <a:pPr algn="ctr" indent="0" marL="0">
               <a:buNone/>
             </a:pPr>
             <a:r>
-              <a:rPr lang="en-US" sz="2800" b="1" dirty="0">
+              <a:rPr lang="en-US" sz="5400" b="1" dirty="0">
                 <a:solidFill>
-                  <a:srgbClr val="0F3460"/>
+                  <a:srgbClr val="FFFFFF"/>
                 </a:solidFill>
                 <a:latin typeface="Calibri" pitchFamily="34" charset="0"/>
                 <a:ea typeface="Calibri" pitchFamily="34" charset="-122"/>
                 <a:cs typeface="Calibri" pitchFamily="34" charset="-120"/>
               </a:rPr>
-              <a:t>Vielen Dank - Fragen?</a:t>
-            </a:r>
-            <a:endParaRPr lang="en-US" sz="2800" dirty="0"/>
+              <a:t>Vielen Dank</a:t>
+            </a:r>
+            <a:endParaRPr lang="en-US" sz="5400" dirty="0"/>
           </a:p>
         </p:txBody>
       </p:sp>
       <p:sp>
         <p:nvSpPr>
-          <p:cNvPr id="3" name="Text 1"/>
-          <p:cNvSpPr/>
-          <p:nvPr/>
-        </p:nvSpPr>
-        <p:spPr>
-          <a:xfrm>
-            <a:off x="457200" y="960120"/>
-            <a:ext cx="8229600" cy="365760"/>
+          <p:cNvPr id="3" name="Shape 1"/>
+          <p:cNvSpPr/>
+          <p:nvPr/>
+        </p:nvSpPr>
+        <p:spPr>
+          <a:xfrm>
+            <a:off x="3931920" y="2331720"/>
+            <a:ext cx="1280160" cy="54864"/>
+          </a:xfrm>
+          <a:prstGeom prst="rect">
+            <a:avLst/>
+          </a:prstGeom>
+          <a:solidFill>
+            <a:srgbClr val="E94560"/>
+          </a:solidFill>
+          <a:ln/>
+        </p:spPr>
+      </p:sp>
+      <p:sp>
+        <p:nvSpPr>
+          <p:cNvPr id="4" name="Text 2"/>
+          <p:cNvSpPr/>
+          <p:nvPr/>
+        </p:nvSpPr>
+        <p:spPr>
+          <a:xfrm>
+            <a:off x="548640" y="2606040"/>
+            <a:ext cx="8046720" cy="640080"/>
           </a:xfrm>
           <a:prstGeom prst="rect">
             <a:avLst/>
@@ -7482,54 +7619,34 @@
           <a:bodyPr wrap="square" rtlCol="0" anchor="ctr"/>
           <a:lstStyle/>
           <a:p>
-            <a:pPr indent="0" marL="0">
+            <a:pPr algn="ctr" indent="0" marL="0">
               <a:buNone/>
             </a:pPr>
             <a:r>
-              <a:rPr lang="en-US" sz="1400" i="1" dirty="0">
+              <a:rPr lang="en-US" sz="3200" i="1" dirty="0">
                 <a:solidFill>
-                  <a:srgbClr val="64748B"/>
+                  <a:srgbClr val="CADCFC"/>
                 </a:solidFill>
                 <a:latin typeface="Calibri" pitchFamily="34" charset="0"/>
                 <a:ea typeface="Calibri" pitchFamily="34" charset="-122"/>
                 <a:cs typeface="Calibri" pitchFamily="34" charset="-120"/>
               </a:rPr>
-              <a:t>Vorbereitete Antworten auf erwartete Fragen</a:t>
-            </a:r>
-            <a:endParaRPr lang="en-US" sz="1400" dirty="0"/>
+              <a:t>Fragen?</a:t>
+            </a:r>
+            <a:endParaRPr lang="en-US" sz="3200" dirty="0"/>
           </a:p>
         </p:txBody>
       </p:sp>
       <p:sp>
         <p:nvSpPr>
-          <p:cNvPr id="4" name="Shape 2"/>
-          <p:cNvSpPr/>
-          <p:nvPr/>
-        </p:nvSpPr>
-        <p:spPr>
-          <a:xfrm>
-            <a:off x="457200" y="1371600"/>
-            <a:ext cx="73152" cy="685800"/>
-          </a:xfrm>
-          <a:prstGeom prst="rect">
-            <a:avLst/>
-          </a:prstGeom>
-          <a:solidFill>
-            <a:srgbClr val="0F3460"/>
-          </a:solidFill>
-          <a:ln/>
-        </p:spPr>
-      </p:sp>
-      <p:sp>
-        <p:nvSpPr>
           <p:cNvPr id="5" name="Text 3"/>
           <p:cNvSpPr/>
           <p:nvPr/>
         </p:nvSpPr>
         <p:spPr>
           <a:xfrm>
-            <a:off x="685800" y="1371600"/>
-            <a:ext cx="7863840" cy="274320"/>
+            <a:off x="548640" y="3794760"/>
+            <a:ext cx="8046720" cy="822960"/>
           </a:xfrm>
           <a:prstGeom prst="rect">
             <a:avLst/>
@@ -7538,96 +7655,54 @@
           <a:ln/>
         </p:spPr>
         <p:txBody>
-          <a:bodyPr wrap="square" lIns="0" tIns="0" rIns="0" bIns="0" rtlCol="0" anchor="ctr"/>
+          <a:bodyPr wrap="square" rtlCol="0" anchor="ctr"/>
           <a:lstStyle/>
           <a:p>
-            <a:pPr indent="0" marL="0">
+            <a:pPr algn="ctr" indent="0" marL="0">
               <a:buNone/>
             </a:pPr>
             <a:r>
-              <a:rPr lang="en-US" sz="1200" b="1" dirty="0">
+              <a:rPr lang="en-US" sz="1300" b="1" dirty="0">
                 <a:solidFill>
-                  <a:srgbClr val="0F3460"/>
+                  <a:srgbClr val="FFFFFF"/>
                 </a:solidFill>
                 <a:latin typeface="Calibri" pitchFamily="34" charset="0"/>
                 <a:ea typeface="Calibri" pitchFamily="34" charset="-122"/>
                 <a:cs typeface="Calibri" pitchFamily="34" charset="-120"/>
               </a:rPr>
-              <a:t>F: Warum kein positives Ergebnis?</a:t>
-            </a:r>
-            <a:endParaRPr lang="en-US" sz="1200" dirty="0"/>
-          </a:p>
-        </p:txBody>
-      </p:sp>
-      <p:sp>
-        <p:nvSpPr>
-          <p:cNvPr id="6" name="Text 4"/>
-          <p:cNvSpPr/>
-          <p:nvPr/>
-        </p:nvSpPr>
-        <p:spPr>
-          <a:xfrm>
-            <a:off x="685800" y="1645920"/>
-            <a:ext cx="7863840" cy="411480"/>
-          </a:xfrm>
-          <a:prstGeom prst="rect">
-            <a:avLst/>
-          </a:prstGeom>
-          <a:noFill/>
-          <a:ln/>
-        </p:spPr>
-        <p:txBody>
-          <a:bodyPr wrap="square" lIns="0" tIns="0" rIns="0" bIns="0" rtlCol="0" anchor="t"/>
-          <a:lstStyle/>
-          <a:p>
-            <a:pPr indent="0" marL="0">
+              <a:t>Keno Schuerger</a:t>
+            </a:r>
+            <a:endParaRPr lang="en-US" sz="1300" dirty="0"/>
+          </a:p>
+          <a:p>
+            <a:pPr algn="ctr" indent="0" marL="0">
               <a:buNone/>
             </a:pPr>
             <a:r>
-              <a:rPr lang="en-US" sz="1100" dirty="0">
+              <a:rPr lang="en-US" sz="1300" dirty="0">
                 <a:solidFill>
-                  <a:srgbClr val="1A1A1A"/>
+                  <a:srgbClr val="9CB4DE"/>
                 </a:solidFill>
                 <a:latin typeface="Calibri" pitchFamily="34" charset="0"/>
                 <a:ea typeface="Calibri" pitchFamily="34" charset="-122"/>
                 <a:cs typeface="Calibri" pitchFamily="34" charset="-120"/>
               </a:rPr>
-              <a:t>A: Das positive Ergebnis (MAE 0.5h Single-Device) war Leakage-Artefakt. Die saubere Methodik enthuellt das. Beitrag der Arbeit ist genau diese Korrektur.</a:t>
-            </a:r>
-            <a:endParaRPr lang="en-US" sz="1100" dirty="0"/>
+              <a:t>TinyML fuer Akkulaufzeit-Vorhersage auf Android</a:t>
+            </a:r>
+            <a:endParaRPr lang="en-US" sz="1300" dirty="0"/>
           </a:p>
         </p:txBody>
       </p:sp>
       <p:sp>
         <p:nvSpPr>
-          <p:cNvPr id="7" name="Shape 5"/>
-          <p:cNvSpPr/>
-          <p:nvPr/>
-        </p:nvSpPr>
-        <p:spPr>
-          <a:xfrm>
-            <a:off x="457200" y="2148840"/>
-            <a:ext cx="73152" cy="685800"/>
-          </a:xfrm>
-          <a:prstGeom prst="rect">
-            <a:avLst/>
-          </a:prstGeom>
-          <a:solidFill>
-            <a:srgbClr val="0F3460"/>
-          </a:solidFill>
-          <a:ln/>
-        </p:spPr>
-      </p:sp>
-      <p:sp>
-        <p:nvSpPr>
-          <p:cNvPr id="8" name="Text 6"/>
-          <p:cNvSpPr/>
-          <p:nvPr/>
-        </p:nvSpPr>
-        <p:spPr>
-          <a:xfrm>
-            <a:off x="685800" y="2148840"/>
-            <a:ext cx="7863840" cy="274320"/>
+          <p:cNvPr id="6" name="Text 4"/>
+          <p:cNvSpPr/>
+          <p:nvPr/>
+        </p:nvSpPr>
+        <p:spPr>
+          <a:xfrm>
+            <a:off x="457200" y="4846320"/>
+            <a:ext cx="6400800" cy="228600"/>
           </a:xfrm>
           <a:prstGeom prst="rect">
             <a:avLst/>
@@ -7636,290 +7711,16 @@
           <a:ln/>
         </p:spPr>
         <p:txBody>
-          <a:bodyPr wrap="square" lIns="0" tIns="0" rIns="0" bIns="0" rtlCol="0" anchor="ctr"/>
+          <a:bodyPr wrap="square" rtlCol="0" anchor="ctr"/>
           <a:lstStyle/>
           <a:p>
             <a:pPr indent="0" marL="0">
               <a:buNone/>
             </a:pPr>
             <a:r>
-              <a:rPr lang="en-US" sz="1200" b="1" dirty="0">
-                <a:solidFill>
-                  <a:srgbClr val="0F3460"/>
-                </a:solidFill>
-                <a:latin typeface="Calibri" pitchFamily="34" charset="0"/>
-                <a:ea typeface="Calibri" pitchFamily="34" charset="-122"/>
-                <a:cs typeface="Calibri" pitchFamily="34" charset="-120"/>
-              </a:rPr>
-              <a:t>F: Warum nur 4 Geraete, kein Cross-Device-Test?</a:t>
-            </a:r>
-            <a:endParaRPr lang="en-US" sz="1200" dirty="0"/>
-          </a:p>
-        </p:txBody>
-      </p:sp>
-      <p:sp>
-        <p:nvSpPr>
-          <p:cNvPr id="9" name="Text 7"/>
-          <p:cNvSpPr/>
-          <p:nvPr/>
-        </p:nvSpPr>
-        <p:spPr>
-          <a:xfrm>
-            <a:off x="685800" y="2423160"/>
-            <a:ext cx="7863840" cy="411480"/>
-          </a:xfrm>
-          <a:prstGeom prst="rect">
-            <a:avLst/>
-          </a:prstGeom>
-          <a:noFill/>
-          <a:ln/>
-        </p:spPr>
-        <p:txBody>
-          <a:bodyPr wrap="square" lIns="0" tIns="0" rIns="0" bIns="0" rtlCol="0" anchor="t"/>
-          <a:lstStyle/>
-          <a:p>
-            <a:pPr indent="0" marL="0">
-              <a:buNone/>
-            </a:pPr>
-            <a:r>
-              <a:rPr lang="en-US" sz="1100" dirty="0">
-                <a:solidFill>
-                  <a:srgbClr val="1A1A1A"/>
-                </a:solidFill>
-                <a:latin typeface="Calibri" pitchFamily="34" charset="0"/>
-                <a:ea typeface="Calibri" pitchFamily="34" charset="-122"/>
-                <a:cs typeface="Calibri" pitchFamily="34" charset="-120"/>
-              </a:rPr>
-              <a:t>A: Methodisch ehrliche Limitation. Aber: Hauptbefund (Informations-Asymmetrie) ist nicht geraet-spezifisch und auf 4 Geraeten bestaetigt.</a:t>
-            </a:r>
-            <a:endParaRPr lang="en-US" sz="1100" dirty="0"/>
-          </a:p>
-        </p:txBody>
-      </p:sp>
-      <p:sp>
-        <p:nvSpPr>
-          <p:cNvPr id="10" name="Shape 8"/>
-          <p:cNvSpPr/>
-          <p:nvPr/>
-        </p:nvSpPr>
-        <p:spPr>
-          <a:xfrm>
-            <a:off x="457200" y="2926080"/>
-            <a:ext cx="73152" cy="685800"/>
-          </a:xfrm>
-          <a:prstGeom prst="rect">
-            <a:avLst/>
-          </a:prstGeom>
-          <a:solidFill>
-            <a:srgbClr val="0F3460"/>
-          </a:solidFill>
-          <a:ln/>
-        </p:spPr>
-      </p:sp>
-      <p:sp>
-        <p:nvSpPr>
-          <p:cNvPr id="11" name="Text 9"/>
-          <p:cNvSpPr/>
-          <p:nvPr/>
-        </p:nvSpPr>
-        <p:spPr>
-          <a:xfrm>
-            <a:off x="685800" y="2926080"/>
-            <a:ext cx="7863840" cy="274320"/>
-          </a:xfrm>
-          <a:prstGeom prst="rect">
-            <a:avLst/>
-          </a:prstGeom>
-          <a:noFill/>
-          <a:ln/>
-        </p:spPr>
-        <p:txBody>
-          <a:bodyPr wrap="square" lIns="0" tIns="0" rIns="0" bIns="0" rtlCol="0" anchor="ctr"/>
-          <a:lstStyle/>
-          <a:p>
-            <a:pPr indent="0" marL="0">
-              <a:buNone/>
-            </a:pPr>
-            <a:r>
-              <a:rPr lang="en-US" sz="1200" b="1" dirty="0">
-                <a:solidFill>
-                  <a:srgbClr val="0F3460"/>
-                </a:solidFill>
-                <a:latin typeface="Calibri" pitchFamily="34" charset="0"/>
-                <a:ea typeface="Calibri" pitchFamily="34" charset="-122"/>
-                <a:cs typeface="Calibri" pitchFamily="34" charset="-120"/>
-              </a:rPr>
-              <a:t>F: Wieso Linear ~ Google?</a:t>
-            </a:r>
-            <a:endParaRPr lang="en-US" sz="1200" dirty="0"/>
-          </a:p>
-        </p:txBody>
-      </p:sp>
-      <p:sp>
-        <p:nvSpPr>
-          <p:cNvPr id="12" name="Text 10"/>
-          <p:cNvSpPr/>
-          <p:nvPr/>
-        </p:nvSpPr>
-        <p:spPr>
-          <a:xfrm>
-            <a:off x="685800" y="3200400"/>
-            <a:ext cx="7863840" cy="411480"/>
-          </a:xfrm>
-          <a:prstGeom prst="rect">
-            <a:avLst/>
-          </a:prstGeom>
-          <a:noFill/>
-          <a:ln/>
-        </p:spPr>
-        <p:txBody>
-          <a:bodyPr wrap="square" lIns="0" tIns="0" rIns="0" bIns="0" rtlCol="0" anchor="t"/>
-          <a:lstStyle/>
-          <a:p>
-            <a:pPr indent="0" marL="0">
-              <a:buNone/>
-            </a:pPr>
-            <a:r>
-              <a:rPr lang="en-US" sz="1100" dirty="0">
-                <a:solidFill>
-                  <a:srgbClr val="1A1A1A"/>
-                </a:solidFill>
-                <a:latin typeface="Calibri" pitchFamily="34" charset="0"/>
-                <a:ea typeface="Calibri" pitchFamily="34" charset="-122"/>
-                <a:cs typeface="Calibri" pitchFamily="34" charset="-120"/>
-              </a:rPr>
-              <a:t>A: p=0.83 fuer C, p=0.55 fuer MAE. Drain-Rate ist das dominante Signal. Googles Hardware-Zugang bringt fuer 'Stunden bis 0%' keinen Mehrwert.</a:t>
-            </a:r>
-            <a:endParaRPr lang="en-US" sz="1100" dirty="0"/>
-          </a:p>
-        </p:txBody>
-      </p:sp>
-      <p:sp>
-        <p:nvSpPr>
-          <p:cNvPr id="13" name="Shape 11"/>
-          <p:cNvSpPr/>
-          <p:nvPr/>
-        </p:nvSpPr>
-        <p:spPr>
-          <a:xfrm>
-            <a:off x="457200" y="3703320"/>
-            <a:ext cx="73152" cy="685800"/>
-          </a:xfrm>
-          <a:prstGeom prst="rect">
-            <a:avLst/>
-          </a:prstGeom>
-          <a:solidFill>
-            <a:srgbClr val="0F3460"/>
-          </a:solidFill>
-          <a:ln/>
-        </p:spPr>
-      </p:sp>
-      <p:sp>
-        <p:nvSpPr>
-          <p:cNvPr id="14" name="Text 12"/>
-          <p:cNvSpPr/>
-          <p:nvPr/>
-        </p:nvSpPr>
-        <p:spPr>
-          <a:xfrm>
-            <a:off x="685800" y="3703320"/>
-            <a:ext cx="7863840" cy="274320"/>
-          </a:xfrm>
-          <a:prstGeom prst="rect">
-            <a:avLst/>
-          </a:prstGeom>
-          <a:noFill/>
-          <a:ln/>
-        </p:spPr>
-        <p:txBody>
-          <a:bodyPr wrap="square" lIns="0" tIns="0" rIns="0" bIns="0" rtlCol="0" anchor="ctr"/>
-          <a:lstStyle/>
-          <a:p>
-            <a:pPr indent="0" marL="0">
-              <a:buNone/>
-            </a:pPr>
-            <a:r>
-              <a:rPr lang="en-US" sz="1200" b="1" dirty="0">
-                <a:solidFill>
-                  <a:srgbClr val="0F3460"/>
-                </a:solidFill>
-                <a:latin typeface="Calibri" pitchFamily="34" charset="0"/>
-                <a:ea typeface="Calibri" pitchFamily="34" charset="-122"/>
-                <a:cs typeface="Calibri" pitchFamily="34" charset="-120"/>
-              </a:rPr>
-              <a:t>F: Was tun fuer Folgestudien?</a:t>
-            </a:r>
-            <a:endParaRPr lang="en-US" sz="1200" dirty="0"/>
-          </a:p>
-        </p:txBody>
-      </p:sp>
-      <p:sp>
-        <p:nvSpPr>
-          <p:cNvPr id="15" name="Text 13"/>
-          <p:cNvSpPr/>
-          <p:nvPr/>
-        </p:nvSpPr>
-        <p:spPr>
-          <a:xfrm>
-            <a:off x="685800" y="3977640"/>
-            <a:ext cx="7863840" cy="411480"/>
-          </a:xfrm>
-          <a:prstGeom prst="rect">
-            <a:avLst/>
-          </a:prstGeom>
-          <a:noFill/>
-          <a:ln/>
-        </p:spPr>
-        <p:txBody>
-          <a:bodyPr wrap="square" lIns="0" tIns="0" rIns="0" bIns="0" rtlCol="0" anchor="t"/>
-          <a:lstStyle/>
-          <a:p>
-            <a:pPr indent="0" marL="0">
-              <a:buNone/>
-            </a:pPr>
-            <a:r>
-              <a:rPr lang="en-US" sz="1100" dirty="0">
-                <a:solidFill>
-                  <a:srgbClr val="1A1A1A"/>
-                </a:solidFill>
-                <a:latin typeface="Calibri" pitchFamily="34" charset="0"/>
-                <a:ea typeface="Calibri" pitchFamily="34" charset="-122"/>
-                <a:cs typeface="Calibri" pitchFamily="34" charset="-120"/>
-              </a:rPr>
-              <a:t>A: Leave-One-Device-Out, kontrollierte Vollentlade-Zyklen, Multi-Device-Sweep ueber N&gt;=5 Geraete.</a:t>
-            </a:r>
-            <a:endParaRPr lang="en-US" sz="1100" dirty="0"/>
-          </a:p>
-        </p:txBody>
-      </p:sp>
-      <p:sp>
-        <p:nvSpPr>
-          <p:cNvPr id="16" name="Text 14"/>
-          <p:cNvSpPr/>
-          <p:nvPr/>
-        </p:nvSpPr>
-        <p:spPr>
-          <a:xfrm>
-            <a:off x="457200" y="4846320"/>
-            <a:ext cx="6400800" cy="228600"/>
-          </a:xfrm>
-          <a:prstGeom prst="rect">
-            <a:avLst/>
-          </a:prstGeom>
-          <a:noFill/>
-          <a:ln/>
-        </p:spPr>
-        <p:txBody>
-          <a:bodyPr wrap="square" rtlCol="0" anchor="ctr"/>
-          <a:lstStyle/>
-          <a:p>
-            <a:pPr indent="0" marL="0">
-              <a:buNone/>
-            </a:pPr>
-            <a:r>
               <a:rPr lang="en-US" sz="900" dirty="0">
                 <a:solidFill>
-                  <a:srgbClr val="64748B"/>
+                  <a:srgbClr val="9CB4DE"/>
                 </a:solidFill>
                 <a:latin typeface="Calibri" pitchFamily="34" charset="0"/>
                 <a:ea typeface="Calibri" pitchFamily="34" charset="-122"/>
@@ -7933,7 +7734,7 @@
       </p:sp>
       <p:sp>
         <p:nvSpPr>
-          <p:cNvPr id="17" name="Text 15"/>
+          <p:cNvPr id="7" name="Text 5"/>
           <p:cNvSpPr/>
           <p:nvPr/>
         </p:nvSpPr>
@@ -7958,7 +7759,7 @@
             <a:r>
               <a:rPr lang="en-US" sz="900" dirty="0">
                 <a:solidFill>
-                  <a:srgbClr val="64748B"/>
+                  <a:srgbClr val="9CB4DE"/>
                 </a:solidFill>
                 <a:latin typeface="Calibri" pitchFamily="34" charset="0"/>
                 <a:ea typeface="Calibri" pitchFamily="34" charset="-122"/>
@@ -8992,7 +8793,7 @@
                 <a:ea typeface="Calibri" pitchFamily="34" charset="-122"/>
                 <a:cs typeface="Calibri" pitchFamily="34" charset="-120"/>
               </a:rPr>
-              <a:t>Forschungsfrage</a:t>
+              <a:t>Worum es im Kern geht</a:t>
             </a:r>
             <a:endParaRPr lang="en-US" sz="1100" dirty="0"/>
           </a:p>

--- a/paper/Paper_Verteidigung.pptx
+++ b/paper/Paper_Verteidigung.pptx
@@ -20,10 +20,9 @@
     <p:sldId id="268" r:id="rId14"/>
     <p:sldId id="269" r:id="rId15"/>
     <p:sldId id="270" r:id="rId16"/>
-    <p:sldId id="271" r:id="rId17"/>
   </p:sldIdLst>
   <p:notesMasterIdLst>
-    <p:notesMasterId r:id="rId18"/>
+    <p:notesMasterId r:id="rId17"/>
   </p:notesMasterIdLst>
   <p:sldSz cx="9144000" cy="5143500"/>
   <p:notesSz cx="5143500" cy="9144000"/>
@@ -1647,94 +1646,6 @@
 </p:notes>
 </file>
 
-<file path=ppt/notesSlides/notesSlide16.xml><?xml version="1.0" encoding="utf-8"?>
-<p:notes xmlns:a="http://schemas.openxmlformats.org/drawingml/2006/main" xmlns:r="http://schemas.openxmlformats.org/officeDocument/2006/relationships" xmlns:p="http://schemas.openxmlformats.org/presentationml/2006/main">
-  <p:cSld>
-    <p:spTree>
-      <p:nvGrpSpPr>
-        <p:cNvPr id="1" name=""/>
-        <p:cNvGrpSpPr/>
-        <p:nvPr/>
-      </p:nvGrpSpPr>
-      <p:grpSpPr>
-        <a:xfrm>
-          <a:off x="0" y="0"/>
-          <a:ext cx="0" cy="0"/>
-          <a:chOff x="0" y="0"/>
-          <a:chExt cx="0" cy="0"/>
-        </a:xfrm>
-      </p:grpSpPr>
-      <p:sp>
-        <p:nvSpPr>
-          <p:cNvPr id="2" name="Slide Image Placeholder 1"/>
-          <p:cNvSpPr>
-            <a:spLocks noGrp="1" noRot="1" noChangeAspect="1"/>
-          </p:cNvSpPr>
-          <p:nvPr>
-            <p:ph type="sldImg"/>
-          </p:nvPr>
-        </p:nvSpPr>
-        <p:spPr/>
-      </p:sp>
-      <p:sp>
-        <p:nvSpPr>
-          <p:cNvPr id="3" name="Notes Placeholder 2"/>
-          <p:cNvSpPr>
-            <a:spLocks noGrp="1"/>
-          </p:cNvSpPr>
-          <p:nvPr>
-            <p:ph type="body" idx="1"/>
-          </p:nvPr>
-        </p:nvSpPr>
-        <p:spPr/>
-        <p:txBody>
-          <a:bodyPr/>
-          <a:lstStyle/>
-          <a:p>
-            <a:r>
-              <a:rPr lang="en-US" dirty="0"/>
-              <a:t/>
-            </a:r>
-            <a:endParaRPr lang="en-US" dirty="0"/>
-          </a:p>
-        </p:txBody>
-      </p:sp>
-      <p:sp>
-        <p:nvSpPr>
-          <p:cNvPr id="4" name="Slide Number Placeholder 3"/>
-          <p:cNvSpPr>
-            <a:spLocks noGrp="1"/>
-          </p:cNvSpPr>
-          <p:nvPr>
-            <p:ph type="sldNum" sz="quarter" idx="10"/>
-          </p:nvPr>
-        </p:nvSpPr>
-        <p:spPr/>
-        <p:txBody>
-          <a:bodyPr/>
-          <a:lstStyle/>
-          <a:p>
-            <a:fld id="{F7021451-1387-4CA6-816F-3879F97B5CBC}" type="slidenum">
-              <a:rPr lang="en-US"/>
-              <a:t>16</a:t>
-            </a:fld>
-            <a:endParaRPr lang="en-US"/>
-          </a:p>
-        </p:txBody>
-      </p:sp>
-    </p:spTree>
-    <p:extLst>
-      <p:ext uri="{BB962C8B-B14F-4D97-AF65-F5344CB8AC3E}">
-        <p14:creationId xmlns:p14="http://schemas.microsoft.com/office/powerpoint/2010/main" val="1024086991"/>
-      </p:ext>
-    </p:extLst>
-  </p:cSld>
-  <p:clrMapOvr>
-    <a:masterClrMapping/>
-  </p:clrMapOvr>
-</p:notes>
-</file>
-
 <file path=ppt/notesSlides/notesSlide2.xml><?xml version="1.0" encoding="utf-8"?>
 <p:notes xmlns:a="http://schemas.openxmlformats.org/drawingml/2006/main" xmlns:r="http://schemas.openxmlformats.org/officeDocument/2006/relationships" xmlns:p="http://schemas.openxmlformats.org/presentationml/2006/main">
   <p:cSld>
@@ -3013,7 +2924,7 @@
                 <a:ea typeface="Calibri" pitchFamily="34" charset="-122"/>
                 <a:cs typeface="Calibri" pitchFamily="34" charset="-120"/>
               </a:rPr>
-              <a:t>1 / 16</a:t>
+              <a:t>1 / 15</a:t>
             </a:r>
             <a:endParaRPr lang="en-US" sz="900" dirty="0"/>
           </a:p>
@@ -3465,7 +3376,7 @@
                 <a:ea typeface="Calibri" pitchFamily="34" charset="-122"/>
                 <a:cs typeface="Calibri" pitchFamily="34" charset="-120"/>
               </a:rPr>
-              <a:t>10 / 16</a:t>
+              <a:t>10 / 15</a:t>
             </a:r>
             <a:endParaRPr lang="en-US" sz="900" dirty="0"/>
           </a:p>
@@ -5290,7 +5201,7 @@
                 <a:ea typeface="Calibri" pitchFamily="34" charset="-122"/>
                 <a:cs typeface="Calibri" pitchFamily="34" charset="-120"/>
               </a:rPr>
-              <a:t>11 / 16</a:t>
+              <a:t>11 / 15</a:t>
             </a:r>
             <a:endParaRPr lang="en-US" sz="900" dirty="0"/>
           </a:p>
@@ -5361,7 +5272,7 @@
                 <a:ea typeface="Calibri" pitchFamily="34" charset="-122"/>
                 <a:cs typeface="Calibri" pitchFamily="34" charset="-120"/>
               </a:rPr>
-              <a:t>Diskussion 1: TinyML lernt Signal</a:t>
+              <a:t>Diskussion: Zwei Schluessel-Befunde</a:t>
             </a:r>
             <a:endParaRPr lang="en-US" sz="2800" dirty="0"/>
           </a:p>
@@ -5369,14 +5280,59 @@
       </p:sp>
       <p:sp>
         <p:nvSpPr>
-          <p:cNvPr id="3" name="Text 1"/>
-          <p:cNvSpPr/>
-          <p:nvPr/>
-        </p:nvSpPr>
-        <p:spPr>
-          <a:xfrm>
-            <a:off x="457200" y="960120"/>
-            <a:ext cx="8229600" cy="320040"/>
+          <p:cNvPr id="3" name="Shape 1"/>
+          <p:cNvSpPr/>
+          <p:nvPr/>
+        </p:nvSpPr>
+        <p:spPr>
+          <a:xfrm>
+            <a:off x="457200" y="1051560"/>
+            <a:ext cx="3931920" cy="3474720"/>
+          </a:xfrm>
+          <a:prstGeom prst="rect">
+            <a:avLst/>
+          </a:prstGeom>
+          <a:solidFill>
+            <a:srgbClr val="F8FAFC"/>
+          </a:solidFill>
+          <a:ln w="12700">
+            <a:solidFill>
+              <a:srgbClr val="27AE60"/>
+            </a:solidFill>
+            <a:prstDash val="solid"/>
+          </a:ln>
+        </p:spPr>
+      </p:sp>
+      <p:sp>
+        <p:nvSpPr>
+          <p:cNvPr id="4" name="Shape 2"/>
+          <p:cNvSpPr/>
+          <p:nvPr/>
+        </p:nvSpPr>
+        <p:spPr>
+          <a:xfrm>
+            <a:off x="457200" y="1051560"/>
+            <a:ext cx="73152" cy="3474720"/>
+          </a:xfrm>
+          <a:prstGeom prst="rect">
+            <a:avLst/>
+          </a:prstGeom>
+          <a:solidFill>
+            <a:srgbClr val="27AE60"/>
+          </a:solidFill>
+          <a:ln/>
+        </p:spPr>
+      </p:sp>
+      <p:sp>
+        <p:nvSpPr>
+          <p:cNvPr id="5" name="Text 3"/>
+          <p:cNvSpPr/>
+          <p:nvPr/>
+        </p:nvSpPr>
+        <p:spPr>
+          <a:xfrm>
+            <a:off x="685800" y="1143000"/>
+            <a:ext cx="3657600" cy="365760"/>
           </a:xfrm>
           <a:prstGeom prst="rect">
             <a:avLst/>
@@ -5385,14 +5341,53 @@
           <a:ln/>
         </p:spPr>
         <p:txBody>
-          <a:bodyPr wrap="square" rtlCol="0" anchor="ctr"/>
+          <a:bodyPr wrap="square" lIns="0" tIns="0" rIns="0" bIns="0" rtlCol="0" anchor="ctr"/>
           <a:lstStyle/>
           <a:p>
             <a:pPr indent="0" marL="0">
               <a:buNone/>
             </a:pPr>
             <a:r>
-              <a:rPr lang="en-US" sz="1300" i="1" dirty="0">
+              <a:rPr lang="en-US" sz="1400" b="1" dirty="0">
+                <a:solidFill>
+                  <a:srgbClr val="27AE60"/>
+                </a:solidFill>
+                <a:latin typeface="Calibri" pitchFamily="34" charset="0"/>
+                <a:ea typeface="Calibri" pitchFamily="34" charset="-122"/>
+                <a:cs typeface="Calibri" pitchFamily="34" charset="-120"/>
+              </a:rPr>
+              <a:t>Befund 1: TinyML lernt Signal</a:t>
+            </a:r>
+            <a:endParaRPr lang="en-US" sz="1400" dirty="0"/>
+          </a:p>
+        </p:txBody>
+      </p:sp>
+      <p:sp>
+        <p:nvSpPr>
+          <p:cNvPr id="6" name="Text 4"/>
+          <p:cNvSpPr/>
+          <p:nvPr/>
+        </p:nvSpPr>
+        <p:spPr>
+          <a:xfrm>
+            <a:off x="685800" y="1508760"/>
+            <a:ext cx="3657600" cy="320040"/>
+          </a:xfrm>
+          <a:prstGeom prst="rect">
+            <a:avLst/>
+          </a:prstGeom>
+          <a:noFill/>
+          <a:ln/>
+        </p:spPr>
+        <p:txBody>
+          <a:bodyPr wrap="square" lIns="0" tIns="0" rIns="0" bIns="0" rtlCol="0" anchor="ctr"/>
+          <a:lstStyle/>
+          <a:p>
+            <a:pPr indent="0" marL="0">
+              <a:buNone/>
+            </a:pPr>
+            <a:r>
+              <a:rPr lang="en-US" sz="1100" i="1" dirty="0">
                 <a:solidFill>
                   <a:srgbClr val="64748B"/>
                 </a:solidFill>
@@ -5400,22 +5395,217 @@
                 <a:ea typeface="Calibri" pitchFamily="34" charset="-122"/>
                 <a:cs typeface="Calibri" pitchFamily="34" charset="-120"/>
               </a:rPr>
-              <a:t>Anders als auf Single-Device-Setup ist TinyML hier kein Mean-Predictor mehr</a:t>
-            </a:r>
-            <a:endParaRPr lang="en-US" sz="1300" dirty="0"/>
+              <a:t>Multi-Device-Datensatz macht den Unterschied:</a:t>
+            </a:r>
+            <a:endParaRPr lang="en-US" sz="1100" dirty="0"/>
           </a:p>
         </p:txBody>
       </p:sp>
       <p:sp>
         <p:nvSpPr>
-          <p:cNvPr id="4" name="Shape 2"/>
-          <p:cNvSpPr/>
-          <p:nvPr/>
-        </p:nvSpPr>
-        <p:spPr>
-          <a:xfrm>
-            <a:off x="457200" y="1417320"/>
-            <a:ext cx="8229600" cy="1188720"/>
+          <p:cNvPr id="7" name="Text 5"/>
+          <p:cNvSpPr/>
+          <p:nvPr/>
+        </p:nvSpPr>
+        <p:spPr>
+          <a:xfrm>
+            <a:off x="685800" y="1828800"/>
+            <a:ext cx="3657600" cy="2194560"/>
+          </a:xfrm>
+          <a:prstGeom prst="rect">
+            <a:avLst/>
+          </a:prstGeom>
+          <a:noFill/>
+          <a:ln/>
+        </p:spPr>
+        <p:txBody>
+          <a:bodyPr wrap="square" lIns="0" tIns="0" rIns="0" bIns="0" rtlCol="0" anchor="t"/>
+          <a:lstStyle/>
+          <a:p>
+            <a:pPr indent="0" marL="0">
+              <a:spcAft>
+                <a:spcPts val="200"/>
+              </a:spcAft>
+              <a:buNone/>
+            </a:pPr>
+            <a:r>
+              <a:rPr lang="en-US" sz="1100" b="1" dirty="0">
+                <a:solidFill>
+                  <a:srgbClr val="1A1A1A"/>
+                </a:solidFill>
+                <a:latin typeface="Calibri" pitchFamily="34" charset="0"/>
+                <a:ea typeface="Calibri" pitchFamily="34" charset="-122"/>
+                <a:cs typeface="Calibri" pitchFamily="34" charset="-120"/>
+              </a:rPr>
+              <a:t>Single Device: </a:t>
+            </a:r>
+            <a:pPr indent="0" marL="0">
+              <a:spcAft>
+                <a:spcPts val="200"/>
+              </a:spcAft>
+              <a:buNone/>
+            </a:pPr>
+            <a:r>
+              <a:rPr lang="en-US" sz="1100" dirty="0">
+                <a:solidFill>
+                  <a:srgbClr val="E94560"/>
+                </a:solidFill>
+                <a:latin typeface="Calibri" pitchFamily="34" charset="0"/>
+                <a:ea typeface="Calibri" pitchFamily="34" charset="-122"/>
+                <a:cs typeface="Calibri" pitchFamily="34" charset="-120"/>
+              </a:rPr>
+              <a:t>TinyML C=0.50 = Mean-Predictor</a:t>
+            </a:r>
+            <a:endParaRPr lang="en-US" sz="1100" dirty="0"/>
+          </a:p>
+          <a:p>
+            <a:pPr indent="0" marL="0">
+              <a:spcAft>
+                <a:spcPts val="200"/>
+              </a:spcAft>
+              <a:buNone/>
+            </a:pPr>
+            <a:r>
+              <a:rPr lang="en-US" sz="1100" dirty="0">
+                <a:solidFill>
+                  <a:srgbClr val="64748B"/>
+                </a:solidFill>
+                <a:latin typeface="Calibri" pitchFamily="34" charset="0"/>
+                <a:ea typeface="Calibri" pitchFamily="34" charset="-122"/>
+                <a:cs typeface="Calibri" pitchFamily="34" charset="-120"/>
+              </a:rPr>
+              <a:t>  RF C=0.51, beide nicht ueber Floor</a:t>
+            </a:r>
+            <a:endParaRPr lang="en-US" sz="1100" dirty="0"/>
+          </a:p>
+          <a:p>
+            <a:pPr indent="0" marL="0">
+              <a:spcAft>
+                <a:spcPts val="200"/>
+              </a:spcAft>
+              <a:buNone/>
+            </a:pPr>
+            <a:r>
+              <a:rPr lang="en-US" sz="1100" dirty="0">
+                <a:solidFill>
+                  <a:srgbClr val="1A1A1A"/>
+                </a:solidFill>
+                <a:latin typeface="Calibri" pitchFamily="34" charset="0"/>
+                <a:ea typeface="Calibri" pitchFamily="34" charset="-122"/>
+                <a:cs typeface="Calibri" pitchFamily="34" charset="-120"/>
+              </a:rPr>
+              <a:t>  </a:t>
+            </a:r>
+            <a:endParaRPr lang="en-US" sz="1100" dirty="0"/>
+          </a:p>
+          <a:p>
+            <a:pPr indent="0" marL="0">
+              <a:spcAft>
+                <a:spcPts val="200"/>
+              </a:spcAft>
+              <a:buNone/>
+            </a:pPr>
+            <a:r>
+              <a:rPr lang="en-US" sz="1100" b="1" dirty="0">
+                <a:solidFill>
+                  <a:srgbClr val="1A1A1A"/>
+                </a:solidFill>
+                <a:latin typeface="Calibri" pitchFamily="34" charset="0"/>
+                <a:ea typeface="Calibri" pitchFamily="34" charset="-122"/>
+                <a:cs typeface="Calibri" pitchFamily="34" charset="-120"/>
+              </a:rPr>
+              <a:t>Multi-Device (jetzt): </a:t>
+            </a:r>
+            <a:pPr indent="0" marL="0">
+              <a:spcAft>
+                <a:spcPts val="200"/>
+              </a:spcAft>
+              <a:buNone/>
+            </a:pPr>
+            <a:r>
+              <a:rPr lang="en-US" sz="1100" b="1" dirty="0">
+                <a:solidFill>
+                  <a:srgbClr val="27AE60"/>
+                </a:solidFill>
+                <a:latin typeface="Calibri" pitchFamily="34" charset="0"/>
+                <a:ea typeface="Calibri" pitchFamily="34" charset="-122"/>
+                <a:cs typeface="Calibri" pitchFamily="34" charset="-120"/>
+              </a:rPr>
+              <a:t>TinyML C=0.67</a:t>
+            </a:r>
+            <a:endParaRPr lang="en-US" sz="1100" dirty="0"/>
+          </a:p>
+          <a:p>
+            <a:pPr indent="0" marL="0">
+              <a:spcAft>
+                <a:spcPts val="200"/>
+              </a:spcAft>
+              <a:buNone/>
+            </a:pPr>
+            <a:r>
+              <a:rPr lang="en-US" sz="1100" dirty="0">
+                <a:solidFill>
+                  <a:srgbClr val="27AE60"/>
+                </a:solidFill>
+                <a:latin typeface="Calibri" pitchFamily="34" charset="0"/>
+                <a:ea typeface="Calibri" pitchFamily="34" charset="-122"/>
+                <a:cs typeface="Calibri" pitchFamily="34" charset="-120"/>
+              </a:rPr>
+              <a:t>  RF C=0.69, beide signifikant &gt; Floor (p&lt;=0.005)</a:t>
+            </a:r>
+            <a:endParaRPr lang="en-US" sz="1100" dirty="0"/>
+          </a:p>
+        </p:txBody>
+      </p:sp>
+      <p:sp>
+        <p:nvSpPr>
+          <p:cNvPr id="8" name="Text 6"/>
+          <p:cNvSpPr/>
+          <p:nvPr/>
+        </p:nvSpPr>
+        <p:spPr>
+          <a:xfrm>
+            <a:off x="685800" y="4114800"/>
+            <a:ext cx="3657600" cy="365760"/>
+          </a:xfrm>
+          <a:prstGeom prst="rect">
+            <a:avLst/>
+          </a:prstGeom>
+          <a:noFill/>
+          <a:ln/>
+        </p:spPr>
+        <p:txBody>
+          <a:bodyPr wrap="square" lIns="0" tIns="0" rIns="0" bIns="0" rtlCol="0" anchor="ctr"/>
+          <a:lstStyle/>
+          <a:p>
+            <a:pPr indent="0" marL="0">
+              <a:buNone/>
+            </a:pPr>
+            <a:r>
+              <a:rPr lang="en-US" sz="1100" b="1" i="1" dirty="0">
+                <a:solidFill>
+                  <a:srgbClr val="0F3460"/>
+                </a:solidFill>
+                <a:latin typeface="Calibri" pitchFamily="34" charset="0"/>
+                <a:ea typeface="Calibri" pitchFamily="34" charset="-122"/>
+                <a:cs typeface="Calibri" pitchFamily="34" charset="-120"/>
+              </a:rPr>
+              <a:t>Aber: ML bleibt hinter analytischen Baselines + Google (C ~ 0.77).</a:t>
+            </a:r>
+            <a:endParaRPr lang="en-US" sz="1100" dirty="0"/>
+          </a:p>
+        </p:txBody>
+      </p:sp>
+      <p:sp>
+        <p:nvSpPr>
+          <p:cNvPr id="9" name="Shape 7"/>
+          <p:cNvSpPr/>
+          <p:nvPr/>
+        </p:nvSpPr>
+        <p:spPr>
+          <a:xfrm>
+            <a:off x="4754880" y="1051560"/>
+            <a:ext cx="3931920" cy="3474720"/>
           </a:xfrm>
           <a:prstGeom prst="rect">
             <a:avLst/>
@@ -5425,7 +5615,7 @@
           </a:solidFill>
           <a:ln w="12700">
             <a:solidFill>
-              <a:srgbClr val="E2E8F0"/>
+              <a:srgbClr val="E94560"/>
             </a:solidFill>
             <a:prstDash val="solid"/>
           </a:ln>
@@ -5433,14 +5623,14 @@
       </p:sp>
       <p:sp>
         <p:nvSpPr>
-          <p:cNvPr id="5" name="Shape 3"/>
-          <p:cNvSpPr/>
-          <p:nvPr/>
-        </p:nvSpPr>
-        <p:spPr>
-          <a:xfrm>
-            <a:off x="457200" y="1417320"/>
-            <a:ext cx="73152" cy="1188720"/>
+          <p:cNvPr id="10" name="Shape 8"/>
+          <p:cNvSpPr/>
+          <p:nvPr/>
+        </p:nvSpPr>
+        <p:spPr>
+          <a:xfrm>
+            <a:off x="4754880" y="1051560"/>
+            <a:ext cx="73152" cy="3474720"/>
           </a:xfrm>
           <a:prstGeom prst="rect">
             <a:avLst/>
@@ -5453,14 +5643,14 @@
       </p:sp>
       <p:sp>
         <p:nvSpPr>
-          <p:cNvPr id="6" name="Text 4"/>
-          <p:cNvSpPr/>
-          <p:nvPr/>
-        </p:nvSpPr>
-        <p:spPr>
-          <a:xfrm>
-            <a:off x="685800" y="1554480"/>
-            <a:ext cx="7863840" cy="365760"/>
+          <p:cNvPr id="11" name="Text 9"/>
+          <p:cNvSpPr/>
+          <p:nvPr/>
+        </p:nvSpPr>
+        <p:spPr>
+          <a:xfrm>
+            <a:off x="4983480" y="1143000"/>
+            <a:ext cx="3657600" cy="365760"/>
           </a:xfrm>
           <a:prstGeom prst="rect">
             <a:avLst/>
@@ -5484,7 +5674,7 @@
                 <a:ea typeface="Calibri" pitchFamily="34" charset="-122"/>
                 <a:cs typeface="Calibri" pitchFamily="34" charset="-120"/>
               </a:rPr>
-              <a:t>Single Device (frueher Stand)</a:t>
+              <a:t>Befund 2: Google = Linear-Baseline</a:t>
             </a:r>
             <a:endParaRPr lang="en-US" sz="1400" dirty="0"/>
           </a:p>
@@ -5492,14 +5682,53 @@
       </p:sp>
       <p:sp>
         <p:nvSpPr>
-          <p:cNvPr id="7" name="Text 5"/>
-          <p:cNvSpPr/>
-          <p:nvPr/>
-        </p:nvSpPr>
-        <p:spPr>
-          <a:xfrm>
-            <a:off x="685800" y="1920240"/>
-            <a:ext cx="7863840" cy="640080"/>
+          <p:cNvPr id="12" name="Text 10"/>
+          <p:cNvSpPr/>
+          <p:nvPr/>
+        </p:nvSpPr>
+        <p:spPr>
+          <a:xfrm>
+            <a:off x="4983480" y="1508760"/>
+            <a:ext cx="3657600" cy="320040"/>
+          </a:xfrm>
+          <a:prstGeom prst="rect">
+            <a:avLst/>
+          </a:prstGeom>
+          <a:noFill/>
+          <a:ln/>
+        </p:spPr>
+        <p:txBody>
+          <a:bodyPr wrap="square" lIns="0" tIns="0" rIns="0" bIns="0" rtlCol="0" anchor="ctr"/>
+          <a:lstStyle/>
+          <a:p>
+            <a:pPr indent="0" marL="0">
+              <a:buNone/>
+            </a:pPr>
+            <a:r>
+              <a:rPr lang="en-US" sz="1100" i="1" dirty="0">
+                <a:solidFill>
+                  <a:srgbClr val="64748B"/>
+                </a:solidFill>
+                <a:latin typeface="Calibri" pitchFamily="34" charset="0"/>
+                <a:ea typeface="Calibri" pitchFamily="34" charset="-122"/>
+                <a:cs typeface="Calibri" pitchFamily="34" charset="-120"/>
+              </a:rPr>
+              <a:t>Statistisch ununterscheidbar (p=0.83):</a:t>
+            </a:r>
+            <a:endParaRPr lang="en-US" sz="1100" dirty="0"/>
+          </a:p>
+        </p:txBody>
+      </p:sp>
+      <p:sp>
+        <p:nvSpPr>
+          <p:cNvPr id="13" name="Text 11"/>
+          <p:cNvSpPr/>
+          <p:nvPr/>
+        </p:nvSpPr>
+        <p:spPr>
+          <a:xfrm>
+            <a:off x="4983480" y="1828800"/>
+            <a:ext cx="3657600" cy="2194560"/>
           </a:xfrm>
           <a:prstGeom prst="rect">
             <a:avLst/>
@@ -5512,10 +5741,50 @@
           <a:lstStyle/>
           <a:p>
             <a:pPr indent="0" marL="0">
+              <a:spcAft>
+                <a:spcPts val="200"/>
+              </a:spcAft>
               <a:buNone/>
             </a:pPr>
             <a:r>
-              <a:rPr lang="en-US" sz="1200" dirty="0">
+              <a:rPr lang="en-US" sz="1100" b="1" dirty="0">
+                <a:solidFill>
+                  <a:srgbClr val="455A64"/>
+                </a:solidFill>
+                <a:latin typeface="Calibri" pitchFamily="34" charset="0"/>
+                <a:ea typeface="Calibri" pitchFamily="34" charset="-122"/>
+                <a:cs typeface="Calibri" pitchFamily="34" charset="-120"/>
+              </a:rPr>
+              <a:t>Linear </a:t>
+            </a:r>
+            <a:pPr indent="0" marL="0">
+              <a:spcAft>
+                <a:spcPts val="200"/>
+              </a:spcAft>
+              <a:buNone/>
+            </a:pPr>
+            <a:r>
+              <a:rPr lang="en-US" sz="1100" dirty="0">
+                <a:solidFill>
+                  <a:srgbClr val="64748B"/>
+                </a:solidFill>
+                <a:latin typeface="Calibri" pitchFamily="34" charset="0"/>
+                <a:ea typeface="Calibri" pitchFamily="34" charset="-122"/>
+                <a:cs typeface="Calibri" pitchFamily="34" charset="-120"/>
+              </a:rPr>
+              <a:t>(battery / drain_rate)</a:t>
+            </a:r>
+            <a:endParaRPr lang="en-US" sz="1100" dirty="0"/>
+          </a:p>
+          <a:p>
+            <a:pPr indent="0" marL="0">
+              <a:spcAft>
+                <a:spcPts val="200"/>
+              </a:spcAft>
+              <a:buNone/>
+            </a:pPr>
+            <a:r>
+              <a:rPr lang="en-US" sz="1100" dirty="0">
                 <a:solidFill>
                   <a:srgbClr val="1A1A1A"/>
                 </a:solidFill>
@@ -5523,122 +5792,19 @@
                 <a:ea typeface="Calibri" pitchFamily="34" charset="-122"/>
                 <a:cs typeface="Calibri" pitchFamily="34" charset="-120"/>
               </a:rPr>
-              <a:t>TinyML C-Index 0.50 = Mean-Predictor. Random Forest 0.51. Beide statistisch nicht von 'kein Modell' unterscheidbar.</a:t>
-            </a:r>
-            <a:endParaRPr lang="en-US" sz="1200" dirty="0"/>
-          </a:p>
-        </p:txBody>
-      </p:sp>
-      <p:sp>
-        <p:nvSpPr>
-          <p:cNvPr id="8" name="Shape 6"/>
-          <p:cNvSpPr/>
-          <p:nvPr/>
-        </p:nvSpPr>
-        <p:spPr>
-          <a:xfrm>
-            <a:off x="457200" y="2788920"/>
-            <a:ext cx="8229600" cy="1188720"/>
-          </a:xfrm>
-          <a:prstGeom prst="rect">
-            <a:avLst/>
-          </a:prstGeom>
-          <a:solidFill>
-            <a:srgbClr val="F8FAFC"/>
-          </a:solidFill>
-          <a:ln w="12700">
-            <a:solidFill>
-              <a:srgbClr val="E2E8F0"/>
-            </a:solidFill>
-            <a:prstDash val="solid"/>
-          </a:ln>
-        </p:spPr>
-      </p:sp>
-      <p:sp>
-        <p:nvSpPr>
-          <p:cNvPr id="9" name="Shape 7"/>
-          <p:cNvSpPr/>
-          <p:nvPr/>
-        </p:nvSpPr>
-        <p:spPr>
-          <a:xfrm>
-            <a:off x="457200" y="2788920"/>
-            <a:ext cx="73152" cy="1188720"/>
-          </a:xfrm>
-          <a:prstGeom prst="rect">
-            <a:avLst/>
-          </a:prstGeom>
-          <a:solidFill>
-            <a:srgbClr val="27AE60"/>
-          </a:solidFill>
-          <a:ln/>
-        </p:spPr>
-      </p:sp>
-      <p:sp>
-        <p:nvSpPr>
-          <p:cNvPr id="10" name="Text 8"/>
-          <p:cNvSpPr/>
-          <p:nvPr/>
-        </p:nvSpPr>
-        <p:spPr>
-          <a:xfrm>
-            <a:off x="685800" y="2926080"/>
-            <a:ext cx="7863840" cy="365760"/>
-          </a:xfrm>
-          <a:prstGeom prst="rect">
-            <a:avLst/>
-          </a:prstGeom>
-          <a:noFill/>
-          <a:ln/>
-        </p:spPr>
-        <p:txBody>
-          <a:bodyPr wrap="square" lIns="0" tIns="0" rIns="0" bIns="0" rtlCol="0" anchor="ctr"/>
-          <a:lstStyle/>
+              <a:t>  MAE 3.21 h, C-Index 0.776</a:t>
+            </a:r>
+            <a:endParaRPr lang="en-US" sz="1100" dirty="0"/>
+          </a:p>
           <a:p>
             <a:pPr indent="0" marL="0">
+              <a:spcAft>
+                <a:spcPts val="200"/>
+              </a:spcAft>
               <a:buNone/>
             </a:pPr>
             <a:r>
-              <a:rPr lang="en-US" sz="1400" b="1" dirty="0">
-                <a:solidFill>
-                  <a:srgbClr val="27AE60"/>
-                </a:solidFill>
-                <a:latin typeface="Calibri" pitchFamily="34" charset="0"/>
-                <a:ea typeface="Calibri" pitchFamily="34" charset="-122"/>
-                <a:cs typeface="Calibri" pitchFamily="34" charset="-120"/>
-              </a:rPr>
-              <a:t>Multi-Device (jetzt)</a:t>
-            </a:r>
-            <a:endParaRPr lang="en-US" sz="1400" dirty="0"/>
-          </a:p>
-        </p:txBody>
-      </p:sp>
-      <p:sp>
-        <p:nvSpPr>
-          <p:cNvPr id="11" name="Text 9"/>
-          <p:cNvSpPr/>
-          <p:nvPr/>
-        </p:nvSpPr>
-        <p:spPr>
-          <a:xfrm>
-            <a:off x="685800" y="3291840"/>
-            <a:ext cx="7863840" cy="640080"/>
-          </a:xfrm>
-          <a:prstGeom prst="rect">
-            <a:avLst/>
-          </a:prstGeom>
-          <a:noFill/>
-          <a:ln/>
-        </p:spPr>
-        <p:txBody>
-          <a:bodyPr wrap="square" lIns="0" tIns="0" rIns="0" bIns="0" rtlCol="0" anchor="t"/>
-          <a:lstStyle/>
-          <a:p>
-            <a:pPr indent="0" marL="0">
-              <a:buNone/>
-            </a:pPr>
-            <a:r>
-              <a:rPr lang="en-US" sz="1200" dirty="0">
+              <a:rPr lang="en-US" sz="1100" dirty="0">
                 <a:solidFill>
                   <a:srgbClr val="1A1A1A"/>
                 </a:solidFill>
@@ -5646,22 +5812,79 @@
                 <a:ea typeface="Calibri" pitchFamily="34" charset="-122"/>
                 <a:cs typeface="Calibri" pitchFamily="34" charset="-120"/>
               </a:rPr>
-              <a:t>TinyML C-Index 0.67, RF 0.69. Beide signifikant ueber Floor (p&lt;=0.005). ML lernt erkennbares Signal.</a:t>
-            </a:r>
-            <a:endParaRPr lang="en-US" sz="1200" dirty="0"/>
+              <a:t>  </a:t>
+            </a:r>
+            <a:endParaRPr lang="en-US" sz="1100" dirty="0"/>
+          </a:p>
+          <a:p>
+            <a:pPr indent="0" marL="0">
+              <a:spcAft>
+                <a:spcPts val="200"/>
+              </a:spcAft>
+              <a:buNone/>
+            </a:pPr>
+            <a:r>
+              <a:rPr lang="en-US" sz="1100" b="1" dirty="0">
+                <a:solidFill>
+                  <a:srgbClr val="FF9800"/>
+                </a:solidFill>
+                <a:latin typeface="Calibri" pitchFamily="34" charset="0"/>
+                <a:ea typeface="Calibri" pitchFamily="34" charset="-122"/>
+                <a:cs typeface="Calibri" pitchFamily="34" charset="-120"/>
+              </a:rPr>
+              <a:t>Google API </a:t>
+            </a:r>
+            <a:pPr indent="0" marL="0">
+              <a:spcAft>
+                <a:spcPts val="200"/>
+              </a:spcAft>
+              <a:buNone/>
+            </a:pPr>
+            <a:r>
+              <a:rPr lang="en-US" sz="1100" dirty="0">
+                <a:solidFill>
+                  <a:srgbClr val="64748B"/>
+                </a:solidFill>
+                <a:latin typeface="Calibri" pitchFamily="34" charset="0"/>
+                <a:ea typeface="Calibri" pitchFamily="34" charset="-122"/>
+                <a:cs typeface="Calibri" pitchFamily="34" charset="-120"/>
+              </a:rPr>
+              <a:t>(privilegierter Systemzugang)</a:t>
+            </a:r>
+            <a:endParaRPr lang="en-US" sz="1100" dirty="0"/>
+          </a:p>
+          <a:p>
+            <a:pPr indent="0" marL="0">
+              <a:spcAft>
+                <a:spcPts val="200"/>
+              </a:spcAft>
+              <a:buNone/>
+            </a:pPr>
+            <a:r>
+              <a:rPr lang="en-US" sz="1100" dirty="0">
+                <a:solidFill>
+                  <a:srgbClr val="1A1A1A"/>
+                </a:solidFill>
+                <a:latin typeface="Calibri" pitchFamily="34" charset="0"/>
+                <a:ea typeface="Calibri" pitchFamily="34" charset="-122"/>
+                <a:cs typeface="Calibri" pitchFamily="34" charset="-120"/>
+              </a:rPr>
+              <a:t>  MAE 3.24 h, C-Index 0.777</a:t>
+            </a:r>
+            <a:endParaRPr lang="en-US" sz="1100" dirty="0"/>
           </a:p>
         </p:txBody>
       </p:sp>
       <p:sp>
         <p:nvSpPr>
-          <p:cNvPr id="12" name="Text 10"/>
-          <p:cNvSpPr/>
-          <p:nvPr/>
-        </p:nvSpPr>
-        <p:spPr>
-          <a:xfrm>
-            <a:off x="457200" y="4251960"/>
-            <a:ext cx="8229600" cy="365760"/>
+          <p:cNvPr id="14" name="Text 12"/>
+          <p:cNvSpPr/>
+          <p:nvPr/>
+        </p:nvSpPr>
+        <p:spPr>
+          <a:xfrm>
+            <a:off x="4983480" y="4114800"/>
+            <a:ext cx="3657600" cy="365760"/>
           </a:xfrm>
           <a:prstGeom prst="rect">
             <a:avLst/>
@@ -5670,14 +5893,14 @@
           <a:ln/>
         </p:spPr>
         <p:txBody>
-          <a:bodyPr wrap="square" rtlCol="0" anchor="ctr"/>
+          <a:bodyPr wrap="square" lIns="0" tIns="0" rIns="0" bIns="0" rtlCol="0" anchor="ctr"/>
           <a:lstStyle/>
           <a:p>
-            <a:pPr algn="ctr" indent="0" marL="0">
+            <a:pPr indent="0" marL="0">
               <a:buNone/>
             </a:pPr>
             <a:r>
-              <a:rPr lang="en-US" sz="1300" b="1" i="1" dirty="0">
+              <a:rPr lang="en-US" sz="1100" b="1" i="1" dirty="0">
                 <a:solidFill>
                   <a:srgbClr val="0F3460"/>
                 </a:solidFill>
@@ -5685,15 +5908,15 @@
                 <a:ea typeface="Calibri" pitchFamily="34" charset="-122"/>
                 <a:cs typeface="Calibri" pitchFamily="34" charset="-120"/>
               </a:rPr>
-              <a:t>Aber: ML bleibt hinter analytischen Baselines + Google bei C ~ 0.77.</a:t>
-            </a:r>
-            <a:endParaRPr lang="en-US" sz="1300" dirty="0"/>
+              <a:t>Hardware-Zugang traegt nichts Messbares fuer 'Stunden bis 0%' bei.</a:t>
+            </a:r>
+            <a:endParaRPr lang="en-US" sz="1100" dirty="0"/>
           </a:p>
         </p:txBody>
       </p:sp>
       <p:sp>
         <p:nvSpPr>
-          <p:cNvPr id="13" name="Text 11"/>
+          <p:cNvPr id="15" name="Text 13"/>
           <p:cNvSpPr/>
           <p:nvPr/>
         </p:nvSpPr>
@@ -5732,7 +5955,7 @@
       </p:sp>
       <p:sp>
         <p:nvSpPr>
-          <p:cNvPr id="14" name="Text 12"/>
+          <p:cNvPr id="16" name="Text 14"/>
           <p:cNvSpPr/>
           <p:nvPr/>
         </p:nvSpPr>
@@ -5763,7 +5986,7 @@
                 <a:ea typeface="Calibri" pitchFamily="34" charset="-122"/>
                 <a:cs typeface="Calibri" pitchFamily="34" charset="-120"/>
               </a:rPr>
-              <a:t>12 / 16</a:t>
+              <a:t>12 / 15</a:t>
             </a:r>
             <a:endParaRPr lang="en-US" sz="900" dirty="0"/>
           </a:p>
@@ -5834,7 +6057,7 @@
                 <a:ea typeface="Calibri" pitchFamily="34" charset="-122"/>
                 <a:cs typeface="Calibri" pitchFamily="34" charset="-120"/>
               </a:rPr>
-              <a:t>Diskussion 2: Google = Linear-Baseline</a:t>
+              <a:t>Limitations (ehrlich)</a:t>
             </a:r>
             <a:endParaRPr lang="en-US" sz="2800" dirty="0"/>
           </a:p>
@@ -5842,14 +6065,59 @@
       </p:sp>
       <p:sp>
         <p:nvSpPr>
-          <p:cNvPr id="3" name="Text 1"/>
-          <p:cNvSpPr/>
-          <p:nvPr/>
-        </p:nvSpPr>
-        <p:spPr>
-          <a:xfrm>
-            <a:off x="457200" y="960120"/>
-            <a:ext cx="8229600" cy="548640"/>
+          <p:cNvPr id="3" name="Shape 1"/>
+          <p:cNvSpPr/>
+          <p:nvPr/>
+        </p:nvSpPr>
+        <p:spPr>
+          <a:xfrm>
+            <a:off x="457200" y="1188720"/>
+            <a:ext cx="8229600" cy="960120"/>
+          </a:xfrm>
+          <a:prstGeom prst="rect">
+            <a:avLst/>
+          </a:prstGeom>
+          <a:solidFill>
+            <a:srgbClr val="F8FAFC"/>
+          </a:solidFill>
+          <a:ln w="12700">
+            <a:solidFill>
+              <a:srgbClr val="E2E8F0"/>
+            </a:solidFill>
+            <a:prstDash val="solid"/>
+          </a:ln>
+        </p:spPr>
+      </p:sp>
+      <p:sp>
+        <p:nvSpPr>
+          <p:cNvPr id="4" name="Shape 2"/>
+          <p:cNvSpPr/>
+          <p:nvPr/>
+        </p:nvSpPr>
+        <p:spPr>
+          <a:xfrm>
+            <a:off x="457200" y="1188720"/>
+            <a:ext cx="73152" cy="960120"/>
+          </a:xfrm>
+          <a:prstGeom prst="rect">
+            <a:avLst/>
+          </a:prstGeom>
+          <a:solidFill>
+            <a:srgbClr val="0F3460"/>
+          </a:solidFill>
+          <a:ln/>
+        </p:spPr>
+      </p:sp>
+      <p:sp>
+        <p:nvSpPr>
+          <p:cNvPr id="5" name="Text 3"/>
+          <p:cNvSpPr/>
+          <p:nvPr/>
+        </p:nvSpPr>
+        <p:spPr>
+          <a:xfrm>
+            <a:off x="685800" y="1298448"/>
+            <a:ext cx="7863840" cy="320040"/>
           </a:xfrm>
           <a:prstGeom prst="rect">
             <a:avLst/>
@@ -5858,101 +6126,37 @@
           <a:ln/>
         </p:spPr>
         <p:txBody>
-          <a:bodyPr wrap="square" rtlCol="0" anchor="ctr"/>
+          <a:bodyPr wrap="square" lIns="0" tIns="0" rIns="0" bIns="0" rtlCol="0" anchor="ctr"/>
           <a:lstStyle/>
           <a:p>
             <a:pPr indent="0" marL="0">
               <a:buNone/>
             </a:pPr>
             <a:r>
-              <a:rPr lang="en-US" sz="1300" i="1" dirty="0">
+              <a:rPr lang="en-US" sz="1500" b="1" dirty="0">
                 <a:solidFill>
-                  <a:srgbClr val="64748B"/>
+                  <a:srgbClr val="0F3460"/>
                 </a:solidFill>
                 <a:latin typeface="Calibri" pitchFamily="34" charset="0"/>
                 <a:ea typeface="Calibri" pitchFamily="34" charset="-122"/>
                 <a:cs typeface="Calibri" pitchFamily="34" charset="-120"/>
               </a:rPr>
-              <a:t>Auf der gemeinsamen Schnittmenge sind die System-API und die einfache lineare Drain-Rate-Baseline statistisch ununterscheidbar.</a:t>
-            </a:r>
-            <a:endParaRPr lang="en-US" sz="1300" dirty="0"/>
+              <a:t>Right-censored Daten</a:t>
+            </a:r>
+            <a:endParaRPr lang="en-US" sz="1500" dirty="0"/>
           </a:p>
         </p:txBody>
       </p:sp>
       <p:sp>
         <p:nvSpPr>
-          <p:cNvPr id="4" name="Shape 2"/>
-          <p:cNvSpPr/>
-          <p:nvPr/>
-        </p:nvSpPr>
-        <p:spPr>
-          <a:xfrm>
-            <a:off x="457200" y="1691640"/>
-            <a:ext cx="3931920" cy="2377440"/>
-          </a:xfrm>
-          <a:prstGeom prst="rect">
-            <a:avLst/>
-          </a:prstGeom>
-          <a:solidFill>
-            <a:srgbClr val="F8FAFC"/>
-          </a:solidFill>
-          <a:ln w="12700">
-            <a:solidFill>
-              <a:srgbClr val="455A64"/>
-            </a:solidFill>
-            <a:prstDash val="solid"/>
-          </a:ln>
-        </p:spPr>
-      </p:sp>
-      <p:sp>
-        <p:nvSpPr>
-          <p:cNvPr id="5" name="Text 3"/>
-          <p:cNvSpPr/>
-          <p:nvPr/>
-        </p:nvSpPr>
-        <p:spPr>
-          <a:xfrm>
-            <a:off x="640080" y="1828800"/>
-            <a:ext cx="3657600" cy="365760"/>
-          </a:xfrm>
-          <a:prstGeom prst="rect">
-            <a:avLst/>
-          </a:prstGeom>
-          <a:noFill/>
-          <a:ln/>
-        </p:spPr>
-        <p:txBody>
-          <a:bodyPr wrap="square" lIns="0" tIns="0" rIns="0" bIns="0" rtlCol="0" anchor="ctr"/>
-          <a:lstStyle/>
-          <a:p>
-            <a:pPr indent="0" marL="0">
-              <a:buNone/>
-            </a:pPr>
-            <a:r>
-              <a:rPr lang="en-US" sz="1400" b="1" dirty="0">
-                <a:solidFill>
-                  <a:srgbClr val="455A64"/>
-                </a:solidFill>
-                <a:latin typeface="Calibri" pitchFamily="34" charset="0"/>
-                <a:ea typeface="Calibri" pitchFamily="34" charset="-122"/>
-                <a:cs typeface="Calibri" pitchFamily="34" charset="-120"/>
-              </a:rPr>
-              <a:t>Linear (battery / drain_rate)</a:t>
-            </a:r>
-            <a:endParaRPr lang="en-US" sz="1400" dirty="0"/>
-          </a:p>
-        </p:txBody>
-      </p:sp>
-      <p:sp>
-        <p:nvSpPr>
           <p:cNvPr id="6" name="Text 4"/>
           <p:cNvSpPr/>
           <p:nvPr/>
         </p:nvSpPr>
         <p:spPr>
           <a:xfrm>
-            <a:off x="640080" y="2194560"/>
-            <a:ext cx="3657600" cy="1828800"/>
+            <a:off x="685800" y="1645920"/>
+            <a:ext cx="7863840" cy="502920"/>
           </a:xfrm>
           <a:prstGeom prst="rect">
             <a:avLst/>
@@ -5976,10 +6180,116 @@
                 <a:ea typeface="Calibri" pitchFamily="34" charset="-122"/>
                 <a:cs typeface="Calibri" pitchFamily="34" charset="-120"/>
               </a:rPr>
-              <a:t>Liest BatteryManager.CHARGE_COUNTER</a:t>
+              <a:t>Akku wird im Alltag nie auf 0% entladen. Strukturelle Eigenschaft der Domaene - gleiche Beobachtung bei Li et al. (2018) mit 51 Nutzern. Deshalb C-Index als Primaer-Metrik statt MAE.</a:t>
             </a:r>
             <a:endParaRPr lang="en-US" sz="1200" dirty="0"/>
           </a:p>
+        </p:txBody>
+      </p:sp>
+      <p:sp>
+        <p:nvSpPr>
+          <p:cNvPr id="7" name="Shape 5"/>
+          <p:cNvSpPr/>
+          <p:nvPr/>
+        </p:nvSpPr>
+        <p:spPr>
+          <a:xfrm>
+            <a:off x="457200" y="2331720"/>
+            <a:ext cx="8229600" cy="960120"/>
+          </a:xfrm>
+          <a:prstGeom prst="rect">
+            <a:avLst/>
+          </a:prstGeom>
+          <a:solidFill>
+            <a:srgbClr val="F8FAFC"/>
+          </a:solidFill>
+          <a:ln w="12700">
+            <a:solidFill>
+              <a:srgbClr val="E2E8F0"/>
+            </a:solidFill>
+            <a:prstDash val="solid"/>
+          </a:ln>
+        </p:spPr>
+      </p:sp>
+      <p:sp>
+        <p:nvSpPr>
+          <p:cNvPr id="8" name="Shape 6"/>
+          <p:cNvSpPr/>
+          <p:nvPr/>
+        </p:nvSpPr>
+        <p:spPr>
+          <a:xfrm>
+            <a:off x="457200" y="2331720"/>
+            <a:ext cx="73152" cy="960120"/>
+          </a:xfrm>
+          <a:prstGeom prst="rect">
+            <a:avLst/>
+          </a:prstGeom>
+          <a:solidFill>
+            <a:srgbClr val="0F3460"/>
+          </a:solidFill>
+          <a:ln/>
+        </p:spPr>
+      </p:sp>
+      <p:sp>
+        <p:nvSpPr>
+          <p:cNvPr id="9" name="Text 7"/>
+          <p:cNvSpPr/>
+          <p:nvPr/>
+        </p:nvSpPr>
+        <p:spPr>
+          <a:xfrm>
+            <a:off x="685800" y="2441448"/>
+            <a:ext cx="7863840" cy="320040"/>
+          </a:xfrm>
+          <a:prstGeom prst="rect">
+            <a:avLst/>
+          </a:prstGeom>
+          <a:noFill/>
+          <a:ln/>
+        </p:spPr>
+        <p:txBody>
+          <a:bodyPr wrap="square" lIns="0" tIns="0" rIns="0" bIns="0" rtlCol="0" anchor="ctr"/>
+          <a:lstStyle/>
+          <a:p>
+            <a:pPr indent="0" marL="0">
+              <a:buNone/>
+            </a:pPr>
+            <a:r>
+              <a:rPr lang="en-US" sz="1500" b="1" dirty="0">
+                <a:solidFill>
+                  <a:srgbClr val="0F3460"/>
+                </a:solidFill>
+                <a:latin typeface="Calibri" pitchFamily="34" charset="0"/>
+                <a:ea typeface="Calibri" pitchFamily="34" charset="-122"/>
+                <a:cs typeface="Calibri" pitchFamily="34" charset="-120"/>
+              </a:rPr>
+              <a:t>Multi-Device, aber nicht Cross-Device</a:t>
+            </a:r>
+            <a:endParaRPr lang="en-US" sz="1500" dirty="0"/>
+          </a:p>
+        </p:txBody>
+      </p:sp>
+      <p:sp>
+        <p:nvSpPr>
+          <p:cNvPr id="10" name="Text 8"/>
+          <p:cNvSpPr/>
+          <p:nvPr/>
+        </p:nvSpPr>
+        <p:spPr>
+          <a:xfrm>
+            <a:off x="685800" y="2788920"/>
+            <a:ext cx="7863840" cy="502920"/>
+          </a:xfrm>
+          <a:prstGeom prst="rect">
+            <a:avLst/>
+          </a:prstGeom>
+          <a:noFill/>
+          <a:ln/>
+        </p:spPr>
+        <p:txBody>
+          <a:bodyPr wrap="square" lIns="0" tIns="0" rIns="0" bIns="0" rtlCol="0" anchor="t"/>
+          <a:lstStyle/>
           <a:p>
             <a:pPr indent="0" marL="0">
               <a:buNone/>
@@ -5993,10 +6303,116 @@
                 <a:ea typeface="Calibri" pitchFamily="34" charset="-122"/>
                 <a:cs typeface="Calibri" pitchFamily="34" charset="-120"/>
               </a:rPr>
-              <a:t>Liest BatteryManager.CURRENT_AVERAGE</a:t>
+              <a:t>Training sieht alle vier Geraete. Eine Leave-One-Device-Out-Studie - also Test auf einem komplett ungesehenen Geraet - ist offene Folgearbeit.</a:t>
             </a:r>
             <a:endParaRPr lang="en-US" sz="1200" dirty="0"/>
           </a:p>
+        </p:txBody>
+      </p:sp>
+      <p:sp>
+        <p:nvSpPr>
+          <p:cNvPr id="11" name="Shape 9"/>
+          <p:cNvSpPr/>
+          <p:nvPr/>
+        </p:nvSpPr>
+        <p:spPr>
+          <a:xfrm>
+            <a:off x="457200" y="3474720"/>
+            <a:ext cx="8229600" cy="960120"/>
+          </a:xfrm>
+          <a:prstGeom prst="rect">
+            <a:avLst/>
+          </a:prstGeom>
+          <a:solidFill>
+            <a:srgbClr val="F8FAFC"/>
+          </a:solidFill>
+          <a:ln w="12700">
+            <a:solidFill>
+              <a:srgbClr val="E2E8F0"/>
+            </a:solidFill>
+            <a:prstDash val="solid"/>
+          </a:ln>
+        </p:spPr>
+      </p:sp>
+      <p:sp>
+        <p:nvSpPr>
+          <p:cNvPr id="12" name="Shape 10"/>
+          <p:cNvSpPr/>
+          <p:nvPr/>
+        </p:nvSpPr>
+        <p:spPr>
+          <a:xfrm>
+            <a:off x="457200" y="3474720"/>
+            <a:ext cx="73152" cy="960120"/>
+          </a:xfrm>
+          <a:prstGeom prst="rect">
+            <a:avLst/>
+          </a:prstGeom>
+          <a:solidFill>
+            <a:srgbClr val="0F3460"/>
+          </a:solidFill>
+          <a:ln/>
+        </p:spPr>
+      </p:sp>
+      <p:sp>
+        <p:nvSpPr>
+          <p:cNvPr id="13" name="Text 11"/>
+          <p:cNvSpPr/>
+          <p:nvPr/>
+        </p:nvSpPr>
+        <p:spPr>
+          <a:xfrm>
+            <a:off x="685800" y="3584448"/>
+            <a:ext cx="7863840" cy="320040"/>
+          </a:xfrm>
+          <a:prstGeom prst="rect">
+            <a:avLst/>
+          </a:prstGeom>
+          <a:noFill/>
+          <a:ln/>
+        </p:spPr>
+        <p:txBody>
+          <a:bodyPr wrap="square" lIns="0" tIns="0" rIns="0" bIns="0" rtlCol="0" anchor="ctr"/>
+          <a:lstStyle/>
+          <a:p>
+            <a:pPr indent="0" marL="0">
+              <a:buNone/>
+            </a:pPr>
+            <a:r>
+              <a:rPr lang="en-US" sz="1500" b="1" dirty="0">
+                <a:solidFill>
+                  <a:srgbClr val="0F3460"/>
+                </a:solidFill>
+                <a:latin typeface="Calibri" pitchFamily="34" charset="0"/>
+                <a:ea typeface="Calibri" pitchFamily="34" charset="-122"/>
+                <a:cs typeface="Calibri" pitchFamily="34" charset="-120"/>
+              </a:rPr>
+              <a:t>TinyML auf Pixel 9 Pro XL anomal schlecht</a:t>
+            </a:r>
+            <a:endParaRPr lang="en-US" sz="1500" dirty="0"/>
+          </a:p>
+        </p:txBody>
+      </p:sp>
+      <p:sp>
+        <p:nvSpPr>
+          <p:cNvPr id="14" name="Text 12"/>
+          <p:cNvSpPr/>
+          <p:nvPr/>
+        </p:nvSpPr>
+        <p:spPr>
+          <a:xfrm>
+            <a:off x="685800" y="3931920"/>
+            <a:ext cx="7863840" cy="502920"/>
+          </a:xfrm>
+          <a:prstGeom prst="rect">
+            <a:avLst/>
+          </a:prstGeom>
+          <a:noFill/>
+          <a:ln/>
+        </p:spPr>
+        <p:txBody>
+          <a:bodyPr wrap="square" lIns="0" tIns="0" rIns="0" bIns="0" rtlCol="0" anchor="t"/>
+          <a:lstStyle/>
           <a:p>
             <a:pPr indent="0" marL="0">
               <a:buNone/>
@@ -6010,286 +6426,15 @@
                 <a:ea typeface="Calibri" pitchFamily="34" charset="-122"/>
                 <a:cs typeface="Calibri" pitchFamily="34" charset="-120"/>
               </a:rPr>
-              <a:t>  </a:t>
+              <a:t>TinyML C=0.60 waehrend RF auf demselben Geraet C=0.76 erreicht. Keine kausale Erklaerung im aktuellen Datensatz - offen fuer Folgearbeiten.</a:t>
             </a:r>
             <a:endParaRPr lang="en-US" sz="1200" dirty="0"/>
           </a:p>
-          <a:p>
-            <a:pPr indent="0" marL="0">
-              <a:buNone/>
-            </a:pPr>
-            <a:r>
-              <a:rPr lang="en-US" sz="1200" b="1" dirty="0">
-                <a:solidFill>
-                  <a:srgbClr val="1A1A1A"/>
-                </a:solidFill>
-                <a:latin typeface="Calibri" pitchFamily="34" charset="0"/>
-                <a:ea typeface="Calibri" pitchFamily="34" charset="-122"/>
-                <a:cs typeface="Calibri" pitchFamily="34" charset="-120"/>
-              </a:rPr>
-              <a:t>MAE: 3.21 h</a:t>
-            </a:r>
-            <a:endParaRPr lang="en-US" sz="1200" dirty="0"/>
-          </a:p>
-          <a:p>
-            <a:pPr indent="0" marL="0">
-              <a:buNone/>
-            </a:pPr>
-            <a:r>
-              <a:rPr lang="en-US" sz="1200" b="1" dirty="0">
-                <a:solidFill>
-                  <a:srgbClr val="1A1A1A"/>
-                </a:solidFill>
-                <a:latin typeface="Calibri" pitchFamily="34" charset="0"/>
-                <a:ea typeface="Calibri" pitchFamily="34" charset="-122"/>
-                <a:cs typeface="Calibri" pitchFamily="34" charset="-120"/>
-              </a:rPr>
-              <a:t>C-Index: 0.776</a:t>
-            </a:r>
-            <a:endParaRPr lang="en-US" sz="1200" dirty="0"/>
-          </a:p>
         </p:txBody>
       </p:sp>
       <p:sp>
         <p:nvSpPr>
-          <p:cNvPr id="7" name="Shape 5"/>
-          <p:cNvSpPr/>
-          <p:nvPr/>
-        </p:nvSpPr>
-        <p:spPr>
-          <a:xfrm>
-            <a:off x="4754880" y="1691640"/>
-            <a:ext cx="3931920" cy="2377440"/>
-          </a:xfrm>
-          <a:prstGeom prst="rect">
-            <a:avLst/>
-          </a:prstGeom>
-          <a:solidFill>
-            <a:srgbClr val="F8FAFC"/>
-          </a:solidFill>
-          <a:ln w="12700">
-            <a:solidFill>
-              <a:srgbClr val="FF9800"/>
-            </a:solidFill>
-            <a:prstDash val="solid"/>
-          </a:ln>
-        </p:spPr>
-      </p:sp>
-      <p:sp>
-        <p:nvSpPr>
-          <p:cNvPr id="8" name="Text 6"/>
-          <p:cNvSpPr/>
-          <p:nvPr/>
-        </p:nvSpPr>
-        <p:spPr>
-          <a:xfrm>
-            <a:off x="4937760" y="1828800"/>
-            <a:ext cx="3657600" cy="365760"/>
-          </a:xfrm>
-          <a:prstGeom prst="rect">
-            <a:avLst/>
-          </a:prstGeom>
-          <a:noFill/>
-          <a:ln/>
-        </p:spPr>
-        <p:txBody>
-          <a:bodyPr wrap="square" lIns="0" tIns="0" rIns="0" bIns="0" rtlCol="0" anchor="ctr"/>
-          <a:lstStyle/>
-          <a:p>
-            <a:pPr indent="0" marL="0">
-              <a:buNone/>
-            </a:pPr>
-            <a:r>
-              <a:rPr lang="en-US" sz="1400" b="1" dirty="0">
-                <a:solidFill>
-                  <a:srgbClr val="FF9800"/>
-                </a:solidFill>
-                <a:latin typeface="Calibri" pitchFamily="34" charset="0"/>
-                <a:ea typeface="Calibri" pitchFamily="34" charset="-122"/>
-                <a:cs typeface="Calibri" pitchFamily="34" charset="-120"/>
-              </a:rPr>
-              <a:t>Google API (Systemprozess)</a:t>
-            </a:r>
-            <a:endParaRPr lang="en-US" sz="1400" dirty="0"/>
-          </a:p>
-        </p:txBody>
-      </p:sp>
-      <p:sp>
-        <p:nvSpPr>
-          <p:cNvPr id="9" name="Text 7"/>
-          <p:cNvSpPr/>
-          <p:nvPr/>
-        </p:nvSpPr>
-        <p:spPr>
-          <a:xfrm>
-            <a:off x="4937760" y="2194560"/>
-            <a:ext cx="3657600" cy="1828800"/>
-          </a:xfrm>
-          <a:prstGeom prst="rect">
-            <a:avLst/>
-          </a:prstGeom>
-          <a:noFill/>
-          <a:ln/>
-        </p:spPr>
-        <p:txBody>
-          <a:bodyPr wrap="square" lIns="0" tIns="0" rIns="0" bIns="0" rtlCol="0" anchor="t"/>
-          <a:lstStyle/>
-          <a:p>
-            <a:pPr indent="0" marL="0">
-              <a:buNone/>
-            </a:pPr>
-            <a:r>
-              <a:rPr lang="en-US" sz="1200" dirty="0">
-                <a:solidFill>
-                  <a:srgbClr val="1A1A1A"/>
-                </a:solidFill>
-                <a:latin typeface="Calibri" pitchFamily="34" charset="0"/>
-                <a:ea typeface="Calibri" pitchFamily="34" charset="-122"/>
-                <a:cs typeface="Calibri" pitchFamily="34" charset="-120"/>
-              </a:rPr>
-              <a:t>Zusaetzliche privilegierte Signale:</a:t>
-            </a:r>
-            <a:endParaRPr lang="en-US" sz="1200" dirty="0"/>
-          </a:p>
-          <a:p>
-            <a:pPr marL="342900" indent="-342900">
-              <a:buSzPct val="100000"/>
-              <a:buChar char="•"/>
-            </a:pPr>
-            <a:r>
-              <a:rPr lang="en-US" sz="1200" dirty="0">
-                <a:solidFill>
-                  <a:srgbClr val="1A1A1A"/>
-                </a:solidFill>
-                <a:latin typeface="Calibri" pitchFamily="34" charset="0"/>
-                <a:ea typeface="Calibri" pitchFamily="34" charset="-122"/>
-                <a:cs typeface="Calibri" pitchFamily="34" charset="-120"/>
-              </a:rPr>
-              <a:t>PowerStats HAL (per-App-Strom)</a:t>
-            </a:r>
-            <a:endParaRPr lang="en-US" sz="1200" dirty="0"/>
-          </a:p>
-          <a:p>
-            <a:pPr marL="342900" indent="-342900">
-              <a:buSzPct val="100000"/>
-              <a:buChar char="•"/>
-            </a:pPr>
-            <a:r>
-              <a:rPr lang="en-US" sz="1200" dirty="0">
-                <a:solidFill>
-                  <a:srgbClr val="1A1A1A"/>
-                </a:solidFill>
-                <a:latin typeface="Calibri" pitchFamily="34" charset="0"/>
-                <a:ea typeface="Calibri" pitchFamily="34" charset="-122"/>
-                <a:cs typeface="Calibri" pitchFamily="34" charset="-120"/>
-              </a:rPr>
-              <a:t>Adaptive-Battery-Integration</a:t>
-            </a:r>
-            <a:endParaRPr lang="en-US" sz="1200" dirty="0"/>
-          </a:p>
-          <a:p>
-            <a:pPr indent="0" marL="0">
-              <a:buNone/>
-            </a:pPr>
-            <a:r>
-              <a:rPr lang="en-US" sz="1200" b="1" dirty="0">
-                <a:solidFill>
-                  <a:srgbClr val="1A1A1A"/>
-                </a:solidFill>
-                <a:latin typeface="Calibri" pitchFamily="34" charset="0"/>
-                <a:ea typeface="Calibri" pitchFamily="34" charset="-122"/>
-                <a:cs typeface="Calibri" pitchFamily="34" charset="-120"/>
-              </a:rPr>
-              <a:t>MAE: 3.24 h</a:t>
-            </a:r>
-            <a:endParaRPr lang="en-US" sz="1200" dirty="0"/>
-          </a:p>
-          <a:p>
-            <a:pPr indent="0" marL="0">
-              <a:buNone/>
-            </a:pPr>
-            <a:r>
-              <a:rPr lang="en-US" sz="1200" b="1" dirty="0">
-                <a:solidFill>
-                  <a:srgbClr val="1A1A1A"/>
-                </a:solidFill>
-                <a:latin typeface="Calibri" pitchFamily="34" charset="0"/>
-                <a:ea typeface="Calibri" pitchFamily="34" charset="-122"/>
-                <a:cs typeface="Calibri" pitchFamily="34" charset="-120"/>
-              </a:rPr>
-              <a:t>C-Index: 0.777</a:t>
-            </a:r>
-            <a:endParaRPr lang="en-US" sz="1200" dirty="0"/>
-          </a:p>
-        </p:txBody>
-      </p:sp>
-      <p:sp>
-        <p:nvSpPr>
-          <p:cNvPr id="10" name="Shape 8"/>
-          <p:cNvSpPr/>
-          <p:nvPr/>
-        </p:nvSpPr>
-        <p:spPr>
-          <a:xfrm>
-            <a:off x="457200" y="4160520"/>
-            <a:ext cx="8229600" cy="502920"/>
-          </a:xfrm>
-          <a:prstGeom prst="rect">
-            <a:avLst/>
-          </a:prstGeom>
-          <a:solidFill>
-            <a:srgbClr val="FFF6E5"/>
-          </a:solidFill>
-          <a:ln w="12700">
-            <a:solidFill>
-              <a:srgbClr val="FF9800"/>
-            </a:solidFill>
-            <a:prstDash val="solid"/>
-          </a:ln>
-        </p:spPr>
-      </p:sp>
-      <p:sp>
-        <p:nvSpPr>
-          <p:cNvPr id="11" name="Text 9"/>
-          <p:cNvSpPr/>
-          <p:nvPr/>
-        </p:nvSpPr>
-        <p:spPr>
-          <a:xfrm>
-            <a:off x="640080" y="4206240"/>
-            <a:ext cx="7863840" cy="411480"/>
-          </a:xfrm>
-          <a:prstGeom prst="rect">
-            <a:avLst/>
-          </a:prstGeom>
-          <a:noFill/>
-          <a:ln/>
-        </p:spPr>
-        <p:txBody>
-          <a:bodyPr wrap="square" lIns="0" tIns="0" rIns="0" bIns="0" rtlCol="0" anchor="ctr"/>
-          <a:lstStyle/>
-          <a:p>
-            <a:pPr indent="0" marL="0">
-              <a:buNone/>
-            </a:pPr>
-            <a:r>
-              <a:rPr lang="en-US" sz="1200" i="1" dirty="0">
-                <a:solidFill>
-                  <a:srgbClr val="1A1A1A"/>
-                </a:solidFill>
-                <a:latin typeface="Calibri" pitchFamily="34" charset="0"/>
-                <a:ea typeface="Calibri" pitchFamily="34" charset="-122"/>
-                <a:cs typeface="Calibri" pitchFamily="34" charset="-120"/>
-              </a:rPr>
-              <a:t>Der zusaetzliche Hardware-Zugang von Google traegt nichts Messbares fuer 'Stunden bis 0%' bei (Permutationstest p=0.83 fuer C, p=0.55 fuer MAE).</a:t>
-            </a:r>
-            <a:endParaRPr lang="en-US" sz="1200" dirty="0"/>
-          </a:p>
-        </p:txBody>
-      </p:sp>
-      <p:sp>
-        <p:nvSpPr>
-          <p:cNvPr id="12" name="Text 10"/>
+          <p:cNvPr id="15" name="Text 13"/>
           <p:cNvSpPr/>
           <p:nvPr/>
         </p:nvSpPr>
@@ -6328,7 +6473,7 @@
       </p:sp>
       <p:sp>
         <p:nvSpPr>
-          <p:cNvPr id="13" name="Text 11"/>
+          <p:cNvPr id="16" name="Text 14"/>
           <p:cNvSpPr/>
           <p:nvPr/>
         </p:nvSpPr>
@@ -6359,7 +6504,7 @@
                 <a:ea typeface="Calibri" pitchFamily="34" charset="-122"/>
                 <a:cs typeface="Calibri" pitchFamily="34" charset="-120"/>
               </a:rPr>
-              <a:t>13 / 16</a:t>
+              <a:t>13 / 15</a:t>
             </a:r>
             <a:endParaRPr lang="en-US" sz="900" dirty="0"/>
           </a:p>
@@ -6379,7 +6524,7 @@
     <p:bg>
       <p:bgPr>
         <a:solidFill>
-          <a:srgbClr val="FFFFFF"/>
+          <a:srgbClr val="0F1B2D"/>
         </a:solidFill>
       </p:bgPr>
     </p:bg>
@@ -6405,8 +6550,8 @@
         </p:nvSpPr>
         <p:spPr>
           <a:xfrm>
-            <a:off x="457200" y="274320"/>
-            <a:ext cx="8229600" cy="594360"/>
+            <a:off x="457200" y="365760"/>
+            <a:ext cx="8229600" cy="640080"/>
           </a:xfrm>
           <a:prstGeom prst="rect">
             <a:avLst/>
@@ -6415,24 +6560,24 @@
           <a:ln/>
         </p:spPr>
         <p:txBody>
-          <a:bodyPr wrap="square" lIns="0" tIns="0" rIns="0" bIns="0" rtlCol="0" anchor="ctr"/>
+          <a:bodyPr wrap="square" rtlCol="0" anchor="ctr"/>
           <a:lstStyle/>
           <a:p>
             <a:pPr indent="0" marL="0">
               <a:buNone/>
             </a:pPr>
             <a:r>
-              <a:rPr lang="en-US" sz="2800" b="1" dirty="0">
+              <a:rPr lang="en-US" sz="2600" b="1" dirty="0">
                 <a:solidFill>
-                  <a:srgbClr val="0F3460"/>
+                  <a:srgbClr val="FFFFFF"/>
                 </a:solidFill>
                 <a:latin typeface="Calibri" pitchFamily="34" charset="0"/>
                 <a:ea typeface="Calibri" pitchFamily="34" charset="-122"/>
                 <a:cs typeface="Calibri" pitchFamily="34" charset="-120"/>
               </a:rPr>
-              <a:t>Limitations (ehrlich)</a:t>
-            </a:r>
-            <a:endParaRPr lang="en-US" sz="2800" dirty="0"/>
+              <a:t>Conclusion: Antwort auf die Forschungsfrage</a:t>
+            </a:r>
+            <a:endParaRPr lang="en-US" sz="2600" dirty="0"/>
           </a:p>
         </p:txBody>
       </p:sp>
@@ -6444,16 +6589,23 @@
         </p:nvSpPr>
         <p:spPr>
           <a:xfrm>
-            <a:off x="457200" y="1051560"/>
-            <a:ext cx="73152" cy="640080"/>
+            <a:off x="457200" y="1371600"/>
+            <a:ext cx="2697480" cy="2560320"/>
           </a:xfrm>
           <a:prstGeom prst="rect">
             <a:avLst/>
           </a:prstGeom>
           <a:solidFill>
-            <a:srgbClr val="0F3460"/>
+            <a:srgbClr val="FFFFFF">
+              <a:alpha val="8000"/>
+            </a:srgbClr>
           </a:solidFill>
-          <a:ln/>
+          <a:ln w="25400">
+            <a:solidFill>
+              <a:srgbClr val="2196F3"/>
+            </a:solidFill>
+            <a:prstDash val="solid"/>
+          </a:ln>
         </p:spPr>
       </p:sp>
       <p:sp>
@@ -6464,8 +6616,8 @@
         </p:nvSpPr>
         <p:spPr>
           <a:xfrm>
-            <a:off x="685800" y="1051560"/>
-            <a:ext cx="7863840" cy="274320"/>
+            <a:off x="594360" y="1508760"/>
+            <a:ext cx="2423160" cy="365760"/>
           </a:xfrm>
           <a:prstGeom prst="rect">
             <a:avLst/>
@@ -6481,17 +6633,17 @@
               <a:buNone/>
             </a:pPr>
             <a:r>
-              <a:rPr lang="en-US" sz="1300" b="1" dirty="0">
+              <a:rPr lang="en-US" sz="1700" b="1" dirty="0">
                 <a:solidFill>
-                  <a:srgbClr val="0F3460"/>
+                  <a:srgbClr val="2196F3"/>
                 </a:solidFill>
                 <a:latin typeface="Calibri" pitchFamily="34" charset="0"/>
                 <a:ea typeface="Calibri" pitchFamily="34" charset="-122"/>
                 <a:cs typeface="Calibri" pitchFamily="34" charset="-120"/>
               </a:rPr>
-              <a:t>Right-censored Daten</a:t>
-            </a:r>
-            <a:endParaRPr lang="en-US" sz="1300" dirty="0"/>
+              <a:t>Genauigkeit</a:t>
+            </a:r>
+            <a:endParaRPr lang="en-US" sz="1700" dirty="0"/>
           </a:p>
         </p:txBody>
       </p:sp>
@@ -6503,8 +6655,8 @@
         </p:nvSpPr>
         <p:spPr>
           <a:xfrm>
-            <a:off x="685800" y="1298448"/>
-            <a:ext cx="7863840" cy="411480"/>
+            <a:off x="594360" y="1920240"/>
+            <a:ext cx="2423160" cy="1920240"/>
           </a:xfrm>
           <a:prstGeom prst="rect">
             <a:avLst/>
@@ -6520,17 +6672,17 @@
               <a:buNone/>
             </a:pPr>
             <a:r>
-              <a:rPr lang="en-US" sz="1100" dirty="0">
+              <a:rPr lang="en-US" sz="1200" dirty="0">
                 <a:solidFill>
-                  <a:srgbClr val="1A1A1A"/>
+                  <a:srgbClr val="FFFFFF"/>
                 </a:solidFill>
                 <a:latin typeface="Calibri" pitchFamily="34" charset="0"/>
                 <a:ea typeface="Calibri" pitchFamily="34" charset="-122"/>
                 <a:cs typeface="Calibri" pitchFamily="34" charset="-120"/>
               </a:rPr>
-              <a:t>Akku wird im Alltag nie auf 0% entladen. Strukturelle Eigenschaft der Domaene, nicht der Studie - gleiche Beobachtung bei Li et al. (2018) mit 51 Nutzern.</a:t>
-            </a:r>
-            <a:endParaRPr lang="en-US" sz="1100" dirty="0"/>
+              <a:t>TinyML schlaegt Mean (C 0.67), bleibt aber hinter Linear/Exp/Google (C ~ 0.77). Google nicht signifikant besser als Linear.</a:t>
+            </a:r>
+            <a:endParaRPr lang="en-US" sz="1200" dirty="0"/>
           </a:p>
         </p:txBody>
       </p:sp>
@@ -6542,16 +6694,23 @@
         </p:nvSpPr>
         <p:spPr>
           <a:xfrm>
-            <a:off x="457200" y="1764792"/>
-            <a:ext cx="73152" cy="640080"/>
+            <a:off x="3291840" y="1371600"/>
+            <a:ext cx="2697480" cy="2560320"/>
           </a:xfrm>
           <a:prstGeom prst="rect">
             <a:avLst/>
           </a:prstGeom>
           <a:solidFill>
-            <a:srgbClr val="0F3460"/>
+            <a:srgbClr val="FFFFFF">
+              <a:alpha val="8000"/>
+            </a:srgbClr>
           </a:solidFill>
-          <a:ln/>
+          <a:ln w="25400">
+            <a:solidFill>
+              <a:srgbClr val="4CAF50"/>
+            </a:solidFill>
+            <a:prstDash val="solid"/>
+          </a:ln>
         </p:spPr>
       </p:sp>
       <p:sp>
@@ -6562,8 +6721,8 @@
         </p:nvSpPr>
         <p:spPr>
           <a:xfrm>
-            <a:off x="685800" y="1764792"/>
-            <a:ext cx="7863840" cy="274320"/>
+            <a:off x="3429000" y="1508760"/>
+            <a:ext cx="2423160" cy="365760"/>
           </a:xfrm>
           <a:prstGeom prst="rect">
             <a:avLst/>
@@ -6579,17 +6738,17 @@
               <a:buNone/>
             </a:pPr>
             <a:r>
-              <a:rPr lang="en-US" sz="1300" b="1" dirty="0">
+              <a:rPr lang="en-US" sz="1700" b="1" dirty="0">
                 <a:solidFill>
-                  <a:srgbClr val="0F3460"/>
+                  <a:srgbClr val="4CAF50"/>
                 </a:solidFill>
                 <a:latin typeface="Calibri" pitchFamily="34" charset="0"/>
                 <a:ea typeface="Calibri" pitchFamily="34" charset="-122"/>
                 <a:cs typeface="Calibri" pitchFamily="34" charset="-120"/>
               </a:rPr>
-              <a:t>Common-Subset-Selection-Bias</a:t>
-            </a:r>
-            <a:endParaRPr lang="en-US" sz="1300" dirty="0"/>
+              <a:t>Effizienz</a:t>
+            </a:r>
+            <a:endParaRPr lang="en-US" sz="1700" dirty="0"/>
           </a:p>
         </p:txBody>
       </p:sp>
@@ -6601,8 +6760,8 @@
         </p:nvSpPr>
         <p:spPr>
           <a:xfrm>
-            <a:off x="685800" y="2011680"/>
-            <a:ext cx="7863840" cy="411480"/>
+            <a:off x="3429000" y="1920240"/>
+            <a:ext cx="2423160" cy="1920240"/>
           </a:xfrm>
           <a:prstGeom prst="rect">
             <a:avLst/>
@@ -6618,17 +6777,17 @@
               <a:buNone/>
             </a:pPr>
             <a:r>
-              <a:rPr lang="en-US" sz="1100" dirty="0">
+              <a:rPr lang="en-US" sz="1200" dirty="0">
                 <a:solidFill>
-                  <a:srgbClr val="1A1A1A"/>
+                  <a:srgbClr val="FFFFFF"/>
                 </a:solidFill>
                 <a:latin typeface="Calibri" pitchFamily="34" charset="0"/>
                 <a:ea typeface="Calibri" pitchFamily="34" charset="-122"/>
                 <a:cs typeface="Calibri" pitchFamily="34" charset="-120"/>
               </a:rPr>
-              <a:t>Wo Google-API definiert ist, sind die Restzeiten kuerzer (mean 6.7 h vs. 7.7 h im gesamten Test). Affektiert MAE symmetrisch, Ranking unaffected.</a:t>
-            </a:r>
-            <a:endParaRPr lang="en-US" sz="1100" dirty="0"/>
+              <a:t>TFLite-Quantisierung funktioniert. 14.4 KB, 4.5 us. Auf dieser Achse hat TinyML uneingeschraenkt seinen Wert.</a:t>
+            </a:r>
+            <a:endParaRPr lang="en-US" sz="1200" dirty="0"/>
           </a:p>
         </p:txBody>
       </p:sp>
@@ -6640,16 +6799,23 @@
         </p:nvSpPr>
         <p:spPr>
           <a:xfrm>
-            <a:off x="457200" y="2478024"/>
-            <a:ext cx="73152" cy="640080"/>
+            <a:off x="6126480" y="1371600"/>
+            <a:ext cx="2697480" cy="2560320"/>
           </a:xfrm>
           <a:prstGeom prst="rect">
             <a:avLst/>
           </a:prstGeom>
           <a:solidFill>
-            <a:srgbClr val="0F3460"/>
+            <a:srgbClr val="FFFFFF">
+              <a:alpha val="8000"/>
+            </a:srgbClr>
           </a:solidFill>
-          <a:ln/>
+          <a:ln w="25400">
+            <a:solidFill>
+              <a:srgbClr val="FF9800"/>
+            </a:solidFill>
+            <a:prstDash val="solid"/>
+          </a:ln>
         </p:spPr>
       </p:sp>
       <p:sp>
@@ -6660,8 +6826,8 @@
         </p:nvSpPr>
         <p:spPr>
           <a:xfrm>
-            <a:off x="685800" y="2478024"/>
-            <a:ext cx="7863840" cy="274320"/>
+            <a:off x="6263640" y="1508760"/>
+            <a:ext cx="2423160" cy="365760"/>
           </a:xfrm>
           <a:prstGeom prst="rect">
             <a:avLst/>
@@ -6677,17 +6843,17 @@
               <a:buNone/>
             </a:pPr>
             <a:r>
-              <a:rPr lang="en-US" sz="1300" b="1" dirty="0">
+              <a:rPr lang="en-US" sz="1700" b="1" dirty="0">
                 <a:solidFill>
-                  <a:srgbClr val="0F3460"/>
+                  <a:srgbClr val="FF9800"/>
                 </a:solidFill>
                 <a:latin typeface="Calibri" pitchFamily="34" charset="0"/>
                 <a:ea typeface="Calibri" pitchFamily="34" charset="-122"/>
                 <a:cs typeface="Calibri" pitchFamily="34" charset="-120"/>
               </a:rPr>
-              <a:t>Multi-Device, aber nicht Cross-Device</a:t>
-            </a:r>
-            <a:endParaRPr lang="en-US" sz="1300" dirty="0"/>
+              <a:t>Hardware &amp; Daten-Coverage</a:t>
+            </a:r>
+            <a:endParaRPr lang="en-US" sz="1700" dirty="0"/>
           </a:p>
         </p:txBody>
       </p:sp>
@@ -6699,8 +6865,8 @@
         </p:nvSpPr>
         <p:spPr>
           <a:xfrm>
-            <a:off x="685800" y="2724912"/>
-            <a:ext cx="7863840" cy="411480"/>
+            <a:off x="6263640" y="1920240"/>
+            <a:ext cx="2423160" cy="1920240"/>
           </a:xfrm>
           <a:prstGeom prst="rect">
             <a:avLst/>
@@ -6716,50 +6882,30 @@
               <a:buNone/>
             </a:pPr>
             <a:r>
-              <a:rPr lang="en-US" sz="1100" dirty="0">
+              <a:rPr lang="en-US" sz="1200" dirty="0">
                 <a:solidFill>
-                  <a:srgbClr val="1A1A1A"/>
+                  <a:srgbClr val="FFFFFF"/>
                 </a:solidFill>
                 <a:latin typeface="Calibri" pitchFamily="34" charset="0"/>
                 <a:ea typeface="Calibri" pitchFamily="34" charset="-122"/>
                 <a:cs typeface="Calibri" pitchFamily="34" charset="-120"/>
               </a:rPr>
-              <a:t>Train sieht alle 4 Geraete. Eine Leave-One-Device-Out-Studie ist offene Folgearbeit.</a:t>
-            </a:r>
-            <a:endParaRPr lang="en-US" sz="1100" dirty="0"/>
+              <a:t>TinyML 0.79 auf Pixel 7 Pro, 0.59 auf Xiaomi. Engpass: Sensor-Qualitaet UND Discharge-Dynamik-Coverage (Xiaomi-Akku 88.8% der Zeit voll). Nicht die Modellarchitektur.</a:t>
+            </a:r>
+            <a:endParaRPr lang="en-US" sz="1200" dirty="0"/>
           </a:p>
         </p:txBody>
       </p:sp>
       <p:sp>
         <p:nvSpPr>
-          <p:cNvPr id="12" name="Shape 10"/>
-          <p:cNvSpPr/>
-          <p:nvPr/>
-        </p:nvSpPr>
-        <p:spPr>
-          <a:xfrm>
-            <a:off x="457200" y="3191256"/>
-            <a:ext cx="73152" cy="640080"/>
-          </a:xfrm>
-          <a:prstGeom prst="rect">
-            <a:avLst/>
-          </a:prstGeom>
-          <a:solidFill>
-            <a:srgbClr val="0F3460"/>
-          </a:solidFill>
-          <a:ln/>
-        </p:spPr>
-      </p:sp>
-      <p:sp>
-        <p:nvSpPr>
-          <p:cNvPr id="13" name="Text 11"/>
-          <p:cNvSpPr/>
-          <p:nvPr/>
-        </p:nvSpPr>
-        <p:spPr>
-          <a:xfrm>
-            <a:off x="685800" y="3191256"/>
-            <a:ext cx="7863840" cy="274320"/>
+          <p:cNvPr id="12" name="Text 10"/>
+          <p:cNvSpPr/>
+          <p:nvPr/>
+        </p:nvSpPr>
+        <p:spPr>
+          <a:xfrm>
+            <a:off x="457200" y="4160520"/>
+            <a:ext cx="8229600" cy="457200"/>
           </a:xfrm>
           <a:prstGeom prst="rect">
             <a:avLst/>
@@ -6768,37 +6914,37 @@
           <a:ln/>
         </p:spPr>
         <p:txBody>
-          <a:bodyPr wrap="square" lIns="0" tIns="0" rIns="0" bIns="0" rtlCol="0" anchor="ctr"/>
+          <a:bodyPr wrap="square" rtlCol="0" anchor="ctr"/>
           <a:lstStyle/>
           <a:p>
-            <a:pPr indent="0" marL="0">
+            <a:pPr algn="ctr" indent="0" marL="0">
               <a:buNone/>
             </a:pPr>
             <a:r>
-              <a:rPr lang="en-US" sz="1300" b="1" dirty="0">
+              <a:rPr lang="en-US" sz="1400" i="1" dirty="0">
                 <a:solidFill>
-                  <a:srgbClr val="0F3460"/>
+                  <a:srgbClr val="CADCFC"/>
                 </a:solidFill>
                 <a:latin typeface="Calibri" pitchFamily="34" charset="0"/>
                 <a:ea typeface="Calibri" pitchFamily="34" charset="-122"/>
                 <a:cs typeface="Calibri" pitchFamily="34" charset="-120"/>
               </a:rPr>
-              <a:t>n=98 fuer Pixel 8 Pro</a:t>
-            </a:r>
-            <a:endParaRPr lang="en-US" sz="1300" dirty="0"/>
+              <a:t>Methodischer Beitrag: Segment-Level-Split als Standard fuer Sliding-Window-Time-Series in Mobile-Sensing.</a:t>
+            </a:r>
+            <a:endParaRPr lang="en-US" sz="1400" dirty="0"/>
           </a:p>
         </p:txBody>
       </p:sp>
       <p:sp>
         <p:nvSpPr>
-          <p:cNvPr id="14" name="Text 12"/>
-          <p:cNvSpPr/>
-          <p:nvPr/>
-        </p:nvSpPr>
-        <p:spPr>
-          <a:xfrm>
-            <a:off x="685800" y="3438144"/>
-            <a:ext cx="7863840" cy="411480"/>
+          <p:cNvPr id="13" name="Text 11"/>
+          <p:cNvSpPr/>
+          <p:nvPr/>
+        </p:nvSpPr>
+        <p:spPr>
+          <a:xfrm>
+            <a:off x="457200" y="4846320"/>
+            <a:ext cx="6400800" cy="228600"/>
           </a:xfrm>
           <a:prstGeom prst="rect">
             <a:avLst/>
@@ -6807,153 +6953,16 @@
           <a:ln/>
         </p:spPr>
         <p:txBody>
-          <a:bodyPr wrap="square" lIns="0" tIns="0" rIns="0" bIns="0" rtlCol="0" anchor="t"/>
+          <a:bodyPr wrap="square" rtlCol="0" anchor="ctr"/>
           <a:lstStyle/>
           <a:p>
             <a:pPr indent="0" marL="0">
               <a:buNone/>
             </a:pPr>
             <a:r>
-              <a:rPr lang="en-US" sz="1100" dirty="0">
-                <a:solidFill>
-                  <a:srgbClr val="1A1A1A"/>
-                </a:solidFill>
-                <a:latin typeface="Calibri" pitchFamily="34" charset="0"/>
-                <a:ea typeface="Calibri" pitchFamily="34" charset="-122"/>
-                <a:cs typeface="Calibri" pitchFamily="34" charset="-120"/>
-              </a:rPr>
-              <a:t>Breite Konfidenzintervalle. C-Index 0.92 ist Punktwert mit wenig statistischer Sicherheit.</a:t>
-            </a:r>
-            <a:endParaRPr lang="en-US" sz="1100" dirty="0"/>
-          </a:p>
-        </p:txBody>
-      </p:sp>
-      <p:sp>
-        <p:nvSpPr>
-          <p:cNvPr id="15" name="Shape 13"/>
-          <p:cNvSpPr/>
-          <p:nvPr/>
-        </p:nvSpPr>
-        <p:spPr>
-          <a:xfrm>
-            <a:off x="457200" y="3904488"/>
-            <a:ext cx="73152" cy="640080"/>
-          </a:xfrm>
-          <a:prstGeom prst="rect">
-            <a:avLst/>
-          </a:prstGeom>
-          <a:solidFill>
-            <a:srgbClr val="0F3460"/>
-          </a:solidFill>
-          <a:ln/>
-        </p:spPr>
-      </p:sp>
-      <p:sp>
-        <p:nvSpPr>
-          <p:cNvPr id="16" name="Text 14"/>
-          <p:cNvSpPr/>
-          <p:nvPr/>
-        </p:nvSpPr>
-        <p:spPr>
-          <a:xfrm>
-            <a:off x="685800" y="3904488"/>
-            <a:ext cx="7863840" cy="274320"/>
-          </a:xfrm>
-          <a:prstGeom prst="rect">
-            <a:avLst/>
-          </a:prstGeom>
-          <a:noFill/>
-          <a:ln/>
-        </p:spPr>
-        <p:txBody>
-          <a:bodyPr wrap="square" lIns="0" tIns="0" rIns="0" bIns="0" rtlCol="0" anchor="ctr"/>
-          <a:lstStyle/>
-          <a:p>
-            <a:pPr indent="0" marL="0">
-              <a:buNone/>
-            </a:pPr>
-            <a:r>
-              <a:rPr lang="en-US" sz="1300" b="1" dirty="0">
-                <a:solidFill>
-                  <a:srgbClr val="0F3460"/>
-                </a:solidFill>
-                <a:latin typeface="Calibri" pitchFamily="34" charset="0"/>
-                <a:ea typeface="Calibri" pitchFamily="34" charset="-122"/>
-                <a:cs typeface="Calibri" pitchFamily="34" charset="-120"/>
-              </a:rPr>
-              <a:t>TinyML auf Pixel 9 Pro XL anomal schlecht</a:t>
-            </a:r>
-            <a:endParaRPr lang="en-US" sz="1300" dirty="0"/>
-          </a:p>
-        </p:txBody>
-      </p:sp>
-      <p:sp>
-        <p:nvSpPr>
-          <p:cNvPr id="17" name="Text 15"/>
-          <p:cNvSpPr/>
-          <p:nvPr/>
-        </p:nvSpPr>
-        <p:spPr>
-          <a:xfrm>
-            <a:off x="685800" y="4151376"/>
-            <a:ext cx="7863840" cy="411480"/>
-          </a:xfrm>
-          <a:prstGeom prst="rect">
-            <a:avLst/>
-          </a:prstGeom>
-          <a:noFill/>
-          <a:ln/>
-        </p:spPr>
-        <p:txBody>
-          <a:bodyPr wrap="square" lIns="0" tIns="0" rIns="0" bIns="0" rtlCol="0" anchor="t"/>
-          <a:lstStyle/>
-          <a:p>
-            <a:pPr indent="0" marL="0">
-              <a:buNone/>
-            </a:pPr>
-            <a:r>
-              <a:rPr lang="en-US" sz="1100" dirty="0">
-                <a:solidFill>
-                  <a:srgbClr val="1A1A1A"/>
-                </a:solidFill>
-                <a:latin typeface="Calibri" pitchFamily="34" charset="0"/>
-                <a:ea typeface="Calibri" pitchFamily="34" charset="-122"/>
-                <a:cs typeface="Calibri" pitchFamily="34" charset="-120"/>
-              </a:rPr>
-              <a:t>C=0.60 waehrend RF auf demselben Geraet C=0.76 erreicht. Keine kausale Erklaerung im aktuellen Datensatz.</a:t>
-            </a:r>
-            <a:endParaRPr lang="en-US" sz="1100" dirty="0"/>
-          </a:p>
-        </p:txBody>
-      </p:sp>
-      <p:sp>
-        <p:nvSpPr>
-          <p:cNvPr id="18" name="Text 16"/>
-          <p:cNvSpPr/>
-          <p:nvPr/>
-        </p:nvSpPr>
-        <p:spPr>
-          <a:xfrm>
-            <a:off x="457200" y="4846320"/>
-            <a:ext cx="6400800" cy="228600"/>
-          </a:xfrm>
-          <a:prstGeom prst="rect">
-            <a:avLst/>
-          </a:prstGeom>
-          <a:noFill/>
-          <a:ln/>
-        </p:spPr>
-        <p:txBody>
-          <a:bodyPr wrap="square" rtlCol="0" anchor="ctr"/>
-          <a:lstStyle/>
-          <a:p>
-            <a:pPr indent="0" marL="0">
-              <a:buNone/>
-            </a:pPr>
-            <a:r>
               <a:rPr lang="en-US" sz="900" dirty="0">
                 <a:solidFill>
-                  <a:srgbClr val="64748B"/>
+                  <a:srgbClr val="9CB4DE"/>
                 </a:solidFill>
                 <a:latin typeface="Calibri" pitchFamily="34" charset="0"/>
                 <a:ea typeface="Calibri" pitchFamily="34" charset="-122"/>
@@ -6967,7 +6976,7 @@
       </p:sp>
       <p:sp>
         <p:nvSpPr>
-          <p:cNvPr id="19" name="Text 17"/>
+          <p:cNvPr id="14" name="Text 12"/>
           <p:cNvSpPr/>
           <p:nvPr/>
         </p:nvSpPr>
@@ -6992,13 +7001,13 @@
             <a:r>
               <a:rPr lang="en-US" sz="900" dirty="0">
                 <a:solidFill>
-                  <a:srgbClr val="64748B"/>
+                  <a:srgbClr val="9CB4DE"/>
                 </a:solidFill>
                 <a:latin typeface="Calibri" pitchFamily="34" charset="0"/>
                 <a:ea typeface="Calibri" pitchFamily="34" charset="-122"/>
                 <a:cs typeface="Calibri" pitchFamily="34" charset="-120"/>
               </a:rPr>
-              <a:t>14 / 16</a:t>
+              <a:t>14 / 15</a:t>
             </a:r>
             <a:endParaRPr lang="en-US" sz="900" dirty="0"/>
           </a:p>
@@ -7044,8 +7053,8 @@
         </p:nvSpPr>
         <p:spPr>
           <a:xfrm>
-            <a:off x="457200" y="365760"/>
-            <a:ext cx="8229600" cy="640080"/>
+            <a:off x="548640" y="1463040"/>
+            <a:ext cx="8046720" cy="822960"/>
           </a:xfrm>
           <a:prstGeom prst="rect">
             <a:avLst/>
@@ -7057,11 +7066,11 @@
           <a:bodyPr wrap="square" rtlCol="0" anchor="ctr"/>
           <a:lstStyle/>
           <a:p>
-            <a:pPr indent="0" marL="0">
+            <a:pPr algn="ctr" indent="0" marL="0">
               <a:buNone/>
             </a:pPr>
             <a:r>
-              <a:rPr lang="en-US" sz="2600" b="1" dirty="0">
+              <a:rPr lang="en-US" sz="5400" b="1" dirty="0">
                 <a:solidFill>
                   <a:srgbClr val="FFFFFF"/>
                 </a:solidFill>
@@ -7069,9 +7078,9 @@
                 <a:ea typeface="Calibri" pitchFamily="34" charset="-122"/>
                 <a:cs typeface="Calibri" pitchFamily="34" charset="-120"/>
               </a:rPr>
-              <a:t>Conclusion: Antwort auf die Forschungsfrage</a:t>
-            </a:r>
-            <a:endParaRPr lang="en-US" sz="2600" dirty="0"/>
+              <a:t>Vielen Dank</a:t>
+            </a:r>
+            <a:endParaRPr lang="en-US" sz="5400" dirty="0"/>
           </a:p>
         </p:txBody>
       </p:sp>
@@ -7083,23 +7092,16 @@
         </p:nvSpPr>
         <p:spPr>
           <a:xfrm>
-            <a:off x="457200" y="1371600"/>
-            <a:ext cx="2697480" cy="2560320"/>
+            <a:off x="3931920" y="2331720"/>
+            <a:ext cx="1280160" cy="54864"/>
           </a:xfrm>
           <a:prstGeom prst="rect">
             <a:avLst/>
           </a:prstGeom>
           <a:solidFill>
-            <a:srgbClr val="FFFFFF">
-              <a:alpha val="8000"/>
-            </a:srgbClr>
+            <a:srgbClr val="E94560"/>
           </a:solidFill>
-          <a:ln w="25400">
-            <a:solidFill>
-              <a:srgbClr val="2196F3"/>
-            </a:solidFill>
-            <a:prstDash val="solid"/>
-          </a:ln>
+          <a:ln/>
         </p:spPr>
       </p:sp>
       <p:sp>
@@ -7110,8 +7112,8 @@
         </p:nvSpPr>
         <p:spPr>
           <a:xfrm>
-            <a:off x="594360" y="1508760"/>
-            <a:ext cx="2423160" cy="365760"/>
+            <a:off x="548640" y="2606040"/>
+            <a:ext cx="8046720" cy="640080"/>
           </a:xfrm>
           <a:prstGeom prst="rect">
             <a:avLst/>
@@ -7120,24 +7122,24 @@
           <a:ln/>
         </p:spPr>
         <p:txBody>
-          <a:bodyPr wrap="square" lIns="0" tIns="0" rIns="0" bIns="0" rtlCol="0" anchor="ctr"/>
+          <a:bodyPr wrap="square" rtlCol="0" anchor="ctr"/>
           <a:lstStyle/>
           <a:p>
-            <a:pPr indent="0" marL="0">
+            <a:pPr algn="ctr" indent="0" marL="0">
               <a:buNone/>
             </a:pPr>
             <a:r>
-              <a:rPr lang="en-US" sz="1700" b="1" dirty="0">
+              <a:rPr lang="en-US" sz="3200" i="1" dirty="0">
                 <a:solidFill>
-                  <a:srgbClr val="2196F3"/>
+                  <a:srgbClr val="CADCFC"/>
                 </a:solidFill>
                 <a:latin typeface="Calibri" pitchFamily="34" charset="0"/>
                 <a:ea typeface="Calibri" pitchFamily="34" charset="-122"/>
                 <a:cs typeface="Calibri" pitchFamily="34" charset="-120"/>
               </a:rPr>
-              <a:t>Genauigkeit</a:t>
-            </a:r>
-            <a:endParaRPr lang="en-US" sz="1700" dirty="0"/>
+              <a:t>Fragen?</a:t>
+            </a:r>
+            <a:endParaRPr lang="en-US" sz="3200" dirty="0"/>
           </a:p>
         </p:txBody>
       </p:sp>
@@ -7149,8 +7151,8 @@
         </p:nvSpPr>
         <p:spPr>
           <a:xfrm>
-            <a:off x="594360" y="1920240"/>
-            <a:ext cx="2423160" cy="1920240"/>
+            <a:off x="548640" y="3794760"/>
+            <a:ext cx="8046720" cy="822960"/>
           </a:xfrm>
           <a:prstGeom prst="rect">
             <a:avLst/>
@@ -7159,14 +7161,14 @@
           <a:ln/>
         </p:spPr>
         <p:txBody>
-          <a:bodyPr wrap="square" lIns="0" tIns="0" rIns="0" bIns="0" rtlCol="0" anchor="t"/>
+          <a:bodyPr wrap="square" rtlCol="0" anchor="ctr"/>
           <a:lstStyle/>
           <a:p>
-            <a:pPr indent="0" marL="0">
+            <a:pPr algn="ctr" indent="0" marL="0">
               <a:buNone/>
             </a:pPr>
             <a:r>
-              <a:rPr lang="en-US" sz="1200" dirty="0">
+              <a:rPr lang="en-US" sz="1300" b="1" dirty="0">
                 <a:solidFill>
                   <a:srgbClr val="FFFFFF"/>
                 </a:solidFill>
@@ -7174,264 +7176,32 @@
                 <a:ea typeface="Calibri" pitchFamily="34" charset="-122"/>
                 <a:cs typeface="Calibri" pitchFamily="34" charset="-120"/>
               </a:rPr>
-              <a:t>TinyML schlaegt Mean (C 0.67), bleibt aber hinter Linear/Exp/Google (C ~ 0.77). Google nicht signifikant besser als Linear.</a:t>
-            </a:r>
-            <a:endParaRPr lang="en-US" sz="1200" dirty="0"/>
-          </a:p>
-        </p:txBody>
-      </p:sp>
-      <p:sp>
-        <p:nvSpPr>
-          <p:cNvPr id="6" name="Shape 4"/>
-          <p:cNvSpPr/>
-          <p:nvPr/>
-        </p:nvSpPr>
-        <p:spPr>
-          <a:xfrm>
-            <a:off x="3291840" y="1371600"/>
-            <a:ext cx="2697480" cy="2560320"/>
-          </a:xfrm>
-          <a:prstGeom prst="rect">
-            <a:avLst/>
-          </a:prstGeom>
-          <a:solidFill>
-            <a:srgbClr val="FFFFFF">
-              <a:alpha val="8000"/>
-            </a:srgbClr>
-          </a:solidFill>
-          <a:ln w="25400">
-            <a:solidFill>
-              <a:srgbClr val="4CAF50"/>
-            </a:solidFill>
-            <a:prstDash val="solid"/>
-          </a:ln>
-        </p:spPr>
-      </p:sp>
-      <p:sp>
-        <p:nvSpPr>
-          <p:cNvPr id="7" name="Text 5"/>
-          <p:cNvSpPr/>
-          <p:nvPr/>
-        </p:nvSpPr>
-        <p:spPr>
-          <a:xfrm>
-            <a:off x="3429000" y="1508760"/>
-            <a:ext cx="2423160" cy="365760"/>
-          </a:xfrm>
-          <a:prstGeom prst="rect">
-            <a:avLst/>
-          </a:prstGeom>
-          <a:noFill/>
-          <a:ln/>
-        </p:spPr>
-        <p:txBody>
-          <a:bodyPr wrap="square" lIns="0" tIns="0" rIns="0" bIns="0" rtlCol="0" anchor="ctr"/>
-          <a:lstStyle/>
-          <a:p>
-            <a:pPr indent="0" marL="0">
+              <a:t>Keno Schuerger</a:t>
+            </a:r>
+            <a:endParaRPr lang="en-US" sz="1300" dirty="0"/>
+          </a:p>
+          <a:p>
+            <a:pPr algn="ctr" indent="0" marL="0">
               <a:buNone/>
             </a:pPr>
             <a:r>
-              <a:rPr lang="en-US" sz="1700" b="1" dirty="0">
+              <a:rPr lang="en-US" sz="1300" dirty="0">
                 <a:solidFill>
-                  <a:srgbClr val="4CAF50"/>
+                  <a:srgbClr val="9CB4DE"/>
                 </a:solidFill>
                 <a:latin typeface="Calibri" pitchFamily="34" charset="0"/>
                 <a:ea typeface="Calibri" pitchFamily="34" charset="-122"/>
                 <a:cs typeface="Calibri" pitchFamily="34" charset="-120"/>
               </a:rPr>
-              <a:t>Effizienz</a:t>
-            </a:r>
-            <a:endParaRPr lang="en-US" sz="1700" dirty="0"/>
+              <a:t>TinyML fuer Akkulaufzeit-Vorhersage auf Android</a:t>
+            </a:r>
+            <a:endParaRPr lang="en-US" sz="1300" dirty="0"/>
           </a:p>
         </p:txBody>
       </p:sp>
       <p:sp>
         <p:nvSpPr>
-          <p:cNvPr id="8" name="Text 6"/>
-          <p:cNvSpPr/>
-          <p:nvPr/>
-        </p:nvSpPr>
-        <p:spPr>
-          <a:xfrm>
-            <a:off x="3429000" y="1920240"/>
-            <a:ext cx="2423160" cy="1920240"/>
-          </a:xfrm>
-          <a:prstGeom prst="rect">
-            <a:avLst/>
-          </a:prstGeom>
-          <a:noFill/>
-          <a:ln/>
-        </p:spPr>
-        <p:txBody>
-          <a:bodyPr wrap="square" lIns="0" tIns="0" rIns="0" bIns="0" rtlCol="0" anchor="t"/>
-          <a:lstStyle/>
-          <a:p>
-            <a:pPr indent="0" marL="0">
-              <a:buNone/>
-            </a:pPr>
-            <a:r>
-              <a:rPr lang="en-US" sz="1200" dirty="0">
-                <a:solidFill>
-                  <a:srgbClr val="FFFFFF"/>
-                </a:solidFill>
-                <a:latin typeface="Calibri" pitchFamily="34" charset="0"/>
-                <a:ea typeface="Calibri" pitchFamily="34" charset="-122"/>
-                <a:cs typeface="Calibri" pitchFamily="34" charset="-120"/>
-              </a:rPr>
-              <a:t>TFLite-Quantisierung funktioniert. 14.4 KB, 4.5 us. Auf dieser Achse hat TinyML uneingeschraenkt seinen Wert.</a:t>
-            </a:r>
-            <a:endParaRPr lang="en-US" sz="1200" dirty="0"/>
-          </a:p>
-        </p:txBody>
-      </p:sp>
-      <p:sp>
-        <p:nvSpPr>
-          <p:cNvPr id="9" name="Shape 7"/>
-          <p:cNvSpPr/>
-          <p:nvPr/>
-        </p:nvSpPr>
-        <p:spPr>
-          <a:xfrm>
-            <a:off x="6126480" y="1371600"/>
-            <a:ext cx="2697480" cy="2560320"/>
-          </a:xfrm>
-          <a:prstGeom prst="rect">
-            <a:avLst/>
-          </a:prstGeom>
-          <a:solidFill>
-            <a:srgbClr val="FFFFFF">
-              <a:alpha val="8000"/>
-            </a:srgbClr>
-          </a:solidFill>
-          <a:ln w="25400">
-            <a:solidFill>
-              <a:srgbClr val="FF9800"/>
-            </a:solidFill>
-            <a:prstDash val="solid"/>
-          </a:ln>
-        </p:spPr>
-      </p:sp>
-      <p:sp>
-        <p:nvSpPr>
-          <p:cNvPr id="10" name="Text 8"/>
-          <p:cNvSpPr/>
-          <p:nvPr/>
-        </p:nvSpPr>
-        <p:spPr>
-          <a:xfrm>
-            <a:off x="6263640" y="1508760"/>
-            <a:ext cx="2423160" cy="365760"/>
-          </a:xfrm>
-          <a:prstGeom prst="rect">
-            <a:avLst/>
-          </a:prstGeom>
-          <a:noFill/>
-          <a:ln/>
-        </p:spPr>
-        <p:txBody>
-          <a:bodyPr wrap="square" lIns="0" tIns="0" rIns="0" bIns="0" rtlCol="0" anchor="ctr"/>
-          <a:lstStyle/>
-          <a:p>
-            <a:pPr indent="0" marL="0">
-              <a:buNone/>
-            </a:pPr>
-            <a:r>
-              <a:rPr lang="en-US" sz="1700" b="1" dirty="0">
-                <a:solidFill>
-                  <a:srgbClr val="FF9800"/>
-                </a:solidFill>
-                <a:latin typeface="Calibri" pitchFamily="34" charset="0"/>
-                <a:ea typeface="Calibri" pitchFamily="34" charset="-122"/>
-                <a:cs typeface="Calibri" pitchFamily="34" charset="-120"/>
-              </a:rPr>
-              <a:t>Hardware &amp; Daten-Coverage</a:t>
-            </a:r>
-            <a:endParaRPr lang="en-US" sz="1700" dirty="0"/>
-          </a:p>
-        </p:txBody>
-      </p:sp>
-      <p:sp>
-        <p:nvSpPr>
-          <p:cNvPr id="11" name="Text 9"/>
-          <p:cNvSpPr/>
-          <p:nvPr/>
-        </p:nvSpPr>
-        <p:spPr>
-          <a:xfrm>
-            <a:off x="6263640" y="1920240"/>
-            <a:ext cx="2423160" cy="1920240"/>
-          </a:xfrm>
-          <a:prstGeom prst="rect">
-            <a:avLst/>
-          </a:prstGeom>
-          <a:noFill/>
-          <a:ln/>
-        </p:spPr>
-        <p:txBody>
-          <a:bodyPr wrap="square" lIns="0" tIns="0" rIns="0" bIns="0" rtlCol="0" anchor="t"/>
-          <a:lstStyle/>
-          <a:p>
-            <a:pPr indent="0" marL="0">
-              <a:buNone/>
-            </a:pPr>
-            <a:r>
-              <a:rPr lang="en-US" sz="1200" dirty="0">
-                <a:solidFill>
-                  <a:srgbClr val="FFFFFF"/>
-                </a:solidFill>
-                <a:latin typeface="Calibri" pitchFamily="34" charset="0"/>
-                <a:ea typeface="Calibri" pitchFamily="34" charset="-122"/>
-                <a:cs typeface="Calibri" pitchFamily="34" charset="-120"/>
-              </a:rPr>
-              <a:t>TinyML 0.79 auf Pixel 7 Pro, 0.59 auf Xiaomi. Engpass: Sensor-Qualitaet UND Discharge-Dynamik-Coverage (Xiaomi-Akku 88.8% der Zeit voll). Nicht die Modellarchitektur.</a:t>
-            </a:r>
-            <a:endParaRPr lang="en-US" sz="1200" dirty="0"/>
-          </a:p>
-        </p:txBody>
-      </p:sp>
-      <p:sp>
-        <p:nvSpPr>
-          <p:cNvPr id="12" name="Text 10"/>
-          <p:cNvSpPr/>
-          <p:nvPr/>
-        </p:nvSpPr>
-        <p:spPr>
-          <a:xfrm>
-            <a:off x="457200" y="4160520"/>
-            <a:ext cx="8229600" cy="457200"/>
-          </a:xfrm>
-          <a:prstGeom prst="rect">
-            <a:avLst/>
-          </a:prstGeom>
-          <a:noFill/>
-          <a:ln/>
-        </p:spPr>
-        <p:txBody>
-          <a:bodyPr wrap="square" rtlCol="0" anchor="ctr"/>
-          <a:lstStyle/>
-          <a:p>
-            <a:pPr algn="ctr" indent="0" marL="0">
-              <a:buNone/>
-            </a:pPr>
-            <a:r>
-              <a:rPr lang="en-US" sz="1400" i="1" dirty="0">
-                <a:solidFill>
-                  <a:srgbClr val="CADCFC"/>
-                </a:solidFill>
-                <a:latin typeface="Calibri" pitchFamily="34" charset="0"/>
-                <a:ea typeface="Calibri" pitchFamily="34" charset="-122"/>
-                <a:cs typeface="Calibri" pitchFamily="34" charset="-120"/>
-              </a:rPr>
-              <a:t>Methodischer Beitrag: Segment-Level-Split als Standard fuer Sliding-Window-Time-Series in Mobile-Sensing.</a:t>
-            </a:r>
-            <a:endParaRPr lang="en-US" sz="1400" dirty="0"/>
-          </a:p>
-        </p:txBody>
-      </p:sp>
-      <p:sp>
-        <p:nvSpPr>
-          <p:cNvPr id="13" name="Text 11"/>
+          <p:cNvPr id="6" name="Text 4"/>
           <p:cNvSpPr/>
           <p:nvPr/>
         </p:nvSpPr>
@@ -7470,7 +7240,7 @@
       </p:sp>
       <p:sp>
         <p:nvSpPr>
-          <p:cNvPr id="14" name="Text 12"/>
+          <p:cNvPr id="7" name="Text 5"/>
           <p:cNvSpPr/>
           <p:nvPr/>
         </p:nvSpPr>
@@ -7501,271 +7271,7 @@
                 <a:ea typeface="Calibri" pitchFamily="34" charset="-122"/>
                 <a:cs typeface="Calibri" pitchFamily="34" charset="-120"/>
               </a:rPr>
-              <a:t>15 / 16</a:t>
-            </a:r>
-            <a:endParaRPr lang="en-US" sz="900" dirty="0"/>
-          </a:p>
-        </p:txBody>
-      </p:sp>
-    </p:spTree>
-  </p:cSld>
-  <p:clrMapOvr>
-    <a:masterClrMapping/>
-  </p:clrMapOvr>
-</p:sld>
-</file>
-
-<file path=ppt/slides/slide16.xml><?xml version="1.0" encoding="utf-8"?>
-<p:sld xmlns:a="http://schemas.openxmlformats.org/drawingml/2006/main" xmlns:r="http://schemas.openxmlformats.org/officeDocument/2006/relationships" xmlns:p="http://schemas.openxmlformats.org/presentationml/2006/main">
-  <p:cSld name="Slide 16">
-    <p:bg>
-      <p:bgPr>
-        <a:solidFill>
-          <a:srgbClr val="0F1B2D"/>
-        </a:solidFill>
-      </p:bgPr>
-    </p:bg>
-    <p:spTree>
-      <p:nvGrpSpPr>
-        <p:cNvPr id="1" name=""/>
-        <p:cNvGrpSpPr/>
-        <p:nvPr/>
-      </p:nvGrpSpPr>
-      <p:grpSpPr>
-        <a:xfrm>
-          <a:off x="0" y="0"/>
-          <a:ext cx="0" cy="0"/>
-          <a:chOff x="0" y="0"/>
-          <a:chExt cx="0" cy="0"/>
-        </a:xfrm>
-      </p:grpSpPr>
-      <p:sp>
-        <p:nvSpPr>
-          <p:cNvPr id="2" name="Text 0"/>
-          <p:cNvSpPr/>
-          <p:nvPr/>
-        </p:nvSpPr>
-        <p:spPr>
-          <a:xfrm>
-            <a:off x="548640" y="1463040"/>
-            <a:ext cx="8046720" cy="822960"/>
-          </a:xfrm>
-          <a:prstGeom prst="rect">
-            <a:avLst/>
-          </a:prstGeom>
-          <a:noFill/>
-          <a:ln/>
-        </p:spPr>
-        <p:txBody>
-          <a:bodyPr wrap="square" rtlCol="0" anchor="ctr"/>
-          <a:lstStyle/>
-          <a:p>
-            <a:pPr algn="ctr" indent="0" marL="0">
-              <a:buNone/>
-            </a:pPr>
-            <a:r>
-              <a:rPr lang="en-US" sz="5400" b="1" dirty="0">
-                <a:solidFill>
-                  <a:srgbClr val="FFFFFF"/>
-                </a:solidFill>
-                <a:latin typeface="Calibri" pitchFamily="34" charset="0"/>
-                <a:ea typeface="Calibri" pitchFamily="34" charset="-122"/>
-                <a:cs typeface="Calibri" pitchFamily="34" charset="-120"/>
-              </a:rPr>
-              <a:t>Vielen Dank</a:t>
-            </a:r>
-            <a:endParaRPr lang="en-US" sz="5400" dirty="0"/>
-          </a:p>
-        </p:txBody>
-      </p:sp>
-      <p:sp>
-        <p:nvSpPr>
-          <p:cNvPr id="3" name="Shape 1"/>
-          <p:cNvSpPr/>
-          <p:nvPr/>
-        </p:nvSpPr>
-        <p:spPr>
-          <a:xfrm>
-            <a:off x="3931920" y="2331720"/>
-            <a:ext cx="1280160" cy="54864"/>
-          </a:xfrm>
-          <a:prstGeom prst="rect">
-            <a:avLst/>
-          </a:prstGeom>
-          <a:solidFill>
-            <a:srgbClr val="E94560"/>
-          </a:solidFill>
-          <a:ln/>
-        </p:spPr>
-      </p:sp>
-      <p:sp>
-        <p:nvSpPr>
-          <p:cNvPr id="4" name="Text 2"/>
-          <p:cNvSpPr/>
-          <p:nvPr/>
-        </p:nvSpPr>
-        <p:spPr>
-          <a:xfrm>
-            <a:off x="548640" y="2606040"/>
-            <a:ext cx="8046720" cy="640080"/>
-          </a:xfrm>
-          <a:prstGeom prst="rect">
-            <a:avLst/>
-          </a:prstGeom>
-          <a:noFill/>
-          <a:ln/>
-        </p:spPr>
-        <p:txBody>
-          <a:bodyPr wrap="square" rtlCol="0" anchor="ctr"/>
-          <a:lstStyle/>
-          <a:p>
-            <a:pPr algn="ctr" indent="0" marL="0">
-              <a:buNone/>
-            </a:pPr>
-            <a:r>
-              <a:rPr lang="en-US" sz="3200" i="1" dirty="0">
-                <a:solidFill>
-                  <a:srgbClr val="CADCFC"/>
-                </a:solidFill>
-                <a:latin typeface="Calibri" pitchFamily="34" charset="0"/>
-                <a:ea typeface="Calibri" pitchFamily="34" charset="-122"/>
-                <a:cs typeface="Calibri" pitchFamily="34" charset="-120"/>
-              </a:rPr>
-              <a:t>Fragen?</a:t>
-            </a:r>
-            <a:endParaRPr lang="en-US" sz="3200" dirty="0"/>
-          </a:p>
-        </p:txBody>
-      </p:sp>
-      <p:sp>
-        <p:nvSpPr>
-          <p:cNvPr id="5" name="Text 3"/>
-          <p:cNvSpPr/>
-          <p:nvPr/>
-        </p:nvSpPr>
-        <p:spPr>
-          <a:xfrm>
-            <a:off x="548640" y="3794760"/>
-            <a:ext cx="8046720" cy="822960"/>
-          </a:xfrm>
-          <a:prstGeom prst="rect">
-            <a:avLst/>
-          </a:prstGeom>
-          <a:noFill/>
-          <a:ln/>
-        </p:spPr>
-        <p:txBody>
-          <a:bodyPr wrap="square" rtlCol="0" anchor="ctr"/>
-          <a:lstStyle/>
-          <a:p>
-            <a:pPr algn="ctr" indent="0" marL="0">
-              <a:buNone/>
-            </a:pPr>
-            <a:r>
-              <a:rPr lang="en-US" sz="1300" b="1" dirty="0">
-                <a:solidFill>
-                  <a:srgbClr val="FFFFFF"/>
-                </a:solidFill>
-                <a:latin typeface="Calibri" pitchFamily="34" charset="0"/>
-                <a:ea typeface="Calibri" pitchFamily="34" charset="-122"/>
-                <a:cs typeface="Calibri" pitchFamily="34" charset="-120"/>
-              </a:rPr>
-              <a:t>Keno Schuerger</a:t>
-            </a:r>
-            <a:endParaRPr lang="en-US" sz="1300" dirty="0"/>
-          </a:p>
-          <a:p>
-            <a:pPr algn="ctr" indent="0" marL="0">
-              <a:buNone/>
-            </a:pPr>
-            <a:r>
-              <a:rPr lang="en-US" sz="1300" dirty="0">
-                <a:solidFill>
-                  <a:srgbClr val="9CB4DE"/>
-                </a:solidFill>
-                <a:latin typeface="Calibri" pitchFamily="34" charset="0"/>
-                <a:ea typeface="Calibri" pitchFamily="34" charset="-122"/>
-                <a:cs typeface="Calibri" pitchFamily="34" charset="-120"/>
-              </a:rPr>
-              <a:t>TinyML fuer Akkulaufzeit-Vorhersage auf Android</a:t>
-            </a:r>
-            <a:endParaRPr lang="en-US" sz="1300" dirty="0"/>
-          </a:p>
-        </p:txBody>
-      </p:sp>
-      <p:sp>
-        <p:nvSpPr>
-          <p:cNvPr id="6" name="Text 4"/>
-          <p:cNvSpPr/>
-          <p:nvPr/>
-        </p:nvSpPr>
-        <p:spPr>
-          <a:xfrm>
-            <a:off x="457200" y="4846320"/>
-            <a:ext cx="6400800" cy="228600"/>
-          </a:xfrm>
-          <a:prstGeom prst="rect">
-            <a:avLst/>
-          </a:prstGeom>
-          <a:noFill/>
-          <a:ln/>
-        </p:spPr>
-        <p:txBody>
-          <a:bodyPr wrap="square" rtlCol="0" anchor="ctr"/>
-          <a:lstStyle/>
-          <a:p>
-            <a:pPr indent="0" marL="0">
-              <a:buNone/>
-            </a:pPr>
-            <a:r>
-              <a:rPr lang="en-US" sz="900" dirty="0">
-                <a:solidFill>
-                  <a:srgbClr val="9CB4DE"/>
-                </a:solidFill>
-                <a:latin typeface="Calibri" pitchFamily="34" charset="0"/>
-                <a:ea typeface="Calibri" pitchFamily="34" charset="-122"/>
-                <a:cs typeface="Calibri" pitchFamily="34" charset="-120"/>
-              </a:rPr>
-              <a:t>K. Schuerger - TinyML fuer Akkulaufzeit-Vorhersage</a:t>
-            </a:r>
-            <a:endParaRPr lang="en-US" sz="900" dirty="0"/>
-          </a:p>
-        </p:txBody>
-      </p:sp>
-      <p:sp>
-        <p:nvSpPr>
-          <p:cNvPr id="7" name="Text 5"/>
-          <p:cNvSpPr/>
-          <p:nvPr/>
-        </p:nvSpPr>
-        <p:spPr>
-          <a:xfrm>
-            <a:off x="8229600" y="4846320"/>
-            <a:ext cx="822960" cy="228600"/>
-          </a:xfrm>
-          <a:prstGeom prst="rect">
-            <a:avLst/>
-          </a:prstGeom>
-          <a:noFill/>
-          <a:ln/>
-        </p:spPr>
-        <p:txBody>
-          <a:bodyPr wrap="square" rtlCol="0" anchor="ctr"/>
-          <a:lstStyle/>
-          <a:p>
-            <a:pPr algn="r" indent="0" marL="0">
-              <a:buNone/>
-            </a:pPr>
-            <a:r>
-              <a:rPr lang="en-US" sz="900" dirty="0">
-                <a:solidFill>
-                  <a:srgbClr val="9CB4DE"/>
-                </a:solidFill>
-                <a:latin typeface="Calibri" pitchFamily="34" charset="0"/>
-                <a:ea typeface="Calibri" pitchFamily="34" charset="-122"/>
-                <a:cs typeface="Calibri" pitchFamily="34" charset="-120"/>
-              </a:rPr>
-              <a:t>16 / 16</a:t>
+              <a:t>15 / 15</a:t>
             </a:r>
             <a:endParaRPr lang="en-US" sz="900" dirty="0"/>
           </a:p>
@@ -8410,7 +7916,7 @@
                 <a:ea typeface="Calibri" pitchFamily="34" charset="-122"/>
                 <a:cs typeface="Calibri" pitchFamily="34" charset="-120"/>
               </a:rPr>
-              <a:t>2 / 16</a:t>
+              <a:t>2 / 15</a:t>
             </a:r>
             <a:endParaRPr lang="en-US" sz="900" dirty="0"/>
           </a:p>
@@ -8910,7 +8416,7 @@
                 <a:ea typeface="Calibri" pitchFamily="34" charset="-122"/>
                 <a:cs typeface="Calibri" pitchFamily="34" charset="-120"/>
               </a:rPr>
-              <a:t>3 / 16</a:t>
+              <a:t>3 / 15</a:t>
             </a:r>
             <a:endParaRPr lang="en-US" sz="900" dirty="0"/>
           </a:p>
@@ -9707,7 +9213,7 @@
                 <a:ea typeface="Calibri" pitchFamily="34" charset="-122"/>
                 <a:cs typeface="Calibri" pitchFamily="34" charset="-120"/>
               </a:rPr>
-              <a:t>4 / 16</a:t>
+              <a:t>4 / 15</a:t>
             </a:r>
             <a:endParaRPr lang="en-US" sz="900" dirty="0"/>
           </a:p>
@@ -11841,7 +11347,7 @@
                 <a:ea typeface="Calibri" pitchFamily="34" charset="-122"/>
                 <a:cs typeface="Calibri" pitchFamily="34" charset="-120"/>
               </a:rPr>
-              <a:t>5 / 16</a:t>
+              <a:t>5 / 15</a:t>
             </a:r>
             <a:endParaRPr lang="en-US" sz="900" dirty="0"/>
           </a:p>
@@ -13004,7 +12510,7 @@
                 <a:ea typeface="Calibri" pitchFamily="34" charset="-122"/>
                 <a:cs typeface="Calibri" pitchFamily="34" charset="-120"/>
               </a:rPr>
-              <a:t>6 / 16</a:t>
+              <a:t>6 / 15</a:t>
             </a:r>
             <a:endParaRPr lang="en-US" sz="900" dirty="0"/>
           </a:p>
@@ -14370,7 +13876,7 @@
                 <a:ea typeface="Calibri" pitchFamily="34" charset="-122"/>
                 <a:cs typeface="Calibri" pitchFamily="34" charset="-120"/>
               </a:rPr>
-              <a:t>7 / 16</a:t>
+              <a:t>7 / 15</a:t>
             </a:r>
             <a:endParaRPr lang="en-US" sz="900" dirty="0"/>
           </a:p>
@@ -14456,7 +13962,7 @@
         <p:spPr>
           <a:xfrm>
             <a:off x="457200" y="960120"/>
-            <a:ext cx="8229600" cy="320040"/>
+            <a:ext cx="8229600" cy="274320"/>
           </a:xfrm>
           <a:prstGeom prst="rect">
             <a:avLst/>
@@ -14483,6 +13989,70 @@
               <a:t>vs. y_extrap, 95% Bootstrap-CI, leakage-freier Multi-Device-Split</a:t>
             </a:r>
             <a:endParaRPr lang="en-US" sz="1200" dirty="0"/>
+          </a:p>
+        </p:txBody>
+      </p:sp>
+      <p:sp>
+        <p:nvSpPr>
+          <p:cNvPr id="4" name="Shape 2"/>
+          <p:cNvSpPr/>
+          <p:nvPr/>
+        </p:nvSpPr>
+        <p:spPr>
+          <a:xfrm>
+            <a:off x="457200" y="1280160"/>
+            <a:ext cx="8229600" cy="292608"/>
+          </a:xfrm>
+          <a:prstGeom prst="rect">
+            <a:avLst/>
+          </a:prstGeom>
+          <a:solidFill>
+            <a:srgbClr val="F0F4F8"/>
+          </a:solidFill>
+          <a:ln w="6350">
+            <a:solidFill>
+              <a:srgbClr val="E2E8F0"/>
+            </a:solidFill>
+            <a:prstDash val="solid"/>
+          </a:ln>
+        </p:spPr>
+      </p:sp>
+      <p:sp>
+        <p:nvSpPr>
+          <p:cNvPr id="5" name="Text 3"/>
+          <p:cNvSpPr/>
+          <p:nvPr/>
+        </p:nvSpPr>
+        <p:spPr>
+          <a:xfrm>
+            <a:off x="640080" y="1298448"/>
+            <a:ext cx="7863840" cy="256032"/>
+          </a:xfrm>
+          <a:prstGeom prst="rect">
+            <a:avLst/>
+          </a:prstGeom>
+          <a:noFill/>
+          <a:ln/>
+        </p:spPr>
+        <p:txBody>
+          <a:bodyPr wrap="square" lIns="0" tIns="0" rIns="0" bIns="0" rtlCol="0" anchor="ctr"/>
+          <a:lstStyle/>
+          <a:p>
+            <a:pPr indent="0" marL="0">
+              <a:buNone/>
+            </a:pPr>
+            <a:r>
+              <a:rPr lang="en-US" sz="1000" i="1" dirty="0">
+                <a:solidFill>
+                  <a:srgbClr val="16213E"/>
+                </a:solidFill>
+                <a:latin typeface="Calibri" pitchFamily="34" charset="0"/>
+                <a:ea typeface="Calibri" pitchFamily="34" charset="-122"/>
+                <a:cs typeface="Calibri" pitchFamily="34" charset="-120"/>
+              </a:rPr>
+              <a:t>C-Index: Anteil korrekt geordneter Vorhersage-Paare. 0,5 = Muenzwurf, 1,0 = perfekt. MAE: durchschnittliche Abweichung in Stunden.</a:t>
+            </a:r>
+            <a:endParaRPr lang="en-US" sz="1000" dirty="0"/>
           </a:p>
         </p:txBody>
       </p:sp>
@@ -14501,7 +14071,7 @@
           </p:nvPr>
         </p:nvGraphicFramePr>
         <p:xfrm>
-          <a:off x="457200" y="1325880"/>
+          <a:off x="457200" y="1691640"/>
           <a:ext cx="8229600" cy="914400"/>
         </p:xfrm>
         <a:graphic>
@@ -16825,14 +16395,14 @@
       </p:graphicFrame>
       <p:sp>
         <p:nvSpPr>
-          <p:cNvPr id="5" name="Shape 2"/>
-          <p:cNvSpPr/>
-          <p:nvPr/>
-        </p:nvSpPr>
-        <p:spPr>
-          <a:xfrm>
-            <a:off x="457200" y="4023360"/>
-            <a:ext cx="8229600" cy="640080"/>
+          <p:cNvPr id="7" name="Shape 4"/>
+          <p:cNvSpPr/>
+          <p:nvPr/>
+        </p:nvSpPr>
+        <p:spPr>
+          <a:xfrm>
+            <a:off x="457200" y="4160520"/>
+            <a:ext cx="8229600" cy="548640"/>
           </a:xfrm>
           <a:prstGeom prst="rect">
             <a:avLst/>
@@ -16850,14 +16420,14 @@
       </p:sp>
       <p:sp>
         <p:nvSpPr>
-          <p:cNvPr id="6" name="Text 3"/>
-          <p:cNvSpPr/>
-          <p:nvPr/>
-        </p:nvSpPr>
-        <p:spPr>
-          <a:xfrm>
-            <a:off x="640080" y="4069080"/>
-            <a:ext cx="7863840" cy="548640"/>
+          <p:cNvPr id="8" name="Text 5"/>
+          <p:cNvSpPr/>
+          <p:nvPr/>
+        </p:nvSpPr>
+        <p:spPr>
+          <a:xfrm>
+            <a:off x="640080" y="4187952"/>
+            <a:ext cx="7863840" cy="502920"/>
           </a:xfrm>
           <a:prstGeom prst="rect">
             <a:avLst/>
@@ -16873,7 +16443,7 @@
               <a:buNone/>
             </a:pPr>
             <a:r>
-              <a:rPr lang="en-US" sz="1300" i="1" dirty="0">
+              <a:rPr lang="en-US" sz="1200" i="1" dirty="0">
                 <a:solidFill>
                   <a:srgbClr val="1A1A1A"/>
                 </a:solidFill>
@@ -16883,13 +16453,13 @@
               </a:rPr>
               <a:t>Beide ML-Modelle schlagen Mean-Predictor signifikant. Linear, Exp und Google bilden eine gemeinsame Spitzengruppe bei C ~ 0.77.</a:t>
             </a:r>
-            <a:endParaRPr lang="en-US" sz="1300" dirty="0"/>
+            <a:endParaRPr lang="en-US" sz="1200" dirty="0"/>
           </a:p>
         </p:txBody>
       </p:sp>
       <p:sp>
         <p:nvSpPr>
-          <p:cNvPr id="7" name="Text 4"/>
+          <p:cNvPr id="9" name="Text 6"/>
           <p:cNvSpPr/>
           <p:nvPr/>
         </p:nvSpPr>
@@ -16928,7 +16498,7 @@
       </p:sp>
       <p:sp>
         <p:nvSpPr>
-          <p:cNvPr id="8" name="Text 5"/>
+          <p:cNvPr id="10" name="Text 7"/>
           <p:cNvSpPr/>
           <p:nvPr/>
         </p:nvSpPr>
@@ -16959,7 +16529,7 @@
                 <a:ea typeface="Calibri" pitchFamily="34" charset="-122"/>
                 <a:cs typeface="Calibri" pitchFamily="34" charset="-120"/>
               </a:rPr>
-              <a:t>8 / 16</a:t>
+              <a:t>8 / 15</a:t>
             </a:r>
             <a:endParaRPr lang="en-US" sz="900" dirty="0"/>
           </a:p>
@@ -17045,7 +16615,7 @@
         <p:spPr>
           <a:xfrm>
             <a:off x="457200" y="960120"/>
-            <a:ext cx="8229600" cy="320040"/>
+            <a:ext cx="8229600" cy="274320"/>
           </a:xfrm>
           <a:prstGeom prst="rect">
             <a:avLst/>
@@ -17072,6 +16642,70 @@
               <a:t>Paarweise Permutationstests auf C-Index (Common Subset n=2.827)</a:t>
             </a:r>
             <a:endParaRPr lang="en-US" sz="1200" dirty="0"/>
+          </a:p>
+        </p:txBody>
+      </p:sp>
+      <p:sp>
+        <p:nvSpPr>
+          <p:cNvPr id="4" name="Shape 2"/>
+          <p:cNvSpPr/>
+          <p:nvPr/>
+        </p:nvSpPr>
+        <p:spPr>
+          <a:xfrm>
+            <a:off x="457200" y="1280160"/>
+            <a:ext cx="8229600" cy="292608"/>
+          </a:xfrm>
+          <a:prstGeom prst="rect">
+            <a:avLst/>
+          </a:prstGeom>
+          <a:solidFill>
+            <a:srgbClr val="F0F4F8"/>
+          </a:solidFill>
+          <a:ln w="6350">
+            <a:solidFill>
+              <a:srgbClr val="E2E8F0"/>
+            </a:solidFill>
+            <a:prstDash val="solid"/>
+          </a:ln>
+        </p:spPr>
+      </p:sp>
+      <p:sp>
+        <p:nvSpPr>
+          <p:cNvPr id="5" name="Text 3"/>
+          <p:cNvSpPr/>
+          <p:nvPr/>
+        </p:nvSpPr>
+        <p:spPr>
+          <a:xfrm>
+            <a:off x="640080" y="1298448"/>
+            <a:ext cx="7863840" cy="256032"/>
+          </a:xfrm>
+          <a:prstGeom prst="rect">
+            <a:avLst/>
+          </a:prstGeom>
+          <a:noFill/>
+          <a:ln/>
+        </p:spPr>
+        <p:txBody>
+          <a:bodyPr wrap="square" lIns="0" tIns="0" rIns="0" bIns="0" rtlCol="0" anchor="ctr"/>
+          <a:lstStyle/>
+          <a:p>
+            <a:pPr indent="0" marL="0">
+              <a:buNone/>
+            </a:pPr>
+            <a:r>
+              <a:rPr lang="en-US" sz="1000" i="1" dirty="0">
+                <a:solidFill>
+                  <a:srgbClr val="16213E"/>
+                </a:solidFill>
+                <a:latin typeface="Calibri" pitchFamily="34" charset="0"/>
+                <a:ea typeface="Calibri" pitchFamily="34" charset="-122"/>
+                <a:cs typeface="Calibri" pitchFamily="34" charset="-120"/>
+              </a:rPr>
+              <a:t>p &lt; 0,05 = Unterschied ist nicht durch Zufall erklaerbar (signifikant). n.s. = nicht signifikant, beide Methoden statistisch ununterscheidbar.</a:t>
+            </a:r>
+            <a:endParaRPr lang="en-US" sz="1000" dirty="0"/>
           </a:p>
         </p:txBody>
       </p:sp>
@@ -17090,7 +16724,7 @@
           </p:nvPr>
         </p:nvGraphicFramePr>
         <p:xfrm>
-          <a:off x="457200" y="1325880"/>
+          <a:off x="457200" y="1645920"/>
           <a:ext cx="8229600" cy="914400"/>
         </p:xfrm>
         <a:graphic>
@@ -19481,14 +19115,14 @@
       </p:graphicFrame>
       <p:sp>
         <p:nvSpPr>
-          <p:cNvPr id="5" name="Shape 2"/>
-          <p:cNvSpPr/>
-          <p:nvPr/>
-        </p:nvSpPr>
-        <p:spPr>
-          <a:xfrm>
-            <a:off x="457200" y="3246120"/>
-            <a:ext cx="8229600" cy="1508760"/>
+          <p:cNvPr id="7" name="Shape 4"/>
+          <p:cNvSpPr/>
+          <p:nvPr/>
+        </p:nvSpPr>
+        <p:spPr>
+          <a:xfrm>
+            <a:off x="457200" y="3520440"/>
+            <a:ext cx="8229600" cy="1188720"/>
           </a:xfrm>
           <a:prstGeom prst="rect">
             <a:avLst/>
@@ -19506,14 +19140,14 @@
       </p:sp>
       <p:sp>
         <p:nvSpPr>
-          <p:cNvPr id="6" name="Text 3"/>
-          <p:cNvSpPr/>
-          <p:nvPr/>
-        </p:nvSpPr>
-        <p:spPr>
-          <a:xfrm>
-            <a:off x="640080" y="3310128"/>
-            <a:ext cx="7863840" cy="292608"/>
+          <p:cNvPr id="8" name="Text 5"/>
+          <p:cNvSpPr/>
+          <p:nvPr/>
+        </p:nvSpPr>
+        <p:spPr>
+          <a:xfrm>
+            <a:off x="640080" y="3566160"/>
+            <a:ext cx="7863840" cy="274320"/>
           </a:xfrm>
           <a:prstGeom prst="rect">
             <a:avLst/>
@@ -19529,7 +19163,7 @@
               <a:buNone/>
             </a:pPr>
             <a:r>
-              <a:rPr lang="en-US" sz="1400" b="1" dirty="0">
+              <a:rPr lang="en-US" sz="1300" b="1" dirty="0">
                 <a:solidFill>
                   <a:srgbClr val="E94560"/>
                 </a:solidFill>
@@ -19539,19 +19173,19 @@
               </a:rPr>
               <a:t>Ueberraschender Befund</a:t>
             </a:r>
-            <a:endParaRPr lang="en-US" sz="1400" dirty="0"/>
+            <a:endParaRPr lang="en-US" sz="1300" dirty="0"/>
           </a:p>
         </p:txBody>
       </p:sp>
       <p:sp>
         <p:nvSpPr>
-          <p:cNvPr id="7" name="Text 4"/>
-          <p:cNvSpPr/>
-          <p:nvPr/>
-        </p:nvSpPr>
-        <p:spPr>
-          <a:xfrm>
-            <a:off x="640080" y="3630168"/>
+          <p:cNvPr id="9" name="Text 6"/>
+          <p:cNvSpPr/>
+          <p:nvPr/>
+        </p:nvSpPr>
+        <p:spPr>
+          <a:xfrm>
+            <a:off x="640080" y="3840480"/>
             <a:ext cx="7863840" cy="868680"/>
           </a:xfrm>
           <a:prstGeom prst="rect">
@@ -19566,13 +19200,13 @@
           <a:p>
             <a:pPr marL="342900" indent="-342900">
               <a:spcAft>
-                <a:spcPts val="300"/>
+                <a:spcPts val="200"/>
               </a:spcAft>
               <a:buSzPct val="100000"/>
               <a:buChar char="•"/>
             </a:pPr>
             <a:r>
-              <a:rPr lang="en-US" sz="1200" dirty="0">
+              <a:rPr lang="en-US" sz="1100" dirty="0">
                 <a:solidFill>
                   <a:srgbClr val="1A1A1A"/>
                 </a:solidFill>
@@ -19582,18 +19216,18 @@
               </a:rPr>
               <a:t>Linear-Drain-Rate-Baseline ist statistisch nicht von Google-API unterscheidbar (p=0.83 fuer C, p=0.55 fuer MAE).</a:t>
             </a:r>
-            <a:endParaRPr lang="en-US" sz="1200" dirty="0"/>
+            <a:endParaRPr lang="en-US" sz="1100" dirty="0"/>
           </a:p>
           <a:p>
             <a:pPr marL="342900" indent="-342900">
               <a:spcAft>
-                <a:spcPts val="300"/>
+                <a:spcPts val="200"/>
               </a:spcAft>
               <a:buSzPct val="100000"/>
               <a:buChar char="•"/>
             </a:pPr>
             <a:r>
-              <a:rPr lang="en-US" sz="1200" dirty="0">
+              <a:rPr lang="en-US" sz="1100" dirty="0">
                 <a:solidFill>
                   <a:srgbClr val="1A1A1A"/>
                 </a:solidFill>
@@ -19601,20 +19235,20 @@
                 <a:ea typeface="Calibri" pitchFamily="34" charset="-122"/>
                 <a:cs typeface="Calibri" pitchFamily="34" charset="-120"/>
               </a:rPr>
-              <a:t>Beide ML-Modelle (TinyML, Random Forest) signifikant ueber Mean-Predictor, aber signifikant unter der Spitzengruppe.</a:t>
-            </a:r>
-            <a:endParaRPr lang="en-US" sz="1200" dirty="0"/>
+              <a:t>Beide ML-Modelle (TinyML, RF) signifikant ueber Mean, aber unter der Spitzengruppe.</a:t>
+            </a:r>
+            <a:endParaRPr lang="en-US" sz="1100" dirty="0"/>
           </a:p>
           <a:p>
             <a:pPr marL="342900" indent="-342900">
               <a:spcAft>
-                <a:spcPts val="300"/>
+                <a:spcPts val="200"/>
               </a:spcAft>
               <a:buSzPct val="100000"/>
               <a:buChar char="•"/>
             </a:pPr>
             <a:r>
-              <a:rPr lang="en-US" sz="1200" dirty="0">
+              <a:rPr lang="en-US" sz="1100" dirty="0">
                 <a:solidFill>
                   <a:srgbClr val="1A1A1A"/>
                 </a:solidFill>
@@ -19624,52 +19258,13 @@
               </a:rPr>
               <a:t>Implikation: 'einfach BatteryManager-Counter lesen' ist auf Aggregat-Ebene konkurrenzfaehig mit dem System-ML-Estimator.</a:t>
             </a:r>
-            <a:endParaRPr lang="en-US" sz="1200" dirty="0"/>
+            <a:endParaRPr lang="en-US" sz="1100" dirty="0"/>
           </a:p>
         </p:txBody>
       </p:sp>
       <p:sp>
         <p:nvSpPr>
-          <p:cNvPr id="8" name="Text 5"/>
-          <p:cNvSpPr/>
-          <p:nvPr/>
-        </p:nvSpPr>
-        <p:spPr>
-          <a:xfrm>
-            <a:off x="640080" y="4507992"/>
-            <a:ext cx="7863840" cy="228600"/>
-          </a:xfrm>
-          <a:prstGeom prst="rect">
-            <a:avLst/>
-          </a:prstGeom>
-          <a:noFill/>
-          <a:ln/>
-        </p:spPr>
-        <p:txBody>
-          <a:bodyPr wrap="square" lIns="0" tIns="0" rIns="0" bIns="0" rtlCol="0" anchor="ctr"/>
-          <a:lstStyle/>
-          <a:p>
-            <a:pPr indent="0" marL="0">
-              <a:buNone/>
-            </a:pPr>
-            <a:r>
-              <a:rPr lang="en-US" sz="1000" i="1" dirty="0">
-                <a:solidFill>
-                  <a:srgbClr val="64748B"/>
-                </a:solidFill>
-                <a:latin typeface="Calibri" pitchFamily="34" charset="0"/>
-                <a:ea typeface="Calibri" pitchFamily="34" charset="-122"/>
-                <a:cs typeface="Calibri" pitchFamily="34" charset="-120"/>
-              </a:rPr>
-              <a:t>Nuance: Aggregat-Befund. Im Bucket &gt;=30h (n=58) gewinnt Google klar (C 0.98 vs 0.64). Auf kurzen/mittleren Restzeiten (~97% der Daten) wirklich praktisch identisch.</a:t>
-            </a:r>
-            <a:endParaRPr lang="en-US" sz="1000" dirty="0"/>
-          </a:p>
-        </p:txBody>
-      </p:sp>
-      <p:sp>
-        <p:nvSpPr>
-          <p:cNvPr id="9" name="Text 6"/>
+          <p:cNvPr id="10" name="Text 7"/>
           <p:cNvSpPr/>
           <p:nvPr/>
         </p:nvSpPr>
@@ -19708,7 +19303,7 @@
       </p:sp>
       <p:sp>
         <p:nvSpPr>
-          <p:cNvPr id="10" name="Text 7"/>
+          <p:cNvPr id="11" name="Text 8"/>
           <p:cNvSpPr/>
           <p:nvPr/>
         </p:nvSpPr>
@@ -19739,7 +19334,7 @@
                 <a:ea typeface="Calibri" pitchFamily="34" charset="-122"/>
                 <a:cs typeface="Calibri" pitchFamily="34" charset="-120"/>
               </a:rPr>
-              <a:t>9 / 16</a:t>
+              <a:t>9 / 15</a:t>
             </a:r>
             <a:endParaRPr lang="en-US" sz="900" dirty="0"/>
           </a:p>

--- a/paper/Paper_Verteidigung.pptx
+++ b/paper/Paper_Verteidigung.pptx
@@ -16703,7 +16703,7 @@
                 <a:ea typeface="Calibri" pitchFamily="34" charset="-122"/>
                 <a:cs typeface="Calibri" pitchFamily="34" charset="-120"/>
               </a:rPr>
-              <a:t>p &lt; 0,05 = Unterschied ist nicht durch Zufall erklaerbar (signifikant). n.s. = nicht signifikant, beide Methoden statistisch ununterscheidbar.</a:t>
+              <a:t>p &lt; 0,05 = signifikant (Unterschied nicht durch Zufall erklaerbar). n.s. = nicht signifikant (beide Methoden statistisch ununterscheidbar).</a:t>
             </a:r>
             <a:endParaRPr lang="en-US" sz="1000" dirty="0"/>
           </a:p>

--- a/paper/Paper_Verteidigung.pptx
+++ b/paper/Paper_Verteidigung.pptx
@@ -147,7 +147,7 @@
                 </a:solidFill>
                 <a:latin typeface="Arial"/>
               </a:rPr>
-              <a:t>C-Index nach Geraet (vs. y_extrap)</a:t>
+              <a:t>C-Index nach Gerät (vs. y_extrap)</a:t>
             </a:r>
           </a:p>
         </c:rich>
@@ -2714,7 +2714,7 @@
                 <a:ea typeface="Calibri" pitchFamily="34" charset="-122"/>
                 <a:cs typeface="Calibri" pitchFamily="34" charset="-120"/>
               </a:rPr>
-              <a:t>App-Level TinyML fuer</a:t>
+              <a:t>App-Level TinyML für</a:t>
             </a:r>
             <a:endParaRPr lang="en-US" sz="3600" dirty="0"/>
           </a:p>
@@ -2851,7 +2851,7 @@
                 <a:ea typeface="Calibri" pitchFamily="34" charset="-122"/>
                 <a:cs typeface="Calibri" pitchFamily="34" charset="-120"/>
               </a:rPr>
-              <a:t>Keno Schuerger</a:t>
+              <a:t>Keno Schürger</a:t>
             </a:r>
             <a:endParaRPr lang="en-US" sz="1400" dirty="0"/>
           </a:p>
@@ -2868,7 +2868,7 @@
                 <a:ea typeface="Calibri" pitchFamily="34" charset="-122"/>
                 <a:cs typeface="Calibri" pitchFamily="34" charset="-120"/>
               </a:rPr>
-              <a:t>Technische Hochschule Wuerzburg-Schweinfurt (THWS)</a:t>
+              <a:t>Technische Hochschule Würzburg-Schweinfurt (THWS)</a:t>
             </a:r>
             <a:endParaRPr lang="en-US" sz="1400" dirty="0"/>
           </a:p>
@@ -3034,7 +3034,7 @@
                 <a:ea typeface="Calibri" pitchFamily="34" charset="-122"/>
                 <a:cs typeface="Calibri" pitchFamily="34" charset="-120"/>
               </a:rPr>
-              <a:t>Derselbe TinyML-Conv1D, evaluiert pro Geraet - der praktisch relevanteste Befund</a:t>
+              <a:t>Derselbe TinyML-Conv1D, evaluiert pro Gerät - der praktisch relevanteste Befund</a:t>
             </a:r>
             <a:endParaRPr lang="en-US" sz="1200" dirty="0"/>
           </a:p>
@@ -3153,7 +3153,7 @@
                 <a:ea typeface="Calibri" pitchFamily="34" charset="-122"/>
                 <a:cs typeface="Calibri" pitchFamily="34" charset="-120"/>
               </a:rPr>
-              <a:t>Analytische Baselines stabiler ueber Geraete</a:t>
+              <a:t>Analytische Baselines stabiler über Geräte</a:t>
             </a:r>
             <a:endParaRPr lang="en-US" sz="1100" dirty="0"/>
           </a:p>
@@ -3298,7 +3298,7 @@
                 <a:ea typeface="Calibri" pitchFamily="34" charset="-122"/>
                 <a:cs typeface="Calibri" pitchFamily="34" charset="-120"/>
               </a:rPr>
-              <a:t>Xiaomi-Daten: Akku 88.8% der Zeit ueber 75% (mean 94%). Wenig Discharge-Dynamik zum Lernen. Sensor-Qualitaet UND Datenverteilung gemischt.</a:t>
+              <a:t>Xiaomi-Daten: Akku 88.8% der Zeit über 75% (mean 94%). Wenig Discharge-Dynamik zum Lernen. Sensor-Qualität UND Datenverteilung gemischt.</a:t>
             </a:r>
             <a:endParaRPr lang="en-US" sz="950" dirty="0"/>
           </a:p>
@@ -3337,7 +3337,7 @@
                 <a:ea typeface="Calibri" pitchFamily="34" charset="-122"/>
                 <a:cs typeface="Calibri" pitchFamily="34" charset="-120"/>
               </a:rPr>
-              <a:t>K. Schuerger - TinyML fuer Akkulaufzeit-Vorhersage</a:t>
+              <a:t>K. Schürger - TinyML für Akkulaufzeit-Vorhersage</a:t>
             </a:r>
             <a:endParaRPr lang="en-US" sz="900" dirty="0"/>
           </a:p>
@@ -4114,7 +4114,7 @@
                           <a:ea typeface="Calibri" pitchFamily="34" charset="-122"/>
                           <a:cs typeface="Calibri" pitchFamily="34" charset="-120"/>
                         </a:rPr>
-                        <a:t>Groesse (KB)</a:t>
+                        <a:t>Größe (KB)</a:t>
                       </a:r>
                       <a:endParaRPr lang="en-US" sz="1100" dirty="0">
                         <a:latin typeface="Calibri" charset="0"/>
@@ -5162,7 +5162,7 @@
                 <a:ea typeface="Calibri" pitchFamily="34" charset="-122"/>
                 <a:cs typeface="Calibri" pitchFamily="34" charset="-120"/>
               </a:rPr>
-              <a:t>K. Schuerger - TinyML fuer Akkulaufzeit-Vorhersage</a:t>
+              <a:t>K. Schürger - TinyML für Akkulaufzeit-Vorhersage</a:t>
             </a:r>
             <a:endParaRPr lang="en-US" sz="900" dirty="0"/>
           </a:p>
@@ -5272,7 +5272,7 @@
                 <a:ea typeface="Calibri" pitchFamily="34" charset="-122"/>
                 <a:cs typeface="Calibri" pitchFamily="34" charset="-120"/>
               </a:rPr>
-              <a:t>Diskussion: Zwei Schluessel-Befunde</a:t>
+              <a:t>Diskussion: Zwei Schlüssel-Befunde</a:t>
             </a:r>
             <a:endParaRPr lang="en-US" sz="2800" dirty="0"/>
           </a:p>
@@ -5474,7 +5474,7 @@
                 <a:ea typeface="Calibri" pitchFamily="34" charset="-122"/>
                 <a:cs typeface="Calibri" pitchFamily="34" charset="-120"/>
               </a:rPr>
-              <a:t>  RF C=0.51, beide nicht ueber Floor</a:t>
+              <a:t>  RF C=0.51, beide nicht über Floor</a:t>
             </a:r>
             <a:endParaRPr lang="en-US" sz="1100" dirty="0"/>
           </a:p>
@@ -5908,7 +5908,7 @@
                 <a:ea typeface="Calibri" pitchFamily="34" charset="-122"/>
                 <a:cs typeface="Calibri" pitchFamily="34" charset="-120"/>
               </a:rPr>
-              <a:t>Hardware-Zugang traegt nichts Messbares fuer 'Stunden bis 0%' bei.</a:t>
+              <a:t>Hardware-Zugang trägt nichts Messbares für 'Stunden bis 0%' bei.</a:t>
             </a:r>
             <a:endParaRPr lang="en-US" sz="1100" dirty="0"/>
           </a:p>
@@ -5947,7 +5947,7 @@
                 <a:ea typeface="Calibri" pitchFamily="34" charset="-122"/>
                 <a:cs typeface="Calibri" pitchFamily="34" charset="-120"/>
               </a:rPr>
-              <a:t>K. Schuerger - TinyML fuer Akkulaufzeit-Vorhersage</a:t>
+              <a:t>K. Schürger - TinyML für Akkulaufzeit-Vorhersage</a:t>
             </a:r>
             <a:endParaRPr lang="en-US" sz="900" dirty="0"/>
           </a:p>
@@ -6180,7 +6180,7 @@
                 <a:ea typeface="Calibri" pitchFamily="34" charset="-122"/>
                 <a:cs typeface="Calibri" pitchFamily="34" charset="-120"/>
               </a:rPr>
-              <a:t>Akku wird im Alltag nie auf 0% entladen. Strukturelle Eigenschaft der Domaene - gleiche Beobachtung bei Li et al. (2018) mit 51 Nutzern. Deshalb C-Index als Primaer-Metrik statt MAE.</a:t>
+              <a:t>Akku wird im Alltag nie auf 0% entladen. Strukturelle Eigenschaft der Domäne - gleiche Beobachtung bei Li et al. (2018) mit 51 Nutzern. Deshalb C-Index als Primär-Metrik statt MAE.</a:t>
             </a:r>
             <a:endParaRPr lang="en-US" sz="1200" dirty="0"/>
           </a:p>
@@ -6303,7 +6303,7 @@
                 <a:ea typeface="Calibri" pitchFamily="34" charset="-122"/>
                 <a:cs typeface="Calibri" pitchFamily="34" charset="-120"/>
               </a:rPr>
-              <a:t>Training sieht alle vier Geraete. Eine Leave-One-Device-Out-Studie - also Test auf einem komplett ungesehenen Geraet - ist offene Folgearbeit.</a:t>
+              <a:t>Training sieht alle vier Geräte. Eine Leave-One-Device-Out-Studie - also Test auf einem komplett ungesehenen Gerät - ist offene Folgearbeit.</a:t>
             </a:r>
             <a:endParaRPr lang="en-US" sz="1200" dirty="0"/>
           </a:p>
@@ -6426,7 +6426,7 @@
                 <a:ea typeface="Calibri" pitchFamily="34" charset="-122"/>
                 <a:cs typeface="Calibri" pitchFamily="34" charset="-120"/>
               </a:rPr>
-              <a:t>TinyML C=0.60 waehrend RF auf demselben Geraet C=0.76 erreicht. Keine kausale Erklaerung im aktuellen Datensatz - offen fuer Folgearbeiten.</a:t>
+              <a:t>TinyML C=0.60 während RF auf demselben Gerät C=0.76 erreicht. Keine kausale Erklärung im aktuellen Datensatz - offen für Folgearbeiten.</a:t>
             </a:r>
             <a:endParaRPr lang="en-US" sz="1200" dirty="0"/>
           </a:p>
@@ -6465,7 +6465,7 @@
                 <a:ea typeface="Calibri" pitchFamily="34" charset="-122"/>
                 <a:cs typeface="Calibri" pitchFamily="34" charset="-120"/>
               </a:rPr>
-              <a:t>K. Schuerger - TinyML fuer Akkulaufzeit-Vorhersage</a:t>
+              <a:t>K. Schürger - TinyML für Akkulaufzeit-Vorhersage</a:t>
             </a:r>
             <a:endParaRPr lang="en-US" sz="900" dirty="0"/>
           </a:p>
@@ -6680,7 +6680,7 @@
                 <a:ea typeface="Calibri" pitchFamily="34" charset="-122"/>
                 <a:cs typeface="Calibri" pitchFamily="34" charset="-120"/>
               </a:rPr>
-              <a:t>TinyML schlaegt Mean (C 0.67), bleibt aber hinter Linear/Exp/Google (C ~ 0.77). Google nicht signifikant besser als Linear.</a:t>
+              <a:t>TinyML schlägt Mean (C 0.67), bleibt aber hinter Linear/Exp/Google (C ~ 0.77). Google nicht signifikant besser als Linear.</a:t>
             </a:r>
             <a:endParaRPr lang="en-US" sz="1200" dirty="0"/>
           </a:p>
@@ -6785,7 +6785,7 @@
                 <a:ea typeface="Calibri" pitchFamily="34" charset="-122"/>
                 <a:cs typeface="Calibri" pitchFamily="34" charset="-120"/>
               </a:rPr>
-              <a:t>TFLite-Quantisierung funktioniert. 14.4 KB, 4.5 us. Auf dieser Achse hat TinyML uneingeschraenkt seinen Wert.</a:t>
+              <a:t>TFLite-Quantisierung funktioniert. 14.4 KB, 4.5 us. Auf dieser Achse hat TinyML uneingeschränkt seinen Wert.</a:t>
             </a:r>
             <a:endParaRPr lang="en-US" sz="1200" dirty="0"/>
           </a:p>
@@ -6890,7 +6890,7 @@
                 <a:ea typeface="Calibri" pitchFamily="34" charset="-122"/>
                 <a:cs typeface="Calibri" pitchFamily="34" charset="-120"/>
               </a:rPr>
-              <a:t>TinyML 0.79 auf Pixel 7 Pro, 0.59 auf Xiaomi. Engpass: Sensor-Qualitaet UND Discharge-Dynamik-Coverage (Xiaomi-Akku 88.8% der Zeit voll). Nicht die Modellarchitektur.</a:t>
+              <a:t>TinyML 0.79 auf Pixel 7 Pro, 0.59 auf Xiaomi. Engpass: Sensor-Qualität UND Discharge-Dynamik-Coverage (Xiaomi-Akku 88.8% der Zeit voll). Nicht die Modellarchitektur.</a:t>
             </a:r>
             <a:endParaRPr lang="en-US" sz="1200" dirty="0"/>
           </a:p>
@@ -6929,7 +6929,7 @@
                 <a:ea typeface="Calibri" pitchFamily="34" charset="-122"/>
                 <a:cs typeface="Calibri" pitchFamily="34" charset="-120"/>
               </a:rPr>
-              <a:t>Methodischer Beitrag: Segment-Level-Split als Standard fuer Sliding-Window-Time-Series in Mobile-Sensing.</a:t>
+              <a:t>Methodischer Beitrag: Segment-Level-Split als Standard für Sliding-Window-Time-Series in Mobile-Sensing.</a:t>
             </a:r>
             <a:endParaRPr lang="en-US" sz="1400" dirty="0"/>
           </a:p>
@@ -6968,7 +6968,7 @@
                 <a:ea typeface="Calibri" pitchFamily="34" charset="-122"/>
                 <a:cs typeface="Calibri" pitchFamily="34" charset="-120"/>
               </a:rPr>
-              <a:t>K. Schuerger - TinyML fuer Akkulaufzeit-Vorhersage</a:t>
+              <a:t>K. Schürger - TinyML für Akkulaufzeit-Vorhersage</a:t>
             </a:r>
             <a:endParaRPr lang="en-US" sz="900" dirty="0"/>
           </a:p>
@@ -7176,7 +7176,7 @@
                 <a:ea typeface="Calibri" pitchFamily="34" charset="-122"/>
                 <a:cs typeface="Calibri" pitchFamily="34" charset="-120"/>
               </a:rPr>
-              <a:t>Keno Schuerger</a:t>
+              <a:t>Keno Schürger</a:t>
             </a:r>
             <a:endParaRPr lang="en-US" sz="1300" dirty="0"/>
           </a:p>
@@ -7193,7 +7193,7 @@
                 <a:ea typeface="Calibri" pitchFamily="34" charset="-122"/>
                 <a:cs typeface="Calibri" pitchFamily="34" charset="-120"/>
               </a:rPr>
-              <a:t>TinyML fuer Akkulaufzeit-Vorhersage auf Android</a:t>
+              <a:t>TinyML für Akkulaufzeit-Vorhersage auf Android</a:t>
             </a:r>
             <a:endParaRPr lang="en-US" sz="1300" dirty="0"/>
           </a:p>
@@ -7232,7 +7232,7 @@
                 <a:ea typeface="Calibri" pitchFamily="34" charset="-122"/>
                 <a:cs typeface="Calibri" pitchFamily="34" charset="-120"/>
               </a:rPr>
-              <a:t>K. Schuerger - TinyML fuer Akkulaufzeit-Vorhersage</a:t>
+              <a:t>K. Schürger - TinyML für Akkulaufzeit-Vorhersage</a:t>
             </a:r>
             <a:endParaRPr lang="en-US" sz="900" dirty="0"/>
           </a:p>
@@ -7838,7 +7838,7 @@
                 <a:ea typeface="Calibri" pitchFamily="34" charset="-122"/>
                 <a:cs typeface="Calibri" pitchFamily="34" charset="-120"/>
               </a:rPr>
-              <a:t>(Latenz, Modellgroesse)</a:t>
+              <a:t>(Latenz, Modellgröße)</a:t>
             </a:r>
             <a:endParaRPr lang="en-US" sz="1400" dirty="0"/>
           </a:p>
@@ -7877,7 +7877,7 @@
                 <a:ea typeface="Calibri" pitchFamily="34" charset="-122"/>
                 <a:cs typeface="Calibri" pitchFamily="34" charset="-120"/>
               </a:rPr>
-              <a:t>K. Schuerger - TinyML fuer Akkulaufzeit-Vorhersage</a:t>
+              <a:t>K. Schürger - TinyML für Akkulaufzeit-Vorhersage</a:t>
             </a:r>
             <a:endParaRPr lang="en-US" sz="900" dirty="0"/>
           </a:p>
@@ -8235,7 +8235,7 @@
                 <a:ea typeface="Calibri" pitchFamily="34" charset="-122"/>
                 <a:cs typeface="Calibri" pitchFamily="34" charset="-120"/>
               </a:rPr>
-              <a:t>Laeuft im Systemprozess - privilegierter Zugriff</a:t>
+              <a:t>Läuft im Systemprozess - privilegierter Zugriff</a:t>
             </a:r>
             <a:endParaRPr lang="en-US" sz="1300" dirty="0"/>
           </a:p>
@@ -8338,7 +8338,7 @@
                 <a:ea typeface="Calibri" pitchFamily="34" charset="-122"/>
                 <a:cs typeface="Calibri" pitchFamily="34" charset="-120"/>
               </a:rPr>
-              <a:t>Kann eine Drittanbieter-App, die nur oeffentliche Sensor-APIs nutzt, mit der System-API mithalten - oder ueberhaupt etwas Sinnvolles lernen?</a:t>
+              <a:t>Kann eine Drittanbieter-App, die nur öffentliche Sensor-APIs nutzt, mit der System-API mithalten - oder überhaupt etwas Sinnvolles lernen?</a:t>
             </a:r>
             <a:endParaRPr lang="en-US" sz="1400" dirty="0"/>
           </a:p>
@@ -8377,7 +8377,7 @@
                 <a:ea typeface="Calibri" pitchFamily="34" charset="-122"/>
                 <a:cs typeface="Calibri" pitchFamily="34" charset="-120"/>
               </a:rPr>
-              <a:t>K. Schuerger - TinyML fuer Akkulaufzeit-Vorhersage</a:t>
+              <a:t>K. Schürger - TinyML für Akkulaufzeit-Vorhersage</a:t>
             </a:r>
             <a:endParaRPr lang="en-US" sz="900" dirty="0"/>
           </a:p>
@@ -8649,7 +8649,7 @@
                 <a:ea typeface="Calibri" pitchFamily="34" charset="-122"/>
                 <a:cs typeface="Calibri" pitchFamily="34" charset="-120"/>
               </a:rPr>
-              <a:t>51 Nutzer, 21 Monate. Fuehrt den Concordance-Index als Standard-Metrik ein, weil das 'severe data missing problem' (User entladen selten auf 0%) MAE unzuverlaessig macht.</a:t>
+              <a:t>51 Nutzer, 21 Monate. Führt den Concordance-Index als Standard-Metrik ein, weil das 'severe data missing problem' (User entladen selten auf 0%) MAE unzuverlässig macht.</a:t>
             </a:r>
             <a:endParaRPr lang="en-US" sz="1100" dirty="0"/>
           </a:p>
@@ -8934,7 +8934,7 @@
                 <a:ea typeface="Calibri" pitchFamily="34" charset="-122"/>
                 <a:cs typeface="Calibri" pitchFamily="34" charset="-120"/>
               </a:rPr>
-              <a:t>Industriestandard-Benchmark fuer TinyML</a:t>
+              <a:t>Industriestandard-Benchmark für TinyML</a:t>
             </a:r>
             <a:endParaRPr lang="en-US" sz="1100" dirty="0"/>
           </a:p>
@@ -9135,7 +9135,7 @@
                 <a:ea typeface="Calibri" pitchFamily="34" charset="-122"/>
                 <a:cs typeface="Calibri" pitchFamily="34" charset="-120"/>
               </a:rPr>
-              <a:t>Random-Shuffle-Splits ueber Sliding-Window-Sequenzen lecken Future-Information. RMSE Gain bis 20.5% bei 10-fold CV (LSTM).</a:t>
+              <a:t>Random-Shuffle-Splits über Sliding-Window-Sequenzen lecken Future-Information. RMSE Gain bis 20.5% bei 10-fold CV (LSTM).</a:t>
             </a:r>
             <a:endParaRPr lang="en-US" sz="1100" dirty="0"/>
           </a:p>
@@ -9174,7 +9174,7 @@
                 <a:ea typeface="Calibri" pitchFamily="34" charset="-122"/>
                 <a:cs typeface="Calibri" pitchFamily="34" charset="-120"/>
               </a:rPr>
-              <a:t>K. Schuerger - TinyML fuer Akkulaufzeit-Vorhersage</a:t>
+              <a:t>K. Schürger - TinyML für Akkulaufzeit-Vorhersage</a:t>
             </a:r>
             <a:endParaRPr lang="en-US" sz="900" dirty="0"/>
           </a:p>
@@ -9284,7 +9284,7 @@
                 <a:ea typeface="Calibri" pitchFamily="34" charset="-122"/>
                 <a:cs typeface="Calibri" pitchFamily="34" charset="-120"/>
               </a:rPr>
-              <a:t>Datensammlung: 4 Geraete, 45 Tage</a:t>
+              <a:t>Datensammlung: 4 Geräte, 45 Tage</a:t>
             </a:r>
             <a:endParaRPr lang="en-US" sz="2800" dirty="0"/>
           </a:p>
@@ -9480,7 +9480,7 @@
                 <a:ea typeface="Calibri" pitchFamily="34" charset="-122"/>
                 <a:cs typeface="Calibri" pitchFamily="34" charset="-120"/>
               </a:rPr>
-              <a:t>Geraete</a:t>
+              <a:t>Geräte</a:t>
             </a:r>
             <a:endParaRPr lang="en-US" sz="1200" dirty="0"/>
           </a:p>
@@ -9728,7 +9728,7 @@
                           <a:ea typeface="Calibri" pitchFamily="34" charset="-122"/>
                           <a:cs typeface="Calibri" pitchFamily="34" charset="-120"/>
                         </a:rPr>
-                        <a:t>Geraet</a:t>
+                        <a:t>Gerät</a:t>
                       </a:r>
                       <a:endParaRPr lang="en-US" sz="1200" dirty="0">
                         <a:latin typeface="Calibri" charset="0"/>
@@ -11308,7 +11308,7 @@
                 <a:ea typeface="Calibri" pitchFamily="34" charset="-122"/>
                 <a:cs typeface="Calibri" pitchFamily="34" charset="-120"/>
               </a:rPr>
-              <a:t>K. Schuerger - TinyML fuer Akkulaufzeit-Vorhersage</a:t>
+              <a:t>K. Schürger - TinyML für Akkulaufzeit-Vorhersage</a:t>
             </a:r>
             <a:endParaRPr lang="en-US" sz="900" dirty="0"/>
           </a:p>
@@ -12471,7 +12471,7 @@
                 <a:ea typeface="Calibri" pitchFamily="34" charset="-122"/>
                 <a:cs typeface="Calibri" pitchFamily="34" charset="-120"/>
               </a:rPr>
-              <a:t>K. Schuerger - TinyML fuer Akkulaufzeit-Vorhersage</a:t>
+              <a:t>K. Schürger - TinyML für Akkulaufzeit-Vorhersage</a:t>
             </a:r>
             <a:endParaRPr lang="en-US" sz="900" dirty="0"/>
           </a:p>
@@ -12620,7 +12620,7 @@
                 <a:ea typeface="Calibri" pitchFamily="34" charset="-122"/>
                 <a:cs typeface="Calibri" pitchFamily="34" charset="-120"/>
               </a:rPr>
-              <a:t>Problem: Random-Shuffle ueber Sliding-Window-Sequenzen leckt Future-Information</a:t>
+              <a:t>Problem: Random-Shuffle über Sliding-Window-Sequenzen leckt Future-Information</a:t>
             </a:r>
             <a:endParaRPr lang="en-US" sz="1400" dirty="0"/>
           </a:p>
@@ -13342,7 +13342,7 @@
                           <a:ea typeface="Calibri" pitchFamily="34" charset="-122"/>
                           <a:cs typeface="Calibri" pitchFamily="34" charset="-120"/>
                         </a:rPr>
-                        <a:t>Multi-Device (4 Geraete)</a:t>
+                        <a:t>Multi-Device (4 Geräte)</a:t>
                       </a:r>
                       <a:endParaRPr lang="en-US" sz="1200" dirty="0">
                         <a:latin typeface="Calibri" charset="0"/>
@@ -13756,7 +13756,7 @@
                 <a:ea typeface="Calibri" pitchFamily="34" charset="-122"/>
                 <a:cs typeface="Calibri" pitchFamily="34" charset="-120"/>
               </a:rPr>
-              <a:t>Single-Device: random-shuffle taeuscht eine 19x bessere Performance vor - reines Leakage-Artefakt.</a:t>
+              <a:t>Single-Device: random-shuffle täuscht eine 19x bessere Performance vor - reines Leakage-Artefakt.</a:t>
             </a:r>
             <a:endParaRPr lang="en-US" sz="1300" dirty="0"/>
           </a:p>
@@ -13798,7 +13798,7 @@
                 <a:ea typeface="Calibri" pitchFamily="34" charset="-122"/>
                 <a:cs typeface="Calibri" pitchFamily="34" charset="-120"/>
               </a:rPr>
-              <a:t>Eigener methodischer Beitrag: Inflation ist data-diversity-dependent. Empfehlung fuer Folgearbeiten in dieser Domaene: Splitting-Strategie explizit nennen.</a:t>
+              <a:t>Eigener methodischer Beitrag: Inflation ist data-diversity-dependent. Empfehlung für Folgearbeiten in dieser Domäne: Splitting-Strategie explizit nennen.</a:t>
             </a:r>
             <a:endParaRPr lang="en-US" sz="1300" dirty="0"/>
           </a:p>
@@ -13837,7 +13837,7 @@
                 <a:ea typeface="Calibri" pitchFamily="34" charset="-122"/>
                 <a:cs typeface="Calibri" pitchFamily="34" charset="-120"/>
               </a:rPr>
-              <a:t>K. Schuerger - TinyML fuer Akkulaufzeit-Vorhersage</a:t>
+              <a:t>K. Schürger - TinyML für Akkulaufzeit-Vorhersage</a:t>
             </a:r>
             <a:endParaRPr lang="en-US" sz="900" dirty="0"/>
           </a:p>
@@ -14050,7 +14050,7 @@
                 <a:ea typeface="Calibri" pitchFamily="34" charset="-122"/>
                 <a:cs typeface="Calibri" pitchFamily="34" charset="-120"/>
               </a:rPr>
-              <a:t>C-Index: Anteil korrekt geordneter Vorhersage-Paare. 0,5 = Muenzwurf, 1,0 = perfekt. MAE: durchschnittliche Abweichung in Stunden.</a:t>
+              <a:t>C-Index: Anteil korrekt geordneter Vorhersage-Paare. 0,5 = Münzwurf, 1,0 = perfekt. MAE: durchschnittliche Abweichung in Stunden.</a:t>
             </a:r>
             <a:endParaRPr lang="en-US" sz="1000" dirty="0"/>
           </a:p>
@@ -16490,7 +16490,7 @@
                 <a:ea typeface="Calibri" pitchFamily="34" charset="-122"/>
                 <a:cs typeface="Calibri" pitchFamily="34" charset="-120"/>
               </a:rPr>
-              <a:t>K. Schuerger - TinyML fuer Akkulaufzeit-Vorhersage</a:t>
+              <a:t>K. Schürger - TinyML für Akkulaufzeit-Vorhersage</a:t>
             </a:r>
             <a:endParaRPr lang="en-US" sz="900" dirty="0"/>
           </a:p>
@@ -16703,7 +16703,7 @@
                 <a:ea typeface="Calibri" pitchFamily="34" charset="-122"/>
                 <a:cs typeface="Calibri" pitchFamily="34" charset="-120"/>
               </a:rPr>
-              <a:t>p &lt; 0,05 = signifikant (Unterschied nicht durch Zufall erklaerbar). n.s. = nicht signifikant (beide Methoden statistisch ununterscheidbar).</a:t>
+              <a:t>p &lt; 0,05 = signifikant (Unterschied nicht durch Zufall erklärbar). n.s. = nicht signifikant (beide Methoden statistisch ununterscheidbar).</a:t>
             </a:r>
             <a:endParaRPr lang="en-US" sz="1000" dirty="0"/>
           </a:p>
@@ -17492,7 +17492,7 @@
                           <a:ea typeface="Calibri" pitchFamily="34" charset="-122"/>
                           <a:cs typeface="Calibri" pitchFamily="34" charset="-120"/>
                         </a:rPr>
-                        <a:t>** signifikant ueber Floor</a:t>
+                        <a:t>** signifikant über Floor</a:t>
                       </a:r>
                       <a:endParaRPr lang="en-US" sz="1150" dirty="0">
                         <a:latin typeface="Calibri" charset="0"/>
@@ -17884,7 +17884,7 @@
                           <a:ea typeface="Calibri" pitchFamily="34" charset="-122"/>
                           <a:cs typeface="Calibri" pitchFamily="34" charset="-120"/>
                         </a:rPr>
-                        <a:t>** signifikant ueber Floor</a:t>
+                        <a:t>** signifikant über Floor</a:t>
                       </a:r>
                       <a:endParaRPr lang="en-US" sz="1150" dirty="0">
                         <a:latin typeface="Calibri" charset="0"/>
@@ -18668,7 +18668,7 @@
                           <a:ea typeface="Calibri" pitchFamily="34" charset="-122"/>
                           <a:cs typeface="Calibri" pitchFamily="34" charset="-120"/>
                         </a:rPr>
-                        <a:t>n.s. - ueberraschend!</a:t>
+                        <a:t>n.s. - überraschend!</a:t>
                       </a:r>
                       <a:endParaRPr lang="en-US" sz="1150" dirty="0">
                         <a:latin typeface="Calibri" charset="0"/>
@@ -19171,7 +19171,7 @@
                 <a:ea typeface="Calibri" pitchFamily="34" charset="-122"/>
                 <a:cs typeface="Calibri" pitchFamily="34" charset="-120"/>
               </a:rPr>
-              <a:t>Ueberraschender Befund</a:t>
+              <a:t>Überraschender Befund</a:t>
             </a:r>
             <a:endParaRPr lang="en-US" sz="1300" dirty="0"/>
           </a:p>
@@ -19214,7 +19214,7 @@
                 <a:ea typeface="Calibri" pitchFamily="34" charset="-122"/>
                 <a:cs typeface="Calibri" pitchFamily="34" charset="-120"/>
               </a:rPr>
-              <a:t>Linear-Drain-Rate-Baseline ist statistisch nicht von Google-API unterscheidbar (p=0.83 fuer C, p=0.55 fuer MAE).</a:t>
+              <a:t>Linear-Drain-Rate-Baseline ist statistisch nicht von Google-API unterscheidbar (p=0.83 für C, p=0.55 für MAE).</a:t>
             </a:r>
             <a:endParaRPr lang="en-US" sz="1100" dirty="0"/>
           </a:p>
@@ -19235,7 +19235,7 @@
                 <a:ea typeface="Calibri" pitchFamily="34" charset="-122"/>
                 <a:cs typeface="Calibri" pitchFamily="34" charset="-120"/>
               </a:rPr>
-              <a:t>Beide ML-Modelle (TinyML, RF) signifikant ueber Mean, aber unter der Spitzengruppe.</a:t>
+              <a:t>Beide ML-Modelle (TinyML, RF) signifikant über Mean, aber unter der Spitzengruppe.</a:t>
             </a:r>
             <a:endParaRPr lang="en-US" sz="1100" dirty="0"/>
           </a:p>
@@ -19256,7 +19256,7 @@
                 <a:ea typeface="Calibri" pitchFamily="34" charset="-122"/>
                 <a:cs typeface="Calibri" pitchFamily="34" charset="-120"/>
               </a:rPr>
-              <a:t>Implikation: 'einfach BatteryManager-Counter lesen' ist auf Aggregat-Ebene konkurrenzfaehig mit dem System-ML-Estimator.</a:t>
+              <a:t>Implikation: 'einfach BatteryManager-Counter lesen' ist auf Aggregat-Ebene konkurrenzfähig mit dem System-ML-Estimator.</a:t>
             </a:r>
             <a:endParaRPr lang="en-US" sz="1100" dirty="0"/>
           </a:p>
@@ -19295,7 +19295,7 @@
                 <a:ea typeface="Calibri" pitchFamily="34" charset="-122"/>
                 <a:cs typeface="Calibri" pitchFamily="34" charset="-120"/>
               </a:rPr>
-              <a:t>K. Schuerger - TinyML fuer Akkulaufzeit-Vorhersage</a:t>
+              <a:t>K. Schürger - TinyML für Akkulaufzeit-Vorhersage</a:t>
             </a:r>
             <a:endParaRPr lang="en-US" sz="900" dirty="0"/>
           </a:p>

--- a/paper/Paper_Verteidigung.pptx
+++ b/paper/Paper_Verteidigung.pptx
@@ -2812,7 +2812,7 @@
                 <a:ea typeface="Calibri" pitchFamily="34" charset="-122"/>
                 <a:cs typeface="Calibri" pitchFamily="34" charset="-120"/>
               </a:rPr>
-              <a:t>Ein methodisch ehrlicher Erfahrungsbericht aus dem Multi-Device-Vergleich</a:t>
+              <a:t>Multi-Device-Vergleich von sechs Methoden</a:t>
             </a:r>
             <a:endParaRPr lang="en-US" sz="1600" dirty="0"/>
           </a:p>

--- a/paper/Paper_Verteidigung.pptx
+++ b/paper/Paper_Verteidigung.pptx
@@ -8094,27 +8094,6 @@
             </a:r>
             <a:endParaRPr lang="en-US" sz="1300" dirty="0"/>
           </a:p>
-          <a:p>
-            <a:pPr marL="342900" indent="-342900">
-              <a:spcAft>
-                <a:spcPts val="600"/>
-              </a:spcAft>
-              <a:buSzPct val="100000"/>
-              <a:buChar char="•"/>
-            </a:pPr>
-            <a:r>
-              <a:rPr lang="en-US" sz="1300" dirty="0">
-                <a:solidFill>
-                  <a:srgbClr val="1A1A1A"/>
-                </a:solidFill>
-                <a:latin typeface="Calibri" pitchFamily="34" charset="0"/>
-                <a:ea typeface="Calibri" pitchFamily="34" charset="-122"/>
-                <a:cs typeface="Calibri" pitchFamily="34" charset="-120"/>
-              </a:rPr>
-              <a:t>MIUI/OneUI: oft Legacy-Code seit Android 5</a:t>
-            </a:r>
-            <a:endParaRPr lang="en-US" sz="1300" dirty="0"/>
-          </a:p>
         </p:txBody>
       </p:sp>
       <p:sp>
@@ -8150,7 +8129,7 @@
                 <a:ea typeface="Calibri" pitchFamily="34" charset="-122"/>
                 <a:cs typeface="Calibri" pitchFamily="34" charset="-120"/>
               </a:rPr>
-              <a:t>Was sich seit Android 12 (2021) aendert</a:t>
+              <a:t>Was sich seit Android 12 (2021) ändert</a:t>
             </a:r>
             <a:endParaRPr lang="en-US" sz="1700" dirty="0"/>
           </a:p>
@@ -8338,7 +8317,7 @@
                 <a:ea typeface="Calibri" pitchFamily="34" charset="-122"/>
                 <a:cs typeface="Calibri" pitchFamily="34" charset="-120"/>
               </a:rPr>
-              <a:t>Kann eine Drittanbieter-App, die nur öffentliche Sensor-APIs nutzt, mit der System-API mithalten - oder überhaupt etwas Sinnvolles lernen?</a:t>
+              <a:t>Wie gut schneidet ein TinyML-Modell auf öffentlich verfügbaren Sensoren gegenüber etablierten Vorhersage-Methoden ab?</a:t>
             </a:r>
             <a:endParaRPr lang="en-US" sz="1400" dirty="0"/>
           </a:p>

--- a/paper/Paper_Verteidigung.pptx
+++ b/paper/Paper_Verteidigung.pptx
@@ -13735,7 +13735,7 @@
                 <a:ea typeface="Calibri" pitchFamily="34" charset="-122"/>
                 <a:cs typeface="Calibri" pitchFamily="34" charset="-120"/>
               </a:rPr>
-              <a:t>Single-Device: random-shuffle täuscht eine 19x bessere Performance vor - reines Leakage-Artefakt.</a:t>
+              <a:t>Bei zufälliger Aufteilung 'sieht' das Modell unbemerkt zukünftige Daten — das täuscht 19x bessere Performance vor (Single-Device).</a:t>
             </a:r>
             <a:endParaRPr lang="en-US" sz="1300" dirty="0"/>
           </a:p>
@@ -13756,7 +13756,7 @@
                 <a:ea typeface="Calibri" pitchFamily="34" charset="-122"/>
                 <a:cs typeface="Calibri" pitchFamily="34" charset="-120"/>
               </a:rPr>
-              <a:t>Multi-Device: nur noch 1.24x Inflation, im Bereich von Albelali &amp; Ahmed (2025) mit 10-fold CV.</a:t>
+              <a:t>Mit 4 Geräten (Multi-Device) schrumpft die Verzerrung auf 1,24x — die Datenvielfalt schwächt das Lecken ab. Vergleichbar mit Albelali &amp; Ahmed (2025).</a:t>
             </a:r>
             <a:endParaRPr lang="en-US" sz="1300" dirty="0"/>
           </a:p>
@@ -13777,7 +13777,7 @@
                 <a:ea typeface="Calibri" pitchFamily="34" charset="-122"/>
                 <a:cs typeface="Calibri" pitchFamily="34" charset="-120"/>
               </a:rPr>
-              <a:t>Eigener methodischer Beitrag: Inflation ist data-diversity-dependent. Empfehlung für Folgearbeiten in dieser Domäne: Splitting-Strategie explizit nennen.</a:t>
+              <a:t>Lehre: Wie stark der Effekt verfälscht, hängt von der Datenvielfalt ab — Folgearbeiten sollten ihre Aufteilungs-Methode immer angeben.</a:t>
             </a:r>
             <a:endParaRPr lang="en-US" sz="1300" dirty="0"/>
           </a:p>

--- a/paper/Paper_Verteidigung.pptx
+++ b/paper/Paper_Verteidigung.pptx
@@ -12599,7 +12599,7 @@
                 <a:ea typeface="Calibri" pitchFamily="34" charset="-122"/>
                 <a:cs typeface="Calibri" pitchFamily="34" charset="-120"/>
               </a:rPr>
-              <a:t>Problem: Random-Shuffle über Sliding-Window-Sequenzen leckt Future-Information</a:t>
+              <a:t>Problem: Bei zufälliger Aufteilung sieht das Modell unbemerkt Daten aus der Zukunft</a:t>
             </a:r>
             <a:endParaRPr lang="en-US" sz="1400" dirty="0"/>
           </a:p>
@@ -13965,7 +13965,7 @@
                 <a:ea typeface="Calibri" pitchFamily="34" charset="-122"/>
                 <a:cs typeface="Calibri" pitchFamily="34" charset="-120"/>
               </a:rPr>
-              <a:t>vs. y_extrap, 95% Bootstrap-CI, leakage-freier Multi-Device-Split</a:t>
+              <a:t>Vergleich gegen extrapolierte echte Restzeit · Klammerwerte = 95%-Konfidenzintervall</a:t>
             </a:r>
             <a:endParaRPr lang="en-US" sz="1200" dirty="0"/>
           </a:p>

--- a/paper/Paper_Verteidigung.pptx
+++ b/paper/Paper_Verteidigung.pptx
@@ -147,7 +147,7 @@
                 </a:solidFill>
                 <a:latin typeface="Arial"/>
               </a:rPr>
-              <a:t>C-Index nach Gerät (vs. y_extrap)</a:t>
+              <a:t>C-Index nach Gerät</a:t>
             </a:r>
           </a:p>
         </c:rich>
@@ -3259,7 +3259,7 @@
                 <a:ea typeface="Calibri" pitchFamily="34" charset="-122"/>
                 <a:cs typeface="Calibri" pitchFamily="34" charset="-120"/>
               </a:rPr>
-              <a:t>Confounder</a:t>
+              <a:t>Aber Achtung</a:t>
             </a:r>
             <a:endParaRPr lang="en-US" sz="1100" dirty="0"/>
           </a:p>
@@ -3298,7 +3298,7 @@
                 <a:ea typeface="Calibri" pitchFamily="34" charset="-122"/>
                 <a:cs typeface="Calibri" pitchFamily="34" charset="-120"/>
               </a:rPr>
-              <a:t>Xiaomi-Daten: Akku 88.8% der Zeit über 75% (mean 94%). Wenig Discharge-Dynamik zum Lernen. Sensor-Qualität UND Datenverteilung gemischt.</a:t>
+              <a:t>Auf dem Xiaomi war der Akku meist voll (88,8 % der Zeit über 75 %). Damit fehlt dem Modell Entlade-Verlauf zum Lernen — der schwache Xiaomi-Wert kann genauso gut an mangelnder Datenvielfalt liegen wie an der Hardware.</a:t>
             </a:r>
             <a:endParaRPr lang="en-US" sz="950" dirty="0"/>
           </a:p>

--- a/paper/Paper_Verteidigung.pptx
+++ b/paper/Paper_Verteidigung.pptx
@@ -6141,7 +6141,7 @@
                 <a:ea typeface="Calibri" pitchFamily="34" charset="-122"/>
                 <a:cs typeface="Calibri" pitchFamily="34" charset="-120"/>
               </a:rPr>
-              <a:t>Right-censored Daten</a:t>
+              <a:t>Akku wird selten ganz leer gefahren</a:t>
             </a:r>
             <a:endParaRPr lang="en-US" sz="1500" dirty="0"/>
           </a:p>
@@ -6180,7 +6180,7 @@
                 <a:ea typeface="Calibri" pitchFamily="34" charset="-122"/>
                 <a:cs typeface="Calibri" pitchFamily="34" charset="-120"/>
               </a:rPr>
-              <a:t>Akku wird im Alltag nie auf 0% entladen. Strukturelle Eigenschaft der Domäne - gleiche Beobachtung bei Li et al. (2018) mit 51 Nutzern. Deshalb C-Index als Primär-Metrik statt MAE.</a:t>
+              <a:t>Akku wird im Alltag nie auf 0 % entladen — Grundeigenschaft der Daten, gleiche Beobachtung bei Li et al. (2018) mit 51 Nutzern. Deshalb C-Index als Hauptmaß statt MAE.</a:t>
             </a:r>
             <a:endParaRPr lang="en-US" sz="1200" dirty="0"/>
           </a:p>
@@ -6303,7 +6303,7 @@
                 <a:ea typeface="Calibri" pitchFamily="34" charset="-122"/>
                 <a:cs typeface="Calibri" pitchFamily="34" charset="-120"/>
               </a:rPr>
-              <a:t>Training sieht alle vier Geräte. Eine Leave-One-Device-Out-Studie - also Test auf einem komplett ungesehenen Gerät - ist offene Folgearbeit.</a:t>
+              <a:t>Training sieht alle vier Geräte. Wie das Modell auf einem komplett neuen Gerät funktionieren würde, ist offene Folgearbeit.</a:t>
             </a:r>
             <a:endParaRPr lang="en-US" sz="1200" dirty="0"/>
           </a:p>
@@ -6387,7 +6387,7 @@
                 <a:ea typeface="Calibri" pitchFamily="34" charset="-122"/>
                 <a:cs typeface="Calibri" pitchFamily="34" charset="-120"/>
               </a:rPr>
-              <a:t>TinyML auf Pixel 9 Pro XL anomal schlecht</a:t>
+              <a:t>TinyML auf Pixel 9 Pro XL überraschend schlecht</a:t>
             </a:r>
             <a:endParaRPr lang="en-US" sz="1500" dirty="0"/>
           </a:p>
@@ -6426,7 +6426,7 @@
                 <a:ea typeface="Calibri" pitchFamily="34" charset="-122"/>
                 <a:cs typeface="Calibri" pitchFamily="34" charset="-120"/>
               </a:rPr>
-              <a:t>TinyML C=0.60 während RF auf demselben Gerät C=0.76 erreicht. Keine kausale Erklärung im aktuellen Datensatz - offen für Folgearbeiten.</a:t>
+              <a:t>TinyML schafft dort nur C-Index 0,60, während Random Forest auf denselben Daten 0,76 erreicht. Warum genau, ist mit den aktuellen Daten nicht erklärbar — offen für Folgearbeiten.</a:t>
             </a:r>
             <a:endParaRPr lang="en-US" sz="1200" dirty="0"/>
           </a:p>

--- a/paper/Paper_Verteidigung.pptx
+++ b/paper/Paper_Verteidigung.pptx
@@ -6851,7 +6851,7 @@
                 <a:ea typeface="Calibri" pitchFamily="34" charset="-122"/>
                 <a:cs typeface="Calibri" pitchFamily="34" charset="-120"/>
               </a:rPr>
-              <a:t>Hardware &amp; Daten-Coverage</a:t>
+              <a:t>Hardware &amp; Datenvielfalt</a:t>
             </a:r>
             <a:endParaRPr lang="en-US" sz="1700" dirty="0"/>
           </a:p>
@@ -6890,7 +6890,7 @@
                 <a:ea typeface="Calibri" pitchFamily="34" charset="-122"/>
                 <a:cs typeface="Calibri" pitchFamily="34" charset="-120"/>
               </a:rPr>
-              <a:t>TinyML 0.79 auf Pixel 7 Pro, 0.59 auf Xiaomi. Engpass: Sensor-Qualität UND Discharge-Dynamik-Coverage (Xiaomi-Akku 88.8% der Zeit voll). Nicht die Modellarchitektur.</a:t>
+              <a:t>TinyML 0,79 auf Pixel 7 Pro, 0,59 auf Xiaomi. Engpass nicht am Modell, sondern an Sensor-Qualität und fehlendem Entlade-Verlauf (Xiaomi-Akku 88,8 % der Zeit voll).</a:t>
             </a:r>
             <a:endParaRPr lang="en-US" sz="1200" dirty="0"/>
           </a:p>
@@ -6929,7 +6929,7 @@
                 <a:ea typeface="Calibri" pitchFamily="34" charset="-122"/>
                 <a:cs typeface="Calibri" pitchFamily="34" charset="-120"/>
               </a:rPr>
-              <a:t>Methodischer Beitrag: Segment-Level-Split als Standard für Sliding-Window-Time-Series in Mobile-Sensing.</a:t>
+              <a:t>Methodischer Beitrag: Segment-Level-Split als Standard für Zeitreihen-Auswertung auf Mobilgeräten.</a:t>
             </a:r>
             <a:endParaRPr lang="en-US" sz="1400" dirty="0"/>
           </a:p>

--- a/paper/Paper_Verteidigung.pptx
+++ b/paper/Paper_Verteidigung.pptx
@@ -2826,8 +2826,8 @@
         </p:nvSpPr>
         <p:spPr>
           <a:xfrm>
-            <a:off x="548640" y="3840480"/>
-            <a:ext cx="8046720" cy="1005840"/>
+            <a:off x="548640" y="3703320"/>
+            <a:ext cx="8046720" cy="1143000"/>
           </a:xfrm>
           <a:prstGeom prst="rect">
             <a:avLst/>
@@ -2852,6 +2852,23 @@
                 <a:cs typeface="Calibri" pitchFamily="34" charset="-120"/>
               </a:rPr>
               <a:t>Keno Schürger</a:t>
+            </a:r>
+            <a:endParaRPr lang="en-US" sz="1400" dirty="0"/>
+          </a:p>
+          <a:p>
+            <a:pPr indent="0" marL="0">
+              <a:buNone/>
+            </a:pPr>
+            <a:r>
+              <a:rPr lang="en-US" sz="1400" dirty="0">
+                <a:solidFill>
+                  <a:srgbClr val="9CB4DE"/>
+                </a:solidFill>
+                <a:latin typeface="Calibri" pitchFamily="34" charset="0"/>
+                <a:ea typeface="Calibri" pitchFamily="34" charset="-122"/>
+                <a:cs typeface="Calibri" pitchFamily="34" charset="-120"/>
+              </a:rPr>
+              <a:t>Matrikelnr.: 5023033</a:t>
             </a:r>
             <a:endParaRPr lang="en-US" sz="1400" dirty="0"/>
           </a:p>
@@ -6904,45 +6921,6 @@
         </p:nvSpPr>
         <p:spPr>
           <a:xfrm>
-            <a:off x="457200" y="4160520"/>
-            <a:ext cx="8229600" cy="457200"/>
-          </a:xfrm>
-          <a:prstGeom prst="rect">
-            <a:avLst/>
-          </a:prstGeom>
-          <a:noFill/>
-          <a:ln/>
-        </p:spPr>
-        <p:txBody>
-          <a:bodyPr wrap="square" rtlCol="0" anchor="ctr"/>
-          <a:lstStyle/>
-          <a:p>
-            <a:pPr algn="ctr" indent="0" marL="0">
-              <a:buNone/>
-            </a:pPr>
-            <a:r>
-              <a:rPr lang="en-US" sz="1400" i="1" dirty="0">
-                <a:solidFill>
-                  <a:srgbClr val="CADCFC"/>
-                </a:solidFill>
-                <a:latin typeface="Calibri" pitchFamily="34" charset="0"/>
-                <a:ea typeface="Calibri" pitchFamily="34" charset="-122"/>
-                <a:cs typeface="Calibri" pitchFamily="34" charset="-120"/>
-              </a:rPr>
-              <a:t>Methodischer Beitrag: Segment-Level-Split als Standard für Zeitreihen-Auswertung auf Mobilgeräten.</a:t>
-            </a:r>
-            <a:endParaRPr lang="en-US" sz="1400" dirty="0"/>
-          </a:p>
-        </p:txBody>
-      </p:sp>
-      <p:sp>
-        <p:nvSpPr>
-          <p:cNvPr id="13" name="Text 11"/>
-          <p:cNvSpPr/>
-          <p:nvPr/>
-        </p:nvSpPr>
-        <p:spPr>
-          <a:xfrm>
             <a:off x="457200" y="4846320"/>
             <a:ext cx="6400800" cy="228600"/>
           </a:xfrm>
@@ -6976,7 +6954,7 @@
       </p:sp>
       <p:sp>
         <p:nvSpPr>
-          <p:cNvPr id="14" name="Text 12"/>
+          <p:cNvPr id="13" name="Text 11"/>
           <p:cNvSpPr/>
           <p:nvPr/>
         </p:nvSpPr>

--- a/paper/Paper_Verteidigung.pptx
+++ b/paper/Paper_Verteidigung.pptx
@@ -5140,7 +5140,7 @@
                 <a:ea typeface="Calibri" pitchFamily="34" charset="-122"/>
                 <a:cs typeface="Calibri" pitchFamily="34" charset="-120"/>
               </a:rPr>
-              <a:t>Die TinyML-Quantisierungs-Pipeline funktioniert wie beworben. Auf der Effizienz-Achse hat TinyML keinen Wettbewerbsnachteil - der Engpass liegt allein auf der Accuracy-Achse.</a:t>
+              <a:t>Die TinyML-Quantisierungs-Pipeline funktioniert wie beworben. Auf der Effizienz-Seite ist TinyML konkurrenzfähig — die Schwäche liegt nur bei der Genauigkeit.</a:t>
             </a:r>
             <a:endParaRPr lang="en-US" sz="1100" dirty="0"/>
           </a:p>

--- a/paper/Paper_Verteidigung.pptx
+++ b/paper/Paper_Verteidigung.pptx
@@ -5140,7 +5140,7 @@
                 <a:ea typeface="Calibri" pitchFamily="34" charset="-122"/>
                 <a:cs typeface="Calibri" pitchFamily="34" charset="-120"/>
               </a:rPr>
-              <a:t>Die TinyML-Quantisierungs-Pipeline funktioniert wie beworben. Auf der Effizienz-Seite ist TinyML konkurrenzfähig — die Schwäche liegt nur bei der Genauigkeit.</a:t>
+              <a:t>Die TinyML-Quantisierungs-Pipeline funktioniert wie beworben. Effizienz ist die Stärke von TinyML — bei der Genauigkeit gibt es nur kleine Abschläge.</a:t>
             </a:r>
             <a:endParaRPr lang="en-US" sz="1100" dirty="0"/>
           </a:p>

--- a/paper/Paper_Verteidigung.pptx
+++ b/paper/Paper_Verteidigung.pptx
@@ -5140,7 +5140,7 @@
                 <a:ea typeface="Calibri" pitchFamily="34" charset="-122"/>
                 <a:cs typeface="Calibri" pitchFamily="34" charset="-120"/>
               </a:rPr>
-              <a:t>Die TinyML-Quantisierungs-Pipeline funktioniert wie beworben. Effizienz ist die Stärke von TinyML — bei der Genauigkeit gibt es nur kleine Abschläge.</a:t>
+              <a:t>Die TinyML-Quantisierungs-Pipeline funktioniert wie beworben. Effizienz ist die klare Stärke von TinyML.</a:t>
             </a:r>
             <a:endParaRPr lang="en-US" sz="1100" dirty="0"/>
           </a:p>

--- a/paper/Paper_Verteidigung.pptx
+++ b/paper/Paper_Verteidigung.pptx
@@ -236,13 +236,13 @@
                 <c:formatCode>General</c:formatCode>
                 <c:ptCount val="4"/>
                 <c:pt idx="0">
-                  <c:v>0.786</c:v>
+                  <c:v>0.754</c:v>
                 </c:pt>
                 <c:pt idx="1">
-                  <c:v>0.714</c:v>
+                  <c:v>0.742</c:v>
                 </c:pt>
                 <c:pt idx="2">
-                  <c:v>0.599</c:v>
+                  <c:v>0.571</c:v>
                 </c:pt>
                 <c:pt idx="3">
                   <c:v>0.593</c:v>
@@ -325,16 +325,16 @@
                 <c:formatCode>General</c:formatCode>
                 <c:ptCount val="4"/>
                 <c:pt idx="0">
-                  <c:v>0.804</c:v>
+                  <c:v>0.807</c:v>
                 </c:pt>
                 <c:pt idx="1">
-                  <c:v>0.801</c:v>
+                  <c:v>0.815</c:v>
                 </c:pt>
                 <c:pt idx="2">
-                  <c:v>0.759</c:v>
+                  <c:v>0.767</c:v>
                 </c:pt>
                 <c:pt idx="3">
-                  <c:v>0.631</c:v>
+                  <c:v>0.628</c:v>
                 </c:pt>
               </c:numCache>
             </c:numRef>
@@ -512,7 +512,7 @@
                   <c:v>0.677</c:v>
                 </c:pt>
                 <c:pt idx="3">
-                  <c:v>0.664</c:v>
+                  <c:v>0.473</c:v>
                 </c:pt>
               </c:numCache>
             </c:numRef>
@@ -594,7 +594,7 @@
         <c:scaling>
           <c:orientation val="minMax"/>
           <c:max val="1"/>
-          <c:min val="0.5"/>
+          <c:min val="0.4"/>
         </c:scaling>
         <c:delete val="0"/>
         <c:axPos val="l"/>
@@ -3149,7 +3149,7 @@
                 <a:ea typeface="Calibri" pitchFamily="34" charset="-122"/>
                 <a:cs typeface="Calibri" pitchFamily="34" charset="-120"/>
               </a:rPr>
-              <a:t>TinyML: 0.79 (Pixel 7 Pro) bis 0.59 (Xiaomi)</a:t>
+              <a:t>TinyML: 0.75 (Pixel 7 Pro) bis 0.59 (Xiaomi)</a:t>
             </a:r>
             <a:endParaRPr lang="en-US" sz="1100" dirty="0"/>
           </a:p>
@@ -3685,7 +3685,7 @@
                 <a:ea typeface="Calibri" pitchFamily="34" charset="-122"/>
                 <a:cs typeface="Calibri" pitchFamily="34" charset="-120"/>
               </a:rPr>
-              <a:t>4.5</a:t>
+              <a:t>3.3</a:t>
             </a:r>
             <a:pPr algn="ctr" indent="0" marL="0">
               <a:buNone/>
@@ -3959,7 +3959,7 @@
                 <a:ea typeface="Calibri" pitchFamily="34" charset="-122"/>
                 <a:cs typeface="Calibri" pitchFamily="34" charset="-120"/>
               </a:rPr>
-              <a:t>10.000x</a:t>
+              <a:t>~12.000x</a:t>
             </a:r>
             <a:pPr algn="ctr" indent="0" marL="0">
               <a:buNone/>
@@ -4334,7 +4334,7 @@
                           <a:ea typeface="Calibri" pitchFamily="34" charset="-122"/>
                           <a:cs typeface="Calibri" pitchFamily="34" charset="-120"/>
                         </a:rPr>
-                        <a:t>109.18</a:t>
+                        <a:t>109.19</a:t>
                       </a:r>
                       <a:endParaRPr lang="en-US" sz="1100" dirty="0">
                         <a:latin typeface="Calibri" charset="0"/>
@@ -4399,7 +4399,7 @@
                           <a:ea typeface="Calibri" pitchFamily="34" charset="-122"/>
                           <a:cs typeface="Calibri" pitchFamily="34" charset="-120"/>
                         </a:rPr>
-                        <a:t>47.1 ms</a:t>
+                        <a:t>39.0 ms</a:t>
                       </a:r>
                       <a:endParaRPr lang="en-US" sz="1100" dirty="0">
                         <a:latin typeface="Calibri" charset="0"/>
@@ -4596,7 +4596,7 @@
                           <a:ea typeface="Calibri" pitchFamily="34" charset="-122"/>
                           <a:cs typeface="Calibri" pitchFamily="34" charset="-120"/>
                         </a:rPr>
-                        <a:t>3.9 us</a:t>
+                        <a:t>3.1 us</a:t>
                       </a:r>
                       <a:endParaRPr lang="en-US" sz="1100" dirty="0">
                         <a:latin typeface="Calibri" charset="0"/>
@@ -4793,7 +4793,7 @@
                           <a:ea typeface="Calibri" pitchFamily="34" charset="-122"/>
                           <a:cs typeface="Calibri" pitchFamily="34" charset="-120"/>
                         </a:rPr>
-                        <a:t>3.7 us</a:t>
+                        <a:t>2.9 us</a:t>
                       </a:r>
                       <a:endParaRPr lang="en-US" sz="1100" dirty="0">
                         <a:latin typeface="Calibri" charset="0"/>
@@ -4990,7 +4990,7 @@
                           <a:ea typeface="Calibri" pitchFamily="34" charset="-122"/>
                           <a:cs typeface="Calibri" pitchFamily="34" charset="-120"/>
                         </a:rPr>
-                        <a:t>4.5 us</a:t>
+                        <a:t>3.3 us</a:t>
                       </a:r>
                       <a:endParaRPr lang="en-US" sz="1100" dirty="0">
                         <a:latin typeface="Calibri" charset="0"/>
@@ -5412,7 +5412,7 @@
                 <a:ea typeface="Calibri" pitchFamily="34" charset="-122"/>
                 <a:cs typeface="Calibri" pitchFamily="34" charset="-120"/>
               </a:rPr>
-              <a:t>Multi-Device-Datensatz macht den Unterschied:</a:t>
+              <a:t>Signal vorhanden — aber target-abhängig:</a:t>
             </a:r>
             <a:endParaRPr lang="en-US" sz="1100" dirty="0"/>
           </a:p>
@@ -5454,7 +5454,7 @@
                 <a:ea typeface="Calibri" pitchFamily="34" charset="-122"/>
                 <a:cs typeface="Calibri" pitchFamily="34" charset="-120"/>
               </a:rPr>
-              <a:t>Single Device: </a:t>
+              <a:t>vs. Trainings-Target (y_extrap): </a:t>
             </a:r>
             <a:pPr indent="0" marL="0">
               <a:spcAft>
@@ -5463,15 +5463,15 @@
               <a:buNone/>
             </a:pPr>
             <a:r>
-              <a:rPr lang="en-US" sz="1100" dirty="0">
+              <a:rPr lang="en-US" sz="1100" b="1" dirty="0">
                 <a:solidFill>
-                  <a:srgbClr val="E94560"/>
+                  <a:srgbClr val="27AE60"/>
                 </a:solidFill>
                 <a:latin typeface="Calibri" pitchFamily="34" charset="0"/>
                 <a:ea typeface="Calibri" pitchFamily="34" charset="-122"/>
                 <a:cs typeface="Calibri" pitchFamily="34" charset="-120"/>
               </a:rPr>
-              <a:t>TinyML C=0.50 = Mean-Predictor</a:t>
+              <a:t>TinyML C=0.66, RF C=0.69</a:t>
             </a:r>
             <a:endParaRPr lang="en-US" sz="1100" dirty="0"/>
           </a:p>
@@ -5485,13 +5485,13 @@
             <a:r>
               <a:rPr lang="en-US" sz="1100" dirty="0">
                 <a:solidFill>
-                  <a:srgbClr val="64748B"/>
+                  <a:srgbClr val="27AE60"/>
                 </a:solidFill>
                 <a:latin typeface="Calibri" pitchFamily="34" charset="0"/>
                 <a:ea typeface="Calibri" pitchFamily="34" charset="-122"/>
                 <a:cs typeface="Calibri" pitchFamily="34" charset="-120"/>
               </a:rPr>
-              <a:t>  RF C=0.51, beide nicht über Floor</a:t>
+              <a:t>  beide signifikant über Floor (p &lt; 0.001)</a:t>
             </a:r>
             <a:endParaRPr lang="en-US" sz="1100" dirty="0"/>
           </a:p>
@@ -5531,7 +5531,7 @@
                 <a:ea typeface="Calibri" pitchFamily="34" charset="-122"/>
                 <a:cs typeface="Calibri" pitchFamily="34" charset="-120"/>
               </a:rPr>
-              <a:t>Multi-Device (jetzt): </a:t>
+              <a:t>vs. gemessene Restzeit (y_real): </a:t>
             </a:r>
             <a:pPr indent="0" marL="0">
               <a:spcAft>
@@ -5542,13 +5542,13 @@
             <a:r>
               <a:rPr lang="en-US" sz="1100" b="1" dirty="0">
                 <a:solidFill>
-                  <a:srgbClr val="27AE60"/>
+                  <a:srgbClr val="E94560"/>
                 </a:solidFill>
                 <a:latin typeface="Calibri" pitchFamily="34" charset="0"/>
                 <a:ea typeface="Calibri" pitchFamily="34" charset="-122"/>
                 <a:cs typeface="Calibri" pitchFamily="34" charset="-120"/>
               </a:rPr>
-              <a:t>TinyML C=0.67</a:t>
+              <a:t>kein signifikanter Vorsprung mehr</a:t>
             </a:r>
             <a:endParaRPr lang="en-US" sz="1100" dirty="0"/>
           </a:p>
@@ -5562,13 +5562,13 @@
             <a:r>
               <a:rPr lang="en-US" sz="1100" dirty="0">
                 <a:solidFill>
-                  <a:srgbClr val="27AE60"/>
+                  <a:srgbClr val="64748B"/>
                 </a:solidFill>
                 <a:latin typeface="Calibri" pitchFamily="34" charset="0"/>
                 <a:ea typeface="Calibri" pitchFamily="34" charset="-122"/>
                 <a:cs typeface="Calibri" pitchFamily="34" charset="-120"/>
               </a:rPr>
-              <a:t>  RF C=0.69, beide signifikant &gt; Floor (p&lt;=0.005)</a:t>
+              <a:t>  TinyML p=0.82; RF sogar unter Floor</a:t>
             </a:r>
             <a:endParaRPr lang="en-US" sz="1100" dirty="0"/>
           </a:p>
@@ -5730,7 +5730,7 @@
                 <a:ea typeface="Calibri" pitchFamily="34" charset="-122"/>
                 <a:cs typeface="Calibri" pitchFamily="34" charset="-120"/>
               </a:rPr>
-              <a:t>Statistisch ununterscheidbar (p=0.83):</a:t>
+              <a:t>Statistisch ununterscheidbar (p=0.11):</a:t>
             </a:r>
             <a:endParaRPr lang="en-US" sz="1100" dirty="0"/>
           </a:p>
@@ -5809,7 +5809,7 @@
                 <a:ea typeface="Calibri" pitchFamily="34" charset="-122"/>
                 <a:cs typeface="Calibri" pitchFamily="34" charset="-120"/>
               </a:rPr>
-              <a:t>  MAE 3.21 h, C-Index 0.776</a:t>
+              <a:t>  MAE 3.30 h, C-Index 0.770</a:t>
             </a:r>
             <a:endParaRPr lang="en-US" sz="1100" dirty="0"/>
           </a:p>
@@ -5886,7 +5886,7 @@
                 <a:ea typeface="Calibri" pitchFamily="34" charset="-122"/>
                 <a:cs typeface="Calibri" pitchFamily="34" charset="-120"/>
               </a:rPr>
-              <a:t>  MAE 3.24 h, C-Index 0.777</a:t>
+              <a:t>  MAE 3.37 h, C-Index 0.762</a:t>
             </a:r>
             <a:endParaRPr lang="en-US" sz="1100" dirty="0"/>
           </a:p>
@@ -5925,7 +5925,7 @@
                 <a:ea typeface="Calibri" pitchFamily="34" charset="-122"/>
                 <a:cs typeface="Calibri" pitchFamily="34" charset="-120"/>
               </a:rPr>
-              <a:t>Hardware-Zugang trägt nichts Messbares für 'Stunden bis 0%' bei.</a:t>
+              <a:t>Hardware-Vorteil zahlt sich erst bei sehr langen Restzeiten aus (&gt;=30 h: C 0.98 vs. 0.64).</a:t>
             </a:r>
             <a:endParaRPr lang="en-US" sz="1100" dirty="0"/>
           </a:p>
@@ -6443,7 +6443,7 @@
                 <a:ea typeface="Calibri" pitchFamily="34" charset="-122"/>
                 <a:cs typeface="Calibri" pitchFamily="34" charset="-120"/>
               </a:rPr>
-              <a:t>TinyML schafft dort nur C-Index 0,60, während Random Forest auf denselben Daten 0,76 erreicht. Warum genau, ist mit den aktuellen Daten nicht erklärbar — offen für Folgearbeiten.</a:t>
+              <a:t>TinyML schafft dort nur C-Index 0,57, während Random Forest auf denselben Daten 0,77 erreicht. Warum genau, ist mit den aktuellen Daten nicht erklärbar — offen für Folgearbeiten.</a:t>
             </a:r>
             <a:endParaRPr lang="en-US" sz="1200" dirty="0"/>
           </a:p>
@@ -6697,7 +6697,7 @@
                 <a:ea typeface="Calibri" pitchFamily="34" charset="-122"/>
                 <a:cs typeface="Calibri" pitchFamily="34" charset="-120"/>
               </a:rPr>
-              <a:t>TinyML schlägt Mean (C 0.67), bleibt aber hinter Linear/Exp/Google (C ~ 0.77). Google nicht signifikant besser als Linear.</a:t>
+              <a:t>TinyML schlägt Mean (C 0.66), bleibt aber hinter Linear/Exp/Google (C ~ 0.77). Google nicht signifikant besser als Linear.</a:t>
             </a:r>
             <a:endParaRPr lang="en-US" sz="1200" dirty="0"/>
           </a:p>
@@ -6802,7 +6802,7 @@
                 <a:ea typeface="Calibri" pitchFamily="34" charset="-122"/>
                 <a:cs typeface="Calibri" pitchFamily="34" charset="-120"/>
               </a:rPr>
-              <a:t>TFLite-Quantisierung funktioniert. 14.4 KB, 4.5 us. Auf dieser Achse hat TinyML uneingeschränkt seinen Wert.</a:t>
+              <a:t>TFLite-Quantisierung funktioniert. 14.4 KB, 3.3 us. Auf dieser Achse hat TinyML uneingeschränkt seinen Wert.</a:t>
             </a:r>
             <a:endParaRPr lang="en-US" sz="1200" dirty="0"/>
           </a:p>
@@ -6907,7 +6907,7 @@
                 <a:ea typeface="Calibri" pitchFamily="34" charset="-122"/>
                 <a:cs typeface="Calibri" pitchFamily="34" charset="-120"/>
               </a:rPr>
-              <a:t>TinyML 0,79 auf Pixel 7 Pro, 0,59 auf Xiaomi. Engpass nicht am Modell, sondern an Sensor-Qualität und fehlendem Entlade-Verlauf (Xiaomi-Akku 88,8 % der Zeit voll).</a:t>
+              <a:t>TinyML 0,75 auf Pixel 7 Pro, 0,59 auf Xiaomi. Engpass nicht am Modell, sondern an Sensor-Qualität und fehlendem Entlade-Verlauf (Xiaomi-Akku 88,8 % der Zeit voll).</a:t>
             </a:r>
             <a:endParaRPr lang="en-US" sz="1200" dirty="0"/>
           </a:p>
@@ -13102,7 +13102,7 @@
                           <a:ea typeface="Calibri" pitchFamily="34" charset="-122"/>
                           <a:cs typeface="Calibri" pitchFamily="34" charset="-120"/>
                         </a:rPr>
-                        <a:t>0.53 h</a:t>
+                        <a:t>6.53 h</a:t>
                       </a:r>
                       <a:endParaRPr lang="en-US" sz="1200" dirty="0">
                         <a:latin typeface="Calibri" charset="0"/>
@@ -13167,7 +13167,7 @@
                           <a:ea typeface="Calibri" pitchFamily="34" charset="-122"/>
                           <a:cs typeface="Calibri" pitchFamily="34" charset="-120"/>
                         </a:rPr>
-                        <a:t>9.96 h</a:t>
+                        <a:t>11.06 h</a:t>
                       </a:r>
                       <a:endParaRPr lang="en-US" sz="1200" dirty="0">
                         <a:latin typeface="Calibri" charset="0"/>
@@ -13232,7 +13232,7 @@
                           <a:ea typeface="Calibri" pitchFamily="34" charset="-122"/>
                           <a:cs typeface="Calibri" pitchFamily="34" charset="-120"/>
                         </a:rPr>
-                        <a:t>~19x</a:t>
+                        <a:t>~1.69x</a:t>
                       </a:r>
                       <a:endParaRPr lang="en-US" sz="1200" dirty="0">
                         <a:latin typeface="Calibri" charset="0"/>
@@ -13713,7 +13713,7 @@
                 <a:ea typeface="Calibri" pitchFamily="34" charset="-122"/>
                 <a:cs typeface="Calibri" pitchFamily="34" charset="-120"/>
               </a:rPr>
-              <a:t>Bei zufälliger Aufteilung 'sieht' das Modell unbemerkt zukünftige Daten — das täuscht 19x bessere Performance vor (Single-Device).</a:t>
+              <a:t>Bei zufälliger Aufteilung 'sieht' das Modell unbemerkt zukünftige Daten — der Test-MAE wirkt dadurch um Faktor ~1,7 besser (Single-Device: 6,5 statt 11,1 h).</a:t>
             </a:r>
             <a:endParaRPr lang="en-US" sz="1300" dirty="0"/>
           </a:p>
@@ -13735,27 +13735,6 @@
                 <a:cs typeface="Calibri" pitchFamily="34" charset="-120"/>
               </a:rPr>
               <a:t>Mit 4 Geräten (Multi-Device) schrumpft die Verzerrung auf 1,24x — die Datenvielfalt schwächt das Lecken ab. Vergleichbar mit Albelali &amp; Ahmed (2025).</a:t>
-            </a:r>
-            <a:endParaRPr lang="en-US" sz="1300" dirty="0"/>
-          </a:p>
-          <a:p>
-            <a:pPr marL="342900" indent="-342900">
-              <a:spcAft>
-                <a:spcPts val="800"/>
-              </a:spcAft>
-              <a:buSzPct val="100000"/>
-              <a:buChar char="•"/>
-            </a:pPr>
-            <a:r>
-              <a:rPr lang="en-US" sz="1300" dirty="0">
-                <a:solidFill>
-                  <a:srgbClr val="1A1A1A"/>
-                </a:solidFill>
-                <a:latin typeface="Calibri" pitchFamily="34" charset="0"/>
-                <a:ea typeface="Calibri" pitchFamily="34" charset="-122"/>
-                <a:cs typeface="Calibri" pitchFamily="34" charset="-120"/>
-              </a:rPr>
-              <a:t>Lehre: Wie stark der Effekt verfälscht, hängt von der Datenvielfalt ab — Folgearbeiten sollten ihre Aufteilungs-Methode immer angeben.</a:t>
             </a:r>
             <a:endParaRPr lang="en-US" sz="1300" dirty="0"/>
           </a:p>
@@ -13904,7 +13883,7 @@
                 <a:ea typeface="Calibri" pitchFamily="34" charset="-122"/>
                 <a:cs typeface="Calibri" pitchFamily="34" charset="-120"/>
               </a:rPr>
-              <a:t>Ergebnis 1: Common Subset (n=2.827)</a:t>
+              <a:t>Ergebnis 1: Common Subset (n=2.883)</a:t>
             </a:r>
             <a:endParaRPr lang="en-US" sz="2800" dirty="0"/>
           </a:p>
@@ -14467,7 +14446,7 @@
                           <a:ea typeface="Calibri" pitchFamily="34" charset="-122"/>
                           <a:cs typeface="Calibri" pitchFamily="34" charset="-120"/>
                         </a:rPr>
-                        <a:t>6.51</a:t>
+                        <a:t>6.52</a:t>
                       </a:r>
                       <a:endParaRPr lang="en-US" sz="1200" dirty="0">
                         <a:latin typeface="Calibri" charset="0"/>
@@ -14532,7 +14511,7 @@
                           <a:ea typeface="Calibri" pitchFamily="34" charset="-122"/>
                           <a:cs typeface="Calibri" pitchFamily="34" charset="-120"/>
                         </a:rPr>
-                        <a:t>9.28</a:t>
+                        <a:t>9.25</a:t>
                       </a:r>
                       <a:endParaRPr lang="en-US" sz="1200" dirty="0">
                         <a:latin typeface="Calibri" charset="0"/>
@@ -14662,7 +14641,7 @@
                           <a:ea typeface="Calibri" pitchFamily="34" charset="-122"/>
                           <a:cs typeface="Calibri" pitchFamily="34" charset="-120"/>
                         </a:rPr>
-                        <a:t>21.7%</a:t>
+                        <a:t>21.5%</a:t>
                       </a:r>
                       <a:endParaRPr lang="en-US" sz="1200" dirty="0">
                         <a:latin typeface="Calibri" charset="0"/>
@@ -14794,7 +14773,7 @@
                           <a:ea typeface="Calibri" pitchFamily="34" charset="-122"/>
                           <a:cs typeface="Calibri" pitchFamily="34" charset="-120"/>
                         </a:rPr>
-                        <a:t>4.28</a:t>
+                        <a:t>4.60</a:t>
                       </a:r>
                       <a:endParaRPr lang="en-US" sz="1200" dirty="0">
                         <a:latin typeface="Calibri" charset="0"/>
@@ -14859,7 +14838,7 @@
                           <a:ea typeface="Calibri" pitchFamily="34" charset="-122"/>
                           <a:cs typeface="Calibri" pitchFamily="34" charset="-120"/>
                         </a:rPr>
-                        <a:t>8.38</a:t>
+                        <a:t>8.47</a:t>
                       </a:r>
                       <a:endParaRPr lang="en-US" sz="1200" dirty="0">
                         <a:latin typeface="Calibri" charset="0"/>
@@ -14924,7 +14903,7 @@
                           <a:ea typeface="Calibri" pitchFamily="34" charset="-122"/>
                           <a:cs typeface="Calibri" pitchFamily="34" charset="-120"/>
                         </a:rPr>
-                        <a:t>0.666 [0.656, 0.675]</a:t>
+                        <a:t>0.656 [0.647, 0.664]</a:t>
                       </a:r>
                       <a:endParaRPr lang="en-US" sz="1200" dirty="0">
                         <a:latin typeface="Calibri" charset="0"/>
@@ -14989,7 +14968,7 @@
                           <a:ea typeface="Calibri" pitchFamily="34" charset="-122"/>
                           <a:cs typeface="Calibri" pitchFamily="34" charset="-120"/>
                         </a:rPr>
-                        <a:t>51.1%</a:t>
+                        <a:t>43.7%</a:t>
                       </a:r>
                       <a:endParaRPr lang="en-US" sz="1200" dirty="0">
                         <a:latin typeface="Calibri" charset="0"/>
@@ -15121,7 +15100,7 @@
                           <a:ea typeface="Calibri" pitchFamily="34" charset="-122"/>
                           <a:cs typeface="Calibri" pitchFamily="34" charset="-120"/>
                         </a:rPr>
-                        <a:t>4.01</a:t>
+                        <a:t>4.06</a:t>
                       </a:r>
                       <a:endParaRPr lang="en-US" sz="1200" dirty="0">
                         <a:latin typeface="Calibri" charset="0"/>
@@ -15186,7 +15165,7 @@
                           <a:ea typeface="Calibri" pitchFamily="34" charset="-122"/>
                           <a:cs typeface="Calibri" pitchFamily="34" charset="-120"/>
                         </a:rPr>
-                        <a:t>7.54</a:t>
+                        <a:t>7.56</a:t>
                       </a:r>
                       <a:endParaRPr lang="en-US" sz="1200" dirty="0">
                         <a:latin typeface="Calibri" charset="0"/>
@@ -15251,7 +15230,7 @@
                           <a:ea typeface="Calibri" pitchFamily="34" charset="-122"/>
                           <a:cs typeface="Calibri" pitchFamily="34" charset="-120"/>
                         </a:rPr>
-                        <a:t>0.686 [0.673, 0.696]</a:t>
+                        <a:t>0.685 [0.673, 0.695]</a:t>
                       </a:r>
                       <a:endParaRPr lang="en-US" sz="1200" dirty="0">
                         <a:latin typeface="Calibri" charset="0"/>
@@ -15316,7 +15295,7 @@
                           <a:ea typeface="Calibri" pitchFamily="34" charset="-122"/>
                           <a:cs typeface="Calibri" pitchFamily="34" charset="-120"/>
                         </a:rPr>
-                        <a:t>45.2%</a:t>
+                        <a:t>46.4%</a:t>
                       </a:r>
                       <a:endParaRPr lang="en-US" sz="1200" dirty="0">
                         <a:latin typeface="Calibri" charset="0"/>
@@ -15448,7 +15427,7 @@
                           <a:ea typeface="Calibri" pitchFamily="34" charset="-122"/>
                           <a:cs typeface="Calibri" pitchFamily="34" charset="-120"/>
                         </a:rPr>
-                        <a:t>3.21</a:t>
+                        <a:t>3.30</a:t>
                       </a:r>
                       <a:endParaRPr lang="en-US" sz="1200" dirty="0">
                         <a:latin typeface="Calibri" charset="0"/>
@@ -15513,7 +15492,72 @@
                           <a:ea typeface="Calibri" pitchFamily="34" charset="-122"/>
                           <a:cs typeface="Calibri" pitchFamily="34" charset="-120"/>
                         </a:rPr>
-                        <a:t>8.55</a:t>
+                        <a:t>8.57</a:t>
+                      </a:r>
+                      <a:endParaRPr lang="en-US" sz="1200" dirty="0">
+                        <a:latin typeface="Calibri" charset="0"/>
+                        <a:ea typeface="Calibri" charset="0"/>
+                        <a:cs typeface="Calibri" charset="0"/>
+                      </a:endParaRPr>
+                    </a:p>
+                  </a:txBody>
+                  <a:tcPr marL="91440" marR="91440" marT="45720" marB="45720">
+                    <a:lnL w="6350" cap="flat" cmpd="sng" algn="ctr">
+                      <a:solidFill>
+                        <a:srgbClr val="E2E8F0"/>
+                      </a:solidFill>
+                      <a:prstDash val="solid"/>
+                      <a:round/>
+                      <a:headEnd type="none" w="med" len="med"/>
+                      <a:tailEnd type="none" w="med" len="med"/>
+                    </a:lnL>
+                    <a:lnR w="6350" cap="flat" cmpd="sng" algn="ctr">
+                      <a:solidFill>
+                        <a:srgbClr val="E2E8F0"/>
+                      </a:solidFill>
+                      <a:prstDash val="solid"/>
+                      <a:round/>
+                      <a:headEnd type="none" w="med" len="med"/>
+                      <a:tailEnd type="none" w="med" len="med"/>
+                    </a:lnR>
+                    <a:lnT w="6350" cap="flat" cmpd="sng" algn="ctr">
+                      <a:solidFill>
+                        <a:srgbClr val="E2E8F0"/>
+                      </a:solidFill>
+                      <a:prstDash val="solid"/>
+                      <a:round/>
+                      <a:headEnd type="none" w="med" len="med"/>
+                      <a:tailEnd type="none" w="med" len="med"/>
+                    </a:lnT>
+                    <a:lnB w="6350" cap="flat" cmpd="sng" algn="ctr">
+                      <a:solidFill>
+                        <a:srgbClr val="E2E8F0"/>
+                      </a:solidFill>
+                      <a:prstDash val="solid"/>
+                      <a:round/>
+                      <a:headEnd type="none" w="med" len="med"/>
+                      <a:tailEnd type="none" w="med" len="med"/>
+                    </a:lnB>
+                  </a:tcPr>
+                </a:tc>
+                <a:tc>
+                  <a:txBody>
+                    <a:bodyPr/>
+                    <a:lstStyle/>
+                    <a:p>
+                      <a:pPr indent="0" marL="0">
+                        <a:buNone/>
+                      </a:pPr>
+                      <a:r>
+                        <a:rPr lang="en-US" sz="1200" b="1" dirty="0">
+                          <a:solidFill>
+                            <a:srgbClr val="27AE60"/>
+                          </a:solidFill>
+                          <a:latin typeface="Calibri" pitchFamily="34" charset="0"/>
+                          <a:ea typeface="Calibri" pitchFamily="34" charset="-122"/>
+                          <a:cs typeface="Calibri" pitchFamily="34" charset="-120"/>
+                        </a:rPr>
+                        <a:t>0.770 [0.761, 0.780]</a:t>
                       </a:r>
                       <a:endParaRPr lang="en-US" sz="1200" dirty="0">
                         <a:latin typeface="Calibri" charset="0"/>
@@ -15578,72 +15622,7 @@
                           <a:ea typeface="Calibri" pitchFamily="34" charset="-122"/>
                           <a:cs typeface="Calibri" pitchFamily="34" charset="-120"/>
                         </a:rPr>
-                        <a:t>0.776 [0.767, 0.784]</a:t>
-                      </a:r>
-                      <a:endParaRPr lang="en-US" sz="1200" dirty="0">
-                        <a:latin typeface="Calibri" charset="0"/>
-                        <a:ea typeface="Calibri" charset="0"/>
-                        <a:cs typeface="Calibri" charset="0"/>
-                      </a:endParaRPr>
-                    </a:p>
-                  </a:txBody>
-                  <a:tcPr marL="91440" marR="91440" marT="45720" marB="45720">
-                    <a:lnL w="6350" cap="flat" cmpd="sng" algn="ctr">
-                      <a:solidFill>
-                        <a:srgbClr val="E2E8F0"/>
-                      </a:solidFill>
-                      <a:prstDash val="solid"/>
-                      <a:round/>
-                      <a:headEnd type="none" w="med" len="med"/>
-                      <a:tailEnd type="none" w="med" len="med"/>
-                    </a:lnL>
-                    <a:lnR w="6350" cap="flat" cmpd="sng" algn="ctr">
-                      <a:solidFill>
-                        <a:srgbClr val="E2E8F0"/>
-                      </a:solidFill>
-                      <a:prstDash val="solid"/>
-                      <a:round/>
-                      <a:headEnd type="none" w="med" len="med"/>
-                      <a:tailEnd type="none" w="med" len="med"/>
-                    </a:lnR>
-                    <a:lnT w="6350" cap="flat" cmpd="sng" algn="ctr">
-                      <a:solidFill>
-                        <a:srgbClr val="E2E8F0"/>
-                      </a:solidFill>
-                      <a:prstDash val="solid"/>
-                      <a:round/>
-                      <a:headEnd type="none" w="med" len="med"/>
-                      <a:tailEnd type="none" w="med" len="med"/>
-                    </a:lnT>
-                    <a:lnB w="6350" cap="flat" cmpd="sng" algn="ctr">
-                      <a:solidFill>
-                        <a:srgbClr val="E2E8F0"/>
-                      </a:solidFill>
-                      <a:prstDash val="solid"/>
-                      <a:round/>
-                      <a:headEnd type="none" w="med" len="med"/>
-                      <a:tailEnd type="none" w="med" len="med"/>
-                    </a:lnB>
-                  </a:tcPr>
-                </a:tc>
-                <a:tc>
-                  <a:txBody>
-                    <a:bodyPr/>
-                    <a:lstStyle/>
-                    <a:p>
-                      <a:pPr indent="0" marL="0">
-                        <a:buNone/>
-                      </a:pPr>
-                      <a:r>
-                        <a:rPr lang="en-US" sz="1200" dirty="0">
-                          <a:solidFill>
-                            <a:srgbClr val="000000"/>
-                          </a:solidFill>
-                          <a:latin typeface="Calibri" pitchFamily="34" charset="0"/>
-                          <a:ea typeface="Calibri" pitchFamily="34" charset="-122"/>
-                          <a:cs typeface="Calibri" pitchFamily="34" charset="-120"/>
-                        </a:rPr>
-                        <a:t>58.3%</a:t>
+                        <a:t>57.3%</a:t>
                       </a:r>
                       <a:endParaRPr lang="en-US" sz="1200" dirty="0">
                         <a:latin typeface="Calibri" charset="0"/>
@@ -15775,7 +15754,7 @@
                           <a:ea typeface="Calibri" pitchFamily="34" charset="-122"/>
                           <a:cs typeface="Calibri" pitchFamily="34" charset="-120"/>
                         </a:rPr>
-                        <a:t>3.49</a:t>
+                        <a:t>3.63</a:t>
                       </a:r>
                       <a:endParaRPr lang="en-US" sz="1200" dirty="0">
                         <a:latin typeface="Calibri" charset="0"/>
@@ -15840,7 +15819,7 @@
                           <a:ea typeface="Calibri" pitchFamily="34" charset="-122"/>
                           <a:cs typeface="Calibri" pitchFamily="34" charset="-120"/>
                         </a:rPr>
-                        <a:t>8.88</a:t>
+                        <a:t>9.04</a:t>
                       </a:r>
                       <a:endParaRPr lang="en-US" sz="1200" dirty="0">
                         <a:latin typeface="Calibri" charset="0"/>
@@ -15905,7 +15884,7 @@
                           <a:ea typeface="Calibri" pitchFamily="34" charset="-122"/>
                           <a:cs typeface="Calibri" pitchFamily="34" charset="-120"/>
                         </a:rPr>
-                        <a:t>0.773 [0.764, 0.781]</a:t>
+                        <a:t>0.767 [0.758, 0.776]</a:t>
                       </a:r>
                       <a:endParaRPr lang="en-US" sz="1200" dirty="0">
                         <a:latin typeface="Calibri" charset="0"/>
@@ -15970,7 +15949,7 @@
                           <a:ea typeface="Calibri" pitchFamily="34" charset="-122"/>
                           <a:cs typeface="Calibri" pitchFamily="34" charset="-120"/>
                         </a:rPr>
-                        <a:t>59.8%</a:t>
+                        <a:t>59.0%</a:t>
                       </a:r>
                       <a:endParaRPr lang="en-US" sz="1200" dirty="0">
                         <a:latin typeface="Calibri" charset="0"/>
@@ -16102,7 +16081,7 @@
                           <a:ea typeface="Calibri" pitchFamily="34" charset="-122"/>
                           <a:cs typeface="Calibri" pitchFamily="34" charset="-120"/>
                         </a:rPr>
-                        <a:t>3.24</a:t>
+                        <a:t>3.37</a:t>
                       </a:r>
                       <a:endParaRPr lang="en-US" sz="1200" dirty="0">
                         <a:latin typeface="Calibri" charset="0"/>
@@ -16167,7 +16146,7 @@
                           <a:ea typeface="Calibri" pitchFamily="34" charset="-122"/>
                           <a:cs typeface="Calibri" pitchFamily="34" charset="-120"/>
                         </a:rPr>
-                        <a:t>8.55</a:t>
+                        <a:t>8.65</a:t>
                       </a:r>
                       <a:endParaRPr lang="en-US" sz="1200" dirty="0">
                         <a:latin typeface="Calibri" charset="0"/>
@@ -16226,13 +16205,13 @@
                       <a:r>
                         <a:rPr lang="en-US" sz="1200" b="1" dirty="0">
                           <a:solidFill>
-                            <a:srgbClr val="27AE60"/>
+                            <a:srgbClr val="000000"/>
                           </a:solidFill>
                           <a:latin typeface="Calibri" pitchFamily="34" charset="0"/>
                           <a:ea typeface="Calibri" pitchFamily="34" charset="-122"/>
                           <a:cs typeface="Calibri" pitchFamily="34" charset="-120"/>
                         </a:rPr>
-                        <a:t>0.777 [0.767, 0.785]</a:t>
+                        <a:t>0.762 [0.751, 0.772]</a:t>
                       </a:r>
                       <a:endParaRPr lang="en-US" sz="1200" dirty="0">
                         <a:latin typeface="Calibri" charset="0"/>
@@ -16297,7 +16276,7 @@
                           <a:ea typeface="Calibri" pitchFamily="34" charset="-122"/>
                           <a:cs typeface="Calibri" pitchFamily="34" charset="-120"/>
                         </a:rPr>
-                        <a:t>60.1%</a:t>
+                        <a:t>59.0%</a:t>
                       </a:r>
                       <a:endParaRPr lang="en-US" sz="1200" dirty="0">
                         <a:latin typeface="Calibri" charset="0"/>
@@ -16596,7 +16575,7 @@
                 <a:ea typeface="Calibri" pitchFamily="34" charset="-122"/>
                 <a:cs typeface="Calibri" pitchFamily="34" charset="-120"/>
               </a:rPr>
-              <a:t>Paarweise Permutationstests auf C-Index (Common Subset n=2.827)</a:t>
+              <a:t>Paarweise Tests auf C-Index (paired Bootstrap, BH-korrigiert; Common Subset n=2.883)</a:t>
             </a:r>
             <a:endParaRPr lang="en-US" sz="1200" dirty="0"/>
           </a:p>
@@ -17189,7 +17168,7 @@
                           <a:ea typeface="Calibri" pitchFamily="34" charset="-122"/>
                           <a:cs typeface="Calibri" pitchFamily="34" charset="-120"/>
                         </a:rPr>
-                        <a:t>0.666</a:t>
+                        <a:t>0.656</a:t>
                       </a:r>
                       <a:endParaRPr lang="en-US" sz="1150" dirty="0">
                         <a:latin typeface="Calibri" charset="0"/>
@@ -17319,7 +17298,7 @@
                           <a:ea typeface="Calibri" pitchFamily="34" charset="-122"/>
                           <a:cs typeface="Calibri" pitchFamily="34" charset="-120"/>
                         </a:rPr>
-                        <a:t>+0.166</a:t>
+                        <a:t>+0.156</a:t>
                       </a:r>
                       <a:endParaRPr lang="en-US" sz="1150" dirty="0">
                         <a:latin typeface="Calibri" charset="0"/>
@@ -17384,7 +17363,7 @@
                           <a:ea typeface="Calibri" pitchFamily="34" charset="-122"/>
                           <a:cs typeface="Calibri" pitchFamily="34" charset="-120"/>
                         </a:rPr>
-                        <a:t>0.005</a:t>
+                        <a:t>&lt;0.001</a:t>
                       </a:r>
                       <a:endParaRPr lang="en-US" sz="1150" dirty="0">
                         <a:latin typeface="Calibri" charset="0"/>
@@ -17581,7 +17560,7 @@
                           <a:ea typeface="Calibri" pitchFamily="34" charset="-122"/>
                           <a:cs typeface="Calibri" pitchFamily="34" charset="-120"/>
                         </a:rPr>
-                        <a:t>0.686</a:t>
+                        <a:t>0.685</a:t>
                       </a:r>
                       <a:endParaRPr lang="en-US" sz="1150" dirty="0">
                         <a:latin typeface="Calibri" charset="0"/>
@@ -17711,7 +17690,7 @@
                           <a:ea typeface="Calibri" pitchFamily="34" charset="-122"/>
                           <a:cs typeface="Calibri" pitchFamily="34" charset="-120"/>
                         </a:rPr>
-                        <a:t>+0.186</a:t>
+                        <a:t>+0.184</a:t>
                       </a:r>
                       <a:endParaRPr lang="en-US" sz="1150" dirty="0">
                         <a:latin typeface="Calibri" charset="0"/>
@@ -17776,7 +17755,7 @@
                           <a:ea typeface="Calibri" pitchFamily="34" charset="-122"/>
                           <a:cs typeface="Calibri" pitchFamily="34" charset="-120"/>
                         </a:rPr>
-                        <a:t>0.005</a:t>
+                        <a:t>&lt;0.001</a:t>
                       </a:r>
                       <a:endParaRPr lang="en-US" sz="1150" dirty="0">
                         <a:latin typeface="Calibri" charset="0"/>
@@ -17973,7 +17952,7 @@
                           <a:ea typeface="Calibri" pitchFamily="34" charset="-122"/>
                           <a:cs typeface="Calibri" pitchFamily="34" charset="-120"/>
                         </a:rPr>
-                        <a:t>0.776</a:t>
+                        <a:t>0.770</a:t>
                       </a:r>
                       <a:endParaRPr lang="en-US" sz="1150" dirty="0">
                         <a:latin typeface="Calibri" charset="0"/>
@@ -18038,7 +18017,7 @@
                           <a:ea typeface="Calibri" pitchFamily="34" charset="-122"/>
                           <a:cs typeface="Calibri" pitchFamily="34" charset="-120"/>
                         </a:rPr>
-                        <a:t>0.773</a:t>
+                        <a:t>0.767</a:t>
                       </a:r>
                       <a:endParaRPr lang="en-US" sz="1150" dirty="0">
                         <a:latin typeface="Calibri" charset="0"/>
@@ -18103,7 +18082,7 @@
                           <a:ea typeface="Calibri" pitchFamily="34" charset="-122"/>
                           <a:cs typeface="Calibri" pitchFamily="34" charset="-120"/>
                         </a:rPr>
-                        <a:t>+0.003</a:t>
+                        <a:t>+0.004</a:t>
                       </a:r>
                       <a:endParaRPr lang="en-US" sz="1150" dirty="0">
                         <a:latin typeface="Calibri" charset="0"/>
@@ -18168,7 +18147,7 @@
                           <a:ea typeface="Calibri" pitchFamily="34" charset="-122"/>
                           <a:cs typeface="Calibri" pitchFamily="34" charset="-120"/>
                         </a:rPr>
-                        <a:t>0.30</a:t>
+                        <a:t>0.27</a:t>
                       </a:r>
                       <a:endParaRPr lang="en-US" sz="1150" dirty="0">
                         <a:latin typeface="Calibri" charset="0"/>
@@ -18365,7 +18344,7 @@
                           <a:ea typeface="Calibri" pitchFamily="34" charset="-122"/>
                           <a:cs typeface="Calibri" pitchFamily="34" charset="-120"/>
                         </a:rPr>
-                        <a:t>0.776</a:t>
+                        <a:t>0.770</a:t>
                       </a:r>
                       <a:endParaRPr lang="en-US" sz="1150" dirty="0">
                         <a:latin typeface="Calibri" charset="0"/>
@@ -18430,7 +18409,7 @@
                           <a:ea typeface="Calibri" pitchFamily="34" charset="-122"/>
                           <a:cs typeface="Calibri" pitchFamily="34" charset="-120"/>
                         </a:rPr>
-                        <a:t>0.777</a:t>
+                        <a:t>0.762</a:t>
                       </a:r>
                       <a:endParaRPr lang="en-US" sz="1150" dirty="0">
                         <a:latin typeface="Calibri" charset="0"/>
@@ -18495,7 +18474,7 @@
                           <a:ea typeface="Calibri" pitchFamily="34" charset="-122"/>
                           <a:cs typeface="Calibri" pitchFamily="34" charset="-120"/>
                         </a:rPr>
-                        <a:t>-0.001</a:t>
+                        <a:t>+0.009</a:t>
                       </a:r>
                       <a:endParaRPr lang="en-US" sz="1150" dirty="0">
                         <a:latin typeface="Calibri" charset="0"/>
@@ -18560,7 +18539,7 @@
                           <a:ea typeface="Calibri" pitchFamily="34" charset="-122"/>
                           <a:cs typeface="Calibri" pitchFamily="34" charset="-120"/>
                         </a:rPr>
-                        <a:t>0.83</a:t>
+                        <a:t>0.11</a:t>
                       </a:r>
                       <a:endParaRPr lang="en-US" sz="1150" dirty="0">
                         <a:latin typeface="Calibri" charset="0"/>
@@ -18757,7 +18736,7 @@
                           <a:ea typeface="Calibri" pitchFamily="34" charset="-122"/>
                           <a:cs typeface="Calibri" pitchFamily="34" charset="-120"/>
                         </a:rPr>
-                        <a:t>0.666</a:t>
+                        <a:t>0.656</a:t>
                       </a:r>
                       <a:endParaRPr lang="en-US" sz="1150" dirty="0">
                         <a:latin typeface="Calibri" charset="0"/>
@@ -18822,7 +18801,7 @@
                           <a:ea typeface="Calibri" pitchFamily="34" charset="-122"/>
                           <a:cs typeface="Calibri" pitchFamily="34" charset="-120"/>
                         </a:rPr>
-                        <a:t>0.777</a:t>
+                        <a:t>0.762</a:t>
                       </a:r>
                       <a:endParaRPr lang="en-US" sz="1150" dirty="0">
                         <a:latin typeface="Calibri" charset="0"/>
@@ -18887,7 +18866,7 @@
                           <a:ea typeface="Calibri" pitchFamily="34" charset="-122"/>
                           <a:cs typeface="Calibri" pitchFamily="34" charset="-120"/>
                         </a:rPr>
-                        <a:t>-0.111</a:t>
+                        <a:t>-0.105</a:t>
                       </a:r>
                       <a:endParaRPr lang="en-US" sz="1150" dirty="0">
                         <a:latin typeface="Calibri" charset="0"/>
@@ -18952,7 +18931,7 @@
                           <a:ea typeface="Calibri" pitchFamily="34" charset="-122"/>
                           <a:cs typeface="Calibri" pitchFamily="34" charset="-120"/>
                         </a:rPr>
-                        <a:t>0.005</a:t>
+                        <a:t>&lt;0.001</a:t>
                       </a:r>
                       <a:endParaRPr lang="en-US" sz="1150" dirty="0">
                         <a:latin typeface="Calibri" charset="0"/>
@@ -19171,7 +19150,7 @@
                 <a:ea typeface="Calibri" pitchFamily="34" charset="-122"/>
                 <a:cs typeface="Calibri" pitchFamily="34" charset="-120"/>
               </a:rPr>
-              <a:t>Linear-Drain-Rate-Baseline ist statistisch nicht von Google-API unterscheidbar (p=0.83 für C, p=0.55 für MAE).</a:t>
+              <a:t>Linear-Drain-Rate-Baseline ist statistisch nicht von Google-API unterscheidbar (p=0.11 für C, p=0.16 für MAE) — Linear liegt numerisch sogar minimal vorn.</a:t>
             </a:r>
             <a:endParaRPr lang="en-US" sz="1100" dirty="0"/>
           </a:p>

--- a/paper/Paper_Verteidigung.pptx
+++ b/paper/Paper_Verteidigung.pptx
@@ -7320,7 +7320,7 @@
                 <a:ea typeface="Calibri" pitchFamily="34" charset="-122"/>
                 <a:cs typeface="Calibri" pitchFamily="34" charset="-120"/>
               </a:rPr>
-              <a:t>Forschungsfrage</a:t>
+              <a:t>Motivation: Akkuvorhersage auf Android</a:t>
             </a:r>
             <a:endParaRPr lang="en-US" sz="2800" dirty="0"/>
           </a:p>
@@ -7328,34 +7328,14 @@
       </p:sp>
       <p:sp>
         <p:nvSpPr>
-          <p:cNvPr id="3" name="Shape 1"/>
-          <p:cNvSpPr/>
-          <p:nvPr/>
-        </p:nvSpPr>
-        <p:spPr>
-          <a:xfrm>
-            <a:off x="457200" y="1188720"/>
-            <a:ext cx="73152" cy="1828800"/>
-          </a:xfrm>
-          <a:prstGeom prst="rect">
-            <a:avLst/>
-          </a:prstGeom>
-          <a:solidFill>
-            <a:srgbClr val="0F3460"/>
-          </a:solidFill>
-          <a:ln/>
-        </p:spPr>
-      </p:sp>
-      <p:sp>
-        <p:nvSpPr>
-          <p:cNvPr id="4" name="Text 2"/>
-          <p:cNvSpPr/>
-          <p:nvPr/>
-        </p:nvSpPr>
-        <p:spPr>
-          <a:xfrm>
-            <a:off x="777240" y="1188720"/>
-            <a:ext cx="7863840" cy="1828800"/>
+          <p:cNvPr id="3" name="Text 1"/>
+          <p:cNvSpPr/>
+          <p:nvPr/>
+        </p:nvSpPr>
+        <p:spPr>
+          <a:xfrm>
+            <a:off x="457200" y="1051560"/>
+            <a:ext cx="3931920" cy="365760"/>
           </a:xfrm>
           <a:prstGeom prst="rect">
             <a:avLst/>
@@ -7364,82 +7344,37 @@
           <a:ln/>
         </p:spPr>
         <p:txBody>
-          <a:bodyPr wrap="square" rtlCol="0" anchor="t"/>
+          <a:bodyPr wrap="square" rtlCol="0" anchor="ctr"/>
           <a:lstStyle/>
           <a:p>
             <a:pPr indent="0" marL="0">
               <a:buNone/>
             </a:pPr>
             <a:r>
-              <a:rPr lang="en-US" sz="2000" i="1" dirty="0">
+              <a:rPr lang="en-US" sz="1700" b="1" dirty="0">
                 <a:solidFill>
-                  <a:srgbClr val="16213E"/>
+                  <a:srgbClr val="0F3460"/>
                 </a:solidFill>
                 <a:latin typeface="Calibri" pitchFamily="34" charset="0"/>
                 <a:ea typeface="Calibri" pitchFamily="34" charset="-122"/>
                 <a:cs typeface="Calibri" pitchFamily="34" charset="-120"/>
               </a:rPr>
-              <a:t>"Wie gut kann TinyML die Akkulaufzeit auf Android vorhersagen im Vergleich zu exponentiellem Fitting und der nativen Google-API, bezogen auf Genauigkeit sowie Effizienz?"</a:t>
-            </a:r>
-            <a:endParaRPr lang="en-US" sz="2000" dirty="0"/>
+              <a:t>Problem</a:t>
+            </a:r>
+            <a:endParaRPr lang="en-US" sz="1700" dirty="0"/>
           </a:p>
         </p:txBody>
       </p:sp>
       <p:sp>
         <p:nvSpPr>
-          <p:cNvPr id="5" name="Shape 3"/>
-          <p:cNvSpPr/>
-          <p:nvPr/>
-        </p:nvSpPr>
-        <p:spPr>
-          <a:xfrm>
-            <a:off x="457200" y="3383280"/>
-            <a:ext cx="2377440" cy="1188720"/>
-          </a:xfrm>
-          <a:prstGeom prst="rect">
-            <a:avLst/>
-          </a:prstGeom>
-          <a:solidFill>
-            <a:srgbClr val="F5F7FA"/>
-          </a:solidFill>
-          <a:ln w="12700">
-            <a:solidFill>
-              <a:srgbClr val="E2E8F0"/>
-            </a:solidFill>
-            <a:prstDash val="solid"/>
-          </a:ln>
-        </p:spPr>
-      </p:sp>
-      <p:sp>
-        <p:nvSpPr>
-          <p:cNvPr id="6" name="Shape 4"/>
-          <p:cNvSpPr/>
-          <p:nvPr/>
-        </p:nvSpPr>
-        <p:spPr>
-          <a:xfrm>
-            <a:off x="457200" y="3383280"/>
-            <a:ext cx="2377440" cy="73152"/>
-          </a:xfrm>
-          <a:prstGeom prst="rect">
-            <a:avLst/>
-          </a:prstGeom>
-          <a:solidFill>
-            <a:srgbClr val="2196F3"/>
-          </a:solidFill>
-          <a:ln/>
-        </p:spPr>
-      </p:sp>
-      <p:sp>
-        <p:nvSpPr>
-          <p:cNvPr id="7" name="Text 5"/>
-          <p:cNvSpPr/>
-          <p:nvPr/>
-        </p:nvSpPr>
-        <p:spPr>
-          <a:xfrm>
-            <a:off x="548640" y="3493008"/>
-            <a:ext cx="2194560" cy="274320"/>
+          <p:cNvPr id="4" name="Text 2"/>
+          <p:cNvSpPr/>
+          <p:nvPr/>
+        </p:nvSpPr>
+        <p:spPr>
+          <a:xfrm>
+            <a:off x="457200" y="1417320"/>
+            <a:ext cx="3931920" cy="1645920"/>
           </a:xfrm>
           <a:prstGeom prst="rect">
             <a:avLst/>
@@ -7448,53 +7383,18 @@
           <a:ln/>
         </p:spPr>
         <p:txBody>
-          <a:bodyPr wrap="square" lIns="0" tIns="0" rIns="0" bIns="0" rtlCol="0" anchor="ctr"/>
+          <a:bodyPr wrap="square" rtlCol="0" anchor="ctr"/>
           <a:lstStyle/>
           <a:p>
-            <a:pPr indent="0" marL="0">
-              <a:buNone/>
+            <a:pPr marL="342900" indent="-342900">
+              <a:spcAft>
+                <a:spcPts val="600"/>
+              </a:spcAft>
+              <a:buSzPct val="100000"/>
+              <a:buChar char="•"/>
             </a:pPr>
             <a:r>
-              <a:rPr lang="en-US" sz="1100" b="1" dirty="0">
-                <a:solidFill>
-                  <a:srgbClr val="2196F3"/>
-                </a:solidFill>
-                <a:latin typeface="Calibri" pitchFamily="34" charset="0"/>
-                <a:ea typeface="Calibri" pitchFamily="34" charset="-122"/>
-                <a:cs typeface="Calibri" pitchFamily="34" charset="-120"/>
-              </a:rPr>
-              <a:t>Methode</a:t>
-            </a:r>
-            <a:endParaRPr lang="en-US" sz="1100" dirty="0"/>
-          </a:p>
-        </p:txBody>
-      </p:sp>
-      <p:sp>
-        <p:nvSpPr>
-          <p:cNvPr id="8" name="Text 6"/>
-          <p:cNvSpPr/>
-          <p:nvPr/>
-        </p:nvSpPr>
-        <p:spPr>
-          <a:xfrm>
-            <a:off x="548640" y="3794760"/>
-            <a:ext cx="2194560" cy="731520"/>
-          </a:xfrm>
-          <a:prstGeom prst="rect">
-            <a:avLst/>
-          </a:prstGeom>
-          <a:noFill/>
-          <a:ln/>
-        </p:spPr>
-        <p:txBody>
-          <a:bodyPr wrap="square" lIns="0" tIns="0" rIns="0" bIns="0" rtlCol="0" anchor="t"/>
-          <a:lstStyle/>
-          <a:p>
-            <a:pPr indent="0" marL="0">
-              <a:buNone/>
-            </a:pPr>
-            <a:r>
-              <a:rPr lang="en-US" sz="1400" dirty="0">
+              <a:rPr lang="en-US" sz="1300" dirty="0">
                 <a:solidFill>
                   <a:srgbClr val="1A1A1A"/>
                 </a:solidFill>
@@ -7502,16 +7402,20 @@
                 <a:ea typeface="Calibri" pitchFamily="34" charset="-122"/>
                 <a:cs typeface="Calibri" pitchFamily="34" charset="-120"/>
               </a:rPr>
-              <a:t>TinyML</a:t>
-            </a:r>
-            <a:endParaRPr lang="en-US" sz="1400" dirty="0"/>
-          </a:p>
-          <a:p>
-            <a:pPr indent="0" marL="0">
-              <a:buNone/>
+              <a:t>Klassisch: Settings-App rechnet linear hoch</a:t>
+            </a:r>
+            <a:endParaRPr lang="en-US" sz="1300" dirty="0"/>
+          </a:p>
+          <a:p>
+            <a:pPr marL="342900" indent="-342900">
+              <a:spcAft>
+                <a:spcPts val="600"/>
+              </a:spcAft>
+              <a:buSzPct val="100000"/>
+              <a:buChar char="•"/>
             </a:pPr>
             <a:r>
-              <a:rPr lang="en-US" sz="1400" dirty="0">
+              <a:rPr lang="en-US" sz="1300" dirty="0">
                 <a:solidFill>
                   <a:srgbClr val="1A1A1A"/>
                 </a:solidFill>
@@ -7519,16 +7423,81 @@
                 <a:ea typeface="Calibri" pitchFamily="34" charset="-122"/>
                 <a:cs typeface="Calibri" pitchFamily="34" charset="-120"/>
               </a:rPr>
-              <a:t>vs.</a:t>
-            </a:r>
-            <a:endParaRPr lang="en-US" sz="1400" dirty="0"/>
-          </a:p>
+              <a:t>Ignoriert aktuelle Nutzung, App-Kontext</a:t>
+            </a:r>
+            <a:endParaRPr lang="en-US" sz="1300" dirty="0"/>
+          </a:p>
+        </p:txBody>
+      </p:sp>
+      <p:sp>
+        <p:nvSpPr>
+          <p:cNvPr id="5" name="Text 3"/>
+          <p:cNvSpPr/>
+          <p:nvPr/>
+        </p:nvSpPr>
+        <p:spPr>
+          <a:xfrm>
+            <a:off x="4754880" y="1051560"/>
+            <a:ext cx="3931920" cy="365760"/>
+          </a:xfrm>
+          <a:prstGeom prst="rect">
+            <a:avLst/>
+          </a:prstGeom>
+          <a:noFill/>
+          <a:ln/>
+        </p:spPr>
+        <p:txBody>
+          <a:bodyPr wrap="square" rtlCol="0" anchor="ctr"/>
+          <a:lstStyle/>
           <a:p>
             <a:pPr indent="0" marL="0">
               <a:buNone/>
             </a:pPr>
             <a:r>
-              <a:rPr lang="en-US" sz="1400" dirty="0">
+              <a:rPr lang="en-US" sz="1700" b="1" dirty="0">
+                <a:solidFill>
+                  <a:srgbClr val="0F3460"/>
+                </a:solidFill>
+                <a:latin typeface="Calibri" pitchFamily="34" charset="0"/>
+                <a:ea typeface="Calibri" pitchFamily="34" charset="-122"/>
+                <a:cs typeface="Calibri" pitchFamily="34" charset="-120"/>
+              </a:rPr>
+              <a:t>Was sich seit Android 12 (2021) ändert</a:t>
+            </a:r>
+            <a:endParaRPr lang="en-US" sz="1700" dirty="0"/>
+          </a:p>
+        </p:txBody>
+      </p:sp>
+      <p:sp>
+        <p:nvSpPr>
+          <p:cNvPr id="6" name="Text 4"/>
+          <p:cNvSpPr/>
+          <p:nvPr/>
+        </p:nvSpPr>
+        <p:spPr>
+          <a:xfrm>
+            <a:off x="4754880" y="1417320"/>
+            <a:ext cx="3931920" cy="1645920"/>
+          </a:xfrm>
+          <a:prstGeom prst="rect">
+            <a:avLst/>
+          </a:prstGeom>
+          <a:noFill/>
+          <a:ln/>
+        </p:spPr>
+        <p:txBody>
+          <a:bodyPr wrap="square" rtlCol="0" anchor="ctr"/>
+          <a:lstStyle/>
+          <a:p>
+            <a:pPr marL="342900" indent="-342900">
+              <a:spcAft>
+                <a:spcPts val="600"/>
+              </a:spcAft>
+              <a:buSzPct val="100000"/>
+              <a:buChar char="•"/>
+            </a:pPr>
+            <a:r>
+              <a:rPr lang="en-US" sz="1300" dirty="0">
                 <a:solidFill>
                   <a:srgbClr val="1A1A1A"/>
                 </a:solidFill>
@@ -7536,122 +7505,20 @@
                 <a:ea typeface="Calibri" pitchFamily="34" charset="-122"/>
                 <a:cs typeface="Calibri" pitchFamily="34" charset="-120"/>
               </a:rPr>
-              <a:t>5 andere Methoden</a:t>
-            </a:r>
-            <a:endParaRPr lang="en-US" sz="1400" dirty="0"/>
-          </a:p>
-        </p:txBody>
-      </p:sp>
-      <p:sp>
-        <p:nvSpPr>
-          <p:cNvPr id="9" name="Shape 7"/>
-          <p:cNvSpPr/>
-          <p:nvPr/>
-        </p:nvSpPr>
-        <p:spPr>
-          <a:xfrm>
-            <a:off x="3383280" y="3383280"/>
-            <a:ext cx="2377440" cy="1188720"/>
-          </a:xfrm>
-          <a:prstGeom prst="rect">
-            <a:avLst/>
-          </a:prstGeom>
-          <a:solidFill>
-            <a:srgbClr val="F5F7FA"/>
-          </a:solidFill>
-          <a:ln w="12700">
-            <a:solidFill>
-              <a:srgbClr val="E2E8F0"/>
-            </a:solidFill>
-            <a:prstDash val="solid"/>
-          </a:ln>
-        </p:spPr>
-      </p:sp>
-      <p:sp>
-        <p:nvSpPr>
-          <p:cNvPr id="10" name="Shape 8"/>
-          <p:cNvSpPr/>
-          <p:nvPr/>
-        </p:nvSpPr>
-        <p:spPr>
-          <a:xfrm>
-            <a:off x="3383280" y="3383280"/>
-            <a:ext cx="2377440" cy="73152"/>
-          </a:xfrm>
-          <a:prstGeom prst="rect">
-            <a:avLst/>
-          </a:prstGeom>
-          <a:solidFill>
-            <a:srgbClr val="4CAF50"/>
-          </a:solidFill>
-          <a:ln/>
-        </p:spPr>
-      </p:sp>
-      <p:sp>
-        <p:nvSpPr>
-          <p:cNvPr id="11" name="Text 9"/>
-          <p:cNvSpPr/>
-          <p:nvPr/>
-        </p:nvSpPr>
-        <p:spPr>
-          <a:xfrm>
-            <a:off x="3474720" y="3493008"/>
-            <a:ext cx="2194560" cy="274320"/>
-          </a:xfrm>
-          <a:prstGeom prst="rect">
-            <a:avLst/>
-          </a:prstGeom>
-          <a:noFill/>
-          <a:ln/>
-        </p:spPr>
-        <p:txBody>
-          <a:bodyPr wrap="square" lIns="0" tIns="0" rIns="0" bIns="0" rtlCol="0" anchor="ctr"/>
-          <a:lstStyle/>
-          <a:p>
-            <a:pPr indent="0" marL="0">
-              <a:buNone/>
+              <a:t>PowerManager.getBatteryDischargePrediction()</a:t>
+            </a:r>
+            <a:endParaRPr lang="en-US" sz="1300" dirty="0"/>
+          </a:p>
+          <a:p>
+            <a:pPr marL="342900" indent="-342900">
+              <a:spcAft>
+                <a:spcPts val="600"/>
+              </a:spcAft>
+              <a:buSzPct val="100000"/>
+              <a:buChar char="•"/>
             </a:pPr>
             <a:r>
-              <a:rPr lang="en-US" sz="1100" b="1" dirty="0">
-                <a:solidFill>
-                  <a:srgbClr val="4CAF50"/>
-                </a:solidFill>
-                <a:latin typeface="Calibri" pitchFamily="34" charset="0"/>
-                <a:ea typeface="Calibri" pitchFamily="34" charset="-122"/>
-                <a:cs typeface="Calibri" pitchFamily="34" charset="-120"/>
-              </a:rPr>
-              <a:t>Achse 1</a:t>
-            </a:r>
-            <a:endParaRPr lang="en-US" sz="1100" dirty="0"/>
-          </a:p>
-        </p:txBody>
-      </p:sp>
-      <p:sp>
-        <p:nvSpPr>
-          <p:cNvPr id="12" name="Text 10"/>
-          <p:cNvSpPr/>
-          <p:nvPr/>
-        </p:nvSpPr>
-        <p:spPr>
-          <a:xfrm>
-            <a:off x="3474720" y="3794760"/>
-            <a:ext cx="2194560" cy="731520"/>
-          </a:xfrm>
-          <a:prstGeom prst="rect">
-            <a:avLst/>
-          </a:prstGeom>
-          <a:noFill/>
-          <a:ln/>
-        </p:spPr>
-        <p:txBody>
-          <a:bodyPr wrap="square" lIns="0" tIns="0" rIns="0" bIns="0" rtlCol="0" anchor="t"/>
-          <a:lstStyle/>
-          <a:p>
-            <a:pPr indent="0" marL="0">
-              <a:buNone/>
-            </a:pPr>
-            <a:r>
-              <a:rPr lang="en-US" sz="1400" dirty="0">
+              <a:rPr lang="en-US" sz="1300" dirty="0">
                 <a:solidFill>
                   <a:srgbClr val="1A1A1A"/>
                 </a:solidFill>
@@ -7659,16 +7526,20 @@
                 <a:ea typeface="Calibri" pitchFamily="34" charset="-122"/>
                 <a:cs typeface="Calibri" pitchFamily="34" charset="-120"/>
               </a:rPr>
-              <a:t>Genauigkeit</a:t>
-            </a:r>
-            <a:endParaRPr lang="en-US" sz="1400" dirty="0"/>
-          </a:p>
-          <a:p>
-            <a:pPr indent="0" marL="0">
-              <a:buNone/>
+              <a:t>Erstes ML-Modell direkt im Android-System</a:t>
+            </a:r>
+            <a:endParaRPr lang="en-US" sz="1300" dirty="0"/>
+          </a:p>
+          <a:p>
+            <a:pPr marL="342900" indent="-342900">
+              <a:spcAft>
+                <a:spcPts val="600"/>
+              </a:spcAft>
+              <a:buSzPct val="100000"/>
+              <a:buChar char="•"/>
             </a:pPr>
             <a:r>
-              <a:rPr lang="en-US" sz="1400" dirty="0">
+              <a:rPr lang="en-US" sz="1300" dirty="0">
                 <a:solidFill>
                   <a:srgbClr val="1A1A1A"/>
                 </a:solidFill>
@@ -7676,32 +7547,32 @@
                 <a:ea typeface="Calibri" pitchFamily="34" charset="-122"/>
                 <a:cs typeface="Calibri" pitchFamily="34" charset="-120"/>
               </a:rPr>
-              <a:t>(C-Index, MAE)</a:t>
-            </a:r>
-            <a:endParaRPr lang="en-US" sz="1400" dirty="0"/>
+              <a:t>Läuft im Systemprozess - privilegierter Zugriff</a:t>
+            </a:r>
+            <a:endParaRPr lang="en-US" sz="1300" dirty="0"/>
           </a:p>
         </p:txBody>
       </p:sp>
       <p:sp>
         <p:nvSpPr>
-          <p:cNvPr id="13" name="Shape 11"/>
-          <p:cNvSpPr/>
-          <p:nvPr/>
-        </p:nvSpPr>
-        <p:spPr>
-          <a:xfrm>
-            <a:off x="6309360" y="3383280"/>
-            <a:ext cx="2377440" cy="1188720"/>
+          <p:cNvPr id="7" name="Shape 5"/>
+          <p:cNvSpPr/>
+          <p:nvPr/>
+        </p:nvSpPr>
+        <p:spPr>
+          <a:xfrm>
+            <a:off x="457200" y="3383280"/>
+            <a:ext cx="8229600" cy="914400"/>
           </a:xfrm>
           <a:prstGeom prst="rect">
             <a:avLst/>
           </a:prstGeom>
           <a:solidFill>
-            <a:srgbClr val="F5F7FA"/>
+            <a:srgbClr val="FFF6E5"/>
           </a:solidFill>
           <a:ln w="12700">
             <a:solidFill>
-              <a:srgbClr val="E2E8F0"/>
+              <a:srgbClr val="FF9800"/>
             </a:solidFill>
             <a:prstDash val="solid"/>
           </a:ln>
@@ -7709,34 +7580,14 @@
       </p:sp>
       <p:sp>
         <p:nvSpPr>
-          <p:cNvPr id="14" name="Shape 12"/>
-          <p:cNvSpPr/>
-          <p:nvPr/>
-        </p:nvSpPr>
-        <p:spPr>
-          <a:xfrm>
-            <a:off x="6309360" y="3383280"/>
-            <a:ext cx="2377440" cy="73152"/>
-          </a:xfrm>
-          <a:prstGeom prst="rect">
-            <a:avLst/>
-          </a:prstGeom>
-          <a:solidFill>
-            <a:srgbClr val="FF9800"/>
-          </a:solidFill>
-          <a:ln/>
-        </p:spPr>
-      </p:sp>
-      <p:sp>
-        <p:nvSpPr>
-          <p:cNvPr id="15" name="Text 13"/>
-          <p:cNvSpPr/>
-          <p:nvPr/>
-        </p:nvSpPr>
-        <p:spPr>
-          <a:xfrm>
-            <a:off x="6400800" y="3493008"/>
-            <a:ext cx="2194560" cy="274320"/>
+          <p:cNvPr id="8" name="Text 6"/>
+          <p:cNvSpPr/>
+          <p:nvPr/>
+        </p:nvSpPr>
+        <p:spPr>
+          <a:xfrm>
+            <a:off x="640080" y="3456432"/>
+            <a:ext cx="7863840" cy="274320"/>
           </a:xfrm>
           <a:prstGeom prst="rect">
             <a:avLst/>
@@ -7760,7 +7611,7 @@
                 <a:ea typeface="Calibri" pitchFamily="34" charset="-122"/>
                 <a:cs typeface="Calibri" pitchFamily="34" charset="-120"/>
               </a:rPr>
-              <a:t>Achse 2</a:t>
+              <a:t>Worum es im Kern geht</a:t>
             </a:r>
             <a:endParaRPr lang="en-US" sz="1100" dirty="0"/>
           </a:p>
@@ -7768,14 +7619,14 @@
       </p:sp>
       <p:sp>
         <p:nvSpPr>
-          <p:cNvPr id="16" name="Text 14"/>
-          <p:cNvSpPr/>
-          <p:nvPr/>
-        </p:nvSpPr>
-        <p:spPr>
-          <a:xfrm>
-            <a:off x="6400800" y="3794760"/>
-            <a:ext cx="2194560" cy="731520"/>
+          <p:cNvPr id="9" name="Text 7"/>
+          <p:cNvSpPr/>
+          <p:nvPr/>
+        </p:nvSpPr>
+        <p:spPr>
+          <a:xfrm>
+            <a:off x="640080" y="3703320"/>
+            <a:ext cx="7863840" cy="548640"/>
           </a:xfrm>
           <a:prstGeom prst="rect">
             <a:avLst/>
@@ -7791,7 +7642,7 @@
               <a:buNone/>
             </a:pPr>
             <a:r>
-              <a:rPr lang="en-US" sz="1400" dirty="0">
+              <a:rPr lang="en-US" sz="1400" i="1" dirty="0">
                 <a:solidFill>
                   <a:srgbClr val="1A1A1A"/>
                 </a:solidFill>
@@ -7799,32 +7650,15 @@
                 <a:ea typeface="Calibri" pitchFamily="34" charset="-122"/>
                 <a:cs typeface="Calibri" pitchFamily="34" charset="-120"/>
               </a:rPr>
-              <a:t>Effizienz</a:t>
+              <a:t>Wie gut schneidet ein TinyML-Modell auf öffentlich verfügbaren Sensoren gegenüber etablierten Vorhersage-Methoden ab?</a:t>
             </a:r>
             <a:endParaRPr lang="en-US" sz="1400" dirty="0"/>
           </a:p>
-          <a:p>
-            <a:pPr indent="0" marL="0">
-              <a:buNone/>
-            </a:pPr>
-            <a:r>
-              <a:rPr lang="en-US" sz="1400" dirty="0">
-                <a:solidFill>
-                  <a:srgbClr val="1A1A1A"/>
-                </a:solidFill>
-                <a:latin typeface="Calibri" pitchFamily="34" charset="0"/>
-                <a:ea typeface="Calibri" pitchFamily="34" charset="-122"/>
-                <a:cs typeface="Calibri" pitchFamily="34" charset="-120"/>
-              </a:rPr>
-              <a:t>(Latenz, Modellgröße)</a:t>
-            </a:r>
-            <a:endParaRPr lang="en-US" sz="1400" dirty="0"/>
-          </a:p>
         </p:txBody>
       </p:sp>
       <p:sp>
         <p:nvSpPr>
-          <p:cNvPr id="17" name="Text 15"/>
+          <p:cNvPr id="10" name="Text 8"/>
           <p:cNvSpPr/>
           <p:nvPr/>
         </p:nvSpPr>
@@ -7863,7 +7697,7 @@
       </p:sp>
       <p:sp>
         <p:nvSpPr>
-          <p:cNvPr id="18" name="Text 16"/>
+          <p:cNvPr id="11" name="Text 9"/>
           <p:cNvSpPr/>
           <p:nvPr/>
         </p:nvSpPr>
@@ -7965,7 +7799,7 @@
                 <a:ea typeface="Calibri" pitchFamily="34" charset="-122"/>
                 <a:cs typeface="Calibri" pitchFamily="34" charset="-120"/>
               </a:rPr>
-              <a:t>Motivation: Akkuvorhersage auf Android</a:t>
+              <a:t>Forschungsfrage</a:t>
             </a:r>
             <a:endParaRPr lang="en-US" sz="2800" dirty="0"/>
           </a:p>
@@ -7973,14 +7807,34 @@
       </p:sp>
       <p:sp>
         <p:nvSpPr>
-          <p:cNvPr id="3" name="Text 1"/>
-          <p:cNvSpPr/>
-          <p:nvPr/>
-        </p:nvSpPr>
-        <p:spPr>
-          <a:xfrm>
-            <a:off x="457200" y="1051560"/>
-            <a:ext cx="3931920" cy="365760"/>
+          <p:cNvPr id="3" name="Shape 1"/>
+          <p:cNvSpPr/>
+          <p:nvPr/>
+        </p:nvSpPr>
+        <p:spPr>
+          <a:xfrm>
+            <a:off x="457200" y="1188720"/>
+            <a:ext cx="73152" cy="1828800"/>
+          </a:xfrm>
+          <a:prstGeom prst="rect">
+            <a:avLst/>
+          </a:prstGeom>
+          <a:solidFill>
+            <a:srgbClr val="0F3460"/>
+          </a:solidFill>
+          <a:ln/>
+        </p:spPr>
+      </p:sp>
+      <p:sp>
+        <p:nvSpPr>
+          <p:cNvPr id="4" name="Text 2"/>
+          <p:cNvSpPr/>
+          <p:nvPr/>
+        </p:nvSpPr>
+        <p:spPr>
+          <a:xfrm>
+            <a:off x="777240" y="1188720"/>
+            <a:ext cx="7863840" cy="1828800"/>
           </a:xfrm>
           <a:prstGeom prst="rect">
             <a:avLst/>
@@ -7989,37 +7843,82 @@
           <a:ln/>
         </p:spPr>
         <p:txBody>
-          <a:bodyPr wrap="square" rtlCol="0" anchor="ctr"/>
+          <a:bodyPr wrap="square" rtlCol="0" anchor="t"/>
           <a:lstStyle/>
           <a:p>
             <a:pPr indent="0" marL="0">
               <a:buNone/>
             </a:pPr>
             <a:r>
-              <a:rPr lang="en-US" sz="1700" b="1" dirty="0">
+              <a:rPr lang="en-US" sz="2000" i="1" dirty="0">
                 <a:solidFill>
-                  <a:srgbClr val="0F3460"/>
+                  <a:srgbClr val="16213E"/>
                 </a:solidFill>
                 <a:latin typeface="Calibri" pitchFamily="34" charset="0"/>
                 <a:ea typeface="Calibri" pitchFamily="34" charset="-122"/>
                 <a:cs typeface="Calibri" pitchFamily="34" charset="-120"/>
               </a:rPr>
-              <a:t>Problem</a:t>
-            </a:r>
-            <a:endParaRPr lang="en-US" sz="1700" dirty="0"/>
+              <a:t>"Wie gut kann TinyML die Akkulaufzeit auf Android vorhersagen im Vergleich zu exponentiellem Fitting und der nativen Google-API, bezogen auf Genauigkeit sowie Effizienz?"</a:t>
+            </a:r>
+            <a:endParaRPr lang="en-US" sz="2000" dirty="0"/>
           </a:p>
         </p:txBody>
       </p:sp>
       <p:sp>
         <p:nvSpPr>
-          <p:cNvPr id="4" name="Text 2"/>
-          <p:cNvSpPr/>
-          <p:nvPr/>
-        </p:nvSpPr>
-        <p:spPr>
-          <a:xfrm>
-            <a:off x="457200" y="1417320"/>
-            <a:ext cx="3931920" cy="1645920"/>
+          <p:cNvPr id="5" name="Shape 3"/>
+          <p:cNvSpPr/>
+          <p:nvPr/>
+        </p:nvSpPr>
+        <p:spPr>
+          <a:xfrm>
+            <a:off x="457200" y="3383280"/>
+            <a:ext cx="2377440" cy="1188720"/>
+          </a:xfrm>
+          <a:prstGeom prst="rect">
+            <a:avLst/>
+          </a:prstGeom>
+          <a:solidFill>
+            <a:srgbClr val="F5F7FA"/>
+          </a:solidFill>
+          <a:ln w="12700">
+            <a:solidFill>
+              <a:srgbClr val="E2E8F0"/>
+            </a:solidFill>
+            <a:prstDash val="solid"/>
+          </a:ln>
+        </p:spPr>
+      </p:sp>
+      <p:sp>
+        <p:nvSpPr>
+          <p:cNvPr id="6" name="Shape 4"/>
+          <p:cNvSpPr/>
+          <p:nvPr/>
+        </p:nvSpPr>
+        <p:spPr>
+          <a:xfrm>
+            <a:off x="457200" y="3383280"/>
+            <a:ext cx="2377440" cy="73152"/>
+          </a:xfrm>
+          <a:prstGeom prst="rect">
+            <a:avLst/>
+          </a:prstGeom>
+          <a:solidFill>
+            <a:srgbClr val="2196F3"/>
+          </a:solidFill>
+          <a:ln/>
+        </p:spPr>
+      </p:sp>
+      <p:sp>
+        <p:nvSpPr>
+          <p:cNvPr id="7" name="Text 5"/>
+          <p:cNvSpPr/>
+          <p:nvPr/>
+        </p:nvSpPr>
+        <p:spPr>
+          <a:xfrm>
+            <a:off x="548640" y="3493008"/>
+            <a:ext cx="2194560" cy="274320"/>
           </a:xfrm>
           <a:prstGeom prst="rect">
             <a:avLst/>
@@ -8028,18 +7927,53 @@
           <a:ln/>
         </p:spPr>
         <p:txBody>
-          <a:bodyPr wrap="square" rtlCol="0" anchor="ctr"/>
+          <a:bodyPr wrap="square" lIns="0" tIns="0" rIns="0" bIns="0" rtlCol="0" anchor="ctr"/>
           <a:lstStyle/>
           <a:p>
-            <a:pPr marL="342900" indent="-342900">
-              <a:spcAft>
-                <a:spcPts val="600"/>
-              </a:spcAft>
-              <a:buSzPct val="100000"/>
-              <a:buChar char="•"/>
+            <a:pPr indent="0" marL="0">
+              <a:buNone/>
             </a:pPr>
             <a:r>
-              <a:rPr lang="en-US" sz="1300" dirty="0">
+              <a:rPr lang="en-US" sz="1100" b="1" dirty="0">
+                <a:solidFill>
+                  <a:srgbClr val="2196F3"/>
+                </a:solidFill>
+                <a:latin typeface="Calibri" pitchFamily="34" charset="0"/>
+                <a:ea typeface="Calibri" pitchFamily="34" charset="-122"/>
+                <a:cs typeface="Calibri" pitchFamily="34" charset="-120"/>
+              </a:rPr>
+              <a:t>Methode</a:t>
+            </a:r>
+            <a:endParaRPr lang="en-US" sz="1100" dirty="0"/>
+          </a:p>
+        </p:txBody>
+      </p:sp>
+      <p:sp>
+        <p:nvSpPr>
+          <p:cNvPr id="8" name="Text 6"/>
+          <p:cNvSpPr/>
+          <p:nvPr/>
+        </p:nvSpPr>
+        <p:spPr>
+          <a:xfrm>
+            <a:off x="548640" y="3794760"/>
+            <a:ext cx="2194560" cy="731520"/>
+          </a:xfrm>
+          <a:prstGeom prst="rect">
+            <a:avLst/>
+          </a:prstGeom>
+          <a:noFill/>
+          <a:ln/>
+        </p:spPr>
+        <p:txBody>
+          <a:bodyPr wrap="square" lIns="0" tIns="0" rIns="0" bIns="0" rtlCol="0" anchor="t"/>
+          <a:lstStyle/>
+          <a:p>
+            <a:pPr indent="0" marL="0">
+              <a:buNone/>
+            </a:pPr>
+            <a:r>
+              <a:rPr lang="en-US" sz="1400" dirty="0">
                 <a:solidFill>
                   <a:srgbClr val="1A1A1A"/>
                 </a:solidFill>
@@ -8047,20 +7981,16 @@
                 <a:ea typeface="Calibri" pitchFamily="34" charset="-122"/>
                 <a:cs typeface="Calibri" pitchFamily="34" charset="-120"/>
               </a:rPr>
-              <a:t>Klassisch: Settings-App rechnet linear hoch</a:t>
-            </a:r>
-            <a:endParaRPr lang="en-US" sz="1300" dirty="0"/>
-          </a:p>
-          <a:p>
-            <a:pPr marL="342900" indent="-342900">
-              <a:spcAft>
-                <a:spcPts val="600"/>
-              </a:spcAft>
-              <a:buSzPct val="100000"/>
-              <a:buChar char="•"/>
+              <a:t>TinyML</a:t>
+            </a:r>
+            <a:endParaRPr lang="en-US" sz="1400" dirty="0"/>
+          </a:p>
+          <a:p>
+            <a:pPr indent="0" marL="0">
+              <a:buNone/>
             </a:pPr>
             <a:r>
-              <a:rPr lang="en-US" sz="1300" dirty="0">
+              <a:rPr lang="en-US" sz="1400" dirty="0">
                 <a:solidFill>
                   <a:srgbClr val="1A1A1A"/>
                 </a:solidFill>
@@ -8068,81 +7998,16 @@
                 <a:ea typeface="Calibri" pitchFamily="34" charset="-122"/>
                 <a:cs typeface="Calibri" pitchFamily="34" charset="-120"/>
               </a:rPr>
-              <a:t>Ignoriert aktuelle Nutzung, App-Kontext</a:t>
-            </a:r>
-            <a:endParaRPr lang="en-US" sz="1300" dirty="0"/>
-          </a:p>
-        </p:txBody>
-      </p:sp>
-      <p:sp>
-        <p:nvSpPr>
-          <p:cNvPr id="5" name="Text 3"/>
-          <p:cNvSpPr/>
-          <p:nvPr/>
-        </p:nvSpPr>
-        <p:spPr>
-          <a:xfrm>
-            <a:off x="4754880" y="1051560"/>
-            <a:ext cx="3931920" cy="365760"/>
-          </a:xfrm>
-          <a:prstGeom prst="rect">
-            <a:avLst/>
-          </a:prstGeom>
-          <a:noFill/>
-          <a:ln/>
-        </p:spPr>
-        <p:txBody>
-          <a:bodyPr wrap="square" rtlCol="0" anchor="ctr"/>
-          <a:lstStyle/>
+              <a:t>vs.</a:t>
+            </a:r>
+            <a:endParaRPr lang="en-US" sz="1400" dirty="0"/>
+          </a:p>
           <a:p>
             <a:pPr indent="0" marL="0">
               <a:buNone/>
             </a:pPr>
             <a:r>
-              <a:rPr lang="en-US" sz="1700" b="1" dirty="0">
-                <a:solidFill>
-                  <a:srgbClr val="0F3460"/>
-                </a:solidFill>
-                <a:latin typeface="Calibri" pitchFamily="34" charset="0"/>
-                <a:ea typeface="Calibri" pitchFamily="34" charset="-122"/>
-                <a:cs typeface="Calibri" pitchFamily="34" charset="-120"/>
-              </a:rPr>
-              <a:t>Was sich seit Android 12 (2021) ändert</a:t>
-            </a:r>
-            <a:endParaRPr lang="en-US" sz="1700" dirty="0"/>
-          </a:p>
-        </p:txBody>
-      </p:sp>
-      <p:sp>
-        <p:nvSpPr>
-          <p:cNvPr id="6" name="Text 4"/>
-          <p:cNvSpPr/>
-          <p:nvPr/>
-        </p:nvSpPr>
-        <p:spPr>
-          <a:xfrm>
-            <a:off x="4754880" y="1417320"/>
-            <a:ext cx="3931920" cy="1645920"/>
-          </a:xfrm>
-          <a:prstGeom prst="rect">
-            <a:avLst/>
-          </a:prstGeom>
-          <a:noFill/>
-          <a:ln/>
-        </p:spPr>
-        <p:txBody>
-          <a:bodyPr wrap="square" rtlCol="0" anchor="ctr"/>
-          <a:lstStyle/>
-          <a:p>
-            <a:pPr marL="342900" indent="-342900">
-              <a:spcAft>
-                <a:spcPts val="600"/>
-              </a:spcAft>
-              <a:buSzPct val="100000"/>
-              <a:buChar char="•"/>
-            </a:pPr>
-            <a:r>
-              <a:rPr lang="en-US" sz="1300" dirty="0">
+              <a:rPr lang="en-US" sz="1400" dirty="0">
                 <a:solidFill>
                   <a:srgbClr val="1A1A1A"/>
                 </a:solidFill>
@@ -8150,20 +8015,122 @@
                 <a:ea typeface="Calibri" pitchFamily="34" charset="-122"/>
                 <a:cs typeface="Calibri" pitchFamily="34" charset="-120"/>
               </a:rPr>
-              <a:t>PowerManager.getBatteryDischargePrediction()</a:t>
-            </a:r>
-            <a:endParaRPr lang="en-US" sz="1300" dirty="0"/>
-          </a:p>
-          <a:p>
-            <a:pPr marL="342900" indent="-342900">
-              <a:spcAft>
-                <a:spcPts val="600"/>
-              </a:spcAft>
-              <a:buSzPct val="100000"/>
-              <a:buChar char="•"/>
+              <a:t>5 andere Methoden</a:t>
+            </a:r>
+            <a:endParaRPr lang="en-US" sz="1400" dirty="0"/>
+          </a:p>
+        </p:txBody>
+      </p:sp>
+      <p:sp>
+        <p:nvSpPr>
+          <p:cNvPr id="9" name="Shape 7"/>
+          <p:cNvSpPr/>
+          <p:nvPr/>
+        </p:nvSpPr>
+        <p:spPr>
+          <a:xfrm>
+            <a:off x="3383280" y="3383280"/>
+            <a:ext cx="2377440" cy="1188720"/>
+          </a:xfrm>
+          <a:prstGeom prst="rect">
+            <a:avLst/>
+          </a:prstGeom>
+          <a:solidFill>
+            <a:srgbClr val="F5F7FA"/>
+          </a:solidFill>
+          <a:ln w="12700">
+            <a:solidFill>
+              <a:srgbClr val="E2E8F0"/>
+            </a:solidFill>
+            <a:prstDash val="solid"/>
+          </a:ln>
+        </p:spPr>
+      </p:sp>
+      <p:sp>
+        <p:nvSpPr>
+          <p:cNvPr id="10" name="Shape 8"/>
+          <p:cNvSpPr/>
+          <p:nvPr/>
+        </p:nvSpPr>
+        <p:spPr>
+          <a:xfrm>
+            <a:off x="3383280" y="3383280"/>
+            <a:ext cx="2377440" cy="73152"/>
+          </a:xfrm>
+          <a:prstGeom prst="rect">
+            <a:avLst/>
+          </a:prstGeom>
+          <a:solidFill>
+            <a:srgbClr val="4CAF50"/>
+          </a:solidFill>
+          <a:ln/>
+        </p:spPr>
+      </p:sp>
+      <p:sp>
+        <p:nvSpPr>
+          <p:cNvPr id="11" name="Text 9"/>
+          <p:cNvSpPr/>
+          <p:nvPr/>
+        </p:nvSpPr>
+        <p:spPr>
+          <a:xfrm>
+            <a:off x="3474720" y="3493008"/>
+            <a:ext cx="2194560" cy="274320"/>
+          </a:xfrm>
+          <a:prstGeom prst="rect">
+            <a:avLst/>
+          </a:prstGeom>
+          <a:noFill/>
+          <a:ln/>
+        </p:spPr>
+        <p:txBody>
+          <a:bodyPr wrap="square" lIns="0" tIns="0" rIns="0" bIns="0" rtlCol="0" anchor="ctr"/>
+          <a:lstStyle/>
+          <a:p>
+            <a:pPr indent="0" marL="0">
+              <a:buNone/>
             </a:pPr>
             <a:r>
-              <a:rPr lang="en-US" sz="1300" dirty="0">
+              <a:rPr lang="en-US" sz="1100" b="1" dirty="0">
+                <a:solidFill>
+                  <a:srgbClr val="4CAF50"/>
+                </a:solidFill>
+                <a:latin typeface="Calibri" pitchFamily="34" charset="0"/>
+                <a:ea typeface="Calibri" pitchFamily="34" charset="-122"/>
+                <a:cs typeface="Calibri" pitchFamily="34" charset="-120"/>
+              </a:rPr>
+              <a:t>Achse 1</a:t>
+            </a:r>
+            <a:endParaRPr lang="en-US" sz="1100" dirty="0"/>
+          </a:p>
+        </p:txBody>
+      </p:sp>
+      <p:sp>
+        <p:nvSpPr>
+          <p:cNvPr id="12" name="Text 10"/>
+          <p:cNvSpPr/>
+          <p:nvPr/>
+        </p:nvSpPr>
+        <p:spPr>
+          <a:xfrm>
+            <a:off x="3474720" y="3794760"/>
+            <a:ext cx="2194560" cy="731520"/>
+          </a:xfrm>
+          <a:prstGeom prst="rect">
+            <a:avLst/>
+          </a:prstGeom>
+          <a:noFill/>
+          <a:ln/>
+        </p:spPr>
+        <p:txBody>
+          <a:bodyPr wrap="square" lIns="0" tIns="0" rIns="0" bIns="0" rtlCol="0" anchor="t"/>
+          <a:lstStyle/>
+          <a:p>
+            <a:pPr indent="0" marL="0">
+              <a:buNone/>
+            </a:pPr>
+            <a:r>
+              <a:rPr lang="en-US" sz="1400" dirty="0">
                 <a:solidFill>
                   <a:srgbClr val="1A1A1A"/>
                 </a:solidFill>
@@ -8171,20 +8138,16 @@
                 <a:ea typeface="Calibri" pitchFamily="34" charset="-122"/>
                 <a:cs typeface="Calibri" pitchFamily="34" charset="-120"/>
               </a:rPr>
-              <a:t>Erstes ML-Modell direkt im Android-System</a:t>
-            </a:r>
-            <a:endParaRPr lang="en-US" sz="1300" dirty="0"/>
-          </a:p>
-          <a:p>
-            <a:pPr marL="342900" indent="-342900">
-              <a:spcAft>
-                <a:spcPts val="600"/>
-              </a:spcAft>
-              <a:buSzPct val="100000"/>
-              <a:buChar char="•"/>
+              <a:t>Genauigkeit</a:t>
+            </a:r>
+            <a:endParaRPr lang="en-US" sz="1400" dirty="0"/>
+          </a:p>
+          <a:p>
+            <a:pPr indent="0" marL="0">
+              <a:buNone/>
             </a:pPr>
             <a:r>
-              <a:rPr lang="en-US" sz="1300" dirty="0">
+              <a:rPr lang="en-US" sz="1400" dirty="0">
                 <a:solidFill>
                   <a:srgbClr val="1A1A1A"/>
                 </a:solidFill>
@@ -8192,32 +8155,32 @@
                 <a:ea typeface="Calibri" pitchFamily="34" charset="-122"/>
                 <a:cs typeface="Calibri" pitchFamily="34" charset="-120"/>
               </a:rPr>
-              <a:t>Läuft im Systemprozess - privilegierter Zugriff</a:t>
-            </a:r>
-            <a:endParaRPr lang="en-US" sz="1300" dirty="0"/>
+              <a:t>(C-Index, MAE)</a:t>
+            </a:r>
+            <a:endParaRPr lang="en-US" sz="1400" dirty="0"/>
           </a:p>
         </p:txBody>
       </p:sp>
       <p:sp>
         <p:nvSpPr>
-          <p:cNvPr id="7" name="Shape 5"/>
-          <p:cNvSpPr/>
-          <p:nvPr/>
-        </p:nvSpPr>
-        <p:spPr>
-          <a:xfrm>
-            <a:off x="457200" y="3383280"/>
-            <a:ext cx="8229600" cy="914400"/>
+          <p:cNvPr id="13" name="Shape 11"/>
+          <p:cNvSpPr/>
+          <p:nvPr/>
+        </p:nvSpPr>
+        <p:spPr>
+          <a:xfrm>
+            <a:off x="6309360" y="3383280"/>
+            <a:ext cx="2377440" cy="1188720"/>
           </a:xfrm>
           <a:prstGeom prst="rect">
             <a:avLst/>
           </a:prstGeom>
           <a:solidFill>
-            <a:srgbClr val="FFF6E5"/>
+            <a:srgbClr val="F5F7FA"/>
           </a:solidFill>
           <a:ln w="12700">
             <a:solidFill>
-              <a:srgbClr val="FF9800"/>
+              <a:srgbClr val="E2E8F0"/>
             </a:solidFill>
             <a:prstDash val="solid"/>
           </a:ln>
@@ -8225,14 +8188,34 @@
       </p:sp>
       <p:sp>
         <p:nvSpPr>
-          <p:cNvPr id="8" name="Text 6"/>
-          <p:cNvSpPr/>
-          <p:nvPr/>
-        </p:nvSpPr>
-        <p:spPr>
-          <a:xfrm>
-            <a:off x="640080" y="3456432"/>
-            <a:ext cx="7863840" cy="274320"/>
+          <p:cNvPr id="14" name="Shape 12"/>
+          <p:cNvSpPr/>
+          <p:nvPr/>
+        </p:nvSpPr>
+        <p:spPr>
+          <a:xfrm>
+            <a:off x="6309360" y="3383280"/>
+            <a:ext cx="2377440" cy="73152"/>
+          </a:xfrm>
+          <a:prstGeom prst="rect">
+            <a:avLst/>
+          </a:prstGeom>
+          <a:solidFill>
+            <a:srgbClr val="FF9800"/>
+          </a:solidFill>
+          <a:ln/>
+        </p:spPr>
+      </p:sp>
+      <p:sp>
+        <p:nvSpPr>
+          <p:cNvPr id="15" name="Text 13"/>
+          <p:cNvSpPr/>
+          <p:nvPr/>
+        </p:nvSpPr>
+        <p:spPr>
+          <a:xfrm>
+            <a:off x="6400800" y="3493008"/>
+            <a:ext cx="2194560" cy="274320"/>
           </a:xfrm>
           <a:prstGeom prst="rect">
             <a:avLst/>
@@ -8256,7 +8239,7 @@
                 <a:ea typeface="Calibri" pitchFamily="34" charset="-122"/>
                 <a:cs typeface="Calibri" pitchFamily="34" charset="-120"/>
               </a:rPr>
-              <a:t>Worum es im Kern geht</a:t>
+              <a:t>Achse 2</a:t>
             </a:r>
             <a:endParaRPr lang="en-US" sz="1100" dirty="0"/>
           </a:p>
@@ -8264,14 +8247,14 @@
       </p:sp>
       <p:sp>
         <p:nvSpPr>
-          <p:cNvPr id="9" name="Text 7"/>
-          <p:cNvSpPr/>
-          <p:nvPr/>
-        </p:nvSpPr>
-        <p:spPr>
-          <a:xfrm>
-            <a:off x="640080" y="3703320"/>
-            <a:ext cx="7863840" cy="548640"/>
+          <p:cNvPr id="16" name="Text 14"/>
+          <p:cNvSpPr/>
+          <p:nvPr/>
+        </p:nvSpPr>
+        <p:spPr>
+          <a:xfrm>
+            <a:off x="6400800" y="3794760"/>
+            <a:ext cx="2194560" cy="731520"/>
           </a:xfrm>
           <a:prstGeom prst="rect">
             <a:avLst/>
@@ -8287,7 +8270,7 @@
               <a:buNone/>
             </a:pPr>
             <a:r>
-              <a:rPr lang="en-US" sz="1400" i="1" dirty="0">
+              <a:rPr lang="en-US" sz="1400" dirty="0">
                 <a:solidFill>
                   <a:srgbClr val="1A1A1A"/>
                 </a:solidFill>
@@ -8295,15 +8278,32 @@
                 <a:ea typeface="Calibri" pitchFamily="34" charset="-122"/>
                 <a:cs typeface="Calibri" pitchFamily="34" charset="-120"/>
               </a:rPr>
-              <a:t>Wie gut schneidet ein TinyML-Modell auf öffentlich verfügbaren Sensoren gegenüber etablierten Vorhersage-Methoden ab?</a:t>
+              <a:t>Effizienz</a:t>
             </a:r>
             <a:endParaRPr lang="en-US" sz="1400" dirty="0"/>
           </a:p>
+          <a:p>
+            <a:pPr indent="0" marL="0">
+              <a:buNone/>
+            </a:pPr>
+            <a:r>
+              <a:rPr lang="en-US" sz="1400" dirty="0">
+                <a:solidFill>
+                  <a:srgbClr val="1A1A1A"/>
+                </a:solidFill>
+                <a:latin typeface="Calibri" pitchFamily="34" charset="0"/>
+                <a:ea typeface="Calibri" pitchFamily="34" charset="-122"/>
+                <a:cs typeface="Calibri" pitchFamily="34" charset="-120"/>
+              </a:rPr>
+              <a:t>(Latenz, Modellgröße)</a:t>
+            </a:r>
+            <a:endParaRPr lang="en-US" sz="1400" dirty="0"/>
+          </a:p>
         </p:txBody>
       </p:sp>
       <p:sp>
         <p:nvSpPr>
-          <p:cNvPr id="10" name="Text 8"/>
+          <p:cNvPr id="17" name="Text 15"/>
           <p:cNvSpPr/>
           <p:nvPr/>
         </p:nvSpPr>
@@ -8342,7 +8342,7 @@
       </p:sp>
       <p:sp>
         <p:nvSpPr>
-          <p:cNvPr id="11" name="Text 9"/>
+          <p:cNvPr id="18" name="Text 16"/>
           <p:cNvSpPr/>
           <p:nvPr/>
         </p:nvSpPr>

--- a/paper/Paper_Verteidigung.pptx
+++ b/paper/Paper_Verteidigung.pptx
@@ -8458,8 +8458,8 @@
         </p:nvSpPr>
         <p:spPr>
           <a:xfrm>
-            <a:off x="457200" y="1051560"/>
-            <a:ext cx="4023360" cy="1691640"/>
+            <a:off x="457200" y="1097280"/>
+            <a:ext cx="4023360" cy="2286000"/>
           </a:xfrm>
           <a:prstGeom prst="rect">
             <a:avLst/>
@@ -8473,6 +8473,13 @@
             </a:solidFill>
             <a:prstDash val="solid"/>
           </a:ln>
+          <a:effectLst>
+            <a:outerShdw sx="100000" sy="100000" kx="0" ky="0" algn="bl" rotWithShape="0" blurRad="76200" dist="12700" dir="8100000">
+              <a:srgbClr val="000000">
+                <a:alpha val="7000"/>
+              </a:srgbClr>
+            </a:outerShdw>
+          </a:effectLst>
         </p:spPr>
       </p:sp>
       <p:sp>
@@ -8483,8 +8490,8 @@
         </p:nvSpPr>
         <p:spPr>
           <a:xfrm>
-            <a:off x="457200" y="1051560"/>
-            <a:ext cx="73152" cy="1691640"/>
+            <a:off x="457200" y="1097280"/>
+            <a:ext cx="91440" cy="2286000"/>
           </a:xfrm>
           <a:prstGeom prst="rect">
             <a:avLst/>
@@ -8503,8 +8510,8 @@
         </p:nvSpPr>
         <p:spPr>
           <a:xfrm>
-            <a:off x="640080" y="1143000"/>
-            <a:ext cx="3749040" cy="320040"/>
+            <a:off x="685800" y="1216152"/>
+            <a:ext cx="3657600" cy="365760"/>
           </a:xfrm>
           <a:prstGeom prst="rect">
             <a:avLst/>
@@ -8520,7 +8527,7 @@
               <a:buNone/>
             </a:pPr>
             <a:r>
-              <a:rPr lang="en-US" sz="1400" b="1" dirty="0">
+              <a:rPr lang="en-US" sz="1600" b="1" dirty="0">
                 <a:solidFill>
                   <a:srgbClr val="0F3460"/>
                 </a:solidFill>
@@ -8530,7 +8537,7 @@
               </a:rPr>
               <a:t>Li et al. (2018)</a:t>
             </a:r>
-            <a:endParaRPr lang="en-US" sz="1400" dirty="0"/>
+            <a:endParaRPr lang="en-US" sz="1600" dirty="0"/>
           </a:p>
         </p:txBody>
       </p:sp>
@@ -8542,8 +8549,8 @@
         </p:nvSpPr>
         <p:spPr>
           <a:xfrm>
-            <a:off x="640080" y="1435608"/>
-            <a:ext cx="3749040" cy="274320"/>
+            <a:off x="685800" y="1600200"/>
+            <a:ext cx="3657600" cy="274320"/>
           </a:xfrm>
           <a:prstGeom prst="rect">
             <a:avLst/>
@@ -8559,7 +8566,7 @@
               <a:buNone/>
             </a:pPr>
             <a:r>
-              <a:rPr lang="en-US" sz="1100" i="1" dirty="0">
+              <a:rPr lang="en-US" sz="1150" i="1" dirty="0">
                 <a:solidFill>
                   <a:srgbClr val="64748B"/>
                 </a:solidFill>
@@ -8569,7 +8576,7 @@
               </a:rPr>
               <a:t>Smartphone Battery Prediction at Scale</a:t>
             </a:r>
-            <a:endParaRPr lang="en-US" sz="1100" dirty="0"/>
+            <a:endParaRPr lang="en-US" sz="1150" dirty="0"/>
           </a:p>
         </p:txBody>
       </p:sp>
@@ -8581,8 +8588,8 @@
         </p:nvSpPr>
         <p:spPr>
           <a:xfrm>
-            <a:off x="640080" y="1737360"/>
-            <a:ext cx="3749040" cy="914400"/>
+            <a:off x="685800" y="1938528"/>
+            <a:ext cx="3657600" cy="1325880"/>
           </a:xfrm>
           <a:prstGeom prst="rect">
             <a:avLst/>
@@ -8598,7 +8605,7 @@
               <a:buNone/>
             </a:pPr>
             <a:r>
-              <a:rPr lang="en-US" sz="1100" dirty="0">
+              <a:rPr lang="en-US" sz="1200" dirty="0">
                 <a:solidFill>
                   <a:srgbClr val="1A1A1A"/>
                 </a:solidFill>
@@ -8606,9 +8613,9 @@
                 <a:ea typeface="Calibri" pitchFamily="34" charset="-122"/>
                 <a:cs typeface="Calibri" pitchFamily="34" charset="-120"/>
               </a:rPr>
-              <a:t>51 Nutzer, 21 Monate. Führt den Concordance-Index als Standard-Metrik ein, weil das 'severe data missing problem' (User entladen selten auf 0%) MAE unzuverlässig macht.</a:t>
-            </a:r>
-            <a:endParaRPr lang="en-US" sz="1100" dirty="0"/>
+              <a:t>51 Nutzer, 21 Monate. Führt den Concordance-Index als Standard-Metrik ein, weil das 'severe data missing problem' (Nutzer entladen fast nie auf 0%) MAE unzuverlässig macht. Der C-Index stammt urspruenglich aus der Medizin.</a:t>
+            </a:r>
+            <a:endParaRPr lang="en-US" sz="1200" dirty="0"/>
           </a:p>
         </p:txBody>
       </p:sp>
@@ -8620,8 +8627,8 @@
         </p:nvSpPr>
         <p:spPr>
           <a:xfrm>
-            <a:off x="4663440" y="1051560"/>
-            <a:ext cx="4023360" cy="1691640"/>
+            <a:off x="4663440" y="1097280"/>
+            <a:ext cx="4023360" cy="2286000"/>
           </a:xfrm>
           <a:prstGeom prst="rect">
             <a:avLst/>
@@ -8635,6 +8642,13 @@
             </a:solidFill>
             <a:prstDash val="solid"/>
           </a:ln>
+          <a:effectLst>
+            <a:outerShdw sx="100000" sy="100000" kx="0" ky="0" algn="bl" rotWithShape="0" blurRad="76200" dist="12700" dir="8100000">
+              <a:srgbClr val="000000">
+                <a:alpha val="7000"/>
+              </a:srgbClr>
+            </a:outerShdw>
+          </a:effectLst>
         </p:spPr>
       </p:sp>
       <p:sp>
@@ -8645,332 +8659,8 @@
         </p:nvSpPr>
         <p:spPr>
           <a:xfrm>
-            <a:off x="4663440" y="1051560"/>
-            <a:ext cx="73152" cy="1691640"/>
-          </a:xfrm>
-          <a:prstGeom prst="rect">
-            <a:avLst/>
-          </a:prstGeom>
-          <a:solidFill>
-            <a:srgbClr val="4CAF50"/>
-          </a:solidFill>
-          <a:ln/>
-        </p:spPr>
-      </p:sp>
-      <p:sp>
-        <p:nvSpPr>
-          <p:cNvPr id="10" name="Text 8"/>
-          <p:cNvSpPr/>
-          <p:nvPr/>
-        </p:nvSpPr>
-        <p:spPr>
-          <a:xfrm>
-            <a:off x="4846320" y="1143000"/>
-            <a:ext cx="3749040" cy="320040"/>
-          </a:xfrm>
-          <a:prstGeom prst="rect">
-            <a:avLst/>
-          </a:prstGeom>
-          <a:noFill/>
-          <a:ln/>
-        </p:spPr>
-        <p:txBody>
-          <a:bodyPr wrap="square" lIns="0" tIns="0" rIns="0" bIns="0" rtlCol="0" anchor="ctr"/>
-          <a:lstStyle/>
-          <a:p>
-            <a:pPr indent="0" marL="0">
-              <a:buNone/>
-            </a:pPr>
-            <a:r>
-              <a:rPr lang="en-US" sz="1400" b="1" dirty="0">
-                <a:solidFill>
-                  <a:srgbClr val="4CAF50"/>
-                </a:solidFill>
-                <a:latin typeface="Calibri" pitchFamily="34" charset="0"/>
-                <a:ea typeface="Calibri" pitchFamily="34" charset="-122"/>
-                <a:cs typeface="Calibri" pitchFamily="34" charset="-120"/>
-              </a:rPr>
-              <a:t>Flores-Martin et al. (2024)</a:t>
-            </a:r>
-            <a:endParaRPr lang="en-US" sz="1400" dirty="0"/>
-          </a:p>
-        </p:txBody>
-      </p:sp>
-      <p:sp>
-        <p:nvSpPr>
-          <p:cNvPr id="11" name="Text 9"/>
-          <p:cNvSpPr/>
-          <p:nvPr/>
-        </p:nvSpPr>
-        <p:spPr>
-          <a:xfrm>
-            <a:off x="4846320" y="1435608"/>
-            <a:ext cx="3749040" cy="274320"/>
-          </a:xfrm>
-          <a:prstGeom prst="rect">
-            <a:avLst/>
-          </a:prstGeom>
-          <a:noFill/>
-          <a:ln/>
-        </p:spPr>
-        <p:txBody>
-          <a:bodyPr wrap="square" lIns="0" tIns="0" rIns="0" bIns="0" rtlCol="0" anchor="ctr"/>
-          <a:lstStyle/>
-          <a:p>
-            <a:pPr indent="0" marL="0">
-              <a:buNone/>
-            </a:pPr>
-            <a:r>
-              <a:rPr lang="en-US" sz="1100" i="1" dirty="0">
-                <a:solidFill>
-                  <a:srgbClr val="64748B"/>
-                </a:solidFill>
-                <a:latin typeface="Calibri" pitchFamily="34" charset="0"/>
-                <a:ea typeface="Calibri" pitchFamily="34" charset="-122"/>
-                <a:cs typeface="Calibri" pitchFamily="34" charset="-120"/>
-              </a:rPr>
-              <a:t>Deep Learning auf Android, DNN vs. LSTM</a:t>
-            </a:r>
-            <a:endParaRPr lang="en-US" sz="1100" dirty="0"/>
-          </a:p>
-        </p:txBody>
-      </p:sp>
-      <p:sp>
-        <p:nvSpPr>
-          <p:cNvPr id="12" name="Text 10"/>
-          <p:cNvSpPr/>
-          <p:nvPr/>
-        </p:nvSpPr>
-        <p:spPr>
-          <a:xfrm>
-            <a:off x="4846320" y="1737360"/>
-            <a:ext cx="3749040" cy="914400"/>
-          </a:xfrm>
-          <a:prstGeom prst="rect">
-            <a:avLst/>
-          </a:prstGeom>
-          <a:noFill/>
-          <a:ln/>
-        </p:spPr>
-        <p:txBody>
-          <a:bodyPr wrap="square" lIns="0" tIns="0" rIns="0" bIns="0" rtlCol="0" anchor="t"/>
-          <a:lstStyle/>
-          <a:p>
-            <a:pPr indent="0" marL="0">
-              <a:buNone/>
-            </a:pPr>
-            <a:r>
-              <a:rPr lang="en-US" sz="1100" dirty="0">
-                <a:solidFill>
-                  <a:srgbClr val="1A1A1A"/>
-                </a:solidFill>
-                <a:latin typeface="Calibri" pitchFamily="34" charset="0"/>
-                <a:ea typeface="Calibri" pitchFamily="34" charset="-122"/>
-                <a:cs typeface="Calibri" pitchFamily="34" charset="-120"/>
-              </a:rPr>
-              <a:t>Direkter Methodik-Verwandter. LSTM auf user-spezifischen App-, Sensor-, Screen-Time-Features.</a:t>
-            </a:r>
-            <a:endParaRPr lang="en-US" sz="1100" dirty="0"/>
-          </a:p>
-        </p:txBody>
-      </p:sp>
-      <p:sp>
-        <p:nvSpPr>
-          <p:cNvPr id="13" name="Shape 11"/>
-          <p:cNvSpPr/>
-          <p:nvPr/>
-        </p:nvSpPr>
-        <p:spPr>
-          <a:xfrm>
-            <a:off x="457200" y="2926080"/>
-            <a:ext cx="4023360" cy="1691640"/>
-          </a:xfrm>
-          <a:prstGeom prst="rect">
-            <a:avLst/>
-          </a:prstGeom>
-          <a:solidFill>
-            <a:srgbClr val="F8FAFC"/>
-          </a:solidFill>
-          <a:ln w="12700">
-            <a:solidFill>
-              <a:srgbClr val="E2E8F0"/>
-            </a:solidFill>
-            <a:prstDash val="solid"/>
-          </a:ln>
-        </p:spPr>
-      </p:sp>
-      <p:sp>
-        <p:nvSpPr>
-          <p:cNvPr id="14" name="Shape 12"/>
-          <p:cNvSpPr/>
-          <p:nvPr/>
-        </p:nvSpPr>
-        <p:spPr>
-          <a:xfrm>
-            <a:off x="457200" y="2926080"/>
-            <a:ext cx="73152" cy="1691640"/>
-          </a:xfrm>
-          <a:prstGeom prst="rect">
-            <a:avLst/>
-          </a:prstGeom>
-          <a:solidFill>
-            <a:srgbClr val="FF9800"/>
-          </a:solidFill>
-          <a:ln/>
-        </p:spPr>
-      </p:sp>
-      <p:sp>
-        <p:nvSpPr>
-          <p:cNvPr id="15" name="Text 13"/>
-          <p:cNvSpPr/>
-          <p:nvPr/>
-        </p:nvSpPr>
-        <p:spPr>
-          <a:xfrm>
-            <a:off x="640080" y="3017520"/>
-            <a:ext cx="3749040" cy="320040"/>
-          </a:xfrm>
-          <a:prstGeom prst="rect">
-            <a:avLst/>
-          </a:prstGeom>
-          <a:noFill/>
-          <a:ln/>
-        </p:spPr>
-        <p:txBody>
-          <a:bodyPr wrap="square" lIns="0" tIns="0" rIns="0" bIns="0" rtlCol="0" anchor="ctr"/>
-          <a:lstStyle/>
-          <a:p>
-            <a:pPr indent="0" marL="0">
-              <a:buNone/>
-            </a:pPr>
-            <a:r>
-              <a:rPr lang="en-US" sz="1400" b="1" dirty="0">
-                <a:solidFill>
-                  <a:srgbClr val="FF9800"/>
-                </a:solidFill>
-                <a:latin typeface="Calibri" pitchFamily="34" charset="0"/>
-                <a:ea typeface="Calibri" pitchFamily="34" charset="-122"/>
-                <a:cs typeface="Calibri" pitchFamily="34" charset="-120"/>
-              </a:rPr>
-              <a:t>Banbury et al. (2021) - MLPerf Tiny</a:t>
-            </a:r>
-            <a:endParaRPr lang="en-US" sz="1400" dirty="0"/>
-          </a:p>
-        </p:txBody>
-      </p:sp>
-      <p:sp>
-        <p:nvSpPr>
-          <p:cNvPr id="16" name="Text 14"/>
-          <p:cNvSpPr/>
-          <p:nvPr/>
-        </p:nvSpPr>
-        <p:spPr>
-          <a:xfrm>
-            <a:off x="640080" y="3310128"/>
-            <a:ext cx="3749040" cy="274320"/>
-          </a:xfrm>
-          <a:prstGeom prst="rect">
-            <a:avLst/>
-          </a:prstGeom>
-          <a:noFill/>
-          <a:ln/>
-        </p:spPr>
-        <p:txBody>
-          <a:bodyPr wrap="square" lIns="0" tIns="0" rIns="0" bIns="0" rtlCol="0" anchor="ctr"/>
-          <a:lstStyle/>
-          <a:p>
-            <a:pPr indent="0" marL="0">
-              <a:buNone/>
-            </a:pPr>
-            <a:r>
-              <a:rPr lang="en-US" sz="1100" i="1" dirty="0">
-                <a:solidFill>
-                  <a:srgbClr val="64748B"/>
-                </a:solidFill>
-                <a:latin typeface="Calibri" pitchFamily="34" charset="0"/>
-                <a:ea typeface="Calibri" pitchFamily="34" charset="-122"/>
-                <a:cs typeface="Calibri" pitchFamily="34" charset="-120"/>
-              </a:rPr>
-              <a:t>Industriestandard-Benchmark für TinyML</a:t>
-            </a:r>
-            <a:endParaRPr lang="en-US" sz="1100" dirty="0"/>
-          </a:p>
-        </p:txBody>
-      </p:sp>
-      <p:sp>
-        <p:nvSpPr>
-          <p:cNvPr id="17" name="Text 15"/>
-          <p:cNvSpPr/>
-          <p:nvPr/>
-        </p:nvSpPr>
-        <p:spPr>
-          <a:xfrm>
-            <a:off x="640080" y="3611880"/>
-            <a:ext cx="3749040" cy="914400"/>
-          </a:xfrm>
-          <a:prstGeom prst="rect">
-            <a:avLst/>
-          </a:prstGeom>
-          <a:noFill/>
-          <a:ln/>
-        </p:spPr>
-        <p:txBody>
-          <a:bodyPr wrap="square" lIns="0" tIns="0" rIns="0" bIns="0" rtlCol="0" anchor="t"/>
-          <a:lstStyle/>
-          <a:p>
-            <a:pPr indent="0" marL="0">
-              <a:buNone/>
-            </a:pPr>
-            <a:r>
-              <a:rPr lang="en-US" sz="1100" dirty="0">
-                <a:solidFill>
-                  <a:srgbClr val="1A1A1A"/>
-                </a:solidFill>
-                <a:latin typeface="Calibri" pitchFamily="34" charset="0"/>
-                <a:ea typeface="Calibri" pitchFamily="34" charset="-122"/>
-                <a:cs typeface="Calibri" pitchFamily="34" charset="-120"/>
-              </a:rPr>
-              <a:t>Misst Accuracy, Latency, Energy gemeinsam. Smartphone-Anwendungen fehlen in der Literatur (siehe Heydari &amp; Mahmoud 2025, Alajlan &amp; Ibrahim 2022).</a:t>
-            </a:r>
-            <a:endParaRPr lang="en-US" sz="1100" dirty="0"/>
-          </a:p>
-        </p:txBody>
-      </p:sp>
-      <p:sp>
-        <p:nvSpPr>
-          <p:cNvPr id="18" name="Shape 16"/>
-          <p:cNvSpPr/>
-          <p:nvPr/>
-        </p:nvSpPr>
-        <p:spPr>
-          <a:xfrm>
-            <a:off x="4663440" y="2926080"/>
-            <a:ext cx="4023360" cy="1691640"/>
-          </a:xfrm>
-          <a:prstGeom prst="rect">
-            <a:avLst/>
-          </a:prstGeom>
-          <a:solidFill>
-            <a:srgbClr val="F8FAFC"/>
-          </a:solidFill>
-          <a:ln w="12700">
-            <a:solidFill>
-              <a:srgbClr val="E2E8F0"/>
-            </a:solidFill>
-            <a:prstDash val="solid"/>
-          </a:ln>
-        </p:spPr>
-      </p:sp>
-      <p:sp>
-        <p:nvSpPr>
-          <p:cNvPr id="19" name="Shape 17"/>
-          <p:cNvSpPr/>
-          <p:nvPr/>
-        </p:nvSpPr>
-        <p:spPr>
-          <a:xfrm>
-            <a:off x="4663440" y="2926080"/>
-            <a:ext cx="73152" cy="1691640"/>
+            <a:off x="4663440" y="1097280"/>
+            <a:ext cx="91440" cy="2286000"/>
           </a:xfrm>
           <a:prstGeom prst="rect">
             <a:avLst/>
@@ -8983,14 +8673,14 @@
       </p:sp>
       <p:sp>
         <p:nvSpPr>
-          <p:cNvPr id="20" name="Text 18"/>
-          <p:cNvSpPr/>
-          <p:nvPr/>
-        </p:nvSpPr>
-        <p:spPr>
-          <a:xfrm>
-            <a:off x="4846320" y="3017520"/>
-            <a:ext cx="3749040" cy="320040"/>
+          <p:cNvPr id="10" name="Text 8"/>
+          <p:cNvSpPr/>
+          <p:nvPr/>
+        </p:nvSpPr>
+        <p:spPr>
+          <a:xfrm>
+            <a:off x="4892040" y="1216152"/>
+            <a:ext cx="3657600" cy="365760"/>
           </a:xfrm>
           <a:prstGeom prst="rect">
             <a:avLst/>
@@ -9006,7 +8696,7 @@
               <a:buNone/>
             </a:pPr>
             <a:r>
-              <a:rPr lang="en-US" sz="1400" b="1" dirty="0">
+              <a:rPr lang="en-US" sz="1600" b="1" dirty="0">
                 <a:solidFill>
                   <a:srgbClr val="E94560"/>
                 </a:solidFill>
@@ -9016,20 +8706,20 @@
               </a:rPr>
               <a:t>Albelali &amp; Ahmed (2025)</a:t>
             </a:r>
-            <a:endParaRPr lang="en-US" sz="1400" dirty="0"/>
+            <a:endParaRPr lang="en-US" sz="1600" dirty="0"/>
           </a:p>
         </p:txBody>
       </p:sp>
       <p:sp>
         <p:nvSpPr>
-          <p:cNvPr id="21" name="Text 19"/>
-          <p:cNvSpPr/>
-          <p:nvPr/>
-        </p:nvSpPr>
-        <p:spPr>
-          <a:xfrm>
-            <a:off x="4846320" y="3310128"/>
-            <a:ext cx="3749040" cy="274320"/>
+          <p:cNvPr id="11" name="Text 9"/>
+          <p:cNvSpPr/>
+          <p:nvPr/>
+        </p:nvSpPr>
+        <p:spPr>
+          <a:xfrm>
+            <a:off x="4892040" y="1600200"/>
+            <a:ext cx="3657600" cy="274320"/>
           </a:xfrm>
           <a:prstGeom prst="rect">
             <a:avLst/>
@@ -9045,7 +8735,7 @@
               <a:buNone/>
             </a:pPr>
             <a:r>
-              <a:rPr lang="en-US" sz="1100" i="1" dirty="0">
+              <a:rPr lang="en-US" sz="1150" i="1" dirty="0">
                 <a:solidFill>
                   <a:srgbClr val="64748B"/>
                 </a:solidFill>
@@ -9055,20 +8745,20 @@
               </a:rPr>
               <a:t>Hidden Leaks in Time Series Forecasting</a:t>
             </a:r>
-            <a:endParaRPr lang="en-US" sz="1100" dirty="0"/>
+            <a:endParaRPr lang="en-US" sz="1150" dirty="0"/>
           </a:p>
         </p:txBody>
       </p:sp>
       <p:sp>
         <p:nvSpPr>
-          <p:cNvPr id="22" name="Text 20"/>
-          <p:cNvSpPr/>
-          <p:nvPr/>
-        </p:nvSpPr>
-        <p:spPr>
-          <a:xfrm>
-            <a:off x="4846320" y="3611880"/>
-            <a:ext cx="3749040" cy="914400"/>
+          <p:cNvPr id="12" name="Text 10"/>
+          <p:cNvSpPr/>
+          <p:nvPr/>
+        </p:nvSpPr>
+        <p:spPr>
+          <a:xfrm>
+            <a:off x="4892040" y="1938528"/>
+            <a:ext cx="3657600" cy="1325880"/>
           </a:xfrm>
           <a:prstGeom prst="rect">
             <a:avLst/>
@@ -9084,7 +8774,7 @@
               <a:buNone/>
             </a:pPr>
             <a:r>
-              <a:rPr lang="en-US" sz="1100" dirty="0">
+              <a:rPr lang="en-US" sz="1200" dirty="0">
                 <a:solidFill>
                   <a:srgbClr val="1A1A1A"/>
                 </a:solidFill>
@@ -9092,7 +8782,119 @@
                 <a:ea typeface="Calibri" pitchFamily="34" charset="-122"/>
                 <a:cs typeface="Calibri" pitchFamily="34" charset="-120"/>
               </a:rPr>
-              <a:t>Random-Shuffle-Splits über Sliding-Window-Sequenzen lecken Future-Information. RMSE Gain bis 20.5% bei 10-fold CV (LSTM).</a:t>
+              <a:t>Zufaelliges Mischen von Sliding-Window-Sequenzen leckt Zukunfts-Information ins Training und schoent die Ergebnisse. RMSE Gain bis 20.5% bei 10-fold CV (LSTM).</a:t>
+            </a:r>
+            <a:endParaRPr lang="en-US" sz="1200" dirty="0"/>
+          </a:p>
+        </p:txBody>
+      </p:sp>
+      <p:sp>
+        <p:nvSpPr>
+          <p:cNvPr id="13" name="Text 11"/>
+          <p:cNvSpPr/>
+          <p:nvPr/>
+        </p:nvSpPr>
+        <p:spPr>
+          <a:xfrm>
+            <a:off x="457200" y="3611880"/>
+            <a:ext cx="8229600" cy="274320"/>
+          </a:xfrm>
+          <a:prstGeom prst="rect">
+            <a:avLst/>
+          </a:prstGeom>
+          <a:noFill/>
+          <a:ln/>
+        </p:spPr>
+        <p:txBody>
+          <a:bodyPr wrap="square" lIns="0" tIns="0" rIns="0" bIns="0" rtlCol="0" anchor="ctr"/>
+          <a:lstStyle/>
+          <a:p>
+            <a:pPr indent="0" marL="0">
+              <a:buNone/>
+            </a:pPr>
+            <a:r>
+              <a:rPr lang="en-US" sz="1200" b="1" dirty="0">
+                <a:solidFill>
+                  <a:srgbClr val="0F3460"/>
+                </a:solidFill>
+                <a:latin typeface="Calibri" pitchFamily="34" charset="0"/>
+                <a:ea typeface="Calibri" pitchFamily="34" charset="-122"/>
+                <a:cs typeface="Calibri" pitchFamily="34" charset="-120"/>
+              </a:rPr>
+              <a:t>Weitere relevante Arbeiten</a:t>
+            </a:r>
+            <a:endParaRPr lang="en-US" sz="1200" dirty="0"/>
+          </a:p>
+        </p:txBody>
+      </p:sp>
+      <p:sp>
+        <p:nvSpPr>
+          <p:cNvPr id="14" name="Shape 12"/>
+          <p:cNvSpPr/>
+          <p:nvPr/>
+        </p:nvSpPr>
+        <p:spPr>
+          <a:xfrm>
+            <a:off x="457200" y="4023360"/>
+            <a:ext cx="146304" cy="146304"/>
+          </a:xfrm>
+          <a:prstGeom prst="rect">
+            <a:avLst/>
+          </a:prstGeom>
+          <a:solidFill>
+            <a:srgbClr val="4CAF50"/>
+          </a:solidFill>
+          <a:ln/>
+        </p:spPr>
+      </p:sp>
+      <p:sp>
+        <p:nvSpPr>
+          <p:cNvPr id="15" name="Text 13"/>
+          <p:cNvSpPr/>
+          <p:nvPr/>
+        </p:nvSpPr>
+        <p:spPr>
+          <a:xfrm>
+            <a:off x="731520" y="3931920"/>
+            <a:ext cx="7955280" cy="365760"/>
+          </a:xfrm>
+          <a:prstGeom prst="rect">
+            <a:avLst/>
+          </a:prstGeom>
+          <a:noFill/>
+          <a:ln/>
+        </p:spPr>
+        <p:txBody>
+          <a:bodyPr wrap="square" lIns="0" tIns="0" rIns="0" bIns="0" rtlCol="0" anchor="t"/>
+          <a:lstStyle/>
+          <a:p>
+            <a:pPr indent="0" marL="0">
+              <a:buNone/>
+            </a:pPr>
+            <a:r>
+              <a:rPr lang="en-US" sz="1100" b="1" dirty="0">
+                <a:solidFill>
+                  <a:srgbClr val="1A1A1A"/>
+                </a:solidFill>
+                <a:latin typeface="Calibri" pitchFamily="34" charset="0"/>
+                <a:ea typeface="Calibri" pitchFamily="34" charset="-122"/>
+                <a:cs typeface="Calibri" pitchFamily="34" charset="-120"/>
+              </a:rPr>
+              <a:t>Flores-Martin et al. (2024):  </a:t>
+            </a:r>
+            <a:pPr indent="0" marL="0">
+              <a:buNone/>
+            </a:pPr>
+            <a:r>
+              <a:rPr lang="en-US" sz="1100" dirty="0">
+                <a:solidFill>
+                  <a:srgbClr val="64748B"/>
+                </a:solidFill>
+                <a:latin typeface="Calibri" pitchFamily="34" charset="0"/>
+                <a:ea typeface="Calibri" pitchFamily="34" charset="-122"/>
+                <a:cs typeface="Calibri" pitchFamily="34" charset="-120"/>
+              </a:rPr>
+              <a:t>Deep Learning auf Android, DNN vs. LSTM auf App- und Sensor-Features. Direkter Methodik-Verwandter.</a:t>
             </a:r>
             <a:endParaRPr lang="en-US" sz="1100" dirty="0"/>
           </a:p>
@@ -9100,7 +8902,80 @@
       </p:sp>
       <p:sp>
         <p:nvSpPr>
-          <p:cNvPr id="23" name="Text 21"/>
+          <p:cNvPr id="16" name="Shape 14"/>
+          <p:cNvSpPr/>
+          <p:nvPr/>
+        </p:nvSpPr>
+        <p:spPr>
+          <a:xfrm>
+            <a:off x="457200" y="4425696"/>
+            <a:ext cx="146304" cy="146304"/>
+          </a:xfrm>
+          <a:prstGeom prst="rect">
+            <a:avLst/>
+          </a:prstGeom>
+          <a:solidFill>
+            <a:srgbClr val="FF9800"/>
+          </a:solidFill>
+          <a:ln/>
+        </p:spPr>
+      </p:sp>
+      <p:sp>
+        <p:nvSpPr>
+          <p:cNvPr id="17" name="Text 15"/>
+          <p:cNvSpPr/>
+          <p:nvPr/>
+        </p:nvSpPr>
+        <p:spPr>
+          <a:xfrm>
+            <a:off x="731520" y="4334256"/>
+            <a:ext cx="7955280" cy="365760"/>
+          </a:xfrm>
+          <a:prstGeom prst="rect">
+            <a:avLst/>
+          </a:prstGeom>
+          <a:noFill/>
+          <a:ln/>
+        </p:spPr>
+        <p:txBody>
+          <a:bodyPr wrap="square" lIns="0" tIns="0" rIns="0" bIns="0" rtlCol="0" anchor="t"/>
+          <a:lstStyle/>
+          <a:p>
+            <a:pPr indent="0" marL="0">
+              <a:buNone/>
+            </a:pPr>
+            <a:r>
+              <a:rPr lang="en-US" sz="1100" b="1" dirty="0">
+                <a:solidFill>
+                  <a:srgbClr val="1A1A1A"/>
+                </a:solidFill>
+                <a:latin typeface="Calibri" pitchFamily="34" charset="0"/>
+                <a:ea typeface="Calibri" pitchFamily="34" charset="-122"/>
+                <a:cs typeface="Calibri" pitchFamily="34" charset="-120"/>
+              </a:rPr>
+              <a:t>Banbury et al. (2021), MLPerf Tiny:  </a:t>
+            </a:r>
+            <a:pPr indent="0" marL="0">
+              <a:buNone/>
+            </a:pPr>
+            <a:r>
+              <a:rPr lang="en-US" sz="1100" dirty="0">
+                <a:solidFill>
+                  <a:srgbClr val="64748B"/>
+                </a:solidFill>
+                <a:latin typeface="Calibri" pitchFamily="34" charset="0"/>
+                <a:ea typeface="Calibri" pitchFamily="34" charset="-122"/>
+                <a:cs typeface="Calibri" pitchFamily="34" charset="-120"/>
+              </a:rPr>
+              <a:t>Industriestandard-Benchmark fuer TinyML (Accuracy, Latency, Energy). Smartphones kaum abgedeckt.</a:t>
+            </a:r>
+            <a:endParaRPr lang="en-US" sz="1100" dirty="0"/>
+          </a:p>
+        </p:txBody>
+      </p:sp>
+      <p:sp>
+        <p:nvSpPr>
+          <p:cNvPr id="18" name="Text 16"/>
           <p:cNvSpPr/>
           <p:nvPr/>
         </p:nvSpPr>
@@ -9139,7 +9014,7 @@
       </p:sp>
       <p:sp>
         <p:nvSpPr>
-          <p:cNvPr id="24" name="Text 22"/>
+          <p:cNvPr id="19" name="Text 17"/>
           <p:cNvSpPr/>
           <p:nvPr/>
         </p:nvSpPr>

--- a/paper/Paper_Verteidigung.pptx
+++ b/paper/Paper_Verteidigung.pptx
@@ -4,6 +4,9 @@
   <p:sldMasterIdLst>
     <p:sldMasterId id="2147483648" r:id="rId1"/>
   </p:sldMasterIdLst>
+  <p:notesMasterIdLst>
+    <p:notesMasterId r:id="rId17"/>
+  </p:notesMasterIdLst>
   <p:sldIdLst>
     <p:sldId id="256" r:id="rId2"/>
     <p:sldId id="257" r:id="rId3"/>
@@ -21,10 +24,7 @@
     <p:sldId id="269" r:id="rId15"/>
     <p:sldId id="270" r:id="rId16"/>
   </p:sldIdLst>
-  <p:notesMasterIdLst>
-    <p:notesMasterId r:id="rId17"/>
-  </p:notesMasterIdLst>
-  <p:sldSz cx="9144000" cy="5143500"/>
+  <p:sldSz cx="9144000" cy="5143500" type="screen16x9"/>
   <p:notesSz cx="5143500" cy="9144000"/>
   <p:defaultTextStyle>
     <a:lvl1pPr marL="0" algn="l" defTabSz="914400" rtl="0" eaLnBrk="1" latinLnBrk="0" hangingPunct="1">
@@ -118,13 +118,20 @@
       </a:defRPr>
     </a:lvl9pPr>
   </p:defaultTextStyle>
+  <p:extLst>
+    <p:ext uri="{EFAFB233-063F-42B5-8137-9DF3F51BA10A}">
+      <p15:sldGuideLst xmlns:p15="http://schemas.microsoft.com/office/powerpoint/2012/main"/>
+    </p:ext>
+  </p:extLst>
 </p:presentation>
 </file>
 
 <file path=ppt/charts/chart1.xml><?xml version="1.0" encoding="utf-8"?>
-<c:chartSpace xmlns:c="http://schemas.openxmlformats.org/drawingml/2006/chart" xmlns:a="http://schemas.openxmlformats.org/drawingml/2006/main" xmlns:r="http://schemas.openxmlformats.org/officeDocument/2006/relationships">
+<c:chartSpace xmlns:c="http://schemas.openxmlformats.org/drawingml/2006/chart" xmlns:a="http://schemas.openxmlformats.org/drawingml/2006/main" xmlns:r="http://schemas.openxmlformats.org/officeDocument/2006/relationships" xmlns:c16r2="http://schemas.microsoft.com/office/drawing/2015/06/chart">
   <c:date1904 val="0"/>
+  <c:lang val="de-DE"/>
   <c:roundedCorners val="1"/>
+  <c:style val="2"/>
   <c:chart>
     <c:title>
       <c:tx>
@@ -141,7 +148,7 @@
               </a:defRPr>
             </a:pPr>
             <a:r>
-              <a:rPr sz="1200" b="0" i="0" u="none" strike="noStrike">
+              <a:rPr lang="de-DE" sz="1200" b="0" i="0" u="none" strike="noStrike">
                 <a:solidFill>
                   <a:srgbClr val="0F3460"/>
                 </a:solidFill>
@@ -152,7 +159,6 @@
           </a:p>
         </c:rich>
       </c:tx>
-      <c:layout/>
       <c:overlay val="0"/>
     </c:title>
     <c:autoTitleDeleted val="0"/>
@@ -183,51 +189,25 @@
             <a:effectLst/>
           </c:spPr>
           <c:invertIfNegative val="0"/>
-          <c:dLbls>
-            <c:numFmt formatCode="#,##0" sourceLinked="0"/>
-            <c:txPr>
-              <a:bodyPr/>
-              <a:lstStyle/>
-              <a:p>
-                <a:pPr>
-                  <a:defRPr b="0" i="0" strike="noStrike" sz="1200" u="none">
-                    <a:solidFill>
-                      <a:srgbClr val="000000"/>
-                    </a:solidFill>
-                    <a:latin typeface="Arial"/>
-                  </a:defRPr>
-                </a:pPr>
-              </a:p>
-            </c:txPr>
-            <c:showLegendKey val="0"/>
-            <c:showVal val="0"/>
-            <c:showCatName val="0"/>
-            <c:showSerName val="0"/>
-            <c:showPercent val="0"/>
-            <c:showBubbleSize val="0"/>
-            <c:showLeaderLines val="0"/>
-          </c:dLbls>
           <c:cat>
-            <c:multiLvlStrRef>
+            <c:strRef>
               <c:f>Sheet1!$A$2:$A$5</c:f>
-              <c:multiLvlStrCache>
+              <c:strCache>
                 <c:ptCount val="4"/>
-                <c:lvl>
-                  <c:pt idx="0">
-                    <c:v>Pixel 7 Pro</c:v>
-                  </c:pt>
-                  <c:pt idx="1">
-                    <c:v>Pixel 8 Pro</c:v>
-                  </c:pt>
-                  <c:pt idx="2">
-                    <c:v>Pixel 9 Pro XL</c:v>
-                  </c:pt>
-                  <c:pt idx="3">
-                    <c:v>Xiaomi</c:v>
-                  </c:pt>
-                </c:lvl>
-              </c:multiLvlStrCache>
-            </c:multiLvlStrRef>
+                <c:pt idx="0">
+                  <c:v>Pixel 7 Pro</c:v>
+                </c:pt>
+                <c:pt idx="1">
+                  <c:v>Pixel 8 Pro</c:v>
+                </c:pt>
+                <c:pt idx="2">
+                  <c:v>Pixel 9 Pro XL</c:v>
+                </c:pt>
+                <c:pt idx="3">
+                  <c:v>Xiaomi</c:v>
+                </c:pt>
+              </c:strCache>
+            </c:strRef>
           </c:cat>
           <c:val>
             <c:numRef>
@@ -239,17 +219,22 @@
                   <c:v>0.754</c:v>
                 </c:pt>
                 <c:pt idx="1">
-                  <c:v>0.742</c:v>
+                  <c:v>0.74199999999999999</c:v>
                 </c:pt>
                 <c:pt idx="2">
-                  <c:v>0.571</c:v>
+                  <c:v>0.57099999999999995</c:v>
                 </c:pt>
                 <c:pt idx="3">
-                  <c:v>0.593</c:v>
+                  <c:v>0.59299999999999997</c:v>
                 </c:pt>
               </c:numCache>
             </c:numRef>
           </c:val>
+          <c:extLst>
+            <c:ext xmlns:c16="http://schemas.microsoft.com/office/drawing/2014/chart" uri="{C3380CC4-5D6E-409C-BE32-E72D297353CC}">
+              <c16:uniqueId val="{00000000-74F6-4B8B-8078-DDD7B389E8E2}"/>
+            </c:ext>
+          </c:extLst>
         </c:ser>
         <c:ser>
           <c:idx val="1"/>
@@ -272,51 +257,25 @@
             <a:effectLst/>
           </c:spPr>
           <c:invertIfNegative val="0"/>
-          <c:dLbls>
-            <c:numFmt formatCode="#,##0" sourceLinked="0"/>
-            <c:txPr>
-              <a:bodyPr/>
-              <a:lstStyle/>
-              <a:p>
-                <a:pPr>
-                  <a:defRPr b="0" i="0" strike="noStrike" sz="1200" u="none">
-                    <a:solidFill>
-                      <a:srgbClr val="000000"/>
-                    </a:solidFill>
-                    <a:latin typeface="Arial"/>
-                  </a:defRPr>
-                </a:pPr>
-              </a:p>
-            </c:txPr>
-            <c:showLegendKey val="0"/>
-            <c:showVal val="0"/>
-            <c:showCatName val="0"/>
-            <c:showSerName val="0"/>
-            <c:showPercent val="0"/>
-            <c:showBubbleSize val="0"/>
-            <c:showLeaderLines val="0"/>
-          </c:dLbls>
           <c:cat>
-            <c:multiLvlStrRef>
+            <c:strRef>
               <c:f>Sheet1!$A$2:$A$5</c:f>
-              <c:multiLvlStrCache>
+              <c:strCache>
                 <c:ptCount val="4"/>
-                <c:lvl>
-                  <c:pt idx="0">
-                    <c:v>Pixel 7 Pro</c:v>
-                  </c:pt>
-                  <c:pt idx="1">
-                    <c:v>Pixel 8 Pro</c:v>
-                  </c:pt>
-                  <c:pt idx="2">
-                    <c:v>Pixel 9 Pro XL</c:v>
-                  </c:pt>
-                  <c:pt idx="3">
-                    <c:v>Xiaomi</c:v>
-                  </c:pt>
-                </c:lvl>
-              </c:multiLvlStrCache>
-            </c:multiLvlStrRef>
+                <c:pt idx="0">
+                  <c:v>Pixel 7 Pro</c:v>
+                </c:pt>
+                <c:pt idx="1">
+                  <c:v>Pixel 8 Pro</c:v>
+                </c:pt>
+                <c:pt idx="2">
+                  <c:v>Pixel 9 Pro XL</c:v>
+                </c:pt>
+                <c:pt idx="3">
+                  <c:v>Xiaomi</c:v>
+                </c:pt>
+              </c:strCache>
+            </c:strRef>
           </c:cat>
           <c:val>
             <c:numRef>
@@ -325,13 +284,13 @@
                 <c:formatCode>General</c:formatCode>
                 <c:ptCount val="4"/>
                 <c:pt idx="0">
-                  <c:v>0.807</c:v>
+                  <c:v>0.80700000000000005</c:v>
                 </c:pt>
                 <c:pt idx="1">
-                  <c:v>0.815</c:v>
+                  <c:v>0.81499999999999995</c:v>
                 </c:pt>
                 <c:pt idx="2">
-                  <c:v>0.767</c:v>
+                  <c:v>0.76700000000000002</c:v>
                 </c:pt>
                 <c:pt idx="3">
                   <c:v>0.628</c:v>
@@ -339,6 +298,11 @@
               </c:numCache>
             </c:numRef>
           </c:val>
+          <c:extLst>
+            <c:ext xmlns:c16="http://schemas.microsoft.com/office/drawing/2014/chart" uri="{C3380CC4-5D6E-409C-BE32-E72D297353CC}">
+              <c16:uniqueId val="{00000001-74F6-4B8B-8078-DDD7B389E8E2}"/>
+            </c:ext>
+          </c:extLst>
         </c:ser>
         <c:ser>
           <c:idx val="2"/>
@@ -361,51 +325,25 @@
             <a:effectLst/>
           </c:spPr>
           <c:invertIfNegative val="0"/>
-          <c:dLbls>
-            <c:numFmt formatCode="#,##0" sourceLinked="0"/>
-            <c:txPr>
-              <a:bodyPr/>
-              <a:lstStyle/>
-              <a:p>
-                <a:pPr>
-                  <a:defRPr b="0" i="0" strike="noStrike" sz="1200" u="none">
-                    <a:solidFill>
-                      <a:srgbClr val="000000"/>
-                    </a:solidFill>
-                    <a:latin typeface="Arial"/>
-                  </a:defRPr>
-                </a:pPr>
-              </a:p>
-            </c:txPr>
-            <c:showLegendKey val="0"/>
-            <c:showVal val="0"/>
-            <c:showCatName val="0"/>
-            <c:showSerName val="0"/>
-            <c:showPercent val="0"/>
-            <c:showBubbleSize val="0"/>
-            <c:showLeaderLines val="0"/>
-          </c:dLbls>
           <c:cat>
-            <c:multiLvlStrRef>
+            <c:strRef>
               <c:f>Sheet1!$A$2:$A$5</c:f>
-              <c:multiLvlStrCache>
+              <c:strCache>
                 <c:ptCount val="4"/>
-                <c:lvl>
-                  <c:pt idx="0">
-                    <c:v>Pixel 7 Pro</c:v>
-                  </c:pt>
-                  <c:pt idx="1">
-                    <c:v>Pixel 8 Pro</c:v>
-                  </c:pt>
-                  <c:pt idx="2">
-                    <c:v>Pixel 9 Pro XL</c:v>
-                  </c:pt>
-                  <c:pt idx="3">
-                    <c:v>Xiaomi</c:v>
-                  </c:pt>
-                </c:lvl>
-              </c:multiLvlStrCache>
-            </c:multiLvlStrRef>
+                <c:pt idx="0">
+                  <c:v>Pixel 7 Pro</c:v>
+                </c:pt>
+                <c:pt idx="1">
+                  <c:v>Pixel 8 Pro</c:v>
+                </c:pt>
+                <c:pt idx="2">
+                  <c:v>Pixel 9 Pro XL</c:v>
+                </c:pt>
+                <c:pt idx="3">
+                  <c:v>Xiaomi</c:v>
+                </c:pt>
+              </c:strCache>
+            </c:strRef>
           </c:cat>
           <c:val>
             <c:numRef>
@@ -414,20 +352,25 @@
                 <c:formatCode>General</c:formatCode>
                 <c:ptCount val="4"/>
                 <c:pt idx="0">
-                  <c:v>0.792</c:v>
+                  <c:v>0.79200000000000004</c:v>
                 </c:pt>
                 <c:pt idx="1">
-                  <c:v>0.696</c:v>
+                  <c:v>0.69599999999999995</c:v>
                 </c:pt>
                 <c:pt idx="2">
                   <c:v>0.73</c:v>
                 </c:pt>
                 <c:pt idx="3">
-                  <c:v>0.724</c:v>
+                  <c:v>0.72399999999999998</c:v>
                 </c:pt>
               </c:numCache>
             </c:numRef>
           </c:val>
+          <c:extLst>
+            <c:ext xmlns:c16="http://schemas.microsoft.com/office/drawing/2014/chart" uri="{C3380CC4-5D6E-409C-BE32-E72D297353CC}">
+              <c16:uniqueId val="{00000002-74F6-4B8B-8078-DDD7B389E8E2}"/>
+            </c:ext>
+          </c:extLst>
         </c:ser>
         <c:ser>
           <c:idx val="3"/>
@@ -450,51 +393,25 @@
             <a:effectLst/>
           </c:spPr>
           <c:invertIfNegative val="0"/>
-          <c:dLbls>
-            <c:numFmt formatCode="#,##0" sourceLinked="0"/>
-            <c:txPr>
-              <a:bodyPr/>
-              <a:lstStyle/>
-              <a:p>
-                <a:pPr>
-                  <a:defRPr b="0" i="0" strike="noStrike" sz="1200" u="none">
-                    <a:solidFill>
-                      <a:srgbClr val="000000"/>
-                    </a:solidFill>
-                    <a:latin typeface="Arial"/>
-                  </a:defRPr>
-                </a:pPr>
-              </a:p>
-            </c:txPr>
-            <c:showLegendKey val="0"/>
-            <c:showVal val="0"/>
-            <c:showCatName val="0"/>
-            <c:showSerName val="0"/>
-            <c:showPercent val="0"/>
-            <c:showBubbleSize val="0"/>
-            <c:showLeaderLines val="0"/>
-          </c:dLbls>
           <c:cat>
-            <c:multiLvlStrRef>
+            <c:strRef>
               <c:f>Sheet1!$A$2:$A$5</c:f>
-              <c:multiLvlStrCache>
+              <c:strCache>
                 <c:ptCount val="4"/>
-                <c:lvl>
-                  <c:pt idx="0">
-                    <c:v>Pixel 7 Pro</c:v>
-                  </c:pt>
-                  <c:pt idx="1">
-                    <c:v>Pixel 8 Pro</c:v>
-                  </c:pt>
-                  <c:pt idx="2">
-                    <c:v>Pixel 9 Pro XL</c:v>
-                  </c:pt>
-                  <c:pt idx="3">
-                    <c:v>Xiaomi</c:v>
-                  </c:pt>
-                </c:lvl>
-              </c:multiLvlStrCache>
-            </c:multiLvlStrRef>
+                <c:pt idx="0">
+                  <c:v>Pixel 7 Pro</c:v>
+                </c:pt>
+                <c:pt idx="1">
+                  <c:v>Pixel 8 Pro</c:v>
+                </c:pt>
+                <c:pt idx="2">
+                  <c:v>Pixel 9 Pro XL</c:v>
+                </c:pt>
+                <c:pt idx="3">
+                  <c:v>Xiaomi</c:v>
+                </c:pt>
+              </c:strCache>
+            </c:strRef>
           </c:cat>
           <c:val>
             <c:numRef>
@@ -503,50 +420,37 @@
                 <c:formatCode>General</c:formatCode>
                 <c:ptCount val="4"/>
                 <c:pt idx="0">
-                  <c:v>0.853</c:v>
+                  <c:v>0.85299999999999998</c:v>
                 </c:pt>
                 <c:pt idx="1">
-                  <c:v>0.921</c:v>
+                  <c:v>0.92100000000000004</c:v>
                 </c:pt>
                 <c:pt idx="2">
-                  <c:v>0.677</c:v>
+                  <c:v>0.67700000000000005</c:v>
                 </c:pt>
                 <c:pt idx="3">
-                  <c:v>0.473</c:v>
+                  <c:v>0.47299999999999998</c:v>
                 </c:pt>
               </c:numCache>
             </c:numRef>
           </c:val>
+          <c:extLst>
+            <c:ext xmlns:c16="http://schemas.microsoft.com/office/drawing/2014/chart" uri="{C3380CC4-5D6E-409C-BE32-E72D297353CC}">
+              <c16:uniqueId val="{00000003-74F6-4B8B-8078-DDD7B389E8E2}"/>
+            </c:ext>
+          </c:extLst>
         </c:ser>
         <c:dLbls>
-          <c:numFmt formatCode="#,##0" sourceLinked="0"/>
-          <c:txPr>
-            <a:bodyPr/>
-            <a:lstStyle/>
-            <a:p>
-              <a:pPr>
-                <a:defRPr b="0" i="0" strike="noStrike" sz="1200" u="none">
-                  <a:solidFill>
-                    <a:srgbClr val="000000"/>
-                  </a:solidFill>
-                  <a:latin typeface="Arial"/>
-                </a:defRPr>
-              </a:pPr>
-            </a:p>
-          </c:txPr>
           <c:showLegendKey val="0"/>
           <c:showVal val="0"/>
           <c:showCatName val="0"/>
           <c:showSerName val="0"/>
           <c:showPercent val="0"/>
           <c:showBubbleSize val="0"/>
-          <c:showLeaderLines val="0"/>
         </c:dLbls>
         <c:gapWidth val="150"/>
-        <c:overlap val="0"/>
         <c:axId val="2094734554"/>
         <c:axId val="2094734552"/>
-        <c:axId val="2094734556"/>
       </c:barChart>
       <c:catAx>
         <c:axId val="2094734554"/>
@@ -587,6 +491,7 @@
         <c:crosses val="autoZero"/>
         <c:auto val="1"/>
         <c:lblAlgn val="ctr"/>
+        <c:lblOffset val="100"/>
         <c:noMultiLvlLbl val="1"/>
       </c:catAx>
       <c:valAx>
@@ -657,7 +562,7 @@
         <a:lstStyle/>
         <a:p>
           <a:pPr>
-            <a:defRPr sz="1000">      </a:defRPr>
+            <a:defRPr sz="1000"/>
           </a:pPr>
           <a:endParaRPr lang="en-US"/>
         </a:p>
@@ -665,6 +570,7 @@
     </c:legend>
     <c:plotVisOnly val="1"/>
     <c:dispBlanksAs val="span"/>
+    <c:showDLblsOverMax val="1"/>
   </c:chart>
   <c:spPr>
     <a:solidFill>
@@ -703,234 +609,10 @@
           <a:chExt cx="0" cy="0"/>
         </a:xfrm>
       </p:grpSpPr>
-      <p:sp>
-        <p:nvSpPr>
-          <p:cNvPr id="2" name="Header Placeholder 1"/>
-          <p:cNvSpPr>
-            <a:spLocks noGrp="1"/>
-          </p:cNvSpPr>
-          <p:nvPr>
-            <p:ph type="hdr" sz="quarter"/>
-          </p:nvPr>
-        </p:nvSpPr>
-        <p:spPr>
-          <a:xfrm>
-            <a:off x="0" y="0"/>
-            <a:ext cx="2971800" cy="458788"/>
-          </a:xfrm>
-          <a:prstGeom prst="rect">
-            <a:avLst/>
-          </a:prstGeom>
-        </p:spPr>
-        <p:txBody>
-          <a:bodyPr vert="horz" lIns="91440" tIns="45720" rIns="91440" bIns="45720" rtlCol="0"/>
-          <a:lstStyle>
-            <a:lvl1pPr algn="l">
-              <a:defRPr sz="1200"/>
-            </a:lvl1pPr>
-          </a:lstStyle>
-          <a:p>
-            <a:endParaRPr lang="en-US"/>
-          </a:p>
-        </p:txBody>
-      </p:sp>
-      <p:sp>
-        <p:nvSpPr>
-          <p:cNvPr id="3" name="Date Placeholder 2"/>
-          <p:cNvSpPr>
-            <a:spLocks noGrp="1"/>
-          </p:cNvSpPr>
-          <p:nvPr>
-            <p:ph type="dt" idx="1"/>
-          </p:nvPr>
-        </p:nvSpPr>
-        <p:spPr>
-          <a:xfrm>
-            <a:off x="3884613" y="0"/>
-            <a:ext cx="2971800" cy="458788"/>
-          </a:xfrm>
-          <a:prstGeom prst="rect">
-            <a:avLst/>
-          </a:prstGeom>
-        </p:spPr>
-        <p:txBody>
-          <a:bodyPr vert="horz" lIns="91440" tIns="45720" rIns="91440" bIns="45720" rtlCol="0"/>
-          <a:lstStyle>
-            <a:lvl1pPr algn="r">
-              <a:defRPr sz="1200"/>
-            </a:lvl1pPr>
-          </a:lstStyle>
-          <a:p>
-            <a:fld id="{5282F153-3F37-0F45-9E97-73ACFA13230C}" type="datetimeFigureOut">
-              <a:rPr lang="en-US"/>
-              <a:t>7/23/19</a:t>
-            </a:fld>
-            <a:endParaRPr lang="en-US"/>
-          </a:p>
-        </p:txBody>
-      </p:sp>
-      <p:sp>
-        <p:nvSpPr>
-          <p:cNvPr id="4" name="Slide Image Placeholder 3"/>
-          <p:cNvSpPr>
-            <a:spLocks noGrp="1" noRot="1" noChangeAspect="1"/>
-          </p:cNvSpPr>
-          <p:nvPr>
-            <p:ph type="sldImg" idx="2"/>
-          </p:nvPr>
-        </p:nvSpPr>
-        <p:spPr>
-          <a:xfrm>
-            <a:off x="685800" y="1143000"/>
-            <a:ext cx="5486400" cy="3086100"/>
-          </a:xfrm>
-          <a:prstGeom prst="rect">
-            <a:avLst/>
-          </a:prstGeom>
-          <a:noFill/>
-          <a:ln w="12700">
-            <a:solidFill>
-              <a:prstClr val="black"/>
-            </a:solidFill>
-          </a:ln>
-        </p:spPr>
-        <p:txBody>
-          <a:bodyPr vert="horz" lIns="91440" tIns="45720" rIns="91440" bIns="45720" rtlCol="0" anchor="ctr"/>
-          <a:lstStyle/>
-          <a:p>
-            <a:endParaRPr lang="en-US"/>
-          </a:p>
-        </p:txBody>
-      </p:sp>
-      <p:sp>
-        <p:nvSpPr>
-          <p:cNvPr id="5" name="Notes Placeholder 4"/>
-          <p:cNvSpPr>
-            <a:spLocks noGrp="1"/>
-          </p:cNvSpPr>
-          <p:nvPr>
-            <p:ph type="body" sz="quarter" idx="3"/>
-          </p:nvPr>
-        </p:nvSpPr>
-        <p:spPr>
-          <a:xfrm>
-            <a:off x="685800" y="4400550"/>
-            <a:ext cx="5486400" cy="3600450"/>
-          </a:xfrm>
-          <a:prstGeom prst="rect">
-            <a:avLst/>
-          </a:prstGeom>
-        </p:spPr>
-        <p:txBody>
-          <a:bodyPr vert="horz" lIns="91440" tIns="45720" rIns="91440" bIns="45720" rtlCol="0"/>
-          <a:lstStyle/>
-          <a:p>
-            <a:pPr lvl="0"/>
-            <a:r>
-              <a:rPr lang="en-US"/>
-              <a:t>Click to edit Master text styles</a:t>
-            </a:r>
-          </a:p>
-          <a:p>
-            <a:pPr lvl="1"/>
-            <a:r>
-              <a:rPr lang="en-US"/>
-              <a:t>Second level</a:t>
-            </a:r>
-          </a:p>
-          <a:p>
-            <a:pPr lvl="2"/>
-            <a:r>
-              <a:rPr lang="en-US"/>
-              <a:t>Third level</a:t>
-            </a:r>
-          </a:p>
-          <a:p>
-            <a:pPr lvl="3"/>
-            <a:r>
-              <a:rPr lang="en-US"/>
-              <a:t>Fourth level</a:t>
-            </a:r>
-          </a:p>
-          <a:p>
-            <a:pPr lvl="4"/>
-            <a:r>
-              <a:rPr lang="en-US"/>
-              <a:t>Fifth level</a:t>
-            </a:r>
-          </a:p>
-        </p:txBody>
-      </p:sp>
-      <p:sp>
-        <p:nvSpPr>
-          <p:cNvPr id="6" name="Footer Placeholder 5"/>
-          <p:cNvSpPr>
-            <a:spLocks noGrp="1"/>
-          </p:cNvSpPr>
-          <p:nvPr>
-            <p:ph type="ftr" sz="quarter" idx="4"/>
-          </p:nvPr>
-        </p:nvSpPr>
-        <p:spPr>
-          <a:xfrm>
-            <a:off x="0" y="8685213"/>
-            <a:ext cx="2971800" cy="458787"/>
-          </a:xfrm>
-          <a:prstGeom prst="rect">
-            <a:avLst/>
-          </a:prstGeom>
-        </p:spPr>
-        <p:txBody>
-          <a:bodyPr vert="horz" lIns="91440" tIns="45720" rIns="91440" bIns="45720" rtlCol="0" anchor="b"/>
-          <a:lstStyle>
-            <a:lvl1pPr algn="l">
-              <a:defRPr sz="1200"/>
-            </a:lvl1pPr>
-          </a:lstStyle>
-          <a:p>
-            <a:endParaRPr lang="en-US"/>
-          </a:p>
-        </p:txBody>
-      </p:sp>
-      <p:sp>
-        <p:nvSpPr>
-          <p:cNvPr id="7" name="Slide Number Placeholder 6"/>
-          <p:cNvSpPr>
-            <a:spLocks noGrp="1"/>
-          </p:cNvSpPr>
-          <p:nvPr>
-            <p:ph type="sldNum" sz="quarter" idx="5"/>
-          </p:nvPr>
-        </p:nvSpPr>
-        <p:spPr>
-          <a:xfrm>
-            <a:off x="3884613" y="8685213"/>
-            <a:ext cx="2971800" cy="458787"/>
-          </a:xfrm>
-          <a:prstGeom prst="rect">
-            <a:avLst/>
-          </a:prstGeom>
-        </p:spPr>
-        <p:txBody>
-          <a:bodyPr vert="horz" lIns="91440" tIns="45720" rIns="91440" bIns="45720" rtlCol="0" anchor="b"/>
-          <a:lstStyle>
-            <a:lvl1pPr algn="r">
-              <a:defRPr sz="1200"/>
-            </a:lvl1pPr>
-          </a:lstStyle>
-          <a:p>
-            <a:fld id="{CE5E9CC1-C706-0F49-92D6-E571CC5EEA8F}" type="slidenum">
-              <a:rPr lang="en-US"/>
-              <a:t>‹#›</a:t>
-            </a:fld>
-            <a:endParaRPr lang="en-US"/>
-          </a:p>
-        </p:txBody>
-      </p:sp>
     </p:spTree>
     <p:extLst>
       <p:ext uri="{BB962C8B-B14F-4D97-AF65-F5344CB8AC3E}">
-        <p14:creationId xmlns:p14="http://schemas.microsoft.com/office/powerpoint/2010/main" val="1024086991"/>
+        <p14:creationId xmlns:p14="http://schemas.microsoft.com/office/powerpoint/2010/main" val="1152803834"/>
       </p:ext>
     </p:extLst>
   </p:cSld>
@@ -1074,10 +756,6 @@
           <a:bodyPr/>
           <a:lstStyle/>
           <a:p>
-            <a:r>
-              <a:rPr lang="en-US" dirty="0"/>
-              <a:t/>
-            </a:r>
             <a:endParaRPr lang="en-US" dirty="0"/>
           </a:p>
         </p:txBody>
@@ -1162,10 +840,6 @@
           <a:bodyPr/>
           <a:lstStyle/>
           <a:p>
-            <a:r>
-              <a:rPr lang="en-US" dirty="0"/>
-              <a:t/>
-            </a:r>
             <a:endParaRPr lang="en-US" dirty="0"/>
           </a:p>
         </p:txBody>
@@ -1250,10 +924,6 @@
           <a:bodyPr/>
           <a:lstStyle/>
           <a:p>
-            <a:r>
-              <a:rPr lang="en-US" dirty="0"/>
-              <a:t/>
-            </a:r>
             <a:endParaRPr lang="en-US" dirty="0"/>
           </a:p>
         </p:txBody>
@@ -1338,10 +1008,6 @@
           <a:bodyPr/>
           <a:lstStyle/>
           <a:p>
-            <a:r>
-              <a:rPr lang="en-US" dirty="0"/>
-              <a:t/>
-            </a:r>
             <a:endParaRPr lang="en-US" dirty="0"/>
           </a:p>
         </p:txBody>
@@ -1426,10 +1092,6 @@
           <a:bodyPr/>
           <a:lstStyle/>
           <a:p>
-            <a:r>
-              <a:rPr lang="en-US" dirty="0"/>
-              <a:t/>
-            </a:r>
             <a:endParaRPr lang="en-US" dirty="0"/>
           </a:p>
         </p:txBody>
@@ -1514,10 +1176,6 @@
           <a:bodyPr/>
           <a:lstStyle/>
           <a:p>
-            <a:r>
-              <a:rPr lang="en-US" dirty="0"/>
-              <a:t/>
-            </a:r>
             <a:endParaRPr lang="en-US" dirty="0"/>
           </a:p>
         </p:txBody>
@@ -1602,10 +1260,6 @@
           <a:bodyPr/>
           <a:lstStyle/>
           <a:p>
-            <a:r>
-              <a:rPr lang="en-US" dirty="0"/>
-              <a:t/>
-            </a:r>
             <a:endParaRPr lang="en-US" dirty="0"/>
           </a:p>
         </p:txBody>
@@ -1690,10 +1344,6 @@
           <a:bodyPr/>
           <a:lstStyle/>
           <a:p>
-            <a:r>
-              <a:rPr lang="en-US" dirty="0"/>
-              <a:t/>
-            </a:r>
             <a:endParaRPr lang="en-US" dirty="0"/>
           </a:p>
         </p:txBody>
@@ -1778,10 +1428,6 @@
           <a:bodyPr/>
           <a:lstStyle/>
           <a:p>
-            <a:r>
-              <a:rPr lang="en-US" dirty="0"/>
-              <a:t/>
-            </a:r>
             <a:endParaRPr lang="en-US" dirty="0"/>
           </a:p>
         </p:txBody>
@@ -1866,10 +1512,6 @@
           <a:bodyPr/>
           <a:lstStyle/>
           <a:p>
-            <a:r>
-              <a:rPr lang="en-US" dirty="0"/>
-              <a:t/>
-            </a:r>
             <a:endParaRPr lang="en-US" dirty="0"/>
           </a:p>
         </p:txBody>
@@ -1954,10 +1596,6 @@
           <a:bodyPr/>
           <a:lstStyle/>
           <a:p>
-            <a:r>
-              <a:rPr lang="en-US" dirty="0"/>
-              <a:t/>
-            </a:r>
             <a:endParaRPr lang="en-US" dirty="0"/>
           </a:p>
         </p:txBody>
@@ -2042,10 +1680,6 @@
           <a:bodyPr/>
           <a:lstStyle/>
           <a:p>
-            <a:r>
-              <a:rPr lang="en-US" dirty="0"/>
-              <a:t/>
-            </a:r>
             <a:endParaRPr lang="en-US" dirty="0"/>
           </a:p>
         </p:txBody>
@@ -2130,10 +1764,6 @@
           <a:bodyPr/>
           <a:lstStyle/>
           <a:p>
-            <a:r>
-              <a:rPr lang="en-US" dirty="0"/>
-              <a:t/>
-            </a:r>
             <a:endParaRPr lang="en-US" dirty="0"/>
           </a:p>
         </p:txBody>
@@ -2218,10 +1848,6 @@
           <a:bodyPr/>
           <a:lstStyle/>
           <a:p>
-            <a:r>
-              <a:rPr lang="en-US" dirty="0"/>
-              <a:t/>
-            </a:r>
             <a:endParaRPr lang="en-US" dirty="0"/>
           </a:p>
         </p:txBody>
@@ -2306,10 +1932,6 @@
           <a:bodyPr/>
           <a:lstStyle/>
           <a:p>
-            <a:r>
-              <a:rPr lang="en-US" dirty="0"/>
-              <a:t/>
-            </a:r>
             <a:endParaRPr lang="en-US" dirty="0"/>
           </a:p>
         </p:txBody>
@@ -2383,6 +2005,11 @@
 <file path=ppt/slideMasters/slideMaster1.xml><?xml version="1.0" encoding="utf-8"?>
 <p:sldMaster xmlns:a="http://schemas.openxmlformats.org/drawingml/2006/main" xmlns:r="http://schemas.openxmlformats.org/officeDocument/2006/relationships" xmlns:p="http://schemas.openxmlformats.org/presentationml/2006/main">
   <p:cSld>
+    <p:bg>
+      <p:bgRef idx="1001">
+        <a:schemeClr val="bg1"/>
+      </p:bgRef>
+    </p:bg>
     <p:spTree>
       <p:nvGrpSpPr>
         <p:cNvPr id="1" name=""/>
@@ -2665,6 +2292,7 @@
         <a:solidFill>
           <a:srgbClr val="0F1B2D"/>
         </a:solidFill>
+        <a:effectLst/>
       </p:bgPr>
     </p:bg>
     <p:spTree>
@@ -2702,7 +2330,7 @@
           <a:bodyPr wrap="square" rtlCol="0" anchor="ctr"/>
           <a:lstStyle/>
           <a:p>
-            <a:pPr algn="l" indent="0" marL="0">
+            <a:pPr marL="0" indent="0" algn="l">
               <a:buNone/>
             </a:pPr>
             <a:r>
@@ -2741,7 +2369,7 @@
           <a:bodyPr wrap="square" rtlCol="0" anchor="ctr"/>
           <a:lstStyle/>
           <a:p>
-            <a:pPr algn="l" indent="0" marL="0">
+            <a:pPr marL="0" indent="0" algn="l">
               <a:buNone/>
             </a:pPr>
             <a:r>
@@ -2778,6 +2406,13 @@
           </a:solidFill>
           <a:ln/>
         </p:spPr>
+        <p:txBody>
+          <a:bodyPr/>
+          <a:lstStyle/>
+          <a:p>
+            <a:endParaRPr lang="de-DE"/>
+          </a:p>
+        </p:txBody>
       </p:sp>
       <p:sp>
         <p:nvSpPr>
@@ -2800,7 +2435,7 @@
           <a:bodyPr wrap="square" rtlCol="0" anchor="ctr"/>
           <a:lstStyle/>
           <a:p>
-            <a:pPr indent="0" marL="0">
+            <a:pPr marL="0" indent="0">
               <a:buNone/>
             </a:pPr>
             <a:r>
@@ -2839,7 +2474,7 @@
           <a:bodyPr wrap="square" rtlCol="0" anchor="ctr"/>
           <a:lstStyle/>
           <a:p>
-            <a:pPr indent="0" marL="0">
+            <a:pPr marL="0" indent="0">
               <a:buNone/>
             </a:pPr>
             <a:r>
@@ -2856,7 +2491,7 @@
             <a:endParaRPr lang="en-US" sz="1400" dirty="0"/>
           </a:p>
           <a:p>
-            <a:pPr indent="0" marL="0">
+            <a:pPr marL="0" indent="0">
               <a:buNone/>
             </a:pPr>
             <a:r>
@@ -2873,7 +2508,7 @@
             <a:endParaRPr lang="en-US" sz="1400" dirty="0"/>
           </a:p>
           <a:p>
-            <a:pPr indent="0" marL="0">
+            <a:pPr marL="0" indent="0">
               <a:buNone/>
             </a:pPr>
             <a:r>
@@ -2890,7 +2525,7 @@
             <a:endParaRPr lang="en-US" sz="1400" dirty="0"/>
           </a:p>
           <a:p>
-            <a:pPr indent="0" marL="0">
+            <a:pPr marL="0" indent="0">
               <a:buNone/>
             </a:pPr>
             <a:r>
@@ -2929,7 +2564,7 @@
           <a:bodyPr wrap="square" rtlCol="0" anchor="ctr"/>
           <a:lstStyle/>
           <a:p>
-            <a:pPr algn="r" indent="0" marL="0">
+            <a:pPr marL="0" indent="0" algn="r">
               <a:buNone/>
             </a:pPr>
             <a:r>
@@ -2963,6 +2598,7 @@
         <a:solidFill>
           <a:srgbClr val="FFFFFF"/>
         </a:solidFill>
+        <a:effectLst/>
       </p:bgPr>
     </p:bg>
     <p:spTree>
@@ -3000,7 +2636,7 @@
           <a:bodyPr wrap="square" lIns="0" tIns="0" rIns="0" bIns="0" rtlCol="0" anchor="ctr"/>
           <a:lstStyle/>
           <a:p>
-            <a:pPr indent="0" marL="0">
+            <a:pPr marL="0" indent="0">
               <a:buNone/>
             </a:pPr>
             <a:r>
@@ -3039,7 +2675,7 @@
           <a:bodyPr wrap="square" rtlCol="0" anchor="ctr"/>
           <a:lstStyle/>
           <a:p>
-            <a:pPr indent="0" marL="0">
+            <a:pPr marL="0" indent="0">
               <a:buNone/>
             </a:pPr>
             <a:r>
@@ -3059,7 +2695,7 @@
       </p:sp>
       <p:graphicFrame>
         <p:nvGraphicFramePr>
-          <p:cNvPr id="4" name="Chart 0" descr=""/>
+          <p:cNvPr id="4" name="Chart 0"/>
           <p:cNvGraphicFramePr/>
           <p:nvPr/>
         </p:nvGraphicFramePr>
@@ -3067,9 +2703,9 @@
           <a:off x="457200" y="1371600"/>
           <a:ext cx="5303520" cy="3200400"/>
         </p:xfrm>
-        <a:graphic xmlns:a="http://schemas.openxmlformats.org/drawingml/2006/main">
+        <a:graphic>
           <a:graphicData uri="http://schemas.openxmlformats.org/drawingml/2006/chart">
-            <c:chart xmlns:c="http://schemas.openxmlformats.org/drawingml/2006/chart" r:id="rId1"/>
+            <c:chart xmlns:c="http://schemas.openxmlformats.org/drawingml/2006/chart" xmlns:r="http://schemas.openxmlformats.org/officeDocument/2006/relationships" r:id="rId3"/>
           </a:graphicData>
         </a:graphic>
       </p:graphicFrame>
@@ -3094,7 +2730,7 @@
           <a:bodyPr wrap="square" rtlCol="0" anchor="ctr"/>
           <a:lstStyle/>
           <a:p>
-            <a:pPr indent="0" marL="0">
+            <a:pPr marL="0" indent="0">
               <a:buNone/>
             </a:pPr>
             <a:r>
@@ -3242,6 +2878,13 @@
             <a:prstDash val="solid"/>
           </a:ln>
         </p:spPr>
+        <p:txBody>
+          <a:bodyPr/>
+          <a:lstStyle/>
+          <a:p>
+            <a:endParaRPr lang="de-DE"/>
+          </a:p>
+        </p:txBody>
       </p:sp>
       <p:sp>
         <p:nvSpPr>
@@ -3264,7 +2907,7 @@
           <a:bodyPr wrap="square" lIns="0" tIns="0" rIns="0" bIns="0" rtlCol="0" anchor="ctr"/>
           <a:lstStyle/>
           <a:p>
-            <a:pPr indent="0" marL="0">
+            <a:pPr marL="0" indent="0">
               <a:buNone/>
             </a:pPr>
             <a:r>
@@ -3303,7 +2946,7 @@
           <a:bodyPr wrap="square" lIns="0" tIns="0" rIns="0" bIns="0" rtlCol="0" anchor="t"/>
           <a:lstStyle/>
           <a:p>
-            <a:pPr indent="0" marL="0">
+            <a:pPr marL="0" indent="0">
               <a:buNone/>
             </a:pPr>
             <a:r>
@@ -3342,7 +2985,7 @@
           <a:bodyPr wrap="square" rtlCol="0" anchor="ctr"/>
           <a:lstStyle/>
           <a:p>
-            <a:pPr indent="0" marL="0">
+            <a:pPr marL="0" indent="0">
               <a:buNone/>
             </a:pPr>
             <a:r>
@@ -3381,7 +3024,7 @@
           <a:bodyPr wrap="square" rtlCol="0" anchor="ctr"/>
           <a:lstStyle/>
           <a:p>
-            <a:pPr algn="r" indent="0" marL="0">
+            <a:pPr marL="0" indent="0" algn="r">
               <a:buNone/>
             </a:pPr>
             <a:r>
@@ -3415,6 +3058,7 @@
         <a:solidFill>
           <a:srgbClr val="FFFFFF"/>
         </a:solidFill>
+        <a:effectLst/>
       </p:bgPr>
     </p:bg>
     <p:spTree>
@@ -3452,7 +3096,7 @@
           <a:bodyPr wrap="square" lIns="0" tIns="0" rIns="0" bIns="0" rtlCol="0" anchor="ctr"/>
           <a:lstStyle/>
           <a:p>
-            <a:pPr indent="0" marL="0">
+            <a:pPr marL="0" indent="0">
               <a:buNone/>
             </a:pPr>
             <a:r>
@@ -3494,6 +3138,13 @@
             <a:prstDash val="solid"/>
           </a:ln>
         </p:spPr>
+        <p:txBody>
+          <a:bodyPr/>
+          <a:lstStyle/>
+          <a:p>
+            <a:endParaRPr lang="de-DE"/>
+          </a:p>
+        </p:txBody>
       </p:sp>
       <p:sp>
         <p:nvSpPr>
@@ -3514,6 +3165,13 @@
           </a:solidFill>
           <a:ln/>
         </p:spPr>
+        <p:txBody>
+          <a:bodyPr/>
+          <a:lstStyle/>
+          <a:p>
+            <a:endParaRPr lang="de-DE"/>
+          </a:p>
+        </p:txBody>
       </p:sp>
       <p:sp>
         <p:nvSpPr>
@@ -3536,7 +3194,7 @@
           <a:bodyPr wrap="square" lIns="0" tIns="0" rIns="0" bIns="0" rtlCol="0" anchor="ctr"/>
           <a:lstStyle/>
           <a:p>
-            <a:pPr algn="ctr" indent="0" marL="0">
+            <a:pPr marL="0" indent="0" algn="ctr">
               <a:buNone/>
             </a:pPr>
             <a:r>
@@ -3550,9 +3208,6 @@
               </a:rPr>
               <a:t>14.4</a:t>
             </a:r>
-            <a:pPr algn="ctr" indent="0" marL="0">
-              <a:buNone/>
-            </a:pPr>
             <a:r>
               <a:rPr lang="en-US" sz="1600" dirty="0">
                 <a:solidFill>
@@ -3589,7 +3244,7 @@
           <a:bodyPr wrap="square" lIns="0" tIns="0" rIns="0" bIns="0" rtlCol="0" anchor="t"/>
           <a:lstStyle/>
           <a:p>
-            <a:pPr algn="ctr" indent="0" marL="0">
+            <a:pPr marL="0" indent="0" algn="ctr">
               <a:buNone/>
             </a:pPr>
             <a:r>
@@ -3631,6 +3286,13 @@
             <a:prstDash val="solid"/>
           </a:ln>
         </p:spPr>
+        <p:txBody>
+          <a:bodyPr/>
+          <a:lstStyle/>
+          <a:p>
+            <a:endParaRPr lang="de-DE"/>
+          </a:p>
+        </p:txBody>
       </p:sp>
       <p:sp>
         <p:nvSpPr>
@@ -3651,6 +3313,13 @@
           </a:solidFill>
           <a:ln/>
         </p:spPr>
+        <p:txBody>
+          <a:bodyPr/>
+          <a:lstStyle/>
+          <a:p>
+            <a:endParaRPr lang="de-DE"/>
+          </a:p>
+        </p:txBody>
       </p:sp>
       <p:sp>
         <p:nvSpPr>
@@ -3673,7 +3342,7 @@
           <a:bodyPr wrap="square" lIns="0" tIns="0" rIns="0" bIns="0" rtlCol="0" anchor="ctr"/>
           <a:lstStyle/>
           <a:p>
-            <a:pPr algn="ctr" indent="0" marL="0">
+            <a:pPr marL="0" indent="0" algn="ctr">
               <a:buNone/>
             </a:pPr>
             <a:r>
@@ -3687,9 +3356,6 @@
               </a:rPr>
               <a:t>3.3</a:t>
             </a:r>
-            <a:pPr algn="ctr" indent="0" marL="0">
-              <a:buNone/>
-            </a:pPr>
             <a:r>
               <a:rPr lang="en-US" sz="1600" dirty="0">
                 <a:solidFill>
@@ -3726,7 +3392,7 @@
           <a:bodyPr wrap="square" lIns="0" tIns="0" rIns="0" bIns="0" rtlCol="0" anchor="t"/>
           <a:lstStyle/>
           <a:p>
-            <a:pPr algn="ctr" indent="0" marL="0">
+            <a:pPr marL="0" indent="0" algn="ctr">
               <a:buNone/>
             </a:pPr>
             <a:r>
@@ -3768,6 +3434,13 @@
             <a:prstDash val="solid"/>
           </a:ln>
         </p:spPr>
+        <p:txBody>
+          <a:bodyPr/>
+          <a:lstStyle/>
+          <a:p>
+            <a:endParaRPr lang="de-DE"/>
+          </a:p>
+        </p:txBody>
       </p:sp>
       <p:sp>
         <p:nvSpPr>
@@ -3788,6 +3461,13 @@
           </a:solidFill>
           <a:ln/>
         </p:spPr>
+        <p:txBody>
+          <a:bodyPr/>
+          <a:lstStyle/>
+          <a:p>
+            <a:endParaRPr lang="de-DE"/>
+          </a:p>
+        </p:txBody>
       </p:sp>
       <p:sp>
         <p:nvSpPr>
@@ -3810,7 +3490,7 @@
           <a:bodyPr wrap="square" lIns="0" tIns="0" rIns="0" bIns="0" rtlCol="0" anchor="ctr"/>
           <a:lstStyle/>
           <a:p>
-            <a:pPr algn="ctr" indent="0" marL="0">
+            <a:pPr marL="0" indent="0" algn="ctr">
               <a:buNone/>
             </a:pPr>
             <a:r>
@@ -3824,9 +3504,6 @@
               </a:rPr>
               <a:t>7.6x</a:t>
             </a:r>
-            <a:pPr algn="ctr" indent="0" marL="0">
-              <a:buNone/>
-            </a:pPr>
             <a:r>
               <a:rPr lang="en-US" sz="1600" dirty="0">
                 <a:solidFill>
@@ -3863,7 +3540,7 @@
           <a:bodyPr wrap="square" lIns="0" tIns="0" rIns="0" bIns="0" rtlCol="0" anchor="t"/>
           <a:lstStyle/>
           <a:p>
-            <a:pPr algn="ctr" indent="0" marL="0">
+            <a:pPr marL="0" indent="0" algn="ctr">
               <a:buNone/>
             </a:pPr>
             <a:r>
@@ -3905,6 +3582,13 @@
             <a:prstDash val="solid"/>
           </a:ln>
         </p:spPr>
+        <p:txBody>
+          <a:bodyPr/>
+          <a:lstStyle/>
+          <a:p>
+            <a:endParaRPr lang="de-DE"/>
+          </a:p>
+        </p:txBody>
       </p:sp>
       <p:sp>
         <p:nvSpPr>
@@ -3925,6 +3609,13 @@
           </a:solidFill>
           <a:ln/>
         </p:spPr>
+        <p:txBody>
+          <a:bodyPr/>
+          <a:lstStyle/>
+          <a:p>
+            <a:endParaRPr lang="de-DE"/>
+          </a:p>
+        </p:txBody>
       </p:sp>
       <p:sp>
         <p:nvSpPr>
@@ -3947,7 +3638,7 @@
           <a:bodyPr wrap="square" lIns="0" tIns="0" rIns="0" bIns="0" rtlCol="0" anchor="ctr"/>
           <a:lstStyle/>
           <a:p>
-            <a:pPr algn="ctr" indent="0" marL="0">
+            <a:pPr marL="0" indent="0" algn="ctr">
               <a:buNone/>
             </a:pPr>
             <a:r>
@@ -3961,9 +3652,6 @@
               </a:rPr>
               <a:t>~12.000x</a:t>
             </a:r>
-            <a:pPr algn="ctr" indent="0" marL="0">
-              <a:buNone/>
-            </a:pPr>
             <a:r>
               <a:rPr lang="en-US" sz="1600" dirty="0">
                 <a:solidFill>
@@ -4000,7 +3688,7 @@
           <a:bodyPr wrap="square" lIns="0" tIns="0" rIns="0" bIns="0" rtlCol="0" anchor="t"/>
           <a:lstStyle/>
           <a:p>
-            <a:pPr algn="ctr" indent="0" marL="0">
+            <a:pPr marL="0" indent="0" algn="ctr">
               <a:buNone/>
             </a:pPr>
             <a:r>
@@ -4020,7 +3708,7 @@
       </p:sp>
       <p:graphicFrame>
         <p:nvGraphicFramePr>
-          <p:cNvPr id="12" name="Table 0"/>
+          <p:cNvPr id="19" name="Table 0"/>
           <p:cNvGraphicFramePr>
             <a:graphicFrameLocks noGrp="1"/>
           </p:cNvGraphicFramePr>
@@ -4034,16 +3722,34 @@
         </p:nvGraphicFramePr>
         <p:xfrm>
           <a:off x="457200" y="2606040"/>
-          <a:ext cx="5029200" cy="914400"/>
+          <a:ext cx="5029200" cy="1295400"/>
         </p:xfrm>
         <a:graphic>
           <a:graphicData uri="http://schemas.openxmlformats.org/drawingml/2006/table">
             <a:tbl>
               <a:tblPr/>
               <a:tblGrid>
-                <a:gridCol w="2286000"/>
-                <a:gridCol w="1371600"/>
-                <a:gridCol w="1371600"/>
+                <a:gridCol w="2286000">
+                  <a:extLst>
+                    <a:ext uri="{9D8B030D-6E8A-4147-A177-3AD203B41FA5}">
+                      <a16:colId xmlns:a16="http://schemas.microsoft.com/office/drawing/2014/main" val="20000"/>
+                    </a:ext>
+                  </a:extLst>
+                </a:gridCol>
+                <a:gridCol w="1371600">
+                  <a:extLst>
+                    <a:ext uri="{9D8B030D-6E8A-4147-A177-3AD203B41FA5}">
+                      <a16:colId xmlns:a16="http://schemas.microsoft.com/office/drawing/2014/main" val="20001"/>
+                    </a:ext>
+                  </a:extLst>
+                </a:gridCol>
+                <a:gridCol w="1371600">
+                  <a:extLst>
+                    <a:ext uri="{9D8B030D-6E8A-4147-A177-3AD203B41FA5}">
+                      <a16:colId xmlns:a16="http://schemas.microsoft.com/office/drawing/2014/main" val="20002"/>
+                    </a:ext>
+                  </a:extLst>
+                </a:gridCol>
               </a:tblGrid>
               <a:tr h="0">
                 <a:tc>
@@ -4051,7 +3757,7 @@
                     <a:bodyPr/>
                     <a:lstStyle/>
                     <a:p>
-                      <a:pPr indent="0" marL="0">
+                      <a:pPr marL="0" indent="0">
                         <a:buNone/>
                       </a:pPr>
                       <a:r>
@@ -4072,7 +3778,7 @@
                       </a:endParaRPr>
                     </a:p>
                   </a:txBody>
-                  <a:tcPr marL="91440" marR="91440" marT="45720" marB="45720">
+                  <a:tcPr>
                     <a:lnL w="6350" cap="flat" cmpd="sng" algn="ctr">
                       <a:solidFill>
                         <a:srgbClr val="E2E8F0"/>
@@ -4119,7 +3825,7 @@
                     <a:bodyPr/>
                     <a:lstStyle/>
                     <a:p>
-                      <a:pPr indent="0" marL="0">
+                      <a:pPr marL="0" indent="0">
                         <a:buNone/>
                       </a:pPr>
                       <a:r>
@@ -4140,7 +3846,7 @@
                       </a:endParaRPr>
                     </a:p>
                   </a:txBody>
-                  <a:tcPr marL="91440" marR="91440" marT="45720" marB="45720">
+                  <a:tcPr>
                     <a:lnL w="6350" cap="flat" cmpd="sng" algn="ctr">
                       <a:solidFill>
                         <a:srgbClr val="E2E8F0"/>
@@ -4187,7 +3893,7 @@
                     <a:bodyPr/>
                     <a:lstStyle/>
                     <a:p>
-                      <a:pPr indent="0" marL="0">
+                      <a:pPr marL="0" indent="0">
                         <a:buNone/>
                       </a:pPr>
                       <a:r>
@@ -4208,7 +3914,7 @@
                       </a:endParaRPr>
                     </a:p>
                   </a:txBody>
-                  <a:tcPr marL="91440" marR="91440" marT="45720" marB="45720">
+                  <a:tcPr>
                     <a:lnL w="6350" cap="flat" cmpd="sng" algn="ctr">
                       <a:solidFill>
                         <a:srgbClr val="E2E8F0"/>
@@ -4250,6 +3956,11 @@
                     </a:solidFill>
                   </a:tcPr>
                 </a:tc>
+                <a:extLst>
+                  <a:ext uri="{0D108BD9-81ED-4DB2-BD59-A6C34878D82A}">
+                    <a16:rowId xmlns:a16="http://schemas.microsoft.com/office/drawing/2014/main" val="10000"/>
+                  </a:ext>
+                </a:extLst>
               </a:tr>
               <a:tr h="0">
                 <a:tc>
@@ -4257,7 +3968,7 @@
                     <a:bodyPr/>
                     <a:lstStyle/>
                     <a:p>
-                      <a:pPr indent="0" marL="0">
+                      <a:pPr marL="0" indent="0">
                         <a:buNone/>
                       </a:pPr>
                       <a:r>
@@ -4278,7 +3989,7 @@
                       </a:endParaRPr>
                     </a:p>
                   </a:txBody>
-                  <a:tcPr marL="91440" marR="91440" marT="45720" marB="45720">
+                  <a:tcPr>
                     <a:lnL w="6350" cap="flat" cmpd="sng" algn="ctr">
                       <a:solidFill>
                         <a:srgbClr val="E2E8F0"/>
@@ -4322,7 +4033,7 @@
                     <a:bodyPr/>
                     <a:lstStyle/>
                     <a:p>
-                      <a:pPr indent="0" marL="0">
+                      <a:pPr marL="0" indent="0">
                         <a:buNone/>
                       </a:pPr>
                       <a:r>
@@ -4343,7 +4054,7 @@
                       </a:endParaRPr>
                     </a:p>
                   </a:txBody>
-                  <a:tcPr marL="91440" marR="91440" marT="45720" marB="45720">
+                  <a:tcPr>
                     <a:lnL w="6350" cap="flat" cmpd="sng" algn="ctr">
                       <a:solidFill>
                         <a:srgbClr val="E2E8F0"/>
@@ -4387,7 +4098,7 @@
                     <a:bodyPr/>
                     <a:lstStyle/>
                     <a:p>
-                      <a:pPr indent="0" marL="0">
+                      <a:pPr marL="0" indent="0">
                         <a:buNone/>
                       </a:pPr>
                       <a:r>
@@ -4408,7 +4119,7 @@
                       </a:endParaRPr>
                     </a:p>
                   </a:txBody>
-                  <a:tcPr marL="91440" marR="91440" marT="45720" marB="45720">
+                  <a:tcPr>
                     <a:lnL w="6350" cap="flat" cmpd="sng" algn="ctr">
                       <a:solidFill>
                         <a:srgbClr val="E2E8F0"/>
@@ -4447,6 +4158,11 @@
                     </a:lnB>
                   </a:tcPr>
                 </a:tc>
+                <a:extLst>
+                  <a:ext uri="{0D108BD9-81ED-4DB2-BD59-A6C34878D82A}">
+                    <a16:rowId xmlns:a16="http://schemas.microsoft.com/office/drawing/2014/main" val="10001"/>
+                  </a:ext>
+                </a:extLst>
               </a:tr>
               <a:tr h="0">
                 <a:tc>
@@ -4454,7 +4170,7 @@
                     <a:bodyPr/>
                     <a:lstStyle/>
                     <a:p>
-                      <a:pPr indent="0" marL="0">
+                      <a:pPr marL="0" indent="0">
                         <a:buNone/>
                       </a:pPr>
                       <a:r>
@@ -4475,7 +4191,7 @@
                       </a:endParaRPr>
                     </a:p>
                   </a:txBody>
-                  <a:tcPr marL="91440" marR="91440" marT="45720" marB="45720">
+                  <a:tcPr>
                     <a:lnL w="6350" cap="flat" cmpd="sng" algn="ctr">
                       <a:solidFill>
                         <a:srgbClr val="E2E8F0"/>
@@ -4519,7 +4235,7 @@
                     <a:bodyPr/>
                     <a:lstStyle/>
                     <a:p>
-                      <a:pPr indent="0" marL="0">
+                      <a:pPr marL="0" indent="0">
                         <a:buNone/>
                       </a:pPr>
                       <a:r>
@@ -4540,7 +4256,7 @@
                       </a:endParaRPr>
                     </a:p>
                   </a:txBody>
-                  <a:tcPr marL="91440" marR="91440" marT="45720" marB="45720">
+                  <a:tcPr>
                     <a:lnL w="6350" cap="flat" cmpd="sng" algn="ctr">
                       <a:solidFill>
                         <a:srgbClr val="E2E8F0"/>
@@ -4584,7 +4300,7 @@
                     <a:bodyPr/>
                     <a:lstStyle/>
                     <a:p>
-                      <a:pPr indent="0" marL="0">
+                      <a:pPr marL="0" indent="0">
                         <a:buNone/>
                       </a:pPr>
                       <a:r>
@@ -4605,7 +4321,7 @@
                       </a:endParaRPr>
                     </a:p>
                   </a:txBody>
-                  <a:tcPr marL="91440" marR="91440" marT="45720" marB="45720">
+                  <a:tcPr>
                     <a:lnL w="6350" cap="flat" cmpd="sng" algn="ctr">
                       <a:solidFill>
                         <a:srgbClr val="E2E8F0"/>
@@ -4644,6 +4360,11 @@
                     </a:lnB>
                   </a:tcPr>
                 </a:tc>
+                <a:extLst>
+                  <a:ext uri="{0D108BD9-81ED-4DB2-BD59-A6C34878D82A}">
+                    <a16:rowId xmlns:a16="http://schemas.microsoft.com/office/drawing/2014/main" val="10002"/>
+                  </a:ext>
+                </a:extLst>
               </a:tr>
               <a:tr h="0">
                 <a:tc>
@@ -4651,7 +4372,7 @@
                     <a:bodyPr/>
                     <a:lstStyle/>
                     <a:p>
-                      <a:pPr indent="0" marL="0">
+                      <a:pPr marL="0" indent="0">
                         <a:buNone/>
                       </a:pPr>
                       <a:r>
@@ -4672,7 +4393,7 @@
                       </a:endParaRPr>
                     </a:p>
                   </a:txBody>
-                  <a:tcPr marL="91440" marR="91440" marT="45720" marB="45720">
+                  <a:tcPr>
                     <a:lnL w="6350" cap="flat" cmpd="sng" algn="ctr">
                       <a:solidFill>
                         <a:srgbClr val="E2E8F0"/>
@@ -4716,7 +4437,7 @@
                     <a:bodyPr/>
                     <a:lstStyle/>
                     <a:p>
-                      <a:pPr indent="0" marL="0">
+                      <a:pPr marL="0" indent="0">
                         <a:buNone/>
                       </a:pPr>
                       <a:r>
@@ -4737,7 +4458,7 @@
                       </a:endParaRPr>
                     </a:p>
                   </a:txBody>
-                  <a:tcPr marL="91440" marR="91440" marT="45720" marB="45720">
+                  <a:tcPr>
                     <a:lnL w="6350" cap="flat" cmpd="sng" algn="ctr">
                       <a:solidFill>
                         <a:srgbClr val="E2E8F0"/>
@@ -4781,7 +4502,7 @@
                     <a:bodyPr/>
                     <a:lstStyle/>
                     <a:p>
-                      <a:pPr indent="0" marL="0">
+                      <a:pPr marL="0" indent="0">
                         <a:buNone/>
                       </a:pPr>
                       <a:r>
@@ -4802,7 +4523,7 @@
                       </a:endParaRPr>
                     </a:p>
                   </a:txBody>
-                  <a:tcPr marL="91440" marR="91440" marT="45720" marB="45720">
+                  <a:tcPr>
                     <a:lnL w="6350" cap="flat" cmpd="sng" algn="ctr">
                       <a:solidFill>
                         <a:srgbClr val="E2E8F0"/>
@@ -4841,6 +4562,11 @@
                     </a:lnB>
                   </a:tcPr>
                 </a:tc>
+                <a:extLst>
+                  <a:ext uri="{0D108BD9-81ED-4DB2-BD59-A6C34878D82A}">
+                    <a16:rowId xmlns:a16="http://schemas.microsoft.com/office/drawing/2014/main" val="10003"/>
+                  </a:ext>
+                </a:extLst>
               </a:tr>
               <a:tr h="0">
                 <a:tc>
@@ -4848,7 +4574,7 @@
                     <a:bodyPr/>
                     <a:lstStyle/>
                     <a:p>
-                      <a:pPr indent="0" marL="0">
+                      <a:pPr marL="0" indent="0">
                         <a:buNone/>
                       </a:pPr>
                       <a:r>
@@ -4869,7 +4595,7 @@
                       </a:endParaRPr>
                     </a:p>
                   </a:txBody>
-                  <a:tcPr marL="91440" marR="91440" marT="45720" marB="45720">
+                  <a:tcPr>
                     <a:lnL w="6350" cap="flat" cmpd="sng" algn="ctr">
                       <a:solidFill>
                         <a:srgbClr val="E2E8F0"/>
@@ -4913,7 +4639,7 @@
                     <a:bodyPr/>
                     <a:lstStyle/>
                     <a:p>
-                      <a:pPr indent="0" marL="0">
+                      <a:pPr marL="0" indent="0">
                         <a:buNone/>
                       </a:pPr>
                       <a:r>
@@ -4934,7 +4660,7 @@
                       </a:endParaRPr>
                     </a:p>
                   </a:txBody>
-                  <a:tcPr marL="91440" marR="91440" marT="45720" marB="45720">
+                  <a:tcPr>
                     <a:lnL w="6350" cap="flat" cmpd="sng" algn="ctr">
                       <a:solidFill>
                         <a:srgbClr val="E2E8F0"/>
@@ -4978,7 +4704,7 @@
                     <a:bodyPr/>
                     <a:lstStyle/>
                     <a:p>
-                      <a:pPr indent="0" marL="0">
+                      <a:pPr marL="0" indent="0">
                         <a:buNone/>
                       </a:pPr>
                       <a:r>
@@ -4999,7 +4725,7 @@
                       </a:endParaRPr>
                     </a:p>
                   </a:txBody>
-                  <a:tcPr marL="91440" marR="91440" marT="45720" marB="45720">
+                  <a:tcPr>
                     <a:lnL w="6350" cap="flat" cmpd="sng" algn="ctr">
                       <a:solidFill>
                         <a:srgbClr val="E2E8F0"/>
@@ -5038,6 +4764,11 @@
                     </a:lnB>
                   </a:tcPr>
                 </a:tc>
+                <a:extLst>
+                  <a:ext uri="{0D108BD9-81ED-4DB2-BD59-A6C34878D82A}">
+                    <a16:rowId xmlns:a16="http://schemas.microsoft.com/office/drawing/2014/main" val="10004"/>
+                  </a:ext>
+                </a:extLst>
               </a:tr>
             </a:tbl>
           </a:graphicData>
@@ -5067,6 +4798,13 @@
             <a:prstDash val="solid"/>
           </a:ln>
         </p:spPr>
+        <p:txBody>
+          <a:bodyPr/>
+          <a:lstStyle/>
+          <a:p>
+            <a:endParaRPr lang="de-DE"/>
+          </a:p>
+        </p:txBody>
       </p:sp>
       <p:sp>
         <p:nvSpPr>
@@ -5089,7 +4827,7 @@
           <a:bodyPr wrap="square" lIns="0" tIns="0" rIns="0" bIns="0" rtlCol="0" anchor="ctr"/>
           <a:lstStyle/>
           <a:p>
-            <a:pPr indent="0" marL="0">
+            <a:pPr marL="0" indent="0">
               <a:buNone/>
             </a:pPr>
             <a:r>
@@ -5128,7 +4866,7 @@
           <a:bodyPr wrap="square" lIns="0" tIns="0" rIns="0" bIns="0" rtlCol="0" anchor="t"/>
           <a:lstStyle/>
           <a:p>
-            <a:pPr indent="0" marL="0">
+            <a:pPr marL="0" indent="0">
               <a:buNone/>
             </a:pPr>
             <a:r>
@@ -5167,7 +4905,7 @@
           <a:bodyPr wrap="square" rtlCol="0" anchor="ctr"/>
           <a:lstStyle/>
           <a:p>
-            <a:pPr indent="0" marL="0">
+            <a:pPr marL="0" indent="0">
               <a:buNone/>
             </a:pPr>
             <a:r>
@@ -5206,7 +4944,7 @@
           <a:bodyPr wrap="square" rtlCol="0" anchor="ctr"/>
           <a:lstStyle/>
           <a:p>
-            <a:pPr algn="r" indent="0" marL="0">
+            <a:pPr marL="0" indent="0" algn="r">
               <a:buNone/>
             </a:pPr>
             <a:r>
@@ -5240,6 +4978,7 @@
         <a:solidFill>
           <a:srgbClr val="FFFFFF"/>
         </a:solidFill>
+        <a:effectLst/>
       </p:bgPr>
     </p:bg>
     <p:spTree>
@@ -5277,7 +5016,7 @@
           <a:bodyPr wrap="square" lIns="0" tIns="0" rIns="0" bIns="0" rtlCol="0" anchor="ctr"/>
           <a:lstStyle/>
           <a:p>
-            <a:pPr indent="0" marL="0">
+            <a:pPr marL="0" indent="0">
               <a:buNone/>
             </a:pPr>
             <a:r>
@@ -5319,6 +5058,13 @@
             <a:prstDash val="solid"/>
           </a:ln>
         </p:spPr>
+        <p:txBody>
+          <a:bodyPr/>
+          <a:lstStyle/>
+          <a:p>
+            <a:endParaRPr lang="de-DE"/>
+          </a:p>
+        </p:txBody>
       </p:sp>
       <p:sp>
         <p:nvSpPr>
@@ -5339,6 +5085,13 @@
           </a:solidFill>
           <a:ln/>
         </p:spPr>
+        <p:txBody>
+          <a:bodyPr/>
+          <a:lstStyle/>
+          <a:p>
+            <a:endParaRPr lang="de-DE"/>
+          </a:p>
+        </p:txBody>
       </p:sp>
       <p:sp>
         <p:nvSpPr>
@@ -5361,7 +5114,7 @@
           <a:bodyPr wrap="square" lIns="0" tIns="0" rIns="0" bIns="0" rtlCol="0" anchor="ctr"/>
           <a:lstStyle/>
           <a:p>
-            <a:pPr indent="0" marL="0">
+            <a:pPr marL="0" indent="0">
               <a:buNone/>
             </a:pPr>
             <a:r>
@@ -5400,7 +5153,7 @@
           <a:bodyPr wrap="square" lIns="0" tIns="0" rIns="0" bIns="0" rtlCol="0" anchor="ctr"/>
           <a:lstStyle/>
           <a:p>
-            <a:pPr indent="0" marL="0">
+            <a:pPr marL="0" indent="0">
               <a:buNone/>
             </a:pPr>
             <a:r>
@@ -5439,7 +5192,7 @@
           <a:bodyPr wrap="square" lIns="0" tIns="0" rIns="0" bIns="0" rtlCol="0" anchor="t"/>
           <a:lstStyle/>
           <a:p>
-            <a:pPr indent="0" marL="0">
+            <a:pPr marL="0" indent="0">
               <a:spcAft>
                 <a:spcPts val="200"/>
               </a:spcAft>
@@ -5456,12 +5209,6 @@
               </a:rPr>
               <a:t>vs. Trainings-Target (y_extrap): </a:t>
             </a:r>
-            <a:pPr indent="0" marL="0">
-              <a:spcAft>
-                <a:spcPts val="200"/>
-              </a:spcAft>
-              <a:buNone/>
-            </a:pPr>
             <a:r>
               <a:rPr lang="en-US" sz="1100" b="1" dirty="0">
                 <a:solidFill>
@@ -5476,7 +5223,7 @@
             <a:endParaRPr lang="en-US" sz="1100" dirty="0"/>
           </a:p>
           <a:p>
-            <a:pPr indent="0" marL="0">
+            <a:pPr marL="0" indent="0">
               <a:spcAft>
                 <a:spcPts val="200"/>
               </a:spcAft>
@@ -5496,7 +5243,7 @@
             <a:endParaRPr lang="en-US" sz="1100" dirty="0"/>
           </a:p>
           <a:p>
-            <a:pPr indent="0" marL="0">
+            <a:pPr marL="0" indent="0">
               <a:spcAft>
                 <a:spcPts val="200"/>
               </a:spcAft>
@@ -5516,7 +5263,7 @@
             <a:endParaRPr lang="en-US" sz="1100" dirty="0"/>
           </a:p>
           <a:p>
-            <a:pPr indent="0" marL="0">
+            <a:pPr marL="0" indent="0">
               <a:spcAft>
                 <a:spcPts val="200"/>
               </a:spcAft>
@@ -5533,12 +5280,6 @@
               </a:rPr>
               <a:t>vs. gemessene Restzeit (y_real): </a:t>
             </a:r>
-            <a:pPr indent="0" marL="0">
-              <a:spcAft>
-                <a:spcPts val="200"/>
-              </a:spcAft>
-              <a:buNone/>
-            </a:pPr>
             <a:r>
               <a:rPr lang="en-US" sz="1100" b="1" dirty="0">
                 <a:solidFill>
@@ -5553,7 +5294,7 @@
             <a:endParaRPr lang="en-US" sz="1100" dirty="0"/>
           </a:p>
           <a:p>
-            <a:pPr indent="0" marL="0">
+            <a:pPr marL="0" indent="0">
               <a:spcAft>
                 <a:spcPts val="200"/>
               </a:spcAft>
@@ -5595,7 +5336,7 @@
           <a:bodyPr wrap="square" lIns="0" tIns="0" rIns="0" bIns="0" rtlCol="0" anchor="ctr"/>
           <a:lstStyle/>
           <a:p>
-            <a:pPr indent="0" marL="0">
+            <a:pPr marL="0" indent="0">
               <a:buNone/>
             </a:pPr>
             <a:r>
@@ -5637,6 +5378,13 @@
             <a:prstDash val="solid"/>
           </a:ln>
         </p:spPr>
+        <p:txBody>
+          <a:bodyPr/>
+          <a:lstStyle/>
+          <a:p>
+            <a:endParaRPr lang="de-DE"/>
+          </a:p>
+        </p:txBody>
       </p:sp>
       <p:sp>
         <p:nvSpPr>
@@ -5657,6 +5405,13 @@
           </a:solidFill>
           <a:ln/>
         </p:spPr>
+        <p:txBody>
+          <a:bodyPr/>
+          <a:lstStyle/>
+          <a:p>
+            <a:endParaRPr lang="de-DE"/>
+          </a:p>
+        </p:txBody>
       </p:sp>
       <p:sp>
         <p:nvSpPr>
@@ -5679,7 +5434,7 @@
           <a:bodyPr wrap="square" lIns="0" tIns="0" rIns="0" bIns="0" rtlCol="0" anchor="ctr"/>
           <a:lstStyle/>
           <a:p>
-            <a:pPr indent="0" marL="0">
+            <a:pPr marL="0" indent="0">
               <a:buNone/>
             </a:pPr>
             <a:r>
@@ -5718,7 +5473,7 @@
           <a:bodyPr wrap="square" lIns="0" tIns="0" rIns="0" bIns="0" rtlCol="0" anchor="ctr"/>
           <a:lstStyle/>
           <a:p>
-            <a:pPr indent="0" marL="0">
+            <a:pPr marL="0" indent="0">
               <a:buNone/>
             </a:pPr>
             <a:r>
@@ -5757,7 +5512,7 @@
           <a:bodyPr wrap="square" lIns="0" tIns="0" rIns="0" bIns="0" rtlCol="0" anchor="t"/>
           <a:lstStyle/>
           <a:p>
-            <a:pPr indent="0" marL="0">
+            <a:pPr marL="0" indent="0">
               <a:spcAft>
                 <a:spcPts val="200"/>
               </a:spcAft>
@@ -5774,12 +5529,6 @@
               </a:rPr>
               <a:t>Linear </a:t>
             </a:r>
-            <a:pPr indent="0" marL="0">
-              <a:spcAft>
-                <a:spcPts val="200"/>
-              </a:spcAft>
-              <a:buNone/>
-            </a:pPr>
             <a:r>
               <a:rPr lang="en-US" sz="1100" dirty="0">
                 <a:solidFill>
@@ -5794,7 +5543,7 @@
             <a:endParaRPr lang="en-US" sz="1100" dirty="0"/>
           </a:p>
           <a:p>
-            <a:pPr indent="0" marL="0">
+            <a:pPr marL="0" indent="0">
               <a:spcAft>
                 <a:spcPts val="200"/>
               </a:spcAft>
@@ -5814,7 +5563,7 @@
             <a:endParaRPr lang="en-US" sz="1100" dirty="0"/>
           </a:p>
           <a:p>
-            <a:pPr indent="0" marL="0">
+            <a:pPr marL="0" indent="0">
               <a:spcAft>
                 <a:spcPts val="200"/>
               </a:spcAft>
@@ -5834,7 +5583,7 @@
             <a:endParaRPr lang="en-US" sz="1100" dirty="0"/>
           </a:p>
           <a:p>
-            <a:pPr indent="0" marL="0">
+            <a:pPr marL="0" indent="0">
               <a:spcAft>
                 <a:spcPts val="200"/>
               </a:spcAft>
@@ -5851,12 +5600,6 @@
               </a:rPr>
               <a:t>Google API </a:t>
             </a:r>
-            <a:pPr indent="0" marL="0">
-              <a:spcAft>
-                <a:spcPts val="200"/>
-              </a:spcAft>
-              <a:buNone/>
-            </a:pPr>
             <a:r>
               <a:rPr lang="en-US" sz="1100" dirty="0">
                 <a:solidFill>
@@ -5871,7 +5614,7 @@
             <a:endParaRPr lang="en-US" sz="1100" dirty="0"/>
           </a:p>
           <a:p>
-            <a:pPr indent="0" marL="0">
+            <a:pPr marL="0" indent="0">
               <a:spcAft>
                 <a:spcPts val="200"/>
               </a:spcAft>
@@ -5913,7 +5656,7 @@
           <a:bodyPr wrap="square" lIns="0" tIns="0" rIns="0" bIns="0" rtlCol="0" anchor="ctr"/>
           <a:lstStyle/>
           <a:p>
-            <a:pPr indent="0" marL="0">
+            <a:pPr marL="0" indent="0">
               <a:buNone/>
             </a:pPr>
             <a:r>
@@ -5952,7 +5695,7 @@
           <a:bodyPr wrap="square" rtlCol="0" anchor="ctr"/>
           <a:lstStyle/>
           <a:p>
-            <a:pPr indent="0" marL="0">
+            <a:pPr marL="0" indent="0">
               <a:buNone/>
             </a:pPr>
             <a:r>
@@ -5991,7 +5734,7 @@
           <a:bodyPr wrap="square" rtlCol="0" anchor="ctr"/>
           <a:lstStyle/>
           <a:p>
-            <a:pPr algn="r" indent="0" marL="0">
+            <a:pPr marL="0" indent="0" algn="r">
               <a:buNone/>
             </a:pPr>
             <a:r>
@@ -6025,6 +5768,7 @@
         <a:solidFill>
           <a:srgbClr val="FFFFFF"/>
         </a:solidFill>
+        <a:effectLst/>
       </p:bgPr>
     </p:bg>
     <p:spTree>
@@ -6062,7 +5806,7 @@
           <a:bodyPr wrap="square" lIns="0" tIns="0" rIns="0" bIns="0" rtlCol="0" anchor="ctr"/>
           <a:lstStyle/>
           <a:p>
-            <a:pPr indent="0" marL="0">
+            <a:pPr marL="0" indent="0">
               <a:buNone/>
             </a:pPr>
             <a:r>
@@ -6104,6 +5848,13 @@
             <a:prstDash val="solid"/>
           </a:ln>
         </p:spPr>
+        <p:txBody>
+          <a:bodyPr/>
+          <a:lstStyle/>
+          <a:p>
+            <a:endParaRPr lang="de-DE"/>
+          </a:p>
+        </p:txBody>
       </p:sp>
       <p:sp>
         <p:nvSpPr>
@@ -6124,6 +5875,13 @@
           </a:solidFill>
           <a:ln/>
         </p:spPr>
+        <p:txBody>
+          <a:bodyPr/>
+          <a:lstStyle/>
+          <a:p>
+            <a:endParaRPr lang="de-DE"/>
+          </a:p>
+        </p:txBody>
       </p:sp>
       <p:sp>
         <p:nvSpPr>
@@ -6146,7 +5904,7 @@
           <a:bodyPr wrap="square" lIns="0" tIns="0" rIns="0" bIns="0" rtlCol="0" anchor="ctr"/>
           <a:lstStyle/>
           <a:p>
-            <a:pPr indent="0" marL="0">
+            <a:pPr marL="0" indent="0">
               <a:buNone/>
             </a:pPr>
             <a:r>
@@ -6185,7 +5943,7 @@
           <a:bodyPr wrap="square" lIns="0" tIns="0" rIns="0" bIns="0" rtlCol="0" anchor="t"/>
           <a:lstStyle/>
           <a:p>
-            <a:pPr indent="0" marL="0">
+            <a:pPr marL="0" indent="0">
               <a:buNone/>
             </a:pPr>
             <a:r>
@@ -6227,6 +5985,13 @@
             <a:prstDash val="solid"/>
           </a:ln>
         </p:spPr>
+        <p:txBody>
+          <a:bodyPr/>
+          <a:lstStyle/>
+          <a:p>
+            <a:endParaRPr lang="de-DE"/>
+          </a:p>
+        </p:txBody>
       </p:sp>
       <p:sp>
         <p:nvSpPr>
@@ -6247,6 +6012,13 @@
           </a:solidFill>
           <a:ln/>
         </p:spPr>
+        <p:txBody>
+          <a:bodyPr/>
+          <a:lstStyle/>
+          <a:p>
+            <a:endParaRPr lang="de-DE"/>
+          </a:p>
+        </p:txBody>
       </p:sp>
       <p:sp>
         <p:nvSpPr>
@@ -6269,7 +6041,7 @@
           <a:bodyPr wrap="square" lIns="0" tIns="0" rIns="0" bIns="0" rtlCol="0" anchor="ctr"/>
           <a:lstStyle/>
           <a:p>
-            <a:pPr indent="0" marL="0">
+            <a:pPr marL="0" indent="0">
               <a:buNone/>
             </a:pPr>
             <a:r>
@@ -6308,7 +6080,7 @@
           <a:bodyPr wrap="square" lIns="0" tIns="0" rIns="0" bIns="0" rtlCol="0" anchor="t"/>
           <a:lstStyle/>
           <a:p>
-            <a:pPr indent="0" marL="0">
+            <a:pPr marL="0" indent="0">
               <a:buNone/>
             </a:pPr>
             <a:r>
@@ -6350,6 +6122,13 @@
             <a:prstDash val="solid"/>
           </a:ln>
         </p:spPr>
+        <p:txBody>
+          <a:bodyPr/>
+          <a:lstStyle/>
+          <a:p>
+            <a:endParaRPr lang="de-DE"/>
+          </a:p>
+        </p:txBody>
       </p:sp>
       <p:sp>
         <p:nvSpPr>
@@ -6370,6 +6149,13 @@
           </a:solidFill>
           <a:ln/>
         </p:spPr>
+        <p:txBody>
+          <a:bodyPr/>
+          <a:lstStyle/>
+          <a:p>
+            <a:endParaRPr lang="de-DE"/>
+          </a:p>
+        </p:txBody>
       </p:sp>
       <p:sp>
         <p:nvSpPr>
@@ -6392,7 +6178,7 @@
           <a:bodyPr wrap="square" lIns="0" tIns="0" rIns="0" bIns="0" rtlCol="0" anchor="ctr"/>
           <a:lstStyle/>
           <a:p>
-            <a:pPr indent="0" marL="0">
+            <a:pPr marL="0" indent="0">
               <a:buNone/>
             </a:pPr>
             <a:r>
@@ -6431,7 +6217,7 @@
           <a:bodyPr wrap="square" lIns="0" tIns="0" rIns="0" bIns="0" rtlCol="0" anchor="t"/>
           <a:lstStyle/>
           <a:p>
-            <a:pPr indent="0" marL="0">
+            <a:pPr marL="0" indent="0">
               <a:buNone/>
             </a:pPr>
             <a:r>
@@ -6470,7 +6256,7 @@
           <a:bodyPr wrap="square" rtlCol="0" anchor="ctr"/>
           <a:lstStyle/>
           <a:p>
-            <a:pPr indent="0" marL="0">
+            <a:pPr marL="0" indent="0">
               <a:buNone/>
             </a:pPr>
             <a:r>
@@ -6509,7 +6295,7 @@
           <a:bodyPr wrap="square" rtlCol="0" anchor="ctr"/>
           <a:lstStyle/>
           <a:p>
-            <a:pPr algn="r" indent="0" marL="0">
+            <a:pPr marL="0" indent="0" algn="r">
               <a:buNone/>
             </a:pPr>
             <a:r>
@@ -6543,6 +6329,7 @@
         <a:solidFill>
           <a:srgbClr val="0F1B2D"/>
         </a:solidFill>
+        <a:effectLst/>
       </p:bgPr>
     </p:bg>
     <p:spTree>
@@ -6580,7 +6367,7 @@
           <a:bodyPr wrap="square" rtlCol="0" anchor="ctr"/>
           <a:lstStyle/>
           <a:p>
-            <a:pPr indent="0" marL="0">
+            <a:pPr marL="0" indent="0">
               <a:buNone/>
             </a:pPr>
             <a:r>
@@ -6624,6 +6411,13 @@
             <a:prstDash val="solid"/>
           </a:ln>
         </p:spPr>
+        <p:txBody>
+          <a:bodyPr/>
+          <a:lstStyle/>
+          <a:p>
+            <a:endParaRPr lang="de-DE"/>
+          </a:p>
+        </p:txBody>
       </p:sp>
       <p:sp>
         <p:nvSpPr>
@@ -6646,7 +6440,7 @@
           <a:bodyPr wrap="square" lIns="0" tIns="0" rIns="0" bIns="0" rtlCol="0" anchor="ctr"/>
           <a:lstStyle/>
           <a:p>
-            <a:pPr indent="0" marL="0">
+            <a:pPr marL="0" indent="0">
               <a:buNone/>
             </a:pPr>
             <a:r>
@@ -6685,7 +6479,7 @@
           <a:bodyPr wrap="square" lIns="0" tIns="0" rIns="0" bIns="0" rtlCol="0" anchor="t"/>
           <a:lstStyle/>
           <a:p>
-            <a:pPr indent="0" marL="0">
+            <a:pPr marL="0" indent="0">
               <a:buNone/>
             </a:pPr>
             <a:r>
@@ -6729,6 +6523,13 @@
             <a:prstDash val="solid"/>
           </a:ln>
         </p:spPr>
+        <p:txBody>
+          <a:bodyPr/>
+          <a:lstStyle/>
+          <a:p>
+            <a:endParaRPr lang="de-DE"/>
+          </a:p>
+        </p:txBody>
       </p:sp>
       <p:sp>
         <p:nvSpPr>
@@ -6751,7 +6552,7 @@
           <a:bodyPr wrap="square" lIns="0" tIns="0" rIns="0" bIns="0" rtlCol="0" anchor="ctr"/>
           <a:lstStyle/>
           <a:p>
-            <a:pPr indent="0" marL="0">
+            <a:pPr marL="0" indent="0">
               <a:buNone/>
             </a:pPr>
             <a:r>
@@ -6790,7 +6591,7 @@
           <a:bodyPr wrap="square" lIns="0" tIns="0" rIns="0" bIns="0" rtlCol="0" anchor="t"/>
           <a:lstStyle/>
           <a:p>
-            <a:pPr indent="0" marL="0">
+            <a:pPr marL="0" indent="0">
               <a:buNone/>
             </a:pPr>
             <a:r>
@@ -6834,6 +6635,13 @@
             <a:prstDash val="solid"/>
           </a:ln>
         </p:spPr>
+        <p:txBody>
+          <a:bodyPr/>
+          <a:lstStyle/>
+          <a:p>
+            <a:endParaRPr lang="de-DE"/>
+          </a:p>
+        </p:txBody>
       </p:sp>
       <p:sp>
         <p:nvSpPr>
@@ -6856,7 +6664,7 @@
           <a:bodyPr wrap="square" lIns="0" tIns="0" rIns="0" bIns="0" rtlCol="0" anchor="ctr"/>
           <a:lstStyle/>
           <a:p>
-            <a:pPr indent="0" marL="0">
+            <a:pPr marL="0" indent="0">
               <a:buNone/>
             </a:pPr>
             <a:r>
@@ -6895,7 +6703,7 @@
           <a:bodyPr wrap="square" lIns="0" tIns="0" rIns="0" bIns="0" rtlCol="0" anchor="t"/>
           <a:lstStyle/>
           <a:p>
-            <a:pPr indent="0" marL="0">
+            <a:pPr marL="0" indent="0">
               <a:buNone/>
             </a:pPr>
             <a:r>
@@ -6934,7 +6742,7 @@
           <a:bodyPr wrap="square" rtlCol="0" anchor="ctr"/>
           <a:lstStyle/>
           <a:p>
-            <a:pPr indent="0" marL="0">
+            <a:pPr marL="0" indent="0">
               <a:buNone/>
             </a:pPr>
             <a:r>
@@ -6973,7 +6781,7 @@
           <a:bodyPr wrap="square" rtlCol="0" anchor="ctr"/>
           <a:lstStyle/>
           <a:p>
-            <a:pPr algn="r" indent="0" marL="0">
+            <a:pPr marL="0" indent="0" algn="r">
               <a:buNone/>
             </a:pPr>
             <a:r>
@@ -7007,6 +6815,7 @@
         <a:solidFill>
           <a:srgbClr val="0F1B2D"/>
         </a:solidFill>
+        <a:effectLst/>
       </p:bgPr>
     </p:bg>
     <p:spTree>
@@ -7044,7 +6853,7 @@
           <a:bodyPr wrap="square" rtlCol="0" anchor="ctr"/>
           <a:lstStyle/>
           <a:p>
-            <a:pPr algn="ctr" indent="0" marL="0">
+            <a:pPr marL="0" indent="0" algn="ctr">
               <a:buNone/>
             </a:pPr>
             <a:r>
@@ -7081,6 +6890,13 @@
           </a:solidFill>
           <a:ln/>
         </p:spPr>
+        <p:txBody>
+          <a:bodyPr/>
+          <a:lstStyle/>
+          <a:p>
+            <a:endParaRPr lang="de-DE"/>
+          </a:p>
+        </p:txBody>
       </p:sp>
       <p:sp>
         <p:nvSpPr>
@@ -7103,7 +6919,7 @@
           <a:bodyPr wrap="square" rtlCol="0" anchor="ctr"/>
           <a:lstStyle/>
           <a:p>
-            <a:pPr algn="ctr" indent="0" marL="0">
+            <a:pPr marL="0" indent="0" algn="ctr">
               <a:buNone/>
             </a:pPr>
             <a:r>
@@ -7142,7 +6958,7 @@
           <a:bodyPr wrap="square" rtlCol="0" anchor="ctr"/>
           <a:lstStyle/>
           <a:p>
-            <a:pPr algn="ctr" indent="0" marL="0">
+            <a:pPr marL="0" indent="0" algn="ctr">
               <a:buNone/>
             </a:pPr>
             <a:r>
@@ -7159,7 +6975,7 @@
             <a:endParaRPr lang="en-US" sz="1300" dirty="0"/>
           </a:p>
           <a:p>
-            <a:pPr algn="ctr" indent="0" marL="0">
+            <a:pPr marL="0" indent="0" algn="ctr">
               <a:buNone/>
             </a:pPr>
             <a:r>
@@ -7198,7 +7014,7 @@
           <a:bodyPr wrap="square" rtlCol="0" anchor="ctr"/>
           <a:lstStyle/>
           <a:p>
-            <a:pPr indent="0" marL="0">
+            <a:pPr marL="0" indent="0">
               <a:buNone/>
             </a:pPr>
             <a:r>
@@ -7237,7 +7053,7 @@
           <a:bodyPr wrap="square" rtlCol="0" anchor="ctr"/>
           <a:lstStyle/>
           <a:p>
-            <a:pPr algn="r" indent="0" marL="0">
+            <a:pPr marL="0" indent="0" algn="r">
               <a:buNone/>
             </a:pPr>
             <a:r>
@@ -7271,6 +7087,7 @@
         <a:solidFill>
           <a:srgbClr val="FFFFFF"/>
         </a:solidFill>
+        <a:effectLst/>
       </p:bgPr>
     </p:bg>
     <p:spTree>
@@ -7308,7 +7125,7 @@
           <a:bodyPr wrap="square" lIns="0" tIns="0" rIns="0" bIns="0" rtlCol="0" anchor="ctr"/>
           <a:lstStyle/>
           <a:p>
-            <a:pPr indent="0" marL="0">
+            <a:pPr marL="0" indent="0">
               <a:buNone/>
             </a:pPr>
             <a:r>
@@ -7347,7 +7164,7 @@
           <a:bodyPr wrap="square" rtlCol="0" anchor="ctr"/>
           <a:lstStyle/>
           <a:p>
-            <a:pPr indent="0" marL="0">
+            <a:pPr marL="0" indent="0">
               <a:buNone/>
             </a:pPr>
             <a:r>
@@ -7450,7 +7267,7 @@
           <a:bodyPr wrap="square" rtlCol="0" anchor="ctr"/>
           <a:lstStyle/>
           <a:p>
-            <a:pPr indent="0" marL="0">
+            <a:pPr marL="0" indent="0">
               <a:buNone/>
             </a:pPr>
             <a:r>
@@ -7577,6 +7394,13 @@
             <a:prstDash val="solid"/>
           </a:ln>
         </p:spPr>
+        <p:txBody>
+          <a:bodyPr/>
+          <a:lstStyle/>
+          <a:p>
+            <a:endParaRPr lang="de-DE"/>
+          </a:p>
+        </p:txBody>
       </p:sp>
       <p:sp>
         <p:nvSpPr>
@@ -7599,7 +7423,7 @@
           <a:bodyPr wrap="square" lIns="0" tIns="0" rIns="0" bIns="0" rtlCol="0" anchor="ctr"/>
           <a:lstStyle/>
           <a:p>
-            <a:pPr indent="0" marL="0">
+            <a:pPr marL="0" indent="0">
               <a:buNone/>
             </a:pPr>
             <a:r>
@@ -7638,7 +7462,7 @@
           <a:bodyPr wrap="square" lIns="0" tIns="0" rIns="0" bIns="0" rtlCol="0" anchor="t"/>
           <a:lstStyle/>
           <a:p>
-            <a:pPr indent="0" marL="0">
+            <a:pPr marL="0" indent="0">
               <a:buNone/>
             </a:pPr>
             <a:r>
@@ -7677,7 +7501,7 @@
           <a:bodyPr wrap="square" rtlCol="0" anchor="ctr"/>
           <a:lstStyle/>
           <a:p>
-            <a:pPr indent="0" marL="0">
+            <a:pPr marL="0" indent="0">
               <a:buNone/>
             </a:pPr>
             <a:r>
@@ -7716,7 +7540,7 @@
           <a:bodyPr wrap="square" rtlCol="0" anchor="ctr"/>
           <a:lstStyle/>
           <a:p>
-            <a:pPr algn="r" indent="0" marL="0">
+            <a:pPr marL="0" indent="0" algn="r">
               <a:buNone/>
             </a:pPr>
             <a:r>
@@ -7750,6 +7574,7 @@
         <a:solidFill>
           <a:srgbClr val="FFFFFF"/>
         </a:solidFill>
+        <a:effectLst/>
       </p:bgPr>
     </p:bg>
     <p:spTree>
@@ -7787,7 +7612,7 @@
           <a:bodyPr wrap="square" lIns="0" tIns="0" rIns="0" bIns="0" rtlCol="0" anchor="ctr"/>
           <a:lstStyle/>
           <a:p>
-            <a:pPr indent="0" marL="0">
+            <a:pPr marL="0" indent="0">
               <a:buNone/>
             </a:pPr>
             <a:r>
@@ -7824,6 +7649,13 @@
           </a:solidFill>
           <a:ln/>
         </p:spPr>
+        <p:txBody>
+          <a:bodyPr/>
+          <a:lstStyle/>
+          <a:p>
+            <a:endParaRPr lang="de-DE"/>
+          </a:p>
+        </p:txBody>
       </p:sp>
       <p:sp>
         <p:nvSpPr>
@@ -7846,7 +7678,7 @@
           <a:bodyPr wrap="square" rtlCol="0" anchor="t"/>
           <a:lstStyle/>
           <a:p>
-            <a:pPr indent="0" marL="0">
+            <a:pPr marL="0" indent="0">
               <a:buNone/>
             </a:pPr>
             <a:r>
@@ -7888,6 +7720,13 @@
             <a:prstDash val="solid"/>
           </a:ln>
         </p:spPr>
+        <p:txBody>
+          <a:bodyPr/>
+          <a:lstStyle/>
+          <a:p>
+            <a:endParaRPr lang="de-DE"/>
+          </a:p>
+        </p:txBody>
       </p:sp>
       <p:sp>
         <p:nvSpPr>
@@ -7908,6 +7747,13 @@
           </a:solidFill>
           <a:ln/>
         </p:spPr>
+        <p:txBody>
+          <a:bodyPr/>
+          <a:lstStyle/>
+          <a:p>
+            <a:endParaRPr lang="de-DE"/>
+          </a:p>
+        </p:txBody>
       </p:sp>
       <p:sp>
         <p:nvSpPr>
@@ -7930,7 +7776,7 @@
           <a:bodyPr wrap="square" lIns="0" tIns="0" rIns="0" bIns="0" rtlCol="0" anchor="ctr"/>
           <a:lstStyle/>
           <a:p>
-            <a:pPr indent="0" marL="0">
+            <a:pPr marL="0" indent="0">
               <a:buNone/>
             </a:pPr>
             <a:r>
@@ -7969,7 +7815,7 @@
           <a:bodyPr wrap="square" lIns="0" tIns="0" rIns="0" bIns="0" rtlCol="0" anchor="t"/>
           <a:lstStyle/>
           <a:p>
-            <a:pPr indent="0" marL="0">
+            <a:pPr marL="0" indent="0">
               <a:buNone/>
             </a:pPr>
             <a:r>
@@ -7986,7 +7832,7 @@
             <a:endParaRPr lang="en-US" sz="1400" dirty="0"/>
           </a:p>
           <a:p>
-            <a:pPr indent="0" marL="0">
+            <a:pPr marL="0" indent="0">
               <a:buNone/>
             </a:pPr>
             <a:r>
@@ -8003,7 +7849,7 @@
             <a:endParaRPr lang="en-US" sz="1400" dirty="0"/>
           </a:p>
           <a:p>
-            <a:pPr indent="0" marL="0">
+            <a:pPr marL="0" indent="0">
               <a:buNone/>
             </a:pPr>
             <a:r>
@@ -8045,6 +7891,13 @@
             <a:prstDash val="solid"/>
           </a:ln>
         </p:spPr>
+        <p:txBody>
+          <a:bodyPr/>
+          <a:lstStyle/>
+          <a:p>
+            <a:endParaRPr lang="de-DE"/>
+          </a:p>
+        </p:txBody>
       </p:sp>
       <p:sp>
         <p:nvSpPr>
@@ -8065,6 +7918,13 @@
           </a:solidFill>
           <a:ln/>
         </p:spPr>
+        <p:txBody>
+          <a:bodyPr/>
+          <a:lstStyle/>
+          <a:p>
+            <a:endParaRPr lang="de-DE"/>
+          </a:p>
+        </p:txBody>
       </p:sp>
       <p:sp>
         <p:nvSpPr>
@@ -8087,7 +7947,7 @@
           <a:bodyPr wrap="square" lIns="0" tIns="0" rIns="0" bIns="0" rtlCol="0" anchor="ctr"/>
           <a:lstStyle/>
           <a:p>
-            <a:pPr indent="0" marL="0">
+            <a:pPr marL="0" indent="0">
               <a:buNone/>
             </a:pPr>
             <a:r>
@@ -8126,7 +7986,7 @@
           <a:bodyPr wrap="square" lIns="0" tIns="0" rIns="0" bIns="0" rtlCol="0" anchor="t"/>
           <a:lstStyle/>
           <a:p>
-            <a:pPr indent="0" marL="0">
+            <a:pPr marL="0" indent="0">
               <a:buNone/>
             </a:pPr>
             <a:r>
@@ -8143,7 +8003,7 @@
             <a:endParaRPr lang="en-US" sz="1400" dirty="0"/>
           </a:p>
           <a:p>
-            <a:pPr indent="0" marL="0">
+            <a:pPr marL="0" indent="0">
               <a:buNone/>
             </a:pPr>
             <a:r>
@@ -8185,6 +8045,13 @@
             <a:prstDash val="solid"/>
           </a:ln>
         </p:spPr>
+        <p:txBody>
+          <a:bodyPr/>
+          <a:lstStyle/>
+          <a:p>
+            <a:endParaRPr lang="de-DE"/>
+          </a:p>
+        </p:txBody>
       </p:sp>
       <p:sp>
         <p:nvSpPr>
@@ -8205,6 +8072,13 @@
           </a:solidFill>
           <a:ln/>
         </p:spPr>
+        <p:txBody>
+          <a:bodyPr/>
+          <a:lstStyle/>
+          <a:p>
+            <a:endParaRPr lang="de-DE"/>
+          </a:p>
+        </p:txBody>
       </p:sp>
       <p:sp>
         <p:nvSpPr>
@@ -8227,7 +8101,7 @@
           <a:bodyPr wrap="square" lIns="0" tIns="0" rIns="0" bIns="0" rtlCol="0" anchor="ctr"/>
           <a:lstStyle/>
           <a:p>
-            <a:pPr indent="0" marL="0">
+            <a:pPr marL="0" indent="0">
               <a:buNone/>
             </a:pPr>
             <a:r>
@@ -8266,7 +8140,7 @@
           <a:bodyPr wrap="square" lIns="0" tIns="0" rIns="0" bIns="0" rtlCol="0" anchor="t"/>
           <a:lstStyle/>
           <a:p>
-            <a:pPr indent="0" marL="0">
+            <a:pPr marL="0" indent="0">
               <a:buNone/>
             </a:pPr>
             <a:r>
@@ -8283,7 +8157,7 @@
             <a:endParaRPr lang="en-US" sz="1400" dirty="0"/>
           </a:p>
           <a:p>
-            <a:pPr indent="0" marL="0">
+            <a:pPr marL="0" indent="0">
               <a:buNone/>
             </a:pPr>
             <a:r>
@@ -8322,7 +8196,7 @@
           <a:bodyPr wrap="square" rtlCol="0" anchor="ctr"/>
           <a:lstStyle/>
           <a:p>
-            <a:pPr indent="0" marL="0">
+            <a:pPr marL="0" indent="0">
               <a:buNone/>
             </a:pPr>
             <a:r>
@@ -8361,7 +8235,7 @@
           <a:bodyPr wrap="square" rtlCol="0" anchor="ctr"/>
           <a:lstStyle/>
           <a:p>
-            <a:pPr algn="r" indent="0" marL="0">
+            <a:pPr marL="0" indent="0" algn="r">
               <a:buNone/>
             </a:pPr>
             <a:r>
@@ -8395,6 +8269,7 @@
         <a:solidFill>
           <a:srgbClr val="FFFFFF"/>
         </a:solidFill>
+        <a:effectLst/>
       </p:bgPr>
     </p:bg>
     <p:spTree>
@@ -8432,7 +8307,7 @@
           <a:bodyPr wrap="square" lIns="0" tIns="0" rIns="0" bIns="0" rtlCol="0" anchor="ctr"/>
           <a:lstStyle/>
           <a:p>
-            <a:pPr indent="0" marL="0">
+            <a:pPr marL="0" indent="0">
               <a:buNone/>
             </a:pPr>
             <a:r>
@@ -8474,13 +8349,20 @@
             <a:prstDash val="solid"/>
           </a:ln>
           <a:effectLst>
-            <a:outerShdw sx="100000" sy="100000" kx="0" ky="0" algn="bl" rotWithShape="0" blurRad="76200" dist="12700" dir="8100000">
+            <a:outerShdw blurRad="76200" dist="12700" dir="8100000" algn="bl" rotWithShape="0">
               <a:srgbClr val="000000">
                 <a:alpha val="7000"/>
               </a:srgbClr>
             </a:outerShdw>
           </a:effectLst>
         </p:spPr>
+        <p:txBody>
+          <a:bodyPr/>
+          <a:lstStyle/>
+          <a:p>
+            <a:endParaRPr lang="de-DE"/>
+          </a:p>
+        </p:txBody>
       </p:sp>
       <p:sp>
         <p:nvSpPr>
@@ -8501,6 +8383,13 @@
           </a:solidFill>
           <a:ln/>
         </p:spPr>
+        <p:txBody>
+          <a:bodyPr/>
+          <a:lstStyle/>
+          <a:p>
+            <a:endParaRPr lang="de-DE"/>
+          </a:p>
+        </p:txBody>
       </p:sp>
       <p:sp>
         <p:nvSpPr>
@@ -8523,7 +8412,7 @@
           <a:bodyPr wrap="square" lIns="0" tIns="0" rIns="0" bIns="0" rtlCol="0" anchor="ctr"/>
           <a:lstStyle/>
           <a:p>
-            <a:pPr indent="0" marL="0">
+            <a:pPr marL="0" indent="0">
               <a:buNone/>
             </a:pPr>
             <a:r>
@@ -8562,7 +8451,7 @@
           <a:bodyPr wrap="square" lIns="0" tIns="0" rIns="0" bIns="0" rtlCol="0" anchor="ctr"/>
           <a:lstStyle/>
           <a:p>
-            <a:pPr indent="0" marL="0">
+            <a:pPr marL="0" indent="0">
               <a:buNone/>
             </a:pPr>
             <a:r>
@@ -8601,7 +8490,7 @@
           <a:bodyPr wrap="square" lIns="0" tIns="0" rIns="0" bIns="0" rtlCol="0" anchor="t"/>
           <a:lstStyle/>
           <a:p>
-            <a:pPr indent="0" marL="0">
+            <a:pPr marL="0" indent="0">
               <a:buNone/>
             </a:pPr>
             <a:r>
@@ -8643,13 +8532,20 @@
             <a:prstDash val="solid"/>
           </a:ln>
           <a:effectLst>
-            <a:outerShdw sx="100000" sy="100000" kx="0" ky="0" algn="bl" rotWithShape="0" blurRad="76200" dist="12700" dir="8100000">
+            <a:outerShdw blurRad="76200" dist="12700" dir="8100000" algn="bl" rotWithShape="0">
               <a:srgbClr val="000000">
                 <a:alpha val="7000"/>
               </a:srgbClr>
             </a:outerShdw>
           </a:effectLst>
         </p:spPr>
+        <p:txBody>
+          <a:bodyPr/>
+          <a:lstStyle/>
+          <a:p>
+            <a:endParaRPr lang="de-DE"/>
+          </a:p>
+        </p:txBody>
       </p:sp>
       <p:sp>
         <p:nvSpPr>
@@ -8670,6 +8566,13 @@
           </a:solidFill>
           <a:ln/>
         </p:spPr>
+        <p:txBody>
+          <a:bodyPr/>
+          <a:lstStyle/>
+          <a:p>
+            <a:endParaRPr lang="de-DE"/>
+          </a:p>
+        </p:txBody>
       </p:sp>
       <p:sp>
         <p:nvSpPr>
@@ -8692,7 +8595,7 @@
           <a:bodyPr wrap="square" lIns="0" tIns="0" rIns="0" bIns="0" rtlCol="0" anchor="ctr"/>
           <a:lstStyle/>
           <a:p>
-            <a:pPr indent="0" marL="0">
+            <a:pPr marL="0" indent="0">
               <a:buNone/>
             </a:pPr>
             <a:r>
@@ -8731,7 +8634,7 @@
           <a:bodyPr wrap="square" lIns="0" tIns="0" rIns="0" bIns="0" rtlCol="0" anchor="ctr"/>
           <a:lstStyle/>
           <a:p>
-            <a:pPr indent="0" marL="0">
+            <a:pPr marL="0" indent="0">
               <a:buNone/>
             </a:pPr>
             <a:r>
@@ -8770,9 +8673,20 @@
           <a:bodyPr wrap="square" lIns="0" tIns="0" rIns="0" bIns="0" rtlCol="0" anchor="t"/>
           <a:lstStyle/>
           <a:p>
-            <a:pPr indent="0" marL="0">
+            <a:pPr marL="0" indent="0">
               <a:buNone/>
             </a:pPr>
+            <a:r>
+              <a:rPr lang="en-US" sz="1200" dirty="0" err="1">
+                <a:solidFill>
+                  <a:srgbClr val="1A1A1A"/>
+                </a:solidFill>
+                <a:latin typeface="Calibri" pitchFamily="34" charset="0"/>
+                <a:ea typeface="Calibri" pitchFamily="34" charset="-122"/>
+                <a:cs typeface="Calibri" pitchFamily="34" charset="-120"/>
+              </a:rPr>
+              <a:t>Zufälliges</a:t>
+            </a:r>
             <a:r>
               <a:rPr lang="en-US" sz="1200" dirty="0">
                 <a:solidFill>
@@ -8782,7 +8696,7 @@
                 <a:ea typeface="Calibri" pitchFamily="34" charset="-122"/>
                 <a:cs typeface="Calibri" pitchFamily="34" charset="-120"/>
               </a:rPr>
-              <a:t>Zufaelliges Mischen von Sliding-Window-Sequenzen leckt Zukunfts-Information ins Training und schoent die Ergebnisse. RMSE Gain bis 20.5% bei 10-fold CV (LSTM).</a:t>
+              <a:t> Mischen von Sliding-Window-Sequenzen leckt Zukunfts-Information ins Training und schoent die Ergebnisse. RMSE Gain bis 20.5% bei 10-fold CV (LSTM).</a:t>
             </a:r>
             <a:endParaRPr lang="en-US" sz="1200" dirty="0"/>
           </a:p>
@@ -8809,7 +8723,7 @@
           <a:bodyPr wrap="square" lIns="0" tIns="0" rIns="0" bIns="0" rtlCol="0" anchor="ctr"/>
           <a:lstStyle/>
           <a:p>
-            <a:pPr indent="0" marL="0">
+            <a:pPr marL="0" indent="0">
               <a:buNone/>
             </a:pPr>
             <a:r>
@@ -8846,6 +8760,13 @@
           </a:solidFill>
           <a:ln/>
         </p:spPr>
+        <p:txBody>
+          <a:bodyPr/>
+          <a:lstStyle/>
+          <a:p>
+            <a:endParaRPr lang="de-DE"/>
+          </a:p>
+        </p:txBody>
       </p:sp>
       <p:sp>
         <p:nvSpPr>
@@ -8868,7 +8789,7 @@
           <a:bodyPr wrap="square" lIns="0" tIns="0" rIns="0" bIns="0" rtlCol="0" anchor="t"/>
           <a:lstStyle/>
           <a:p>
-            <a:pPr indent="0" marL="0">
+            <a:pPr marL="0" indent="0">
               <a:buNone/>
             </a:pPr>
             <a:r>
@@ -8882,9 +8803,6 @@
               </a:rPr>
               <a:t>Flores-Martin et al. (2024):  </a:t>
             </a:r>
-            <a:pPr indent="0" marL="0">
-              <a:buNone/>
-            </a:pPr>
             <a:r>
               <a:rPr lang="en-US" sz="1100" dirty="0">
                 <a:solidFill>
@@ -8919,6 +8837,13 @@
           </a:solidFill>
           <a:ln/>
         </p:spPr>
+        <p:txBody>
+          <a:bodyPr/>
+          <a:lstStyle/>
+          <a:p>
+            <a:endParaRPr lang="de-DE"/>
+          </a:p>
+        </p:txBody>
       </p:sp>
       <p:sp>
         <p:nvSpPr>
@@ -8941,7 +8866,7 @@
           <a:bodyPr wrap="square" lIns="0" tIns="0" rIns="0" bIns="0" rtlCol="0" anchor="t"/>
           <a:lstStyle/>
           <a:p>
-            <a:pPr indent="0" marL="0">
+            <a:pPr marL="0" indent="0">
               <a:buNone/>
             </a:pPr>
             <a:r>
@@ -8955,9 +8880,17 @@
               </a:rPr>
               <a:t>Banbury et al. (2021), MLPerf Tiny:  </a:t>
             </a:r>
-            <a:pPr indent="0" marL="0">
-              <a:buNone/>
-            </a:pPr>
+            <a:r>
+              <a:rPr lang="en-US" sz="1100" dirty="0" err="1">
+                <a:solidFill>
+                  <a:srgbClr val="64748B"/>
+                </a:solidFill>
+                <a:latin typeface="Calibri" pitchFamily="34" charset="0"/>
+                <a:ea typeface="Calibri" pitchFamily="34" charset="-122"/>
+                <a:cs typeface="Calibri" pitchFamily="34" charset="-120"/>
+              </a:rPr>
+              <a:t>Industriestandard</a:t>
+            </a:r>
             <a:r>
               <a:rPr lang="en-US" sz="1100" dirty="0">
                 <a:solidFill>
@@ -8967,7 +8900,29 @@
                 <a:ea typeface="Calibri" pitchFamily="34" charset="-122"/>
                 <a:cs typeface="Calibri" pitchFamily="34" charset="-120"/>
               </a:rPr>
-              <a:t>Industriestandard-Benchmark fuer TinyML (Accuracy, Latency, Energy). Smartphones kaum abgedeckt.</a:t>
+              <a:t>-Benchmark </a:t>
+            </a:r>
+            <a:r>
+              <a:rPr lang="en-US" sz="1100" dirty="0" err="1">
+                <a:solidFill>
+                  <a:srgbClr val="64748B"/>
+                </a:solidFill>
+                <a:latin typeface="Calibri" pitchFamily="34" charset="0"/>
+                <a:ea typeface="Calibri" pitchFamily="34" charset="-122"/>
+                <a:cs typeface="Calibri" pitchFamily="34" charset="-120"/>
+              </a:rPr>
+              <a:t>fürr</a:t>
+            </a:r>
+            <a:r>
+              <a:rPr lang="en-US" sz="1100" dirty="0">
+                <a:solidFill>
+                  <a:srgbClr val="64748B"/>
+                </a:solidFill>
+                <a:latin typeface="Calibri" pitchFamily="34" charset="0"/>
+                <a:ea typeface="Calibri" pitchFamily="34" charset="-122"/>
+                <a:cs typeface="Calibri" pitchFamily="34" charset="-120"/>
+              </a:rPr>
+              <a:t> TinyML (Accuracy, Latency, Energy). Smartphones kaum abgedeckt.</a:t>
             </a:r>
             <a:endParaRPr lang="en-US" sz="1100" dirty="0"/>
           </a:p>
@@ -8994,7 +8949,7 @@
           <a:bodyPr wrap="square" rtlCol="0" anchor="ctr"/>
           <a:lstStyle/>
           <a:p>
-            <a:pPr indent="0" marL="0">
+            <a:pPr marL="0" indent="0">
               <a:buNone/>
             </a:pPr>
             <a:r>
@@ -9033,7 +8988,7 @@
           <a:bodyPr wrap="square" rtlCol="0" anchor="ctr"/>
           <a:lstStyle/>
           <a:p>
-            <a:pPr algn="r" indent="0" marL="0">
+            <a:pPr marL="0" indent="0" algn="r">
               <a:buNone/>
             </a:pPr>
             <a:r>
@@ -9067,6 +9022,7 @@
         <a:solidFill>
           <a:srgbClr val="FFFFFF"/>
         </a:solidFill>
+        <a:effectLst/>
       </p:bgPr>
     </p:bg>
     <p:spTree>
@@ -9104,7 +9060,7 @@
           <a:bodyPr wrap="square" lIns="0" tIns="0" rIns="0" bIns="0" rtlCol="0" anchor="ctr"/>
           <a:lstStyle/>
           <a:p>
-            <a:pPr indent="0" marL="0">
+            <a:pPr marL="0" indent="0">
               <a:buNone/>
             </a:pPr>
             <a:r>
@@ -9141,6 +9097,13 @@
           </a:solidFill>
           <a:ln/>
         </p:spPr>
+        <p:txBody>
+          <a:bodyPr/>
+          <a:lstStyle/>
+          <a:p>
+            <a:endParaRPr lang="de-DE"/>
+          </a:p>
+        </p:txBody>
       </p:sp>
       <p:sp>
         <p:nvSpPr>
@@ -9163,7 +9126,7 @@
           <a:bodyPr wrap="square" lIns="0" tIns="0" rIns="0" bIns="0" rtlCol="0" anchor="ctr"/>
           <a:lstStyle/>
           <a:p>
-            <a:pPr algn="ctr" indent="0" marL="0">
+            <a:pPr marL="0" indent="0" algn="ctr">
               <a:buNone/>
             </a:pPr>
             <a:r>
@@ -9202,7 +9165,7 @@
           <a:bodyPr wrap="square" lIns="0" tIns="0" rIns="0" bIns="0" rtlCol="0" anchor="ctr"/>
           <a:lstStyle/>
           <a:p>
-            <a:pPr algn="ctr" indent="0" marL="0">
+            <a:pPr marL="0" indent="0" algn="ctr">
               <a:buNone/>
             </a:pPr>
             <a:r>
@@ -9239,6 +9202,13 @@
           </a:solidFill>
           <a:ln/>
         </p:spPr>
+        <p:txBody>
+          <a:bodyPr/>
+          <a:lstStyle/>
+          <a:p>
+            <a:endParaRPr lang="de-DE"/>
+          </a:p>
+        </p:txBody>
       </p:sp>
       <p:sp>
         <p:nvSpPr>
@@ -9261,7 +9231,7 @@
           <a:bodyPr wrap="square" lIns="0" tIns="0" rIns="0" bIns="0" rtlCol="0" anchor="ctr"/>
           <a:lstStyle/>
           <a:p>
-            <a:pPr algn="ctr" indent="0" marL="0">
+            <a:pPr marL="0" indent="0" algn="ctr">
               <a:buNone/>
             </a:pPr>
             <a:r>
@@ -9300,7 +9270,7 @@
           <a:bodyPr wrap="square" lIns="0" tIns="0" rIns="0" bIns="0" rtlCol="0" anchor="ctr"/>
           <a:lstStyle/>
           <a:p>
-            <a:pPr algn="ctr" indent="0" marL="0">
+            <a:pPr marL="0" indent="0" algn="ctr">
               <a:buNone/>
             </a:pPr>
             <a:r>
@@ -9337,6 +9307,13 @@
           </a:solidFill>
           <a:ln/>
         </p:spPr>
+        <p:txBody>
+          <a:bodyPr/>
+          <a:lstStyle/>
+          <a:p>
+            <a:endParaRPr lang="de-DE"/>
+          </a:p>
+        </p:txBody>
       </p:sp>
       <p:sp>
         <p:nvSpPr>
@@ -9359,7 +9336,7 @@
           <a:bodyPr wrap="square" lIns="0" tIns="0" rIns="0" bIns="0" rtlCol="0" anchor="ctr"/>
           <a:lstStyle/>
           <a:p>
-            <a:pPr algn="ctr" indent="0" marL="0">
+            <a:pPr marL="0" indent="0" algn="ctr">
               <a:buNone/>
             </a:pPr>
             <a:r>
@@ -9398,7 +9375,7 @@
           <a:bodyPr wrap="square" lIns="0" tIns="0" rIns="0" bIns="0" rtlCol="0" anchor="ctr"/>
           <a:lstStyle/>
           <a:p>
-            <a:pPr algn="ctr" indent="0" marL="0">
+            <a:pPr marL="0" indent="0" algn="ctr">
               <a:buNone/>
             </a:pPr>
             <a:r>
@@ -9435,6 +9412,13 @@
           </a:solidFill>
           <a:ln/>
         </p:spPr>
+        <p:txBody>
+          <a:bodyPr/>
+          <a:lstStyle/>
+          <a:p>
+            <a:endParaRPr lang="de-DE"/>
+          </a:p>
+        </p:txBody>
       </p:sp>
       <p:sp>
         <p:nvSpPr>
@@ -9457,7 +9441,7 @@
           <a:bodyPr wrap="square" lIns="0" tIns="0" rIns="0" bIns="0" rtlCol="0" anchor="ctr"/>
           <a:lstStyle/>
           <a:p>
-            <a:pPr algn="ctr" indent="0" marL="0">
+            <a:pPr marL="0" indent="0" algn="ctr">
               <a:buNone/>
             </a:pPr>
             <a:r>
@@ -9496,7 +9480,7 @@
           <a:bodyPr wrap="square" lIns="0" tIns="0" rIns="0" bIns="0" rtlCol="0" anchor="ctr"/>
           <a:lstStyle/>
           <a:p>
-            <a:pPr algn="ctr" indent="0" marL="0">
+            <a:pPr marL="0" indent="0" algn="ctr">
               <a:buNone/>
             </a:pPr>
             <a:r>
@@ -9516,7 +9500,7 @@
       </p:sp>
       <p:graphicFrame>
         <p:nvGraphicFramePr>
-          <p:cNvPr id="6" name="Table 0"/>
+          <p:cNvPr id="15" name="Table 0"/>
           <p:cNvGraphicFramePr>
             <a:graphicFrameLocks noGrp="1"/>
           </p:cNvGraphicFramePr>
@@ -9530,17 +9514,41 @@
         </p:nvGraphicFramePr>
         <p:xfrm>
           <a:off x="457200" y="2331720"/>
-          <a:ext cx="5943600" cy="914400"/>
+          <a:ext cx="5943600" cy="1371600"/>
         </p:xfrm>
         <a:graphic>
           <a:graphicData uri="http://schemas.openxmlformats.org/drawingml/2006/table">
             <a:tbl>
               <a:tblPr/>
               <a:tblGrid>
-                <a:gridCol w="2103120"/>
-                <a:gridCol w="1371600"/>
-                <a:gridCol w="1097280"/>
-                <a:gridCol w="1371600"/>
+                <a:gridCol w="2103120">
+                  <a:extLst>
+                    <a:ext uri="{9D8B030D-6E8A-4147-A177-3AD203B41FA5}">
+                      <a16:colId xmlns:a16="http://schemas.microsoft.com/office/drawing/2014/main" val="20000"/>
+                    </a:ext>
+                  </a:extLst>
+                </a:gridCol>
+                <a:gridCol w="1371600">
+                  <a:extLst>
+                    <a:ext uri="{9D8B030D-6E8A-4147-A177-3AD203B41FA5}">
+                      <a16:colId xmlns:a16="http://schemas.microsoft.com/office/drawing/2014/main" val="20001"/>
+                    </a:ext>
+                  </a:extLst>
+                </a:gridCol>
+                <a:gridCol w="1097280">
+                  <a:extLst>
+                    <a:ext uri="{9D8B030D-6E8A-4147-A177-3AD203B41FA5}">
+                      <a16:colId xmlns:a16="http://schemas.microsoft.com/office/drawing/2014/main" val="20002"/>
+                    </a:ext>
+                  </a:extLst>
+                </a:gridCol>
+                <a:gridCol w="1371600">
+                  <a:extLst>
+                    <a:ext uri="{9D8B030D-6E8A-4147-A177-3AD203B41FA5}">
+                      <a16:colId xmlns:a16="http://schemas.microsoft.com/office/drawing/2014/main" val="20003"/>
+                    </a:ext>
+                  </a:extLst>
+                </a:gridCol>
               </a:tblGrid>
               <a:tr h="0">
                 <a:tc>
@@ -9548,7 +9556,7 @@
                     <a:bodyPr/>
                     <a:lstStyle/>
                     <a:p>
-                      <a:pPr indent="0" marL="0">
+                      <a:pPr marL="0" indent="0">
                         <a:buNone/>
                       </a:pPr>
                       <a:r>
@@ -9569,7 +9577,7 @@
                       </a:endParaRPr>
                     </a:p>
                   </a:txBody>
-                  <a:tcPr marL="91440" marR="91440" marT="45720" marB="45720">
+                  <a:tcPr>
                     <a:lnL w="6350" cap="flat" cmpd="sng" algn="ctr">
                       <a:solidFill>
                         <a:srgbClr val="E2E8F0"/>
@@ -9616,7 +9624,7 @@
                     <a:bodyPr/>
                     <a:lstStyle/>
                     <a:p>
-                      <a:pPr indent="0" marL="0">
+                      <a:pPr marL="0" indent="0">
                         <a:buNone/>
                       </a:pPr>
                       <a:r>
@@ -9637,7 +9645,7 @@
                       </a:endParaRPr>
                     </a:p>
                   </a:txBody>
-                  <a:tcPr marL="91440" marR="91440" marT="45720" marB="45720">
+                  <a:tcPr>
                     <a:lnL w="6350" cap="flat" cmpd="sng" algn="ctr">
                       <a:solidFill>
                         <a:srgbClr val="E2E8F0"/>
@@ -9684,7 +9692,7 @@
                     <a:bodyPr/>
                     <a:lstStyle/>
                     <a:p>
-                      <a:pPr indent="0" marL="0">
+                      <a:pPr marL="0" indent="0">
                         <a:buNone/>
                       </a:pPr>
                       <a:r>
@@ -9705,7 +9713,7 @@
                       </a:endParaRPr>
                     </a:p>
                   </a:txBody>
-                  <a:tcPr marL="91440" marR="91440" marT="45720" marB="45720">
+                  <a:tcPr>
                     <a:lnL w="6350" cap="flat" cmpd="sng" algn="ctr">
                       <a:solidFill>
                         <a:srgbClr val="E2E8F0"/>
@@ -9752,7 +9760,7 @@
                     <a:bodyPr/>
                     <a:lstStyle/>
                     <a:p>
-                      <a:pPr indent="0" marL="0">
+                      <a:pPr marL="0" indent="0">
                         <a:buNone/>
                       </a:pPr>
                       <a:r>
@@ -9773,7 +9781,7 @@
                       </a:endParaRPr>
                     </a:p>
                   </a:txBody>
-                  <a:tcPr marL="91440" marR="91440" marT="45720" marB="45720">
+                  <a:tcPr>
                     <a:lnL w="6350" cap="flat" cmpd="sng" algn="ctr">
                       <a:solidFill>
                         <a:srgbClr val="E2E8F0"/>
@@ -9815,6 +9823,11 @@
                     </a:solidFill>
                   </a:tcPr>
                 </a:tc>
+                <a:extLst>
+                  <a:ext uri="{0D108BD9-81ED-4DB2-BD59-A6C34878D82A}">
+                    <a16:rowId xmlns:a16="http://schemas.microsoft.com/office/drawing/2014/main" val="10000"/>
+                  </a:ext>
+                </a:extLst>
               </a:tr>
               <a:tr h="0">
                 <a:tc>
@@ -9822,7 +9835,7 @@
                     <a:bodyPr/>
                     <a:lstStyle/>
                     <a:p>
-                      <a:pPr indent="0" marL="0">
+                      <a:pPr marL="0" indent="0">
                         <a:buNone/>
                       </a:pPr>
                       <a:r>
@@ -9843,7 +9856,7 @@
                       </a:endParaRPr>
                     </a:p>
                   </a:txBody>
-                  <a:tcPr marL="91440" marR="91440" marT="45720" marB="45720">
+                  <a:tcPr>
                     <a:lnL w="6350" cap="flat" cmpd="sng" algn="ctr">
                       <a:solidFill>
                         <a:srgbClr val="E2E8F0"/>
@@ -9887,7 +9900,7 @@
                     <a:bodyPr/>
                     <a:lstStyle/>
                     <a:p>
-                      <a:pPr indent="0" marL="0">
+                      <a:pPr marL="0" indent="0">
                         <a:buNone/>
                       </a:pPr>
                       <a:r>
@@ -9908,7 +9921,7 @@
                       </a:endParaRPr>
                     </a:p>
                   </a:txBody>
-                  <a:tcPr marL="91440" marR="91440" marT="45720" marB="45720">
+                  <a:tcPr>
                     <a:lnL w="6350" cap="flat" cmpd="sng" algn="ctr">
                       <a:solidFill>
                         <a:srgbClr val="E2E8F0"/>
@@ -9952,7 +9965,7 @@
                     <a:bodyPr/>
                     <a:lstStyle/>
                     <a:p>
-                      <a:pPr indent="0" marL="0">
+                      <a:pPr marL="0" indent="0">
                         <a:buNone/>
                       </a:pPr>
                       <a:r>
@@ -9973,7 +9986,7 @@
                       </a:endParaRPr>
                     </a:p>
                   </a:txBody>
-                  <a:tcPr marL="91440" marR="91440" marT="45720" marB="45720">
+                  <a:tcPr>
                     <a:lnL w="6350" cap="flat" cmpd="sng" algn="ctr">
                       <a:solidFill>
                         <a:srgbClr val="E2E8F0"/>
@@ -10017,7 +10030,7 @@
                     <a:bodyPr/>
                     <a:lstStyle/>
                     <a:p>
-                      <a:pPr indent="0" marL="0">
+                      <a:pPr marL="0" indent="0">
                         <a:buNone/>
                       </a:pPr>
                       <a:r>
@@ -10038,7 +10051,7 @@
                       </a:endParaRPr>
                     </a:p>
                   </a:txBody>
-                  <a:tcPr marL="91440" marR="91440" marT="45720" marB="45720">
+                  <a:tcPr>
                     <a:lnL w="6350" cap="flat" cmpd="sng" algn="ctr">
                       <a:solidFill>
                         <a:srgbClr val="E2E8F0"/>
@@ -10077,6 +10090,11 @@
                     </a:lnB>
                   </a:tcPr>
                 </a:tc>
+                <a:extLst>
+                  <a:ext uri="{0D108BD9-81ED-4DB2-BD59-A6C34878D82A}">
+                    <a16:rowId xmlns:a16="http://schemas.microsoft.com/office/drawing/2014/main" val="10001"/>
+                  </a:ext>
+                </a:extLst>
               </a:tr>
               <a:tr h="0">
                 <a:tc>
@@ -10084,7 +10102,7 @@
                     <a:bodyPr/>
                     <a:lstStyle/>
                     <a:p>
-                      <a:pPr indent="0" marL="0">
+                      <a:pPr marL="0" indent="0">
                         <a:buNone/>
                       </a:pPr>
                       <a:r>
@@ -10105,7 +10123,7 @@
                       </a:endParaRPr>
                     </a:p>
                   </a:txBody>
-                  <a:tcPr marL="91440" marR="91440" marT="45720" marB="45720">
+                  <a:tcPr>
                     <a:lnL w="6350" cap="flat" cmpd="sng" algn="ctr">
                       <a:solidFill>
                         <a:srgbClr val="E2E8F0"/>
@@ -10149,7 +10167,7 @@
                     <a:bodyPr/>
                     <a:lstStyle/>
                     <a:p>
-                      <a:pPr indent="0" marL="0">
+                      <a:pPr marL="0" indent="0">
                         <a:buNone/>
                       </a:pPr>
                       <a:r>
@@ -10170,7 +10188,7 @@
                       </a:endParaRPr>
                     </a:p>
                   </a:txBody>
-                  <a:tcPr marL="91440" marR="91440" marT="45720" marB="45720">
+                  <a:tcPr>
                     <a:lnL w="6350" cap="flat" cmpd="sng" algn="ctr">
                       <a:solidFill>
                         <a:srgbClr val="E2E8F0"/>
@@ -10214,7 +10232,7 @@
                     <a:bodyPr/>
                     <a:lstStyle/>
                     <a:p>
-                      <a:pPr indent="0" marL="0">
+                      <a:pPr marL="0" indent="0">
                         <a:buNone/>
                       </a:pPr>
                       <a:r>
@@ -10235,7 +10253,7 @@
                       </a:endParaRPr>
                     </a:p>
                   </a:txBody>
-                  <a:tcPr marL="91440" marR="91440" marT="45720" marB="45720">
+                  <a:tcPr>
                     <a:lnL w="6350" cap="flat" cmpd="sng" algn="ctr">
                       <a:solidFill>
                         <a:srgbClr val="E2E8F0"/>
@@ -10279,7 +10297,7 @@
                     <a:bodyPr/>
                     <a:lstStyle/>
                     <a:p>
-                      <a:pPr indent="0" marL="0">
+                      <a:pPr marL="0" indent="0">
                         <a:buNone/>
                       </a:pPr>
                       <a:r>
@@ -10300,7 +10318,7 @@
                       </a:endParaRPr>
                     </a:p>
                   </a:txBody>
-                  <a:tcPr marL="91440" marR="91440" marT="45720" marB="45720">
+                  <a:tcPr>
                     <a:lnL w="6350" cap="flat" cmpd="sng" algn="ctr">
                       <a:solidFill>
                         <a:srgbClr val="E2E8F0"/>
@@ -10339,6 +10357,11 @@
                     </a:lnB>
                   </a:tcPr>
                 </a:tc>
+                <a:extLst>
+                  <a:ext uri="{0D108BD9-81ED-4DB2-BD59-A6C34878D82A}">
+                    <a16:rowId xmlns:a16="http://schemas.microsoft.com/office/drawing/2014/main" val="10002"/>
+                  </a:ext>
+                </a:extLst>
               </a:tr>
               <a:tr h="0">
                 <a:tc>
@@ -10346,7 +10369,7 @@
                     <a:bodyPr/>
                     <a:lstStyle/>
                     <a:p>
-                      <a:pPr indent="0" marL="0">
+                      <a:pPr marL="0" indent="0">
                         <a:buNone/>
                       </a:pPr>
                       <a:r>
@@ -10367,7 +10390,7 @@
                       </a:endParaRPr>
                     </a:p>
                   </a:txBody>
-                  <a:tcPr marL="91440" marR="91440" marT="45720" marB="45720">
+                  <a:tcPr>
                     <a:lnL w="6350" cap="flat" cmpd="sng" algn="ctr">
                       <a:solidFill>
                         <a:srgbClr val="E2E8F0"/>
@@ -10411,7 +10434,7 @@
                     <a:bodyPr/>
                     <a:lstStyle/>
                     <a:p>
-                      <a:pPr indent="0" marL="0">
+                      <a:pPr marL="0" indent="0">
                         <a:buNone/>
                       </a:pPr>
                       <a:r>
@@ -10432,7 +10455,7 @@
                       </a:endParaRPr>
                     </a:p>
                   </a:txBody>
-                  <a:tcPr marL="91440" marR="91440" marT="45720" marB="45720">
+                  <a:tcPr>
                     <a:lnL w="6350" cap="flat" cmpd="sng" algn="ctr">
                       <a:solidFill>
                         <a:srgbClr val="E2E8F0"/>
@@ -10476,7 +10499,7 @@
                     <a:bodyPr/>
                     <a:lstStyle/>
                     <a:p>
-                      <a:pPr indent="0" marL="0">
+                      <a:pPr marL="0" indent="0">
                         <a:buNone/>
                       </a:pPr>
                       <a:r>
@@ -10497,7 +10520,7 @@
                       </a:endParaRPr>
                     </a:p>
                   </a:txBody>
-                  <a:tcPr marL="91440" marR="91440" marT="45720" marB="45720">
+                  <a:tcPr>
                     <a:lnL w="6350" cap="flat" cmpd="sng" algn="ctr">
                       <a:solidFill>
                         <a:srgbClr val="E2E8F0"/>
@@ -10541,7 +10564,7 @@
                     <a:bodyPr/>
                     <a:lstStyle/>
                     <a:p>
-                      <a:pPr indent="0" marL="0">
+                      <a:pPr marL="0" indent="0">
                         <a:buNone/>
                       </a:pPr>
                       <a:r>
@@ -10562,7 +10585,7 @@
                       </a:endParaRPr>
                     </a:p>
                   </a:txBody>
-                  <a:tcPr marL="91440" marR="91440" marT="45720" marB="45720">
+                  <a:tcPr>
                     <a:lnL w="6350" cap="flat" cmpd="sng" algn="ctr">
                       <a:solidFill>
                         <a:srgbClr val="E2E8F0"/>
@@ -10601,6 +10624,11 @@
                     </a:lnB>
                   </a:tcPr>
                 </a:tc>
+                <a:extLst>
+                  <a:ext uri="{0D108BD9-81ED-4DB2-BD59-A6C34878D82A}">
+                    <a16:rowId xmlns:a16="http://schemas.microsoft.com/office/drawing/2014/main" val="10003"/>
+                  </a:ext>
+                </a:extLst>
               </a:tr>
               <a:tr h="0">
                 <a:tc>
@@ -10608,7 +10636,7 @@
                     <a:bodyPr/>
                     <a:lstStyle/>
                     <a:p>
-                      <a:pPr indent="0" marL="0">
+                      <a:pPr marL="0" indent="0">
                         <a:buNone/>
                       </a:pPr>
                       <a:r>
@@ -10629,7 +10657,7 @@
                       </a:endParaRPr>
                     </a:p>
                   </a:txBody>
-                  <a:tcPr marL="91440" marR="91440" marT="45720" marB="45720">
+                  <a:tcPr>
                     <a:lnL w="6350" cap="flat" cmpd="sng" algn="ctr">
                       <a:solidFill>
                         <a:srgbClr val="E2E8F0"/>
@@ -10673,7 +10701,7 @@
                     <a:bodyPr/>
                     <a:lstStyle/>
                     <a:p>
-                      <a:pPr indent="0" marL="0">
+                      <a:pPr marL="0" indent="0">
                         <a:buNone/>
                       </a:pPr>
                       <a:r>
@@ -10694,7 +10722,7 @@
                       </a:endParaRPr>
                     </a:p>
                   </a:txBody>
-                  <a:tcPr marL="91440" marR="91440" marT="45720" marB="45720">
+                  <a:tcPr>
                     <a:lnL w="6350" cap="flat" cmpd="sng" algn="ctr">
                       <a:solidFill>
                         <a:srgbClr val="E2E8F0"/>
@@ -10738,7 +10766,7 @@
                     <a:bodyPr/>
                     <a:lstStyle/>
                     <a:p>
-                      <a:pPr indent="0" marL="0">
+                      <a:pPr marL="0" indent="0">
                         <a:buNone/>
                       </a:pPr>
                       <a:r>
@@ -10759,7 +10787,7 @@
                       </a:endParaRPr>
                     </a:p>
                   </a:txBody>
-                  <a:tcPr marL="91440" marR="91440" marT="45720" marB="45720">
+                  <a:tcPr>
                     <a:lnL w="6350" cap="flat" cmpd="sng" algn="ctr">
                       <a:solidFill>
                         <a:srgbClr val="E2E8F0"/>
@@ -10803,7 +10831,7 @@
                     <a:bodyPr/>
                     <a:lstStyle/>
                     <a:p>
-                      <a:pPr indent="0" marL="0">
+                      <a:pPr marL="0" indent="0">
                         <a:buNone/>
                       </a:pPr>
                       <a:r>
@@ -10824,7 +10852,7 @@
                       </a:endParaRPr>
                     </a:p>
                   </a:txBody>
-                  <a:tcPr marL="91440" marR="91440" marT="45720" marB="45720">
+                  <a:tcPr>
                     <a:lnL w="6350" cap="flat" cmpd="sng" algn="ctr">
                       <a:solidFill>
                         <a:srgbClr val="E2E8F0"/>
@@ -10863,6 +10891,11 @@
                     </a:lnB>
                   </a:tcPr>
                 </a:tc>
+                <a:extLst>
+                  <a:ext uri="{0D108BD9-81ED-4DB2-BD59-A6C34878D82A}">
+                    <a16:rowId xmlns:a16="http://schemas.microsoft.com/office/drawing/2014/main" val="10004"/>
+                  </a:ext>
+                </a:extLst>
               </a:tr>
             </a:tbl>
           </a:graphicData>
@@ -10892,6 +10925,13 @@
             <a:prstDash val="solid"/>
           </a:ln>
         </p:spPr>
+        <p:txBody>
+          <a:bodyPr/>
+          <a:lstStyle/>
+          <a:p>
+            <a:endParaRPr lang="de-DE"/>
+          </a:p>
+        </p:txBody>
       </p:sp>
       <p:sp>
         <p:nvSpPr>
@@ -10914,7 +10954,7 @@
           <a:bodyPr wrap="square" lIns="0" tIns="0" rIns="0" bIns="0" rtlCol="0" anchor="ctr"/>
           <a:lstStyle/>
           <a:p>
-            <a:pPr indent="0" marL="0">
+            <a:pPr marL="0" indent="0">
               <a:buNone/>
             </a:pPr>
             <a:r>
@@ -10953,7 +10993,7 @@
           <a:bodyPr wrap="square" lIns="0" tIns="0" rIns="0" bIns="0" rtlCol="0" anchor="t"/>
           <a:lstStyle/>
           <a:p>
-            <a:pPr indent="0" marL="0">
+            <a:pPr marL="0" indent="0">
               <a:buNone/>
             </a:pPr>
             <a:r>
@@ -10970,7 +11010,7 @@
             <a:endParaRPr lang="en-US" sz="950" dirty="0"/>
           </a:p>
           <a:p>
-            <a:pPr indent="0" marL="0">
+            <a:pPr marL="0" indent="0">
               <a:buNone/>
             </a:pPr>
             <a:r>
@@ -10987,7 +11027,7 @@
             <a:endParaRPr lang="en-US" sz="950" dirty="0"/>
           </a:p>
           <a:p>
-            <a:pPr indent="0" marL="0">
+            <a:pPr marL="0" indent="0">
               <a:buNone/>
             </a:pPr>
             <a:r>
@@ -11004,7 +11044,7 @@
             <a:endParaRPr lang="en-US" sz="950" dirty="0"/>
           </a:p>
           <a:p>
-            <a:pPr indent="0" marL="0">
+            <a:pPr marL="0" indent="0">
               <a:buNone/>
             </a:pPr>
             <a:r>
@@ -11021,7 +11061,7 @@
             <a:endParaRPr lang="en-US" sz="950" dirty="0"/>
           </a:p>
           <a:p>
-            <a:pPr indent="0" marL="0">
+            <a:pPr marL="0" indent="0">
               <a:buNone/>
             </a:pPr>
             <a:r>
@@ -11038,7 +11078,7 @@
             <a:endParaRPr lang="en-US" sz="950" dirty="0"/>
           </a:p>
           <a:p>
-            <a:pPr indent="0" marL="0">
+            <a:pPr marL="0" indent="0">
               <a:buNone/>
             </a:pPr>
             <a:r>
@@ -11055,7 +11095,7 @@
             <a:endParaRPr lang="en-US" sz="950" dirty="0"/>
           </a:p>
           <a:p>
-            <a:pPr indent="0" marL="0">
+            <a:pPr marL="0" indent="0">
               <a:buNone/>
             </a:pPr>
             <a:r>
@@ -11072,7 +11112,7 @@
             <a:endParaRPr lang="en-US" sz="950" dirty="0"/>
           </a:p>
           <a:p>
-            <a:pPr indent="0" marL="0">
+            <a:pPr marL="0" indent="0">
               <a:buNone/>
             </a:pPr>
             <a:r>
@@ -11089,7 +11129,7 @@
             <a:endParaRPr lang="en-US" sz="950" dirty="0"/>
           </a:p>
           <a:p>
-            <a:pPr indent="0" marL="0">
+            <a:pPr marL="0" indent="0">
               <a:buNone/>
             </a:pPr>
             <a:r>
@@ -11128,7 +11168,7 @@
           <a:bodyPr wrap="square" rtlCol="0" anchor="ctr"/>
           <a:lstStyle/>
           <a:p>
-            <a:pPr indent="0" marL="0">
+            <a:pPr marL="0" indent="0">
               <a:buNone/>
             </a:pPr>
             <a:r>
@@ -11167,7 +11207,7 @@
           <a:bodyPr wrap="square" rtlCol="0" anchor="ctr"/>
           <a:lstStyle/>
           <a:p>
-            <a:pPr algn="r" indent="0" marL="0">
+            <a:pPr marL="0" indent="0" algn="r">
               <a:buNone/>
             </a:pPr>
             <a:r>
@@ -11201,6 +11241,7 @@
         <a:solidFill>
           <a:srgbClr val="FFFFFF"/>
         </a:solidFill>
+        <a:effectLst/>
       </p:bgPr>
     </p:bg>
     <p:spTree>
@@ -11238,7 +11279,7 @@
           <a:bodyPr wrap="square" lIns="0" tIns="0" rIns="0" bIns="0" rtlCol="0" anchor="ctr"/>
           <a:lstStyle/>
           <a:p>
-            <a:pPr indent="0" marL="0">
+            <a:pPr marL="0" indent="0">
               <a:buNone/>
             </a:pPr>
             <a:r>
@@ -11280,13 +11321,20 @@
             <a:prstDash val="solid"/>
           </a:ln>
           <a:effectLst>
-            <a:outerShdw sx="100000" sy="100000" kx="0" ky="0" algn="bl" rotWithShape="0" blurRad="76200" dist="12700" dir="8100000">
+            <a:outerShdw blurRad="76200" dist="12700" dir="8100000" algn="bl" rotWithShape="0">
               <a:srgbClr val="000000">
                 <a:alpha val="6000"/>
               </a:srgbClr>
             </a:outerShdw>
           </a:effectLst>
         </p:spPr>
+        <p:txBody>
+          <a:bodyPr/>
+          <a:lstStyle/>
+          <a:p>
+            <a:endParaRPr lang="de-DE"/>
+          </a:p>
+        </p:txBody>
       </p:sp>
       <p:sp>
         <p:nvSpPr>
@@ -11307,6 +11355,13 @@
           </a:solidFill>
           <a:ln/>
         </p:spPr>
+        <p:txBody>
+          <a:bodyPr/>
+          <a:lstStyle/>
+          <a:p>
+            <a:endParaRPr lang="de-DE"/>
+          </a:p>
+        </p:txBody>
       </p:sp>
       <p:sp>
         <p:nvSpPr>
@@ -11329,7 +11384,7 @@
           <a:bodyPr wrap="square" lIns="0" tIns="0" rIns="0" bIns="0" rtlCol="0" anchor="ctr"/>
           <a:lstStyle/>
           <a:p>
-            <a:pPr indent="0" marL="0">
+            <a:pPr marL="0" indent="0">
               <a:buNone/>
             </a:pPr>
             <a:r>
@@ -11368,7 +11423,7 @@
           <a:bodyPr wrap="square" lIns="0" tIns="0" rIns="0" bIns="0" rtlCol="0" anchor="t"/>
           <a:lstStyle/>
           <a:p>
-            <a:pPr indent="0" marL="0">
+            <a:pPr marL="0" indent="0">
               <a:buNone/>
             </a:pPr>
             <a:r>
@@ -11407,7 +11462,7 @@
           <a:bodyPr wrap="square" lIns="0" tIns="0" rIns="0" bIns="0" rtlCol="0" anchor="ctr"/>
           <a:lstStyle/>
           <a:p>
-            <a:pPr indent="0" marL="0">
+            <a:pPr marL="0" indent="0">
               <a:buNone/>
             </a:pPr>
             <a:r>
@@ -11449,13 +11504,20 @@
             <a:prstDash val="solid"/>
           </a:ln>
           <a:effectLst>
-            <a:outerShdw sx="100000" sy="100000" kx="0" ky="0" algn="bl" rotWithShape="0" blurRad="76200" dist="12700" dir="8100000">
+            <a:outerShdw blurRad="76200" dist="12700" dir="8100000" algn="bl" rotWithShape="0">
               <a:srgbClr val="000000">
                 <a:alpha val="6000"/>
               </a:srgbClr>
             </a:outerShdw>
           </a:effectLst>
         </p:spPr>
+        <p:txBody>
+          <a:bodyPr/>
+          <a:lstStyle/>
+          <a:p>
+            <a:endParaRPr lang="de-DE"/>
+          </a:p>
+        </p:txBody>
       </p:sp>
       <p:sp>
         <p:nvSpPr>
@@ -11476,6 +11538,13 @@
           </a:solidFill>
           <a:ln/>
         </p:spPr>
+        <p:txBody>
+          <a:bodyPr/>
+          <a:lstStyle/>
+          <a:p>
+            <a:endParaRPr lang="de-DE"/>
+          </a:p>
+        </p:txBody>
       </p:sp>
       <p:sp>
         <p:nvSpPr>
@@ -11498,7 +11567,7 @@
           <a:bodyPr wrap="square" lIns="0" tIns="0" rIns="0" bIns="0" rtlCol="0" anchor="ctr"/>
           <a:lstStyle/>
           <a:p>
-            <a:pPr indent="0" marL="0">
+            <a:pPr marL="0" indent="0">
               <a:buNone/>
             </a:pPr>
             <a:r>
@@ -11537,7 +11606,7 @@
           <a:bodyPr wrap="square" lIns="0" tIns="0" rIns="0" bIns="0" rtlCol="0" anchor="t"/>
           <a:lstStyle/>
           <a:p>
-            <a:pPr indent="0" marL="0">
+            <a:pPr marL="0" indent="0">
               <a:buNone/>
             </a:pPr>
             <a:r>
@@ -11576,7 +11645,7 @@
           <a:bodyPr wrap="square" lIns="0" tIns="0" rIns="0" bIns="0" rtlCol="0" anchor="ctr"/>
           <a:lstStyle/>
           <a:p>
-            <a:pPr indent="0" marL="0">
+            <a:pPr marL="0" indent="0">
               <a:buNone/>
             </a:pPr>
             <a:r>
@@ -11618,13 +11687,20 @@
             <a:prstDash val="solid"/>
           </a:ln>
           <a:effectLst>
-            <a:outerShdw sx="100000" sy="100000" kx="0" ky="0" algn="bl" rotWithShape="0" blurRad="76200" dist="12700" dir="8100000">
+            <a:outerShdw blurRad="76200" dist="12700" dir="8100000" algn="bl" rotWithShape="0">
               <a:srgbClr val="000000">
                 <a:alpha val="6000"/>
               </a:srgbClr>
             </a:outerShdw>
           </a:effectLst>
         </p:spPr>
+        <p:txBody>
+          <a:bodyPr/>
+          <a:lstStyle/>
+          <a:p>
+            <a:endParaRPr lang="de-DE"/>
+          </a:p>
+        </p:txBody>
       </p:sp>
       <p:sp>
         <p:nvSpPr>
@@ -11645,6 +11721,13 @@
           </a:solidFill>
           <a:ln/>
         </p:spPr>
+        <p:txBody>
+          <a:bodyPr/>
+          <a:lstStyle/>
+          <a:p>
+            <a:endParaRPr lang="de-DE"/>
+          </a:p>
+        </p:txBody>
       </p:sp>
       <p:sp>
         <p:nvSpPr>
@@ -11667,7 +11750,7 @@
           <a:bodyPr wrap="square" lIns="0" tIns="0" rIns="0" bIns="0" rtlCol="0" anchor="ctr"/>
           <a:lstStyle/>
           <a:p>
-            <a:pPr indent="0" marL="0">
+            <a:pPr marL="0" indent="0">
               <a:buNone/>
             </a:pPr>
             <a:r>
@@ -11706,7 +11789,7 @@
           <a:bodyPr wrap="square" lIns="0" tIns="0" rIns="0" bIns="0" rtlCol="0" anchor="t"/>
           <a:lstStyle/>
           <a:p>
-            <a:pPr indent="0" marL="0">
+            <a:pPr marL="0" indent="0">
               <a:buNone/>
             </a:pPr>
             <a:r>
@@ -11745,7 +11828,7 @@
           <a:bodyPr wrap="square" lIns="0" tIns="0" rIns="0" bIns="0" rtlCol="0" anchor="ctr"/>
           <a:lstStyle/>
           <a:p>
-            <a:pPr indent="0" marL="0">
+            <a:pPr marL="0" indent="0">
               <a:buNone/>
             </a:pPr>
             <a:r>
@@ -11787,13 +11870,20 @@
             <a:prstDash val="solid"/>
           </a:ln>
           <a:effectLst>
-            <a:outerShdw sx="100000" sy="100000" kx="0" ky="0" algn="bl" rotWithShape="0" blurRad="76200" dist="12700" dir="8100000">
+            <a:outerShdw blurRad="76200" dist="12700" dir="8100000" algn="bl" rotWithShape="0">
               <a:srgbClr val="000000">
                 <a:alpha val="6000"/>
               </a:srgbClr>
             </a:outerShdw>
           </a:effectLst>
         </p:spPr>
+        <p:txBody>
+          <a:bodyPr/>
+          <a:lstStyle/>
+          <a:p>
+            <a:endParaRPr lang="de-DE"/>
+          </a:p>
+        </p:txBody>
       </p:sp>
       <p:sp>
         <p:nvSpPr>
@@ -11814,6 +11904,13 @@
           </a:solidFill>
           <a:ln/>
         </p:spPr>
+        <p:txBody>
+          <a:bodyPr/>
+          <a:lstStyle/>
+          <a:p>
+            <a:endParaRPr lang="de-DE"/>
+          </a:p>
+        </p:txBody>
       </p:sp>
       <p:sp>
         <p:nvSpPr>
@@ -11836,7 +11933,7 @@
           <a:bodyPr wrap="square" lIns="0" tIns="0" rIns="0" bIns="0" rtlCol="0" anchor="ctr"/>
           <a:lstStyle/>
           <a:p>
-            <a:pPr indent="0" marL="0">
+            <a:pPr marL="0" indent="0">
               <a:buNone/>
             </a:pPr>
             <a:r>
@@ -11875,7 +11972,7 @@
           <a:bodyPr wrap="square" lIns="0" tIns="0" rIns="0" bIns="0" rtlCol="0" anchor="t"/>
           <a:lstStyle/>
           <a:p>
-            <a:pPr indent="0" marL="0">
+            <a:pPr marL="0" indent="0">
               <a:buNone/>
             </a:pPr>
             <a:r>
@@ -11914,7 +12011,7 @@
           <a:bodyPr wrap="square" lIns="0" tIns="0" rIns="0" bIns="0" rtlCol="0" anchor="ctr"/>
           <a:lstStyle/>
           <a:p>
-            <a:pPr indent="0" marL="0">
+            <a:pPr marL="0" indent="0">
               <a:buNone/>
             </a:pPr>
             <a:r>
@@ -11956,13 +12053,20 @@
             <a:prstDash val="solid"/>
           </a:ln>
           <a:effectLst>
-            <a:outerShdw sx="100000" sy="100000" kx="0" ky="0" algn="bl" rotWithShape="0" blurRad="76200" dist="12700" dir="8100000">
+            <a:outerShdw blurRad="76200" dist="12700" dir="8100000" algn="bl" rotWithShape="0">
               <a:srgbClr val="000000">
                 <a:alpha val="6000"/>
               </a:srgbClr>
             </a:outerShdw>
           </a:effectLst>
         </p:spPr>
+        <p:txBody>
+          <a:bodyPr/>
+          <a:lstStyle/>
+          <a:p>
+            <a:endParaRPr lang="de-DE"/>
+          </a:p>
+        </p:txBody>
       </p:sp>
       <p:sp>
         <p:nvSpPr>
@@ -11983,6 +12087,13 @@
           </a:solidFill>
           <a:ln/>
         </p:spPr>
+        <p:txBody>
+          <a:bodyPr/>
+          <a:lstStyle/>
+          <a:p>
+            <a:endParaRPr lang="de-DE"/>
+          </a:p>
+        </p:txBody>
       </p:sp>
       <p:sp>
         <p:nvSpPr>
@@ -12005,7 +12116,7 @@
           <a:bodyPr wrap="square" lIns="0" tIns="0" rIns="0" bIns="0" rtlCol="0" anchor="ctr"/>
           <a:lstStyle/>
           <a:p>
-            <a:pPr indent="0" marL="0">
+            <a:pPr marL="0" indent="0">
               <a:buNone/>
             </a:pPr>
             <a:r>
@@ -12044,7 +12155,7 @@
           <a:bodyPr wrap="square" lIns="0" tIns="0" rIns="0" bIns="0" rtlCol="0" anchor="t"/>
           <a:lstStyle/>
           <a:p>
-            <a:pPr indent="0" marL="0">
+            <a:pPr marL="0" indent="0">
               <a:buNone/>
             </a:pPr>
             <a:r>
@@ -12083,7 +12194,7 @@
           <a:bodyPr wrap="square" lIns="0" tIns="0" rIns="0" bIns="0" rtlCol="0" anchor="ctr"/>
           <a:lstStyle/>
           <a:p>
-            <a:pPr indent="0" marL="0">
+            <a:pPr marL="0" indent="0">
               <a:buNone/>
             </a:pPr>
             <a:r>
@@ -12125,13 +12236,20 @@
             <a:prstDash val="solid"/>
           </a:ln>
           <a:effectLst>
-            <a:outerShdw sx="100000" sy="100000" kx="0" ky="0" algn="bl" rotWithShape="0" blurRad="76200" dist="12700" dir="8100000">
+            <a:outerShdw blurRad="76200" dist="12700" dir="8100000" algn="bl" rotWithShape="0">
               <a:srgbClr val="000000">
                 <a:alpha val="6000"/>
               </a:srgbClr>
             </a:outerShdw>
           </a:effectLst>
         </p:spPr>
+        <p:txBody>
+          <a:bodyPr/>
+          <a:lstStyle/>
+          <a:p>
+            <a:endParaRPr lang="de-DE"/>
+          </a:p>
+        </p:txBody>
       </p:sp>
       <p:sp>
         <p:nvSpPr>
@@ -12152,6 +12270,13 @@
           </a:solidFill>
           <a:ln/>
         </p:spPr>
+        <p:txBody>
+          <a:bodyPr/>
+          <a:lstStyle/>
+          <a:p>
+            <a:endParaRPr lang="de-DE"/>
+          </a:p>
+        </p:txBody>
       </p:sp>
       <p:sp>
         <p:nvSpPr>
@@ -12174,7 +12299,7 @@
           <a:bodyPr wrap="square" lIns="0" tIns="0" rIns="0" bIns="0" rtlCol="0" anchor="ctr"/>
           <a:lstStyle/>
           <a:p>
-            <a:pPr indent="0" marL="0">
+            <a:pPr marL="0" indent="0">
               <a:buNone/>
             </a:pPr>
             <a:r>
@@ -12213,7 +12338,7 @@
           <a:bodyPr wrap="square" lIns="0" tIns="0" rIns="0" bIns="0" rtlCol="0" anchor="t"/>
           <a:lstStyle/>
           <a:p>
-            <a:pPr indent="0" marL="0">
+            <a:pPr marL="0" indent="0">
               <a:buNone/>
             </a:pPr>
             <a:r>
@@ -12252,7 +12377,7 @@
           <a:bodyPr wrap="square" lIns="0" tIns="0" rIns="0" bIns="0" rtlCol="0" anchor="ctr"/>
           <a:lstStyle/>
           <a:p>
-            <a:pPr indent="0" marL="0">
+            <a:pPr marL="0" indent="0">
               <a:buNone/>
             </a:pPr>
             <a:r>
@@ -12291,7 +12416,7 @@
           <a:bodyPr wrap="square" rtlCol="0" anchor="ctr"/>
           <a:lstStyle/>
           <a:p>
-            <a:pPr indent="0" marL="0">
+            <a:pPr marL="0" indent="0">
               <a:buNone/>
             </a:pPr>
             <a:r>
@@ -12330,7 +12455,7 @@
           <a:bodyPr wrap="square" rtlCol="0" anchor="ctr"/>
           <a:lstStyle/>
           <a:p>
-            <a:pPr algn="r" indent="0" marL="0">
+            <a:pPr marL="0" indent="0" algn="r">
               <a:buNone/>
             </a:pPr>
             <a:r>
@@ -12364,6 +12489,7 @@
         <a:solidFill>
           <a:srgbClr val="FFFFFF"/>
         </a:solidFill>
+        <a:effectLst/>
       </p:bgPr>
     </p:bg>
     <p:spTree>
@@ -12401,7 +12527,7 @@
           <a:bodyPr wrap="square" lIns="0" tIns="0" rIns="0" bIns="0" rtlCol="0" anchor="ctr"/>
           <a:lstStyle/>
           <a:p>
-            <a:pPr indent="0" marL="0">
+            <a:pPr marL="0" indent="0">
               <a:buNone/>
             </a:pPr>
             <a:r>
@@ -12440,7 +12566,7 @@
           <a:bodyPr wrap="square" rtlCol="0" anchor="ctr"/>
           <a:lstStyle/>
           <a:p>
-            <a:pPr indent="0" marL="0">
+            <a:pPr marL="0" indent="0">
               <a:buNone/>
             </a:pPr>
             <a:r>
@@ -12474,18 +12600,48 @@
         </p:nvGraphicFramePr>
         <p:xfrm>
           <a:off x="457200" y="1417320"/>
-          <a:ext cx="8229600" cy="914400"/>
+          <a:ext cx="8229600" cy="822960"/>
         </p:xfrm>
         <a:graphic>
           <a:graphicData uri="http://schemas.openxmlformats.org/drawingml/2006/table">
             <a:tbl>
               <a:tblPr/>
               <a:tblGrid>
-                <a:gridCol w="2286000"/>
-                <a:gridCol w="1280160"/>
-                <a:gridCol w="1920240"/>
-                <a:gridCol w="1920240"/>
-                <a:gridCol w="822960"/>
+                <a:gridCol w="2286000">
+                  <a:extLst>
+                    <a:ext uri="{9D8B030D-6E8A-4147-A177-3AD203B41FA5}">
+                      <a16:colId xmlns:a16="http://schemas.microsoft.com/office/drawing/2014/main" val="20000"/>
+                    </a:ext>
+                  </a:extLst>
+                </a:gridCol>
+                <a:gridCol w="1280160">
+                  <a:extLst>
+                    <a:ext uri="{9D8B030D-6E8A-4147-A177-3AD203B41FA5}">
+                      <a16:colId xmlns:a16="http://schemas.microsoft.com/office/drawing/2014/main" val="20001"/>
+                    </a:ext>
+                  </a:extLst>
+                </a:gridCol>
+                <a:gridCol w="1920240">
+                  <a:extLst>
+                    <a:ext uri="{9D8B030D-6E8A-4147-A177-3AD203B41FA5}">
+                      <a16:colId xmlns:a16="http://schemas.microsoft.com/office/drawing/2014/main" val="20002"/>
+                    </a:ext>
+                  </a:extLst>
+                </a:gridCol>
+                <a:gridCol w="1920240">
+                  <a:extLst>
+                    <a:ext uri="{9D8B030D-6E8A-4147-A177-3AD203B41FA5}">
+                      <a16:colId xmlns:a16="http://schemas.microsoft.com/office/drawing/2014/main" val="20003"/>
+                    </a:ext>
+                  </a:extLst>
+                </a:gridCol>
+                <a:gridCol w="822960">
+                  <a:extLst>
+                    <a:ext uri="{9D8B030D-6E8A-4147-A177-3AD203B41FA5}">
+                      <a16:colId xmlns:a16="http://schemas.microsoft.com/office/drawing/2014/main" val="20004"/>
+                    </a:ext>
+                  </a:extLst>
+                </a:gridCol>
               </a:tblGrid>
               <a:tr h="0">
                 <a:tc>
@@ -12493,7 +12649,7 @@
                     <a:bodyPr/>
                     <a:lstStyle/>
                     <a:p>
-                      <a:pPr indent="0" marL="0">
+                      <a:pPr marL="0" indent="0">
                         <a:buNone/>
                       </a:pPr>
                       <a:r>
@@ -12514,7 +12670,7 @@
                       </a:endParaRPr>
                     </a:p>
                   </a:txBody>
-                  <a:tcPr marL="91440" marR="91440" marT="45720" marB="45720">
+                  <a:tcPr>
                     <a:lnL w="6350" cap="flat" cmpd="sng" algn="ctr">
                       <a:solidFill>
                         <a:srgbClr val="E2E8F0"/>
@@ -12561,7 +12717,7 @@
                     <a:bodyPr/>
                     <a:lstStyle/>
                     <a:p>
-                      <a:pPr indent="0" marL="0">
+                      <a:pPr marL="0" indent="0">
                         <a:buNone/>
                       </a:pPr>
                       <a:r>
@@ -12582,7 +12738,7 @@
                       </a:endParaRPr>
                     </a:p>
                   </a:txBody>
-                  <a:tcPr marL="91440" marR="91440" marT="45720" marB="45720">
+                  <a:tcPr>
                     <a:lnL w="6350" cap="flat" cmpd="sng" algn="ctr">
                       <a:solidFill>
                         <a:srgbClr val="E2E8F0"/>
@@ -12629,7 +12785,7 @@
                     <a:bodyPr/>
                     <a:lstStyle/>
                     <a:p>
-                      <a:pPr indent="0" marL="0">
+                      <a:pPr marL="0" indent="0">
                         <a:buNone/>
                       </a:pPr>
                       <a:r>
@@ -12650,7 +12806,7 @@
                       </a:endParaRPr>
                     </a:p>
                   </a:txBody>
-                  <a:tcPr marL="91440" marR="91440" marT="45720" marB="45720">
+                  <a:tcPr>
                     <a:lnL w="6350" cap="flat" cmpd="sng" algn="ctr">
                       <a:solidFill>
                         <a:srgbClr val="E2E8F0"/>
@@ -12697,7 +12853,7 @@
                     <a:bodyPr/>
                     <a:lstStyle/>
                     <a:p>
-                      <a:pPr indent="0" marL="0">
+                      <a:pPr marL="0" indent="0">
                         <a:buNone/>
                       </a:pPr>
                       <a:r>
@@ -12718,7 +12874,7 @@
                       </a:endParaRPr>
                     </a:p>
                   </a:txBody>
-                  <a:tcPr marL="91440" marR="91440" marT="45720" marB="45720">
+                  <a:tcPr>
                     <a:lnL w="6350" cap="flat" cmpd="sng" algn="ctr">
                       <a:solidFill>
                         <a:srgbClr val="E2E8F0"/>
@@ -12765,7 +12921,7 @@
                     <a:bodyPr/>
                     <a:lstStyle/>
                     <a:p>
-                      <a:pPr indent="0" marL="0">
+                      <a:pPr marL="0" indent="0">
                         <a:buNone/>
                       </a:pPr>
                       <a:r>
@@ -12786,7 +12942,7 @@
                       </a:endParaRPr>
                     </a:p>
                   </a:txBody>
-                  <a:tcPr marL="91440" marR="91440" marT="45720" marB="45720">
+                  <a:tcPr>
                     <a:lnL w="6350" cap="flat" cmpd="sng" algn="ctr">
                       <a:solidFill>
                         <a:srgbClr val="E2E8F0"/>
@@ -12828,6 +12984,11 @@
                     </a:solidFill>
                   </a:tcPr>
                 </a:tc>
+                <a:extLst>
+                  <a:ext uri="{0D108BD9-81ED-4DB2-BD59-A6C34878D82A}">
+                    <a16:rowId xmlns:a16="http://schemas.microsoft.com/office/drawing/2014/main" val="10000"/>
+                  </a:ext>
+                </a:extLst>
               </a:tr>
               <a:tr h="0">
                 <a:tc>
@@ -12835,7 +12996,7 @@
                     <a:bodyPr/>
                     <a:lstStyle/>
                     <a:p>
-                      <a:pPr indent="0" marL="0">
+                      <a:pPr marL="0" indent="0">
                         <a:buNone/>
                       </a:pPr>
                       <a:r>
@@ -12856,7 +13017,7 @@
                       </a:endParaRPr>
                     </a:p>
                   </a:txBody>
-                  <a:tcPr marL="91440" marR="91440" marT="45720" marB="45720">
+                  <a:tcPr>
                     <a:lnL w="6350" cap="flat" cmpd="sng" algn="ctr">
                       <a:solidFill>
                         <a:srgbClr val="E2E8F0"/>
@@ -12900,7 +13061,7 @@
                     <a:bodyPr/>
                     <a:lstStyle/>
                     <a:p>
-                      <a:pPr indent="0" marL="0">
+                      <a:pPr marL="0" indent="0">
                         <a:buNone/>
                       </a:pPr>
                       <a:r>
@@ -12921,7 +13082,7 @@
                       </a:endParaRPr>
                     </a:p>
                   </a:txBody>
-                  <a:tcPr marL="91440" marR="91440" marT="45720" marB="45720">
+                  <a:tcPr>
                     <a:lnL w="6350" cap="flat" cmpd="sng" algn="ctr">
                       <a:solidFill>
                         <a:srgbClr val="E2E8F0"/>
@@ -12965,7 +13126,7 @@
                     <a:bodyPr/>
                     <a:lstStyle/>
                     <a:p>
-                      <a:pPr indent="0" marL="0">
+                      <a:pPr marL="0" indent="0">
                         <a:buNone/>
                       </a:pPr>
                       <a:r>
@@ -12986,7 +13147,7 @@
                       </a:endParaRPr>
                     </a:p>
                   </a:txBody>
-                  <a:tcPr marL="91440" marR="91440" marT="45720" marB="45720">
+                  <a:tcPr>
                     <a:lnL w="6350" cap="flat" cmpd="sng" algn="ctr">
                       <a:solidFill>
                         <a:srgbClr val="E2E8F0"/>
@@ -13030,7 +13191,7 @@
                     <a:bodyPr/>
                     <a:lstStyle/>
                     <a:p>
-                      <a:pPr indent="0" marL="0">
+                      <a:pPr marL="0" indent="0">
                         <a:buNone/>
                       </a:pPr>
                       <a:r>
@@ -13051,7 +13212,7 @@
                       </a:endParaRPr>
                     </a:p>
                   </a:txBody>
-                  <a:tcPr marL="91440" marR="91440" marT="45720" marB="45720">
+                  <a:tcPr>
                     <a:lnL w="6350" cap="flat" cmpd="sng" algn="ctr">
                       <a:solidFill>
                         <a:srgbClr val="E2E8F0"/>
@@ -13095,7 +13256,7 @@
                     <a:bodyPr/>
                     <a:lstStyle/>
                     <a:p>
-                      <a:pPr indent="0" marL="0">
+                      <a:pPr marL="0" indent="0">
                         <a:buNone/>
                       </a:pPr>
                       <a:r>
@@ -13116,7 +13277,7 @@
                       </a:endParaRPr>
                     </a:p>
                   </a:txBody>
-                  <a:tcPr marL="91440" marR="91440" marT="45720" marB="45720">
+                  <a:tcPr>
                     <a:lnL w="6350" cap="flat" cmpd="sng" algn="ctr">
                       <a:solidFill>
                         <a:srgbClr val="E2E8F0"/>
@@ -13155,6 +13316,11 @@
                     </a:lnB>
                   </a:tcPr>
                 </a:tc>
+                <a:extLst>
+                  <a:ext uri="{0D108BD9-81ED-4DB2-BD59-A6C34878D82A}">
+                    <a16:rowId xmlns:a16="http://schemas.microsoft.com/office/drawing/2014/main" val="10001"/>
+                  </a:ext>
+                </a:extLst>
               </a:tr>
               <a:tr h="0">
                 <a:tc>
@@ -13162,7 +13328,7 @@
                     <a:bodyPr/>
                     <a:lstStyle/>
                     <a:p>
-                      <a:pPr indent="0" marL="0">
+                      <a:pPr marL="0" indent="0">
                         <a:buNone/>
                       </a:pPr>
                       <a:r>
@@ -13183,7 +13349,7 @@
                       </a:endParaRPr>
                     </a:p>
                   </a:txBody>
-                  <a:tcPr marL="91440" marR="91440" marT="45720" marB="45720">
+                  <a:tcPr>
                     <a:lnL w="6350" cap="flat" cmpd="sng" algn="ctr">
                       <a:solidFill>
                         <a:srgbClr val="E2E8F0"/>
@@ -13227,7 +13393,7 @@
                     <a:bodyPr/>
                     <a:lstStyle/>
                     <a:p>
-                      <a:pPr indent="0" marL="0">
+                      <a:pPr marL="0" indent="0">
                         <a:buNone/>
                       </a:pPr>
                       <a:r>
@@ -13248,7 +13414,7 @@
                       </a:endParaRPr>
                     </a:p>
                   </a:txBody>
-                  <a:tcPr marL="91440" marR="91440" marT="45720" marB="45720">
+                  <a:tcPr>
                     <a:lnL w="6350" cap="flat" cmpd="sng" algn="ctr">
                       <a:solidFill>
                         <a:srgbClr val="E2E8F0"/>
@@ -13292,7 +13458,7 @@
                     <a:bodyPr/>
                     <a:lstStyle/>
                     <a:p>
-                      <a:pPr indent="0" marL="0">
+                      <a:pPr marL="0" indent="0">
                         <a:buNone/>
                       </a:pPr>
                       <a:r>
@@ -13313,7 +13479,7 @@
                       </a:endParaRPr>
                     </a:p>
                   </a:txBody>
-                  <a:tcPr marL="91440" marR="91440" marT="45720" marB="45720">
+                  <a:tcPr>
                     <a:lnL w="6350" cap="flat" cmpd="sng" algn="ctr">
                       <a:solidFill>
                         <a:srgbClr val="E2E8F0"/>
@@ -13357,7 +13523,7 @@
                     <a:bodyPr/>
                     <a:lstStyle/>
                     <a:p>
-                      <a:pPr indent="0" marL="0">
+                      <a:pPr marL="0" indent="0">
                         <a:buNone/>
                       </a:pPr>
                       <a:r>
@@ -13378,7 +13544,7 @@
                       </a:endParaRPr>
                     </a:p>
                   </a:txBody>
-                  <a:tcPr marL="91440" marR="91440" marT="45720" marB="45720">
+                  <a:tcPr>
                     <a:lnL w="6350" cap="flat" cmpd="sng" algn="ctr">
                       <a:solidFill>
                         <a:srgbClr val="E2E8F0"/>
@@ -13422,7 +13588,7 @@
                     <a:bodyPr/>
                     <a:lstStyle/>
                     <a:p>
-                      <a:pPr indent="0" marL="0">
+                      <a:pPr marL="0" indent="0">
                         <a:buNone/>
                       </a:pPr>
                       <a:r>
@@ -13443,7 +13609,7 @@
                       </a:endParaRPr>
                     </a:p>
                   </a:txBody>
-                  <a:tcPr marL="91440" marR="91440" marT="45720" marB="45720">
+                  <a:tcPr>
                     <a:lnL w="6350" cap="flat" cmpd="sng" algn="ctr">
                       <a:solidFill>
                         <a:srgbClr val="E2E8F0"/>
@@ -13482,6 +13648,11 @@
                     </a:lnB>
                   </a:tcPr>
                 </a:tc>
+                <a:extLst>
+                  <a:ext uri="{0D108BD9-81ED-4DB2-BD59-A6C34878D82A}">
+                    <a16:rowId xmlns:a16="http://schemas.microsoft.com/office/drawing/2014/main" val="10002"/>
+                  </a:ext>
+                </a:extLst>
               </a:tr>
             </a:tbl>
           </a:graphicData>
@@ -13511,6 +13682,13 @@
             <a:prstDash val="solid"/>
           </a:ln>
         </p:spPr>
+        <p:txBody>
+          <a:bodyPr/>
+          <a:lstStyle/>
+          <a:p>
+            <a:endParaRPr lang="de-DE"/>
+          </a:p>
+        </p:txBody>
       </p:sp>
       <p:sp>
         <p:nvSpPr>
@@ -13533,7 +13711,7 @@
           <a:bodyPr wrap="square" lIns="0" tIns="0" rIns="0" bIns="0" rtlCol="0" anchor="ctr"/>
           <a:lstStyle/>
           <a:p>
-            <a:pPr indent="0" marL="0">
+            <a:pPr marL="0" indent="0">
               <a:buNone/>
             </a:pPr>
             <a:r>
@@ -13617,7 +13795,7 @@
       </p:sp>
       <p:sp>
         <p:nvSpPr>
-          <p:cNvPr id="8" name="Text 5"/>
+          <p:cNvPr id="4" name="Text 5"/>
           <p:cNvSpPr/>
           <p:nvPr/>
         </p:nvSpPr>
@@ -13636,7 +13814,7 @@
           <a:bodyPr wrap="square" rtlCol="0" anchor="ctr"/>
           <a:lstStyle/>
           <a:p>
-            <a:pPr indent="0" marL="0">
+            <a:pPr marL="0" indent="0">
               <a:buNone/>
             </a:pPr>
             <a:r>
@@ -13675,7 +13853,7 @@
           <a:bodyPr wrap="square" rtlCol="0" anchor="ctr"/>
           <a:lstStyle/>
           <a:p>
-            <a:pPr algn="r" indent="0" marL="0">
+            <a:pPr marL="0" indent="0" algn="r">
               <a:buNone/>
             </a:pPr>
             <a:r>
@@ -13709,6 +13887,7 @@
         <a:solidFill>
           <a:srgbClr val="FFFFFF"/>
         </a:solidFill>
+        <a:effectLst/>
       </p:bgPr>
     </p:bg>
     <p:spTree>
@@ -13746,7 +13925,7 @@
           <a:bodyPr wrap="square" lIns="0" tIns="0" rIns="0" bIns="0" rtlCol="0" anchor="ctr"/>
           <a:lstStyle/>
           <a:p>
-            <a:pPr indent="0" marL="0">
+            <a:pPr marL="0" indent="0">
               <a:buNone/>
             </a:pPr>
             <a:r>
@@ -13785,7 +13964,7 @@
           <a:bodyPr wrap="square" rtlCol="0" anchor="ctr"/>
           <a:lstStyle/>
           <a:p>
-            <a:pPr indent="0" marL="0">
+            <a:pPr marL="0" indent="0">
               <a:buNone/>
             </a:pPr>
             <a:r>
@@ -13827,6 +14006,13 @@
             <a:prstDash val="solid"/>
           </a:ln>
         </p:spPr>
+        <p:txBody>
+          <a:bodyPr/>
+          <a:lstStyle/>
+          <a:p>
+            <a:endParaRPr lang="de-DE"/>
+          </a:p>
+        </p:txBody>
       </p:sp>
       <p:sp>
         <p:nvSpPr>
@@ -13849,7 +14035,7 @@
           <a:bodyPr wrap="square" lIns="0" tIns="0" rIns="0" bIns="0" rtlCol="0" anchor="ctr"/>
           <a:lstStyle/>
           <a:p>
-            <a:pPr indent="0" marL="0">
+            <a:pPr marL="0" indent="0">
               <a:buNone/>
             </a:pPr>
             <a:r>
@@ -13883,18 +14069,48 @@
         </p:nvGraphicFramePr>
         <p:xfrm>
           <a:off x="457200" y="1691640"/>
-          <a:ext cx="8229600" cy="914400"/>
+          <a:ext cx="8229600" cy="1920240"/>
         </p:xfrm>
         <a:graphic>
           <a:graphicData uri="http://schemas.openxmlformats.org/drawingml/2006/table">
             <a:tbl>
               <a:tblPr/>
               <a:tblGrid>
-                <a:gridCol w="2377440"/>
-                <a:gridCol w="1097280"/>
-                <a:gridCol w="1097280"/>
-                <a:gridCol w="2377440"/>
-                <a:gridCol w="1280160"/>
+                <a:gridCol w="2377440">
+                  <a:extLst>
+                    <a:ext uri="{9D8B030D-6E8A-4147-A177-3AD203B41FA5}">
+                      <a16:colId xmlns:a16="http://schemas.microsoft.com/office/drawing/2014/main" val="20000"/>
+                    </a:ext>
+                  </a:extLst>
+                </a:gridCol>
+                <a:gridCol w="1097280">
+                  <a:extLst>
+                    <a:ext uri="{9D8B030D-6E8A-4147-A177-3AD203B41FA5}">
+                      <a16:colId xmlns:a16="http://schemas.microsoft.com/office/drawing/2014/main" val="20001"/>
+                    </a:ext>
+                  </a:extLst>
+                </a:gridCol>
+                <a:gridCol w="1097280">
+                  <a:extLst>
+                    <a:ext uri="{9D8B030D-6E8A-4147-A177-3AD203B41FA5}">
+                      <a16:colId xmlns:a16="http://schemas.microsoft.com/office/drawing/2014/main" val="20002"/>
+                    </a:ext>
+                  </a:extLst>
+                </a:gridCol>
+                <a:gridCol w="2377440">
+                  <a:extLst>
+                    <a:ext uri="{9D8B030D-6E8A-4147-A177-3AD203B41FA5}">
+                      <a16:colId xmlns:a16="http://schemas.microsoft.com/office/drawing/2014/main" val="20003"/>
+                    </a:ext>
+                  </a:extLst>
+                </a:gridCol>
+                <a:gridCol w="1280160">
+                  <a:extLst>
+                    <a:ext uri="{9D8B030D-6E8A-4147-A177-3AD203B41FA5}">
+                      <a16:colId xmlns:a16="http://schemas.microsoft.com/office/drawing/2014/main" val="20004"/>
+                    </a:ext>
+                  </a:extLst>
+                </a:gridCol>
               </a:tblGrid>
               <a:tr h="0">
                 <a:tc>
@@ -13902,7 +14118,7 @@
                     <a:bodyPr/>
                     <a:lstStyle/>
                     <a:p>
-                      <a:pPr indent="0" marL="0">
+                      <a:pPr marL="0" indent="0">
                         <a:buNone/>
                       </a:pPr>
                       <a:r>
@@ -13923,7 +14139,7 @@
                       </a:endParaRPr>
                     </a:p>
                   </a:txBody>
-                  <a:tcPr marL="91440" marR="91440" marT="45720" marB="45720">
+                  <a:tcPr>
                     <a:lnL w="6350" cap="flat" cmpd="sng" algn="ctr">
                       <a:solidFill>
                         <a:srgbClr val="E2E8F0"/>
@@ -13970,7 +14186,7 @@
                     <a:bodyPr/>
                     <a:lstStyle/>
                     <a:p>
-                      <a:pPr indent="0" marL="0">
+                      <a:pPr marL="0" indent="0">
                         <a:buNone/>
                       </a:pPr>
                       <a:r>
@@ -13991,7 +14207,7 @@
                       </a:endParaRPr>
                     </a:p>
                   </a:txBody>
-                  <a:tcPr marL="91440" marR="91440" marT="45720" marB="45720">
+                  <a:tcPr>
                     <a:lnL w="6350" cap="flat" cmpd="sng" algn="ctr">
                       <a:solidFill>
                         <a:srgbClr val="E2E8F0"/>
@@ -14038,7 +14254,7 @@
                     <a:bodyPr/>
                     <a:lstStyle/>
                     <a:p>
-                      <a:pPr indent="0" marL="0">
+                      <a:pPr marL="0" indent="0">
                         <a:buNone/>
                       </a:pPr>
                       <a:r>
@@ -14059,7 +14275,7 @@
                       </a:endParaRPr>
                     </a:p>
                   </a:txBody>
-                  <a:tcPr marL="91440" marR="91440" marT="45720" marB="45720">
+                  <a:tcPr>
                     <a:lnL w="6350" cap="flat" cmpd="sng" algn="ctr">
                       <a:solidFill>
                         <a:srgbClr val="E2E8F0"/>
@@ -14106,7 +14322,7 @@
                     <a:bodyPr/>
                     <a:lstStyle/>
                     <a:p>
-                      <a:pPr indent="0" marL="0">
+                      <a:pPr marL="0" indent="0">
                         <a:buNone/>
                       </a:pPr>
                       <a:r>
@@ -14127,7 +14343,7 @@
                       </a:endParaRPr>
                     </a:p>
                   </a:txBody>
-                  <a:tcPr marL="91440" marR="91440" marT="45720" marB="45720">
+                  <a:tcPr>
                     <a:lnL w="6350" cap="flat" cmpd="sng" algn="ctr">
                       <a:solidFill>
                         <a:srgbClr val="E2E8F0"/>
@@ -14174,7 +14390,7 @@
                     <a:bodyPr/>
                     <a:lstStyle/>
                     <a:p>
-                      <a:pPr indent="0" marL="0">
+                      <a:pPr marL="0" indent="0">
                         <a:buNone/>
                       </a:pPr>
                       <a:r>
@@ -14195,7 +14411,7 @@
                       </a:endParaRPr>
                     </a:p>
                   </a:txBody>
-                  <a:tcPr marL="91440" marR="91440" marT="45720" marB="45720">
+                  <a:tcPr>
                     <a:lnL w="6350" cap="flat" cmpd="sng" algn="ctr">
                       <a:solidFill>
                         <a:srgbClr val="E2E8F0"/>
@@ -14237,6 +14453,11 @@
                     </a:solidFill>
                   </a:tcPr>
                 </a:tc>
+                <a:extLst>
+                  <a:ext uri="{0D108BD9-81ED-4DB2-BD59-A6C34878D82A}">
+                    <a16:rowId xmlns:a16="http://schemas.microsoft.com/office/drawing/2014/main" val="10000"/>
+                  </a:ext>
+                </a:extLst>
               </a:tr>
               <a:tr h="0">
                 <a:tc>
@@ -14244,7 +14465,7 @@
                     <a:bodyPr/>
                     <a:lstStyle/>
                     <a:p>
-                      <a:pPr indent="0" marL="0">
+                      <a:pPr marL="0" indent="0">
                         <a:buNone/>
                       </a:pPr>
                       <a:r>
@@ -14265,7 +14486,7 @@
                       </a:endParaRPr>
                     </a:p>
                   </a:txBody>
-                  <a:tcPr marL="91440" marR="91440" marT="45720" marB="45720">
+                  <a:tcPr>
                     <a:lnL w="6350" cap="flat" cmpd="sng" algn="ctr">
                       <a:solidFill>
                         <a:srgbClr val="E2E8F0"/>
@@ -14309,7 +14530,7 @@
                     <a:bodyPr/>
                     <a:lstStyle/>
                     <a:p>
-                      <a:pPr indent="0" marL="0">
+                      <a:pPr marL="0" indent="0">
                         <a:buNone/>
                       </a:pPr>
                       <a:r>
@@ -14330,7 +14551,7 @@
                       </a:endParaRPr>
                     </a:p>
                   </a:txBody>
-                  <a:tcPr marL="91440" marR="91440" marT="45720" marB="45720">
+                  <a:tcPr>
                     <a:lnL w="6350" cap="flat" cmpd="sng" algn="ctr">
                       <a:solidFill>
                         <a:srgbClr val="E2E8F0"/>
@@ -14374,7 +14595,7 @@
                     <a:bodyPr/>
                     <a:lstStyle/>
                     <a:p>
-                      <a:pPr indent="0" marL="0">
+                      <a:pPr marL="0" indent="0">
                         <a:buNone/>
                       </a:pPr>
                       <a:r>
@@ -14395,7 +14616,7 @@
                       </a:endParaRPr>
                     </a:p>
                   </a:txBody>
-                  <a:tcPr marL="91440" marR="91440" marT="45720" marB="45720">
+                  <a:tcPr>
                     <a:lnL w="6350" cap="flat" cmpd="sng" algn="ctr">
                       <a:solidFill>
                         <a:srgbClr val="E2E8F0"/>
@@ -14439,7 +14660,7 @@
                     <a:bodyPr/>
                     <a:lstStyle/>
                     <a:p>
-                      <a:pPr indent="0" marL="0">
+                      <a:pPr marL="0" indent="0">
                         <a:buNone/>
                       </a:pPr>
                       <a:r>
@@ -14460,7 +14681,7 @@
                       </a:endParaRPr>
                     </a:p>
                   </a:txBody>
-                  <a:tcPr marL="91440" marR="91440" marT="45720" marB="45720">
+                  <a:tcPr>
                     <a:lnL w="6350" cap="flat" cmpd="sng" algn="ctr">
                       <a:solidFill>
                         <a:srgbClr val="E2E8F0"/>
@@ -14504,7 +14725,7 @@
                     <a:bodyPr/>
                     <a:lstStyle/>
                     <a:p>
-                      <a:pPr indent="0" marL="0">
+                      <a:pPr marL="0" indent="0">
                         <a:buNone/>
                       </a:pPr>
                       <a:r>
@@ -14525,7 +14746,7 @@
                       </a:endParaRPr>
                     </a:p>
                   </a:txBody>
-                  <a:tcPr marL="91440" marR="91440" marT="45720" marB="45720">
+                  <a:tcPr>
                     <a:lnL w="6350" cap="flat" cmpd="sng" algn="ctr">
                       <a:solidFill>
                         <a:srgbClr val="E2E8F0"/>
@@ -14564,6 +14785,11 @@
                     </a:lnB>
                   </a:tcPr>
                 </a:tc>
+                <a:extLst>
+                  <a:ext uri="{0D108BD9-81ED-4DB2-BD59-A6C34878D82A}">
+                    <a16:rowId xmlns:a16="http://schemas.microsoft.com/office/drawing/2014/main" val="10001"/>
+                  </a:ext>
+                </a:extLst>
               </a:tr>
               <a:tr h="0">
                 <a:tc>
@@ -14571,7 +14797,7 @@
                     <a:bodyPr/>
                     <a:lstStyle/>
                     <a:p>
-                      <a:pPr indent="0" marL="0">
+                      <a:pPr marL="0" indent="0">
                         <a:buNone/>
                       </a:pPr>
                       <a:r>
@@ -14592,7 +14818,7 @@
                       </a:endParaRPr>
                     </a:p>
                   </a:txBody>
-                  <a:tcPr marL="91440" marR="91440" marT="45720" marB="45720">
+                  <a:tcPr>
                     <a:lnL w="6350" cap="flat" cmpd="sng" algn="ctr">
                       <a:solidFill>
                         <a:srgbClr val="E2E8F0"/>
@@ -14636,7 +14862,7 @@
                     <a:bodyPr/>
                     <a:lstStyle/>
                     <a:p>
-                      <a:pPr indent="0" marL="0">
+                      <a:pPr marL="0" indent="0">
                         <a:buNone/>
                       </a:pPr>
                       <a:r>
@@ -14657,7 +14883,7 @@
                       </a:endParaRPr>
                     </a:p>
                   </a:txBody>
-                  <a:tcPr marL="91440" marR="91440" marT="45720" marB="45720">
+                  <a:tcPr>
                     <a:lnL w="6350" cap="flat" cmpd="sng" algn="ctr">
                       <a:solidFill>
                         <a:srgbClr val="E2E8F0"/>
@@ -14701,7 +14927,7 @@
                     <a:bodyPr/>
                     <a:lstStyle/>
                     <a:p>
-                      <a:pPr indent="0" marL="0">
+                      <a:pPr marL="0" indent="0">
                         <a:buNone/>
                       </a:pPr>
                       <a:r>
@@ -14722,7 +14948,7 @@
                       </a:endParaRPr>
                     </a:p>
                   </a:txBody>
-                  <a:tcPr marL="91440" marR="91440" marT="45720" marB="45720">
+                  <a:tcPr>
                     <a:lnL w="6350" cap="flat" cmpd="sng" algn="ctr">
                       <a:solidFill>
                         <a:srgbClr val="E2E8F0"/>
@@ -14766,7 +14992,7 @@
                     <a:bodyPr/>
                     <a:lstStyle/>
                     <a:p>
-                      <a:pPr indent="0" marL="0">
+                      <a:pPr marL="0" indent="0">
                         <a:buNone/>
                       </a:pPr>
                       <a:r>
@@ -14787,7 +15013,7 @@
                       </a:endParaRPr>
                     </a:p>
                   </a:txBody>
-                  <a:tcPr marL="91440" marR="91440" marT="45720" marB="45720">
+                  <a:tcPr>
                     <a:lnL w="6350" cap="flat" cmpd="sng" algn="ctr">
                       <a:solidFill>
                         <a:srgbClr val="E2E8F0"/>
@@ -14831,7 +15057,7 @@
                     <a:bodyPr/>
                     <a:lstStyle/>
                     <a:p>
-                      <a:pPr indent="0" marL="0">
+                      <a:pPr marL="0" indent="0">
                         <a:buNone/>
                       </a:pPr>
                       <a:r>
@@ -14852,7 +15078,7 @@
                       </a:endParaRPr>
                     </a:p>
                   </a:txBody>
-                  <a:tcPr marL="91440" marR="91440" marT="45720" marB="45720">
+                  <a:tcPr>
                     <a:lnL w="6350" cap="flat" cmpd="sng" algn="ctr">
                       <a:solidFill>
                         <a:srgbClr val="E2E8F0"/>
@@ -14891,6 +15117,11 @@
                     </a:lnB>
                   </a:tcPr>
                 </a:tc>
+                <a:extLst>
+                  <a:ext uri="{0D108BD9-81ED-4DB2-BD59-A6C34878D82A}">
+                    <a16:rowId xmlns:a16="http://schemas.microsoft.com/office/drawing/2014/main" val="10002"/>
+                  </a:ext>
+                </a:extLst>
               </a:tr>
               <a:tr h="0">
                 <a:tc>
@@ -14898,7 +15129,7 @@
                     <a:bodyPr/>
                     <a:lstStyle/>
                     <a:p>
-                      <a:pPr indent="0" marL="0">
+                      <a:pPr marL="0" indent="0">
                         <a:buNone/>
                       </a:pPr>
                       <a:r>
@@ -14919,7 +15150,7 @@
                       </a:endParaRPr>
                     </a:p>
                   </a:txBody>
-                  <a:tcPr marL="91440" marR="91440" marT="45720" marB="45720">
+                  <a:tcPr>
                     <a:lnL w="6350" cap="flat" cmpd="sng" algn="ctr">
                       <a:solidFill>
                         <a:srgbClr val="E2E8F0"/>
@@ -14963,7 +15194,7 @@
                     <a:bodyPr/>
                     <a:lstStyle/>
                     <a:p>
-                      <a:pPr indent="0" marL="0">
+                      <a:pPr marL="0" indent="0">
                         <a:buNone/>
                       </a:pPr>
                       <a:r>
@@ -14984,7 +15215,7 @@
                       </a:endParaRPr>
                     </a:p>
                   </a:txBody>
-                  <a:tcPr marL="91440" marR="91440" marT="45720" marB="45720">
+                  <a:tcPr>
                     <a:lnL w="6350" cap="flat" cmpd="sng" algn="ctr">
                       <a:solidFill>
                         <a:srgbClr val="E2E8F0"/>
@@ -15028,7 +15259,7 @@
                     <a:bodyPr/>
                     <a:lstStyle/>
                     <a:p>
-                      <a:pPr indent="0" marL="0">
+                      <a:pPr marL="0" indent="0">
                         <a:buNone/>
                       </a:pPr>
                       <a:r>
@@ -15049,7 +15280,7 @@
                       </a:endParaRPr>
                     </a:p>
                   </a:txBody>
-                  <a:tcPr marL="91440" marR="91440" marT="45720" marB="45720">
+                  <a:tcPr>
                     <a:lnL w="6350" cap="flat" cmpd="sng" algn="ctr">
                       <a:solidFill>
                         <a:srgbClr val="E2E8F0"/>
@@ -15093,7 +15324,7 @@
                     <a:bodyPr/>
                     <a:lstStyle/>
                     <a:p>
-                      <a:pPr indent="0" marL="0">
+                      <a:pPr marL="0" indent="0">
                         <a:buNone/>
                       </a:pPr>
                       <a:r>
@@ -15114,7 +15345,7 @@
                       </a:endParaRPr>
                     </a:p>
                   </a:txBody>
-                  <a:tcPr marL="91440" marR="91440" marT="45720" marB="45720">
+                  <a:tcPr>
                     <a:lnL w="6350" cap="flat" cmpd="sng" algn="ctr">
                       <a:solidFill>
                         <a:srgbClr val="E2E8F0"/>
@@ -15158,7 +15389,7 @@
                     <a:bodyPr/>
                     <a:lstStyle/>
                     <a:p>
-                      <a:pPr indent="0" marL="0">
+                      <a:pPr marL="0" indent="0">
                         <a:buNone/>
                       </a:pPr>
                       <a:r>
@@ -15179,7 +15410,7 @@
                       </a:endParaRPr>
                     </a:p>
                   </a:txBody>
-                  <a:tcPr marL="91440" marR="91440" marT="45720" marB="45720">
+                  <a:tcPr>
                     <a:lnL w="6350" cap="flat" cmpd="sng" algn="ctr">
                       <a:solidFill>
                         <a:srgbClr val="E2E8F0"/>
@@ -15218,6 +15449,11 @@
                     </a:lnB>
                   </a:tcPr>
                 </a:tc>
+                <a:extLst>
+                  <a:ext uri="{0D108BD9-81ED-4DB2-BD59-A6C34878D82A}">
+                    <a16:rowId xmlns:a16="http://schemas.microsoft.com/office/drawing/2014/main" val="10003"/>
+                  </a:ext>
+                </a:extLst>
               </a:tr>
               <a:tr h="0">
                 <a:tc>
@@ -15225,7 +15461,7 @@
                     <a:bodyPr/>
                     <a:lstStyle/>
                     <a:p>
-                      <a:pPr indent="0" marL="0">
+                      <a:pPr marL="0" indent="0">
                         <a:buNone/>
                       </a:pPr>
                       <a:r>
@@ -15246,7 +15482,7 @@
                       </a:endParaRPr>
                     </a:p>
                   </a:txBody>
-                  <a:tcPr marL="91440" marR="91440" marT="45720" marB="45720">
+                  <a:tcPr>
                     <a:lnL w="6350" cap="flat" cmpd="sng" algn="ctr">
                       <a:solidFill>
                         <a:srgbClr val="E2E8F0"/>
@@ -15290,7 +15526,7 @@
                     <a:bodyPr/>
                     <a:lstStyle/>
                     <a:p>
-                      <a:pPr indent="0" marL="0">
+                      <a:pPr marL="0" indent="0">
                         <a:buNone/>
                       </a:pPr>
                       <a:r>
@@ -15311,7 +15547,7 @@
                       </a:endParaRPr>
                     </a:p>
                   </a:txBody>
-                  <a:tcPr marL="91440" marR="91440" marT="45720" marB="45720">
+                  <a:tcPr>
                     <a:lnL w="6350" cap="flat" cmpd="sng" algn="ctr">
                       <a:solidFill>
                         <a:srgbClr val="E2E8F0"/>
@@ -15355,7 +15591,7 @@
                     <a:bodyPr/>
                     <a:lstStyle/>
                     <a:p>
-                      <a:pPr indent="0" marL="0">
+                      <a:pPr marL="0" indent="0">
                         <a:buNone/>
                       </a:pPr>
                       <a:r>
@@ -15376,7 +15612,7 @@
                       </a:endParaRPr>
                     </a:p>
                   </a:txBody>
-                  <a:tcPr marL="91440" marR="91440" marT="45720" marB="45720">
+                  <a:tcPr>
                     <a:lnL w="6350" cap="flat" cmpd="sng" algn="ctr">
                       <a:solidFill>
                         <a:srgbClr val="E2E8F0"/>
@@ -15420,7 +15656,7 @@
                     <a:bodyPr/>
                     <a:lstStyle/>
                     <a:p>
-                      <a:pPr indent="0" marL="0">
+                      <a:pPr marL="0" indent="0">
                         <a:buNone/>
                       </a:pPr>
                       <a:r>
@@ -15441,7 +15677,7 @@
                       </a:endParaRPr>
                     </a:p>
                   </a:txBody>
-                  <a:tcPr marL="91440" marR="91440" marT="45720" marB="45720">
+                  <a:tcPr>
                     <a:lnL w="6350" cap="flat" cmpd="sng" algn="ctr">
                       <a:solidFill>
                         <a:srgbClr val="E2E8F0"/>
@@ -15485,7 +15721,7 @@
                     <a:bodyPr/>
                     <a:lstStyle/>
                     <a:p>
-                      <a:pPr indent="0" marL="0">
+                      <a:pPr marL="0" indent="0">
                         <a:buNone/>
                       </a:pPr>
                       <a:r>
@@ -15506,7 +15742,7 @@
                       </a:endParaRPr>
                     </a:p>
                   </a:txBody>
-                  <a:tcPr marL="91440" marR="91440" marT="45720" marB="45720">
+                  <a:tcPr>
                     <a:lnL w="6350" cap="flat" cmpd="sng" algn="ctr">
                       <a:solidFill>
                         <a:srgbClr val="E2E8F0"/>
@@ -15545,6 +15781,11 @@
                     </a:lnB>
                   </a:tcPr>
                 </a:tc>
+                <a:extLst>
+                  <a:ext uri="{0D108BD9-81ED-4DB2-BD59-A6C34878D82A}">
+                    <a16:rowId xmlns:a16="http://schemas.microsoft.com/office/drawing/2014/main" val="10004"/>
+                  </a:ext>
+                </a:extLst>
               </a:tr>
               <a:tr h="0">
                 <a:tc>
@@ -15552,7 +15793,7 @@
                     <a:bodyPr/>
                     <a:lstStyle/>
                     <a:p>
-                      <a:pPr indent="0" marL="0">
+                      <a:pPr marL="0" indent="0">
                         <a:buNone/>
                       </a:pPr>
                       <a:r>
@@ -15573,7 +15814,7 @@
                       </a:endParaRPr>
                     </a:p>
                   </a:txBody>
-                  <a:tcPr marL="91440" marR="91440" marT="45720" marB="45720">
+                  <a:tcPr>
                     <a:lnL w="6350" cap="flat" cmpd="sng" algn="ctr">
                       <a:solidFill>
                         <a:srgbClr val="E2E8F0"/>
@@ -15617,7 +15858,7 @@
                     <a:bodyPr/>
                     <a:lstStyle/>
                     <a:p>
-                      <a:pPr indent="0" marL="0">
+                      <a:pPr marL="0" indent="0">
                         <a:buNone/>
                       </a:pPr>
                       <a:r>
@@ -15638,7 +15879,7 @@
                       </a:endParaRPr>
                     </a:p>
                   </a:txBody>
-                  <a:tcPr marL="91440" marR="91440" marT="45720" marB="45720">
+                  <a:tcPr>
                     <a:lnL w="6350" cap="flat" cmpd="sng" algn="ctr">
                       <a:solidFill>
                         <a:srgbClr val="E2E8F0"/>
@@ -15682,7 +15923,7 @@
                     <a:bodyPr/>
                     <a:lstStyle/>
                     <a:p>
-                      <a:pPr indent="0" marL="0">
+                      <a:pPr marL="0" indent="0">
                         <a:buNone/>
                       </a:pPr>
                       <a:r>
@@ -15703,7 +15944,7 @@
                       </a:endParaRPr>
                     </a:p>
                   </a:txBody>
-                  <a:tcPr marL="91440" marR="91440" marT="45720" marB="45720">
+                  <a:tcPr>
                     <a:lnL w="6350" cap="flat" cmpd="sng" algn="ctr">
                       <a:solidFill>
                         <a:srgbClr val="E2E8F0"/>
@@ -15747,7 +15988,7 @@
                     <a:bodyPr/>
                     <a:lstStyle/>
                     <a:p>
-                      <a:pPr indent="0" marL="0">
+                      <a:pPr marL="0" indent="0">
                         <a:buNone/>
                       </a:pPr>
                       <a:r>
@@ -15768,7 +16009,7 @@
                       </a:endParaRPr>
                     </a:p>
                   </a:txBody>
-                  <a:tcPr marL="91440" marR="91440" marT="45720" marB="45720">
+                  <a:tcPr>
                     <a:lnL w="6350" cap="flat" cmpd="sng" algn="ctr">
                       <a:solidFill>
                         <a:srgbClr val="E2E8F0"/>
@@ -15812,7 +16053,7 @@
                     <a:bodyPr/>
                     <a:lstStyle/>
                     <a:p>
-                      <a:pPr indent="0" marL="0">
+                      <a:pPr marL="0" indent="0">
                         <a:buNone/>
                       </a:pPr>
                       <a:r>
@@ -15833,7 +16074,7 @@
                       </a:endParaRPr>
                     </a:p>
                   </a:txBody>
-                  <a:tcPr marL="91440" marR="91440" marT="45720" marB="45720">
+                  <a:tcPr>
                     <a:lnL w="6350" cap="flat" cmpd="sng" algn="ctr">
                       <a:solidFill>
                         <a:srgbClr val="E2E8F0"/>
@@ -15872,6 +16113,11 @@
                     </a:lnB>
                   </a:tcPr>
                 </a:tc>
+                <a:extLst>
+                  <a:ext uri="{0D108BD9-81ED-4DB2-BD59-A6C34878D82A}">
+                    <a16:rowId xmlns:a16="http://schemas.microsoft.com/office/drawing/2014/main" val="10005"/>
+                  </a:ext>
+                </a:extLst>
               </a:tr>
               <a:tr h="0">
                 <a:tc>
@@ -15879,7 +16125,7 @@
                     <a:bodyPr/>
                     <a:lstStyle/>
                     <a:p>
-                      <a:pPr indent="0" marL="0">
+                      <a:pPr marL="0" indent="0">
                         <a:buNone/>
                       </a:pPr>
                       <a:r>
@@ -15900,7 +16146,7 @@
                       </a:endParaRPr>
                     </a:p>
                   </a:txBody>
-                  <a:tcPr marL="91440" marR="91440" marT="45720" marB="45720">
+                  <a:tcPr>
                     <a:lnL w="6350" cap="flat" cmpd="sng" algn="ctr">
                       <a:solidFill>
                         <a:srgbClr val="E2E8F0"/>
@@ -15944,7 +16190,7 @@
                     <a:bodyPr/>
                     <a:lstStyle/>
                     <a:p>
-                      <a:pPr indent="0" marL="0">
+                      <a:pPr marL="0" indent="0">
                         <a:buNone/>
                       </a:pPr>
                       <a:r>
@@ -15965,7 +16211,7 @@
                       </a:endParaRPr>
                     </a:p>
                   </a:txBody>
-                  <a:tcPr marL="91440" marR="91440" marT="45720" marB="45720">
+                  <a:tcPr>
                     <a:lnL w="6350" cap="flat" cmpd="sng" algn="ctr">
                       <a:solidFill>
                         <a:srgbClr val="E2E8F0"/>
@@ -16009,7 +16255,7 @@
                     <a:bodyPr/>
                     <a:lstStyle/>
                     <a:p>
-                      <a:pPr indent="0" marL="0">
+                      <a:pPr marL="0" indent="0">
                         <a:buNone/>
                       </a:pPr>
                       <a:r>
@@ -16030,7 +16276,7 @@
                       </a:endParaRPr>
                     </a:p>
                   </a:txBody>
-                  <a:tcPr marL="91440" marR="91440" marT="45720" marB="45720">
+                  <a:tcPr>
                     <a:lnL w="6350" cap="flat" cmpd="sng" algn="ctr">
                       <a:solidFill>
                         <a:srgbClr val="E2E8F0"/>
@@ -16074,7 +16320,7 @@
                     <a:bodyPr/>
                     <a:lstStyle/>
                     <a:p>
-                      <a:pPr indent="0" marL="0">
+                      <a:pPr marL="0" indent="0">
                         <a:buNone/>
                       </a:pPr>
                       <a:r>
@@ -16095,7 +16341,7 @@
                       </a:endParaRPr>
                     </a:p>
                   </a:txBody>
-                  <a:tcPr marL="91440" marR="91440" marT="45720" marB="45720">
+                  <a:tcPr>
                     <a:lnL w="6350" cap="flat" cmpd="sng" algn="ctr">
                       <a:solidFill>
                         <a:srgbClr val="E2E8F0"/>
@@ -16139,7 +16385,7 @@
                     <a:bodyPr/>
                     <a:lstStyle/>
                     <a:p>
-                      <a:pPr indent="0" marL="0">
+                      <a:pPr marL="0" indent="0">
                         <a:buNone/>
                       </a:pPr>
                       <a:r>
@@ -16160,7 +16406,7 @@
                       </a:endParaRPr>
                     </a:p>
                   </a:txBody>
-                  <a:tcPr marL="91440" marR="91440" marT="45720" marB="45720">
+                  <a:tcPr>
                     <a:lnL w="6350" cap="flat" cmpd="sng" algn="ctr">
                       <a:solidFill>
                         <a:srgbClr val="E2E8F0"/>
@@ -16199,6 +16445,11 @@
                     </a:lnB>
                   </a:tcPr>
                 </a:tc>
+                <a:extLst>
+                  <a:ext uri="{0D108BD9-81ED-4DB2-BD59-A6C34878D82A}">
+                    <a16:rowId xmlns:a16="http://schemas.microsoft.com/office/drawing/2014/main" val="10006"/>
+                  </a:ext>
+                </a:extLst>
               </a:tr>
             </a:tbl>
           </a:graphicData>
@@ -16228,6 +16479,13 @@
             <a:prstDash val="solid"/>
           </a:ln>
         </p:spPr>
+        <p:txBody>
+          <a:bodyPr/>
+          <a:lstStyle/>
+          <a:p>
+            <a:endParaRPr lang="de-DE"/>
+          </a:p>
+        </p:txBody>
       </p:sp>
       <p:sp>
         <p:nvSpPr>
@@ -16250,7 +16508,7 @@
           <a:bodyPr wrap="square" lIns="0" tIns="0" rIns="0" bIns="0" rtlCol="0" anchor="ctr"/>
           <a:lstStyle/>
           <a:p>
-            <a:pPr indent="0" marL="0">
+            <a:pPr marL="0" indent="0">
               <a:buNone/>
             </a:pPr>
             <a:r>
@@ -16270,7 +16528,7 @@
       </p:sp>
       <p:sp>
         <p:nvSpPr>
-          <p:cNvPr id="9" name="Text 6"/>
+          <p:cNvPr id="6" name="Text 6"/>
           <p:cNvSpPr/>
           <p:nvPr/>
         </p:nvSpPr>
@@ -16289,7 +16547,7 @@
           <a:bodyPr wrap="square" rtlCol="0" anchor="ctr"/>
           <a:lstStyle/>
           <a:p>
-            <a:pPr indent="0" marL="0">
+            <a:pPr marL="0" indent="0">
               <a:buNone/>
             </a:pPr>
             <a:r>
@@ -16328,7 +16586,7 @@
           <a:bodyPr wrap="square" rtlCol="0" anchor="ctr"/>
           <a:lstStyle/>
           <a:p>
-            <a:pPr algn="r" indent="0" marL="0">
+            <a:pPr marL="0" indent="0" algn="r">
               <a:buNone/>
             </a:pPr>
             <a:r>
@@ -16362,6 +16620,7 @@
         <a:solidFill>
           <a:srgbClr val="FFFFFF"/>
         </a:solidFill>
+        <a:effectLst/>
       </p:bgPr>
     </p:bg>
     <p:spTree>
@@ -16399,7 +16658,7 @@
           <a:bodyPr wrap="square" lIns="0" tIns="0" rIns="0" bIns="0" rtlCol="0" anchor="ctr"/>
           <a:lstStyle/>
           <a:p>
-            <a:pPr indent="0" marL="0">
+            <a:pPr marL="0" indent="0">
               <a:buNone/>
             </a:pPr>
             <a:r>
@@ -16438,7 +16697,7 @@
           <a:bodyPr wrap="square" rtlCol="0" anchor="ctr"/>
           <a:lstStyle/>
           <a:p>
-            <a:pPr indent="0" marL="0">
+            <a:pPr marL="0" indent="0">
               <a:buNone/>
             </a:pPr>
             <a:r>
@@ -16480,6 +16739,13 @@
             <a:prstDash val="solid"/>
           </a:ln>
         </p:spPr>
+        <p:txBody>
+          <a:bodyPr/>
+          <a:lstStyle/>
+          <a:p>
+            <a:endParaRPr lang="de-DE"/>
+          </a:p>
+        </p:txBody>
       </p:sp>
       <p:sp>
         <p:nvSpPr>
@@ -16502,7 +16768,7 @@
           <a:bodyPr wrap="square" lIns="0" tIns="0" rIns="0" bIns="0" rtlCol="0" anchor="ctr"/>
           <a:lstStyle/>
           <a:p>
-            <a:pPr indent="0" marL="0">
+            <a:pPr marL="0" indent="0">
               <a:buNone/>
             </a:pPr>
             <a:r>
@@ -16536,19 +16802,55 @@
         </p:nvGraphicFramePr>
         <p:xfrm>
           <a:off x="457200" y="1645920"/>
-          <a:ext cx="8229600" cy="914400"/>
+          <a:ext cx="8229600" cy="1600200"/>
         </p:xfrm>
         <a:graphic>
           <a:graphicData uri="http://schemas.openxmlformats.org/drawingml/2006/table">
             <a:tbl>
               <a:tblPr/>
               <a:tblGrid>
-                <a:gridCol w="2377440"/>
-                <a:gridCol w="731520"/>
-                <a:gridCol w="731520"/>
-                <a:gridCol w="914400"/>
-                <a:gridCol w="731520"/>
-                <a:gridCol w="2743200"/>
+                <a:gridCol w="2377440">
+                  <a:extLst>
+                    <a:ext uri="{9D8B030D-6E8A-4147-A177-3AD203B41FA5}">
+                      <a16:colId xmlns:a16="http://schemas.microsoft.com/office/drawing/2014/main" val="20000"/>
+                    </a:ext>
+                  </a:extLst>
+                </a:gridCol>
+                <a:gridCol w="731520">
+                  <a:extLst>
+                    <a:ext uri="{9D8B030D-6E8A-4147-A177-3AD203B41FA5}">
+                      <a16:colId xmlns:a16="http://schemas.microsoft.com/office/drawing/2014/main" val="20001"/>
+                    </a:ext>
+                  </a:extLst>
+                </a:gridCol>
+                <a:gridCol w="731520">
+                  <a:extLst>
+                    <a:ext uri="{9D8B030D-6E8A-4147-A177-3AD203B41FA5}">
+                      <a16:colId xmlns:a16="http://schemas.microsoft.com/office/drawing/2014/main" val="20002"/>
+                    </a:ext>
+                  </a:extLst>
+                </a:gridCol>
+                <a:gridCol w="914400">
+                  <a:extLst>
+                    <a:ext uri="{9D8B030D-6E8A-4147-A177-3AD203B41FA5}">
+                      <a16:colId xmlns:a16="http://schemas.microsoft.com/office/drawing/2014/main" val="20003"/>
+                    </a:ext>
+                  </a:extLst>
+                </a:gridCol>
+                <a:gridCol w="731520">
+                  <a:extLst>
+                    <a:ext uri="{9D8B030D-6E8A-4147-A177-3AD203B41FA5}">
+                      <a16:colId xmlns:a16="http://schemas.microsoft.com/office/drawing/2014/main" val="20004"/>
+                    </a:ext>
+                  </a:extLst>
+                </a:gridCol>
+                <a:gridCol w="2743200">
+                  <a:extLst>
+                    <a:ext uri="{9D8B030D-6E8A-4147-A177-3AD203B41FA5}">
+                      <a16:colId xmlns:a16="http://schemas.microsoft.com/office/drawing/2014/main" val="20005"/>
+                    </a:ext>
+                  </a:extLst>
+                </a:gridCol>
               </a:tblGrid>
               <a:tr h="0">
                 <a:tc>
@@ -16556,7 +16858,7 @@
                     <a:bodyPr/>
                     <a:lstStyle/>
                     <a:p>
-                      <a:pPr indent="0" marL="0">
+                      <a:pPr marL="0" indent="0">
                         <a:buNone/>
                       </a:pPr>
                       <a:r>
@@ -16577,7 +16879,7 @@
                       </a:endParaRPr>
                     </a:p>
                   </a:txBody>
-                  <a:tcPr marL="91440" marR="91440" marT="45720" marB="45720">
+                  <a:tcPr>
                     <a:lnL w="6350" cap="flat" cmpd="sng" algn="ctr">
                       <a:solidFill>
                         <a:srgbClr val="E2E8F0"/>
@@ -16624,7 +16926,7 @@
                     <a:bodyPr/>
                     <a:lstStyle/>
                     <a:p>
-                      <a:pPr indent="0" marL="0">
+                      <a:pPr marL="0" indent="0">
                         <a:buNone/>
                       </a:pPr>
                       <a:r>
@@ -16645,7 +16947,7 @@
                       </a:endParaRPr>
                     </a:p>
                   </a:txBody>
-                  <a:tcPr marL="91440" marR="91440" marT="45720" marB="45720">
+                  <a:tcPr>
                     <a:lnL w="6350" cap="flat" cmpd="sng" algn="ctr">
                       <a:solidFill>
                         <a:srgbClr val="E2E8F0"/>
@@ -16692,7 +16994,7 @@
                     <a:bodyPr/>
                     <a:lstStyle/>
                     <a:p>
-                      <a:pPr indent="0" marL="0">
+                      <a:pPr marL="0" indent="0">
                         <a:buNone/>
                       </a:pPr>
                       <a:r>
@@ -16713,7 +17015,7 @@
                       </a:endParaRPr>
                     </a:p>
                   </a:txBody>
-                  <a:tcPr marL="91440" marR="91440" marT="45720" marB="45720">
+                  <a:tcPr>
                     <a:lnL w="6350" cap="flat" cmpd="sng" algn="ctr">
                       <a:solidFill>
                         <a:srgbClr val="E2E8F0"/>
@@ -16760,7 +17062,7 @@
                     <a:bodyPr/>
                     <a:lstStyle/>
                     <a:p>
-                      <a:pPr indent="0" marL="0">
+                      <a:pPr marL="0" indent="0">
                         <a:buNone/>
                       </a:pPr>
                       <a:r>
@@ -16781,7 +17083,7 @@
                       </a:endParaRPr>
                     </a:p>
                   </a:txBody>
-                  <a:tcPr marL="91440" marR="91440" marT="45720" marB="45720">
+                  <a:tcPr>
                     <a:lnL w="6350" cap="flat" cmpd="sng" algn="ctr">
                       <a:solidFill>
                         <a:srgbClr val="E2E8F0"/>
@@ -16828,7 +17130,7 @@
                     <a:bodyPr/>
                     <a:lstStyle/>
                     <a:p>
-                      <a:pPr indent="0" marL="0">
+                      <a:pPr marL="0" indent="0">
                         <a:buNone/>
                       </a:pPr>
                       <a:r>
@@ -16849,7 +17151,7 @@
                       </a:endParaRPr>
                     </a:p>
                   </a:txBody>
-                  <a:tcPr marL="91440" marR="91440" marT="45720" marB="45720">
+                  <a:tcPr>
                     <a:lnL w="6350" cap="flat" cmpd="sng" algn="ctr">
                       <a:solidFill>
                         <a:srgbClr val="E2E8F0"/>
@@ -16896,7 +17198,7 @@
                     <a:bodyPr/>
                     <a:lstStyle/>
                     <a:p>
-                      <a:pPr indent="0" marL="0">
+                      <a:pPr marL="0" indent="0">
                         <a:buNone/>
                       </a:pPr>
                       <a:r>
@@ -16917,7 +17219,7 @@
                       </a:endParaRPr>
                     </a:p>
                   </a:txBody>
-                  <a:tcPr marL="91440" marR="91440" marT="45720" marB="45720">
+                  <a:tcPr>
                     <a:lnL w="6350" cap="flat" cmpd="sng" algn="ctr">
                       <a:solidFill>
                         <a:srgbClr val="E2E8F0"/>
@@ -16959,6 +17261,11 @@
                     </a:solidFill>
                   </a:tcPr>
                 </a:tc>
+                <a:extLst>
+                  <a:ext uri="{0D108BD9-81ED-4DB2-BD59-A6C34878D82A}">
+                    <a16:rowId xmlns:a16="http://schemas.microsoft.com/office/drawing/2014/main" val="10000"/>
+                  </a:ext>
+                </a:extLst>
               </a:tr>
               <a:tr h="0">
                 <a:tc>
@@ -16966,7 +17273,7 @@
                     <a:bodyPr/>
                     <a:lstStyle/>
                     <a:p>
-                      <a:pPr indent="0" marL="0">
+                      <a:pPr marL="0" indent="0">
                         <a:buNone/>
                       </a:pPr>
                       <a:r>
@@ -16987,7 +17294,7 @@
                       </a:endParaRPr>
                     </a:p>
                   </a:txBody>
-                  <a:tcPr marL="91440" marR="91440" marT="45720" marB="45720">
+                  <a:tcPr>
                     <a:lnL w="6350" cap="flat" cmpd="sng" algn="ctr">
                       <a:solidFill>
                         <a:srgbClr val="E2E8F0"/>
@@ -17031,7 +17338,7 @@
                     <a:bodyPr/>
                     <a:lstStyle/>
                     <a:p>
-                      <a:pPr indent="0" marL="0">
+                      <a:pPr marL="0" indent="0">
                         <a:buNone/>
                       </a:pPr>
                       <a:r>
@@ -17052,7 +17359,7 @@
                       </a:endParaRPr>
                     </a:p>
                   </a:txBody>
-                  <a:tcPr marL="91440" marR="91440" marT="45720" marB="45720">
+                  <a:tcPr>
                     <a:lnL w="6350" cap="flat" cmpd="sng" algn="ctr">
                       <a:solidFill>
                         <a:srgbClr val="E2E8F0"/>
@@ -17096,7 +17403,7 @@
                     <a:bodyPr/>
                     <a:lstStyle/>
                     <a:p>
-                      <a:pPr indent="0" marL="0">
+                      <a:pPr marL="0" indent="0">
                         <a:buNone/>
                       </a:pPr>
                       <a:r>
@@ -17117,7 +17424,7 @@
                       </a:endParaRPr>
                     </a:p>
                   </a:txBody>
-                  <a:tcPr marL="91440" marR="91440" marT="45720" marB="45720">
+                  <a:tcPr>
                     <a:lnL w="6350" cap="flat" cmpd="sng" algn="ctr">
                       <a:solidFill>
                         <a:srgbClr val="E2E8F0"/>
@@ -17161,7 +17468,7 @@
                     <a:bodyPr/>
                     <a:lstStyle/>
                     <a:p>
-                      <a:pPr indent="0" marL="0">
+                      <a:pPr marL="0" indent="0">
                         <a:buNone/>
                       </a:pPr>
                       <a:r>
@@ -17182,7 +17489,7 @@
                       </a:endParaRPr>
                     </a:p>
                   </a:txBody>
-                  <a:tcPr marL="91440" marR="91440" marT="45720" marB="45720">
+                  <a:tcPr>
                     <a:lnL w="6350" cap="flat" cmpd="sng" algn="ctr">
                       <a:solidFill>
                         <a:srgbClr val="E2E8F0"/>
@@ -17226,7 +17533,7 @@
                     <a:bodyPr/>
                     <a:lstStyle/>
                     <a:p>
-                      <a:pPr indent="0" marL="0">
+                      <a:pPr marL="0" indent="0">
                         <a:buNone/>
                       </a:pPr>
                       <a:r>
@@ -17247,7 +17554,7 @@
                       </a:endParaRPr>
                     </a:p>
                   </a:txBody>
-                  <a:tcPr marL="91440" marR="91440" marT="45720" marB="45720">
+                  <a:tcPr>
                     <a:lnL w="6350" cap="flat" cmpd="sng" algn="ctr">
                       <a:solidFill>
                         <a:srgbClr val="E2E8F0"/>
@@ -17291,7 +17598,7 @@
                     <a:bodyPr/>
                     <a:lstStyle/>
                     <a:p>
-                      <a:pPr indent="0" marL="0">
+                      <a:pPr marL="0" indent="0">
                         <a:buNone/>
                       </a:pPr>
                       <a:r>
@@ -17312,7 +17619,7 @@
                       </a:endParaRPr>
                     </a:p>
                   </a:txBody>
-                  <a:tcPr marL="91440" marR="91440" marT="45720" marB="45720">
+                  <a:tcPr>
                     <a:lnL w="6350" cap="flat" cmpd="sng" algn="ctr">
                       <a:solidFill>
                         <a:srgbClr val="E2E8F0"/>
@@ -17351,6 +17658,11 @@
                     </a:lnB>
                   </a:tcPr>
                 </a:tc>
+                <a:extLst>
+                  <a:ext uri="{0D108BD9-81ED-4DB2-BD59-A6C34878D82A}">
+                    <a16:rowId xmlns:a16="http://schemas.microsoft.com/office/drawing/2014/main" val="10001"/>
+                  </a:ext>
+                </a:extLst>
               </a:tr>
               <a:tr h="0">
                 <a:tc>
@@ -17358,7 +17670,7 @@
                     <a:bodyPr/>
                     <a:lstStyle/>
                     <a:p>
-                      <a:pPr indent="0" marL="0">
+                      <a:pPr marL="0" indent="0">
                         <a:buNone/>
                       </a:pPr>
                       <a:r>
@@ -17379,7 +17691,7 @@
                       </a:endParaRPr>
                     </a:p>
                   </a:txBody>
-                  <a:tcPr marL="91440" marR="91440" marT="45720" marB="45720">
+                  <a:tcPr>
                     <a:lnL w="6350" cap="flat" cmpd="sng" algn="ctr">
                       <a:solidFill>
                         <a:srgbClr val="E2E8F0"/>
@@ -17423,7 +17735,7 @@
                     <a:bodyPr/>
                     <a:lstStyle/>
                     <a:p>
-                      <a:pPr indent="0" marL="0">
+                      <a:pPr marL="0" indent="0">
                         <a:buNone/>
                       </a:pPr>
                       <a:r>
@@ -17444,7 +17756,7 @@
                       </a:endParaRPr>
                     </a:p>
                   </a:txBody>
-                  <a:tcPr marL="91440" marR="91440" marT="45720" marB="45720">
+                  <a:tcPr>
                     <a:lnL w="6350" cap="flat" cmpd="sng" algn="ctr">
                       <a:solidFill>
                         <a:srgbClr val="E2E8F0"/>
@@ -17488,7 +17800,7 @@
                     <a:bodyPr/>
                     <a:lstStyle/>
                     <a:p>
-                      <a:pPr indent="0" marL="0">
+                      <a:pPr marL="0" indent="0">
                         <a:buNone/>
                       </a:pPr>
                       <a:r>
@@ -17509,7 +17821,7 @@
                       </a:endParaRPr>
                     </a:p>
                   </a:txBody>
-                  <a:tcPr marL="91440" marR="91440" marT="45720" marB="45720">
+                  <a:tcPr>
                     <a:lnL w="6350" cap="flat" cmpd="sng" algn="ctr">
                       <a:solidFill>
                         <a:srgbClr val="E2E8F0"/>
@@ -17553,7 +17865,7 @@
                     <a:bodyPr/>
                     <a:lstStyle/>
                     <a:p>
-                      <a:pPr indent="0" marL="0">
+                      <a:pPr marL="0" indent="0">
                         <a:buNone/>
                       </a:pPr>
                       <a:r>
@@ -17574,7 +17886,7 @@
                       </a:endParaRPr>
                     </a:p>
                   </a:txBody>
-                  <a:tcPr marL="91440" marR="91440" marT="45720" marB="45720">
+                  <a:tcPr>
                     <a:lnL w="6350" cap="flat" cmpd="sng" algn="ctr">
                       <a:solidFill>
                         <a:srgbClr val="E2E8F0"/>
@@ -17618,7 +17930,7 @@
                     <a:bodyPr/>
                     <a:lstStyle/>
                     <a:p>
-                      <a:pPr indent="0" marL="0">
+                      <a:pPr marL="0" indent="0">
                         <a:buNone/>
                       </a:pPr>
                       <a:r>
@@ -17639,7 +17951,7 @@
                       </a:endParaRPr>
                     </a:p>
                   </a:txBody>
-                  <a:tcPr marL="91440" marR="91440" marT="45720" marB="45720">
+                  <a:tcPr>
                     <a:lnL w="6350" cap="flat" cmpd="sng" algn="ctr">
                       <a:solidFill>
                         <a:srgbClr val="E2E8F0"/>
@@ -17683,7 +17995,7 @@
                     <a:bodyPr/>
                     <a:lstStyle/>
                     <a:p>
-                      <a:pPr indent="0" marL="0">
+                      <a:pPr marL="0" indent="0">
                         <a:buNone/>
                       </a:pPr>
                       <a:r>
@@ -17704,7 +18016,7 @@
                       </a:endParaRPr>
                     </a:p>
                   </a:txBody>
-                  <a:tcPr marL="91440" marR="91440" marT="45720" marB="45720">
+                  <a:tcPr>
                     <a:lnL w="6350" cap="flat" cmpd="sng" algn="ctr">
                       <a:solidFill>
                         <a:srgbClr val="E2E8F0"/>
@@ -17743,6 +18055,11 @@
                     </a:lnB>
                   </a:tcPr>
                 </a:tc>
+                <a:extLst>
+                  <a:ext uri="{0D108BD9-81ED-4DB2-BD59-A6C34878D82A}">
+                    <a16:rowId xmlns:a16="http://schemas.microsoft.com/office/drawing/2014/main" val="10002"/>
+                  </a:ext>
+                </a:extLst>
               </a:tr>
               <a:tr h="0">
                 <a:tc>
@@ -17750,7 +18067,7 @@
                     <a:bodyPr/>
                     <a:lstStyle/>
                     <a:p>
-                      <a:pPr indent="0" marL="0">
+                      <a:pPr marL="0" indent="0">
                         <a:buNone/>
                       </a:pPr>
                       <a:r>
@@ -17771,7 +18088,7 @@
                       </a:endParaRPr>
                     </a:p>
                   </a:txBody>
-                  <a:tcPr marL="91440" marR="91440" marT="45720" marB="45720">
+                  <a:tcPr>
                     <a:lnL w="6350" cap="flat" cmpd="sng" algn="ctr">
                       <a:solidFill>
                         <a:srgbClr val="E2E8F0"/>
@@ -17815,7 +18132,7 @@
                     <a:bodyPr/>
                     <a:lstStyle/>
                     <a:p>
-                      <a:pPr indent="0" marL="0">
+                      <a:pPr marL="0" indent="0">
                         <a:buNone/>
                       </a:pPr>
                       <a:r>
@@ -17836,7 +18153,7 @@
                       </a:endParaRPr>
                     </a:p>
                   </a:txBody>
-                  <a:tcPr marL="91440" marR="91440" marT="45720" marB="45720">
+                  <a:tcPr>
                     <a:lnL w="6350" cap="flat" cmpd="sng" algn="ctr">
                       <a:solidFill>
                         <a:srgbClr val="E2E8F0"/>
@@ -17880,7 +18197,7 @@
                     <a:bodyPr/>
                     <a:lstStyle/>
                     <a:p>
-                      <a:pPr indent="0" marL="0">
+                      <a:pPr marL="0" indent="0">
                         <a:buNone/>
                       </a:pPr>
                       <a:r>
@@ -17901,7 +18218,7 @@
                       </a:endParaRPr>
                     </a:p>
                   </a:txBody>
-                  <a:tcPr marL="91440" marR="91440" marT="45720" marB="45720">
+                  <a:tcPr>
                     <a:lnL w="6350" cap="flat" cmpd="sng" algn="ctr">
                       <a:solidFill>
                         <a:srgbClr val="E2E8F0"/>
@@ -17945,7 +18262,7 @@
                     <a:bodyPr/>
                     <a:lstStyle/>
                     <a:p>
-                      <a:pPr indent="0" marL="0">
+                      <a:pPr marL="0" indent="0">
                         <a:buNone/>
                       </a:pPr>
                       <a:r>
@@ -17966,7 +18283,7 @@
                       </a:endParaRPr>
                     </a:p>
                   </a:txBody>
-                  <a:tcPr marL="91440" marR="91440" marT="45720" marB="45720">
+                  <a:tcPr>
                     <a:lnL w="6350" cap="flat" cmpd="sng" algn="ctr">
                       <a:solidFill>
                         <a:srgbClr val="E2E8F0"/>
@@ -18010,7 +18327,7 @@
                     <a:bodyPr/>
                     <a:lstStyle/>
                     <a:p>
-                      <a:pPr indent="0" marL="0">
+                      <a:pPr marL="0" indent="0">
                         <a:buNone/>
                       </a:pPr>
                       <a:r>
@@ -18031,7 +18348,7 @@
                       </a:endParaRPr>
                     </a:p>
                   </a:txBody>
-                  <a:tcPr marL="91440" marR="91440" marT="45720" marB="45720">
+                  <a:tcPr>
                     <a:lnL w="6350" cap="flat" cmpd="sng" algn="ctr">
                       <a:solidFill>
                         <a:srgbClr val="E2E8F0"/>
@@ -18075,7 +18392,7 @@
                     <a:bodyPr/>
                     <a:lstStyle/>
                     <a:p>
-                      <a:pPr indent="0" marL="0">
+                      <a:pPr marL="0" indent="0">
                         <a:buNone/>
                       </a:pPr>
                       <a:r>
@@ -18096,7 +18413,7 @@
                       </a:endParaRPr>
                     </a:p>
                   </a:txBody>
-                  <a:tcPr marL="91440" marR="91440" marT="45720" marB="45720">
+                  <a:tcPr>
                     <a:lnL w="6350" cap="flat" cmpd="sng" algn="ctr">
                       <a:solidFill>
                         <a:srgbClr val="E2E8F0"/>
@@ -18135,6 +18452,11 @@
                     </a:lnB>
                   </a:tcPr>
                 </a:tc>
+                <a:extLst>
+                  <a:ext uri="{0D108BD9-81ED-4DB2-BD59-A6C34878D82A}">
+                    <a16:rowId xmlns:a16="http://schemas.microsoft.com/office/drawing/2014/main" val="10003"/>
+                  </a:ext>
+                </a:extLst>
               </a:tr>
               <a:tr h="0">
                 <a:tc>
@@ -18142,7 +18464,7 @@
                     <a:bodyPr/>
                     <a:lstStyle/>
                     <a:p>
-                      <a:pPr indent="0" marL="0">
+                      <a:pPr marL="0" indent="0">
                         <a:buNone/>
                       </a:pPr>
                       <a:r>
@@ -18163,7 +18485,7 @@
                       </a:endParaRPr>
                     </a:p>
                   </a:txBody>
-                  <a:tcPr marL="91440" marR="91440" marT="45720" marB="45720">
+                  <a:tcPr>
                     <a:lnL w="6350" cap="flat" cmpd="sng" algn="ctr">
                       <a:solidFill>
                         <a:srgbClr val="E2E8F0"/>
@@ -18207,7 +18529,7 @@
                     <a:bodyPr/>
                     <a:lstStyle/>
                     <a:p>
-                      <a:pPr indent="0" marL="0">
+                      <a:pPr marL="0" indent="0">
                         <a:buNone/>
                       </a:pPr>
                       <a:r>
@@ -18228,7 +18550,7 @@
                       </a:endParaRPr>
                     </a:p>
                   </a:txBody>
-                  <a:tcPr marL="91440" marR="91440" marT="45720" marB="45720">
+                  <a:tcPr>
                     <a:lnL w="6350" cap="flat" cmpd="sng" algn="ctr">
                       <a:solidFill>
                         <a:srgbClr val="E2E8F0"/>
@@ -18272,7 +18594,7 @@
                     <a:bodyPr/>
                     <a:lstStyle/>
                     <a:p>
-                      <a:pPr indent="0" marL="0">
+                      <a:pPr marL="0" indent="0">
                         <a:buNone/>
                       </a:pPr>
                       <a:r>
@@ -18293,7 +18615,7 @@
                       </a:endParaRPr>
                     </a:p>
                   </a:txBody>
-                  <a:tcPr marL="91440" marR="91440" marT="45720" marB="45720">
+                  <a:tcPr>
                     <a:lnL w="6350" cap="flat" cmpd="sng" algn="ctr">
                       <a:solidFill>
                         <a:srgbClr val="E2E8F0"/>
@@ -18337,7 +18659,7 @@
                     <a:bodyPr/>
                     <a:lstStyle/>
                     <a:p>
-                      <a:pPr indent="0" marL="0">
+                      <a:pPr marL="0" indent="0">
                         <a:buNone/>
                       </a:pPr>
                       <a:r>
@@ -18358,7 +18680,7 @@
                       </a:endParaRPr>
                     </a:p>
                   </a:txBody>
-                  <a:tcPr marL="91440" marR="91440" marT="45720" marB="45720">
+                  <a:tcPr>
                     <a:lnL w="6350" cap="flat" cmpd="sng" algn="ctr">
                       <a:solidFill>
                         <a:srgbClr val="E2E8F0"/>
@@ -18402,7 +18724,7 @@
                     <a:bodyPr/>
                     <a:lstStyle/>
                     <a:p>
-                      <a:pPr indent="0" marL="0">
+                      <a:pPr marL="0" indent="0">
                         <a:buNone/>
                       </a:pPr>
                       <a:r>
@@ -18423,7 +18745,7 @@
                       </a:endParaRPr>
                     </a:p>
                   </a:txBody>
-                  <a:tcPr marL="91440" marR="91440" marT="45720" marB="45720">
+                  <a:tcPr>
                     <a:lnL w="6350" cap="flat" cmpd="sng" algn="ctr">
                       <a:solidFill>
                         <a:srgbClr val="E2E8F0"/>
@@ -18467,7 +18789,7 @@
                     <a:bodyPr/>
                     <a:lstStyle/>
                     <a:p>
-                      <a:pPr indent="0" marL="0">
+                      <a:pPr marL="0" indent="0">
                         <a:buNone/>
                       </a:pPr>
                       <a:r>
@@ -18488,7 +18810,7 @@
                       </a:endParaRPr>
                     </a:p>
                   </a:txBody>
-                  <a:tcPr marL="91440" marR="91440" marT="45720" marB="45720">
+                  <a:tcPr>
                     <a:lnL w="6350" cap="flat" cmpd="sng" algn="ctr">
                       <a:solidFill>
                         <a:srgbClr val="E2E8F0"/>
@@ -18527,6 +18849,11 @@
                     </a:lnB>
                   </a:tcPr>
                 </a:tc>
+                <a:extLst>
+                  <a:ext uri="{0D108BD9-81ED-4DB2-BD59-A6C34878D82A}">
+                    <a16:rowId xmlns:a16="http://schemas.microsoft.com/office/drawing/2014/main" val="10004"/>
+                  </a:ext>
+                </a:extLst>
               </a:tr>
               <a:tr h="0">
                 <a:tc>
@@ -18534,7 +18861,7 @@
                     <a:bodyPr/>
                     <a:lstStyle/>
                     <a:p>
-                      <a:pPr indent="0" marL="0">
+                      <a:pPr marL="0" indent="0">
                         <a:buNone/>
                       </a:pPr>
                       <a:r>
@@ -18555,7 +18882,7 @@
                       </a:endParaRPr>
                     </a:p>
                   </a:txBody>
-                  <a:tcPr marL="91440" marR="91440" marT="45720" marB="45720">
+                  <a:tcPr>
                     <a:lnL w="6350" cap="flat" cmpd="sng" algn="ctr">
                       <a:solidFill>
                         <a:srgbClr val="E2E8F0"/>
@@ -18599,7 +18926,7 @@
                     <a:bodyPr/>
                     <a:lstStyle/>
                     <a:p>
-                      <a:pPr indent="0" marL="0">
+                      <a:pPr marL="0" indent="0">
                         <a:buNone/>
                       </a:pPr>
                       <a:r>
@@ -18620,7 +18947,7 @@
                       </a:endParaRPr>
                     </a:p>
                   </a:txBody>
-                  <a:tcPr marL="91440" marR="91440" marT="45720" marB="45720">
+                  <a:tcPr>
                     <a:lnL w="6350" cap="flat" cmpd="sng" algn="ctr">
                       <a:solidFill>
                         <a:srgbClr val="E2E8F0"/>
@@ -18664,7 +18991,7 @@
                     <a:bodyPr/>
                     <a:lstStyle/>
                     <a:p>
-                      <a:pPr indent="0" marL="0">
+                      <a:pPr marL="0" indent="0">
                         <a:buNone/>
                       </a:pPr>
                       <a:r>
@@ -18685,7 +19012,7 @@
                       </a:endParaRPr>
                     </a:p>
                   </a:txBody>
-                  <a:tcPr marL="91440" marR="91440" marT="45720" marB="45720">
+                  <a:tcPr>
                     <a:lnL w="6350" cap="flat" cmpd="sng" algn="ctr">
                       <a:solidFill>
                         <a:srgbClr val="E2E8F0"/>
@@ -18729,7 +19056,7 @@
                     <a:bodyPr/>
                     <a:lstStyle/>
                     <a:p>
-                      <a:pPr indent="0" marL="0">
+                      <a:pPr marL="0" indent="0">
                         <a:buNone/>
                       </a:pPr>
                       <a:r>
@@ -18750,7 +19077,7 @@
                       </a:endParaRPr>
                     </a:p>
                   </a:txBody>
-                  <a:tcPr marL="91440" marR="91440" marT="45720" marB="45720">
+                  <a:tcPr>
                     <a:lnL w="6350" cap="flat" cmpd="sng" algn="ctr">
                       <a:solidFill>
                         <a:srgbClr val="E2E8F0"/>
@@ -18794,7 +19121,7 @@
                     <a:bodyPr/>
                     <a:lstStyle/>
                     <a:p>
-                      <a:pPr indent="0" marL="0">
+                      <a:pPr marL="0" indent="0">
                         <a:buNone/>
                       </a:pPr>
                       <a:r>
@@ -18815,7 +19142,7 @@
                       </a:endParaRPr>
                     </a:p>
                   </a:txBody>
-                  <a:tcPr marL="91440" marR="91440" marT="45720" marB="45720">
+                  <a:tcPr>
                     <a:lnL w="6350" cap="flat" cmpd="sng" algn="ctr">
                       <a:solidFill>
                         <a:srgbClr val="E2E8F0"/>
@@ -18859,7 +19186,7 @@
                     <a:bodyPr/>
                     <a:lstStyle/>
                     <a:p>
-                      <a:pPr indent="0" marL="0">
+                      <a:pPr marL="0" indent="0">
                         <a:buNone/>
                       </a:pPr>
                       <a:r>
@@ -18880,7 +19207,7 @@
                       </a:endParaRPr>
                     </a:p>
                   </a:txBody>
-                  <a:tcPr marL="91440" marR="91440" marT="45720" marB="45720">
+                  <a:tcPr>
                     <a:lnL w="6350" cap="flat" cmpd="sng" algn="ctr">
                       <a:solidFill>
                         <a:srgbClr val="E2E8F0"/>
@@ -18919,6 +19246,11 @@
                     </a:lnB>
                   </a:tcPr>
                 </a:tc>
+                <a:extLst>
+                  <a:ext uri="{0D108BD9-81ED-4DB2-BD59-A6C34878D82A}">
+                    <a16:rowId xmlns:a16="http://schemas.microsoft.com/office/drawing/2014/main" val="10005"/>
+                  </a:ext>
+                </a:extLst>
               </a:tr>
             </a:tbl>
           </a:graphicData>
@@ -18948,6 +19280,13 @@
             <a:prstDash val="solid"/>
           </a:ln>
         </p:spPr>
+        <p:txBody>
+          <a:bodyPr/>
+          <a:lstStyle/>
+          <a:p>
+            <a:endParaRPr lang="de-DE"/>
+          </a:p>
+        </p:txBody>
       </p:sp>
       <p:sp>
         <p:nvSpPr>
@@ -18970,7 +19309,7 @@
           <a:bodyPr wrap="square" lIns="0" tIns="0" rIns="0" bIns="0" rtlCol="0" anchor="ctr"/>
           <a:lstStyle/>
           <a:p>
-            <a:pPr indent="0" marL="0">
+            <a:pPr marL="0" indent="0">
               <a:buNone/>
             </a:pPr>
             <a:r>
@@ -19075,7 +19414,7 @@
       </p:sp>
       <p:sp>
         <p:nvSpPr>
-          <p:cNvPr id="10" name="Text 7"/>
+          <p:cNvPr id="6" name="Text 7"/>
           <p:cNvSpPr/>
           <p:nvPr/>
         </p:nvSpPr>
@@ -19094,7 +19433,7 @@
           <a:bodyPr wrap="square" rtlCol="0" anchor="ctr"/>
           <a:lstStyle/>
           <a:p>
-            <a:pPr indent="0" marL="0">
+            <a:pPr marL="0" indent="0">
               <a:buNone/>
             </a:pPr>
             <a:r>
@@ -19133,7 +19472,7 @@
           <a:bodyPr wrap="square" rtlCol="0" anchor="ctr"/>
           <a:lstStyle/>
           <a:p>
-            <a:pPr algn="r" indent="0" marL="0">
+            <a:pPr marL="0" indent="0" algn="r">
               <a:buNone/>
             </a:pPr>
             <a:r>
@@ -19452,4 +19791,319 @@
     </a:ext>
   </a:extLst>
 </a:theme>
+</file>
+
+<file path=ppt/theme/theme2.xml><?xml version="1.0" encoding="utf-8"?>
+<a:theme xmlns:a="http://schemas.openxmlformats.org/drawingml/2006/main" name="Office">
+  <a:themeElements>
+    <a:clrScheme name="Office">
+      <a:dk1>
+        <a:sysClr val="windowText" lastClr="000000"/>
+      </a:dk1>
+      <a:lt1>
+        <a:sysClr val="window" lastClr="FFFFFF"/>
+      </a:lt1>
+      <a:dk2>
+        <a:srgbClr val="0E2841"/>
+      </a:dk2>
+      <a:lt2>
+        <a:srgbClr val="E8E8E8"/>
+      </a:lt2>
+      <a:accent1>
+        <a:srgbClr val="156082"/>
+      </a:accent1>
+      <a:accent2>
+        <a:srgbClr val="E97132"/>
+      </a:accent2>
+      <a:accent3>
+        <a:srgbClr val="196B24"/>
+      </a:accent3>
+      <a:accent4>
+        <a:srgbClr val="0F9ED5"/>
+      </a:accent4>
+      <a:accent5>
+        <a:srgbClr val="A02B93"/>
+      </a:accent5>
+      <a:accent6>
+        <a:srgbClr val="4EA72E"/>
+      </a:accent6>
+      <a:hlink>
+        <a:srgbClr val="467886"/>
+      </a:hlink>
+      <a:folHlink>
+        <a:srgbClr val="96607D"/>
+      </a:folHlink>
+    </a:clrScheme>
+    <a:fontScheme name="Office">
+      <a:majorFont>
+        <a:latin typeface="Aptos Display" panose="02110004020202020204"/>
+        <a:ea typeface=""/>
+        <a:cs typeface=""/>
+        <a:font script="Jpan" typeface="游ゴシック Light"/>
+        <a:font script="Hang" typeface="맑은 고딕"/>
+        <a:font script="Hans" typeface="等线 Light"/>
+        <a:font script="Hant" typeface="新細明體"/>
+        <a:font script="Arab" typeface="Times New Roman"/>
+        <a:font script="Hebr" typeface="Times New Roman"/>
+        <a:font script="Thai" typeface="Angsana New"/>
+        <a:font script="Ethi" typeface="Nyala"/>
+        <a:font script="Beng" typeface="Vrinda"/>
+        <a:font script="Gujr" typeface="Shruti"/>
+        <a:font script="Khmr" typeface="MoolBoran"/>
+        <a:font script="Knda" typeface="Tunga"/>
+        <a:font script="Guru" typeface="Raavi"/>
+        <a:font script="Cans" typeface="Euphemia"/>
+        <a:font script="Cher" typeface="Plantagenet Cherokee"/>
+        <a:font script="Yiii" typeface="Microsoft Yi Baiti"/>
+        <a:font script="Tibt" typeface="Microsoft Himalaya"/>
+        <a:font script="Thaa" typeface="MV Boli"/>
+        <a:font script="Deva" typeface="Mangal"/>
+        <a:font script="Telu" typeface="Gautami"/>
+        <a:font script="Taml" typeface="Latha"/>
+        <a:font script="Syrc" typeface="Estrangelo Edessa"/>
+        <a:font script="Orya" typeface="Kalinga"/>
+        <a:font script="Mlym" typeface="Kartika"/>
+        <a:font script="Laoo" typeface="DokChampa"/>
+        <a:font script="Sinh" typeface="Iskoola Pota"/>
+        <a:font script="Mong" typeface="Mongolian Baiti"/>
+        <a:font script="Viet" typeface="Times New Roman"/>
+        <a:font script="Uigh" typeface="Microsoft Uighur"/>
+        <a:font script="Geor" typeface="Sylfaen"/>
+        <a:font script="Armn" typeface="Arial"/>
+        <a:font script="Bugi" typeface="Leelawadee UI"/>
+        <a:font script="Bopo" typeface="Microsoft JhengHei"/>
+        <a:font script="Java" typeface="Javanese Text"/>
+        <a:font script="Lisu" typeface="Segoe UI"/>
+        <a:font script="Mymr" typeface="Myanmar Text"/>
+        <a:font script="Nkoo" typeface="Ebrima"/>
+        <a:font script="Olck" typeface="Nirmala UI"/>
+        <a:font script="Osma" typeface="Ebrima"/>
+        <a:font script="Phag" typeface="Phagspa"/>
+        <a:font script="Syrn" typeface="Estrangelo Edessa"/>
+        <a:font script="Syrj" typeface="Estrangelo Edessa"/>
+        <a:font script="Syre" typeface="Estrangelo Edessa"/>
+        <a:font script="Sora" typeface="Nirmala UI"/>
+        <a:font script="Tale" typeface="Microsoft Tai Le"/>
+        <a:font script="Talu" typeface="Microsoft New Tai Lue"/>
+        <a:font script="Tfng" typeface="Ebrima"/>
+      </a:majorFont>
+      <a:minorFont>
+        <a:latin typeface="Aptos" panose="02110004020202020204"/>
+        <a:ea typeface=""/>
+        <a:cs typeface=""/>
+        <a:font script="Jpan" typeface="游ゴシック"/>
+        <a:font script="Hang" typeface="맑은 고딕"/>
+        <a:font script="Hans" typeface="等线"/>
+        <a:font script="Hant" typeface="新細明體"/>
+        <a:font script="Arab" typeface="Arial"/>
+        <a:font script="Hebr" typeface="Arial"/>
+        <a:font script="Thai" typeface="Cordia New"/>
+        <a:font script="Ethi" typeface="Nyala"/>
+        <a:font script="Beng" typeface="Vrinda"/>
+        <a:font script="Gujr" typeface="Shruti"/>
+        <a:font script="Khmr" typeface="DaunPenh"/>
+        <a:font script="Knda" typeface="Tunga"/>
+        <a:font script="Guru" typeface="Raavi"/>
+        <a:font script="Cans" typeface="Euphemia"/>
+        <a:font script="Cher" typeface="Plantagenet Cherokee"/>
+        <a:font script="Yiii" typeface="Microsoft Yi Baiti"/>
+        <a:font script="Tibt" typeface="Microsoft Himalaya"/>
+        <a:font script="Thaa" typeface="MV Boli"/>
+        <a:font script="Deva" typeface="Mangal"/>
+        <a:font script="Telu" typeface="Gautami"/>
+        <a:font script="Taml" typeface="Latha"/>
+        <a:font script="Syrc" typeface="Estrangelo Edessa"/>
+        <a:font script="Orya" typeface="Kalinga"/>
+        <a:font script="Mlym" typeface="Kartika"/>
+        <a:font script="Laoo" typeface="DokChampa"/>
+        <a:font script="Sinh" typeface="Iskoola Pota"/>
+        <a:font script="Mong" typeface="Mongolian Baiti"/>
+        <a:font script="Viet" typeface="Arial"/>
+        <a:font script="Uigh" typeface="Microsoft Uighur"/>
+        <a:font script="Geor" typeface="Sylfaen"/>
+        <a:font script="Armn" typeface="Arial"/>
+        <a:font script="Bugi" typeface="Leelawadee UI"/>
+        <a:font script="Bopo" typeface="Microsoft JhengHei"/>
+        <a:font script="Java" typeface="Javanese Text"/>
+        <a:font script="Lisu" typeface="Segoe UI"/>
+        <a:font script="Mymr" typeface="Myanmar Text"/>
+        <a:font script="Nkoo" typeface="Ebrima"/>
+        <a:font script="Olck" typeface="Nirmala UI"/>
+        <a:font script="Osma" typeface="Ebrima"/>
+        <a:font script="Phag" typeface="Phagspa"/>
+        <a:font script="Syrn" typeface="Estrangelo Edessa"/>
+        <a:font script="Syrj" typeface="Estrangelo Edessa"/>
+        <a:font script="Syre" typeface="Estrangelo Edessa"/>
+        <a:font script="Sora" typeface="Nirmala UI"/>
+        <a:font script="Tale" typeface="Microsoft Tai Le"/>
+        <a:font script="Talu" typeface="Microsoft New Tai Lue"/>
+        <a:font script="Tfng" typeface="Ebrima"/>
+      </a:minorFont>
+    </a:fontScheme>
+    <a:fmtScheme name="Office">
+      <a:fillStyleLst>
+        <a:solidFill>
+          <a:schemeClr val="phClr"/>
+        </a:solidFill>
+        <a:gradFill rotWithShape="1">
+          <a:gsLst>
+            <a:gs pos="0">
+              <a:schemeClr val="phClr">
+                <a:lumMod val="110000"/>
+                <a:satMod val="105000"/>
+                <a:tint val="67000"/>
+              </a:schemeClr>
+            </a:gs>
+            <a:gs pos="50000">
+              <a:schemeClr val="phClr">
+                <a:lumMod val="105000"/>
+                <a:satMod val="103000"/>
+                <a:tint val="73000"/>
+              </a:schemeClr>
+            </a:gs>
+            <a:gs pos="100000">
+              <a:schemeClr val="phClr">
+                <a:lumMod val="105000"/>
+                <a:satMod val="109000"/>
+                <a:tint val="81000"/>
+              </a:schemeClr>
+            </a:gs>
+          </a:gsLst>
+          <a:lin ang="5400000" scaled="0"/>
+        </a:gradFill>
+        <a:gradFill rotWithShape="1">
+          <a:gsLst>
+            <a:gs pos="0">
+              <a:schemeClr val="phClr">
+                <a:satMod val="103000"/>
+                <a:lumMod val="102000"/>
+                <a:tint val="94000"/>
+              </a:schemeClr>
+            </a:gs>
+            <a:gs pos="50000">
+              <a:schemeClr val="phClr">
+                <a:satMod val="110000"/>
+                <a:lumMod val="100000"/>
+                <a:shade val="100000"/>
+              </a:schemeClr>
+            </a:gs>
+            <a:gs pos="100000">
+              <a:schemeClr val="phClr">
+                <a:lumMod val="99000"/>
+                <a:satMod val="120000"/>
+                <a:shade val="78000"/>
+              </a:schemeClr>
+            </a:gs>
+          </a:gsLst>
+          <a:lin ang="5400000" scaled="0"/>
+        </a:gradFill>
+      </a:fillStyleLst>
+      <a:lnStyleLst>
+        <a:ln w="12700" cap="flat" cmpd="sng" algn="ctr">
+          <a:solidFill>
+            <a:schemeClr val="phClr"/>
+          </a:solidFill>
+          <a:prstDash val="solid"/>
+          <a:miter lim="800000"/>
+        </a:ln>
+        <a:ln w="19050" cap="flat" cmpd="sng" algn="ctr">
+          <a:solidFill>
+            <a:schemeClr val="phClr"/>
+          </a:solidFill>
+          <a:prstDash val="solid"/>
+          <a:miter lim="800000"/>
+        </a:ln>
+        <a:ln w="25400" cap="flat" cmpd="sng" algn="ctr">
+          <a:solidFill>
+            <a:schemeClr val="phClr"/>
+          </a:solidFill>
+          <a:prstDash val="solid"/>
+          <a:miter lim="800000"/>
+        </a:ln>
+      </a:lnStyleLst>
+      <a:effectStyleLst>
+        <a:effectStyle>
+          <a:effectLst/>
+        </a:effectStyle>
+        <a:effectStyle>
+          <a:effectLst/>
+        </a:effectStyle>
+        <a:effectStyle>
+          <a:effectLst>
+            <a:outerShdw blurRad="57150" dist="19050" dir="5400000" algn="ctr" rotWithShape="0">
+              <a:srgbClr val="000000">
+                <a:alpha val="63000"/>
+              </a:srgbClr>
+            </a:outerShdw>
+          </a:effectLst>
+        </a:effectStyle>
+      </a:effectStyleLst>
+      <a:bgFillStyleLst>
+        <a:solidFill>
+          <a:schemeClr val="phClr"/>
+        </a:solidFill>
+        <a:solidFill>
+          <a:schemeClr val="phClr">
+            <a:tint val="95000"/>
+            <a:satMod val="170000"/>
+          </a:schemeClr>
+        </a:solidFill>
+        <a:gradFill rotWithShape="1">
+          <a:gsLst>
+            <a:gs pos="0">
+              <a:schemeClr val="phClr">
+                <a:tint val="93000"/>
+                <a:satMod val="150000"/>
+                <a:shade val="98000"/>
+                <a:lumMod val="102000"/>
+              </a:schemeClr>
+            </a:gs>
+            <a:gs pos="50000">
+              <a:schemeClr val="phClr">
+                <a:tint val="98000"/>
+                <a:satMod val="130000"/>
+                <a:shade val="90000"/>
+                <a:lumMod val="103000"/>
+              </a:schemeClr>
+            </a:gs>
+            <a:gs pos="100000">
+              <a:schemeClr val="phClr">
+                <a:shade val="63000"/>
+                <a:satMod val="120000"/>
+              </a:schemeClr>
+            </a:gs>
+          </a:gsLst>
+          <a:lin ang="5400000" scaled="0"/>
+        </a:gradFill>
+      </a:bgFillStyleLst>
+    </a:fmtScheme>
+  </a:themeElements>
+  <a:objectDefaults>
+    <a:lnDef>
+      <a:spPr/>
+      <a:bodyPr/>
+      <a:lstStyle/>
+      <a:style>
+        <a:lnRef idx="2">
+          <a:schemeClr val="accent1"/>
+        </a:lnRef>
+        <a:fillRef idx="0">
+          <a:schemeClr val="accent1"/>
+        </a:fillRef>
+        <a:effectRef idx="1">
+          <a:schemeClr val="accent1"/>
+        </a:effectRef>
+        <a:fontRef idx="minor">
+          <a:schemeClr val="tx1"/>
+        </a:fontRef>
+      </a:style>
+    </a:lnDef>
+  </a:objectDefaults>
+  <a:extraClrSchemeLst/>
+  <a:extLst>
+    <a:ext uri="{05A4C25C-085E-4340-85A3-A5531E510DB2}">
+      <thm15:themeFamily xmlns:thm15="http://schemas.microsoft.com/office/thememl/2012/main" name="Office Theme" id="{2E142A2C-CD16-42D6-873A-C26D2A0506FA}" vid="{1BDDFF52-6CD6-40A5-AB3C-68EB2F1E4D0A}"/>
+    </a:ext>
+  </a:extLst>
+</a:theme>
 </file>